--- a/science-fair/night-signal/Night_Signal_Presentation.pptx
+++ b/science-fair/night-signal/Night_Signal_Presentation.pptx
@@ -16,9 +16,10 @@
     <p:sldId id="264" r:id="rId10"/>
     <p:sldId id="265" r:id="rId11"/>
     <p:sldId id="266" r:id="rId12"/>
+    <p:sldId id="267" r:id="rId13"/>
   </p:sldIdLst>
   <p:notesMasterIdLst>
-    <p:notesMasterId r:id="rId13"/>
+    <p:notesMasterId r:id="rId14"/>
   </p:notesMasterIdLst>
   <p:sldSz cx="12191695" cy="6858000"/>
   <p:notesSz cx="6858000" cy="12191695"/>
@@ -712,6 +713,94 @@
             <a:fld id="{F7021451-1387-4CA6-816F-3879F97B5CBC}" type="slidenum">
               <a:rPr lang="en-US"/>
               <a:t>11</a:t>
+            </a:fld>
+            <a:endParaRPr lang="en-US"/>
+          </a:p>
+        </p:txBody>
+      </p:sp>
+    </p:spTree>
+    <p:extLst>
+      <p:ext uri="{BB962C8B-B14F-4D97-AF65-F5344CB8AC3E}">
+        <p14:creationId xmlns:p14="http://schemas.microsoft.com/office/powerpoint/2010/main" val="1024086991"/>
+      </p:ext>
+    </p:extLst>
+  </p:cSld>
+  <p:clrMapOvr>
+    <a:masterClrMapping/>
+  </p:clrMapOvr>
+</p:notes>
+</file>
+
+<file path=ppt/notesSlides/notesSlide12.xml><?xml version="1.0" encoding="utf-8"?>
+<p:notes xmlns:a="http://schemas.openxmlformats.org/drawingml/2006/main" xmlns:r="http://schemas.openxmlformats.org/officeDocument/2006/relationships" xmlns:p="http://schemas.openxmlformats.org/presentationml/2006/main">
+  <p:cSld>
+    <p:spTree>
+      <p:nvGrpSpPr>
+        <p:cNvPr id="1" name=""/>
+        <p:cNvGrpSpPr/>
+        <p:nvPr/>
+      </p:nvGrpSpPr>
+      <p:grpSpPr>
+        <a:xfrm>
+          <a:off x="0" y="0"/>
+          <a:ext cx="0" cy="0"/>
+          <a:chOff x="0" y="0"/>
+          <a:chExt cx="0" cy="0"/>
+        </a:xfrm>
+      </p:grpSpPr>
+      <p:sp>
+        <p:nvSpPr>
+          <p:cNvPr id="2" name="Slide Image Placeholder 1"/>
+          <p:cNvSpPr>
+            <a:spLocks noGrp="1" noRot="1" noChangeAspect="1"/>
+          </p:cNvSpPr>
+          <p:nvPr>
+            <p:ph type="sldImg"/>
+          </p:nvPr>
+        </p:nvSpPr>
+        <p:spPr/>
+      </p:sp>
+      <p:sp>
+        <p:nvSpPr>
+          <p:cNvPr id="3" name="Notes Placeholder 2"/>
+          <p:cNvSpPr>
+            <a:spLocks noGrp="1"/>
+          </p:cNvSpPr>
+          <p:nvPr>
+            <p:ph type="body" idx="1"/>
+          </p:nvPr>
+        </p:nvSpPr>
+        <p:spPr/>
+        <p:txBody>
+          <a:bodyPr/>
+          <a:lstStyle/>
+          <a:p>
+            <a:r>
+              <a:rPr lang="en-US" dirty="0"/>
+              <a:t/>
+            </a:r>
+            <a:endParaRPr lang="en-US" dirty="0"/>
+          </a:p>
+        </p:txBody>
+      </p:sp>
+      <p:sp>
+        <p:nvSpPr>
+          <p:cNvPr id="4" name="Slide Number Placeholder 3"/>
+          <p:cNvSpPr>
+            <a:spLocks noGrp="1"/>
+          </p:cNvSpPr>
+          <p:nvPr>
+            <p:ph type="sldNum" sz="quarter" idx="10"/>
+          </p:nvPr>
+        </p:nvSpPr>
+        <p:spPr/>
+        <p:txBody>
+          <a:bodyPr/>
+          <a:lstStyle/>
+          <a:p>
+            <a:fld id="{F7021451-1387-4CA6-816F-3879F97B5CBC}" type="slidenum">
+              <a:rPr lang="en-US"/>
+              <a:t>12</a:t>
             </a:fld>
             <a:endParaRPr lang="en-US"/>
           </a:p>
@@ -1991,6 +2080,492 @@
     <p:bg>
       <p:bgPr>
         <a:solidFill>
+          <a:srgbClr val="0E1830"/>
+        </a:solidFill>
+      </p:bgPr>
+    </p:bg>
+    <p:spTree>
+      <p:nvGrpSpPr>
+        <p:cNvPr id="1" name=""/>
+        <p:cNvGrpSpPr/>
+        <p:nvPr/>
+      </p:nvGrpSpPr>
+      <p:grpSpPr>
+        <a:xfrm>
+          <a:off x="0" y="0"/>
+          <a:ext cx="0" cy="0"/>
+          <a:chOff x="0" y="0"/>
+          <a:chExt cx="0" cy="0"/>
+        </a:xfrm>
+      </p:grpSpPr>
+      <p:sp>
+        <p:nvSpPr>
+          <p:cNvPr id="2" name="Text 0"/>
+          <p:cNvSpPr txBox="1"/>
+          <p:nvPr/>
+        </p:nvSpPr>
+        <p:spPr>
+          <a:xfrm>
+            <a:off x="640080" y="457200"/>
+            <a:ext cx="10881360" cy="274320"/>
+          </a:xfrm>
+          <a:prstGeom prst="rect">
+            <a:avLst/>
+          </a:prstGeom>
+          <a:noFill/>
+          <a:ln/>
+        </p:spPr>
+        <p:txBody>
+          <a:bodyPr wrap="square" lIns="0" tIns="0" rIns="0" bIns="0" rtlCol="0" anchor="ctr"/>
+          <a:lstStyle/>
+          <a:p>
+            <a:pPr indent="0" marL="0">
+              <a:buNone/>
+            </a:pPr>
+            <a:r>
+              <a:rPr lang="en-US" sz="1200" b="1" spc="300" kern="0" dirty="0">
+                <a:solidFill>
+                  <a:srgbClr val="3FB8CC"/>
+                </a:solidFill>
+                <a:latin typeface="Calibri" pitchFamily="34" charset="0"/>
+                <a:ea typeface="Calibri" pitchFamily="34" charset="-122"/>
+                <a:cs typeface="Calibri" pitchFamily="34" charset="-120"/>
+              </a:rPr>
+              <a:t>CONCLUSION</a:t>
+            </a:r>
+            <a:endParaRPr lang="en-US" sz="1200" dirty="0"/>
+          </a:p>
+        </p:txBody>
+      </p:sp>
+      <p:sp>
+        <p:nvSpPr>
+          <p:cNvPr id="3" name="Text 1"/>
+          <p:cNvSpPr txBox="1"/>
+          <p:nvPr/>
+        </p:nvSpPr>
+        <p:spPr>
+          <a:xfrm>
+            <a:off x="640080" y="822960"/>
+            <a:ext cx="10881360" cy="914400"/>
+          </a:xfrm>
+          <a:prstGeom prst="rect">
+            <a:avLst/>
+          </a:prstGeom>
+          <a:noFill/>
+          <a:ln/>
+        </p:spPr>
+        <p:txBody>
+          <a:bodyPr wrap="square" lIns="0" tIns="0" rIns="0" bIns="0" rtlCol="0" anchor="ctr"/>
+          <a:lstStyle/>
+          <a:p>
+            <a:pPr indent="0" marL="0">
+              <a:lnSpc>
+                <a:spcPts val="3400"/>
+              </a:lnSpc>
+              <a:buNone/>
+            </a:pPr>
+            <a:r>
+              <a:rPr lang="en-US" sz="3000" b="1" dirty="0">
+                <a:solidFill>
+                  <a:srgbClr val="FFFFFF"/>
+                </a:solidFill>
+                <a:latin typeface="Calibri" pitchFamily="34" charset="0"/>
+                <a:ea typeface="Calibri" pitchFamily="34" charset="-122"/>
+                <a:cs typeface="Calibri" pitchFamily="34" charset="-120"/>
+              </a:rPr>
+              <a:t>Back to the hypothesis</a:t>
+            </a:r>
+            <a:endParaRPr lang="en-US" sz="3000" dirty="0"/>
+          </a:p>
+        </p:txBody>
+      </p:sp>
+      <p:sp>
+        <p:nvSpPr>
+          <p:cNvPr id="4" name="Shape 2"/>
+          <p:cNvSpPr/>
+          <p:nvPr/>
+        </p:nvSpPr>
+        <p:spPr>
+          <a:xfrm>
+            <a:off x="640080" y="1828800"/>
+            <a:ext cx="10881360" cy="1280160"/>
+          </a:xfrm>
+          <a:prstGeom prst="roundRect">
+            <a:avLst>
+              <a:gd name="adj" fmla="val 7143"/>
+            </a:avLst>
+          </a:prstGeom>
+          <a:solidFill>
+            <a:srgbClr val="18233F"/>
+          </a:solidFill>
+          <a:ln w="12700">
+            <a:solidFill>
+              <a:srgbClr val="1F8A9C"/>
+            </a:solidFill>
+            <a:prstDash val="solid"/>
+          </a:ln>
+        </p:spPr>
+      </p:sp>
+      <p:sp>
+        <p:nvSpPr>
+          <p:cNvPr id="5" name="Text 3"/>
+          <p:cNvSpPr txBox="1"/>
+          <p:nvPr/>
+        </p:nvSpPr>
+        <p:spPr>
+          <a:xfrm>
+            <a:off x="914400" y="2011680"/>
+            <a:ext cx="10332720" cy="1005840"/>
+          </a:xfrm>
+          <a:prstGeom prst="rect">
+            <a:avLst/>
+          </a:prstGeom>
+          <a:noFill/>
+          <a:ln/>
+        </p:spPr>
+        <p:txBody>
+          <a:bodyPr wrap="square" lIns="0" tIns="0" rIns="0" bIns="0" rtlCol="0" anchor="ctr"/>
+          <a:lstStyle/>
+          <a:p>
+            <a:pPr indent="0" marL="0">
+              <a:lnSpc>
+                <a:spcPts val="2300"/>
+              </a:lnSpc>
+              <a:buNone/>
+            </a:pPr>
+            <a:r>
+              <a:rPr lang="en-US" sz="1600" b="1" dirty="0">
+                <a:solidFill>
+                  <a:srgbClr val="3FB8CC"/>
+                </a:solidFill>
+                <a:latin typeface="Calibri" pitchFamily="34" charset="0"/>
+                <a:ea typeface="Calibri" pitchFamily="34" charset="-122"/>
+                <a:cs typeface="Calibri" pitchFamily="34" charset="-120"/>
+              </a:rPr>
+              <a:t>Hypothesis supported. </a:t>
+            </a:r>
+            <a:pPr indent="0" marL="0">
+              <a:lnSpc>
+                <a:spcPts val="2300"/>
+              </a:lnSpc>
+              <a:buNone/>
+            </a:pPr>
+            <a:r>
+              <a:rPr lang="en-US" sz="1600" dirty="0">
+                <a:solidFill>
+                  <a:srgbClr val="FFFFFF"/>
+                </a:solidFill>
+                <a:latin typeface="Calibri" pitchFamily="34" charset="0"/>
+                <a:ea typeface="Calibri" pitchFamily="34" charset="-122"/>
+                <a:cs typeface="Calibri" pitchFamily="34" charset="-120"/>
+              </a:rPr>
+              <a:t>A $35 wearable detected apnea’s oxygen drops, agreed closely with a medical oximeter, estimated an AHI severity, and revealed that back-sleeping caused more events.</a:t>
+            </a:r>
+            <a:endParaRPr lang="en-US" sz="1600" dirty="0"/>
+          </a:p>
+        </p:txBody>
+      </p:sp>
+      <p:sp>
+        <p:nvSpPr>
+          <p:cNvPr id="6" name="Text 4"/>
+          <p:cNvSpPr txBox="1"/>
+          <p:nvPr/>
+        </p:nvSpPr>
+        <p:spPr>
+          <a:xfrm>
+            <a:off x="640080" y="3474720"/>
+            <a:ext cx="10058400" cy="365760"/>
+          </a:xfrm>
+          <a:prstGeom prst="rect">
+            <a:avLst/>
+          </a:prstGeom>
+          <a:noFill/>
+          <a:ln/>
+        </p:spPr>
+        <p:txBody>
+          <a:bodyPr wrap="square" lIns="0" tIns="0" rIns="0" bIns="0" rtlCol="0" anchor="ctr"/>
+          <a:lstStyle/>
+          <a:p>
+            <a:pPr indent="0" marL="0">
+              <a:buNone/>
+            </a:pPr>
+            <a:r>
+              <a:rPr lang="en-US" sz="1600" b="1" dirty="0">
+                <a:solidFill>
+                  <a:srgbClr val="E4568A"/>
+                </a:solidFill>
+                <a:latin typeface="Calibri" pitchFamily="34" charset="0"/>
+                <a:ea typeface="Calibri" pitchFamily="34" charset="-122"/>
+                <a:cs typeface="Calibri" pitchFamily="34" charset="-120"/>
+              </a:rPr>
+              <a:t>Further considerations &amp; improvements</a:t>
+            </a:r>
+            <a:endParaRPr lang="en-US" sz="1600" dirty="0"/>
+          </a:p>
+        </p:txBody>
+      </p:sp>
+      <p:sp>
+        <p:nvSpPr>
+          <p:cNvPr id="7" name="Shape 5"/>
+          <p:cNvSpPr/>
+          <p:nvPr/>
+        </p:nvSpPr>
+        <p:spPr>
+          <a:xfrm>
+            <a:off x="640080" y="3995928"/>
+            <a:ext cx="128016" cy="128016"/>
+          </a:xfrm>
+          <a:prstGeom prst="ellipse">
+            <a:avLst/>
+          </a:prstGeom>
+          <a:solidFill>
+            <a:srgbClr val="1F8A9C"/>
+          </a:solidFill>
+          <a:ln/>
+        </p:spPr>
+      </p:sp>
+      <p:sp>
+        <p:nvSpPr>
+          <p:cNvPr id="8" name="Text 6"/>
+          <p:cNvSpPr txBox="1"/>
+          <p:nvPr/>
+        </p:nvSpPr>
+        <p:spPr>
+          <a:xfrm>
+            <a:off x="932688" y="3904488"/>
+            <a:ext cx="10314432" cy="731520"/>
+          </a:xfrm>
+          <a:prstGeom prst="rect">
+            <a:avLst/>
+          </a:prstGeom>
+          <a:noFill/>
+          <a:ln/>
+        </p:spPr>
+        <p:txBody>
+          <a:bodyPr wrap="square" lIns="0" tIns="0" rIns="0" bIns="0" rtlCol="0" anchor="ctr"/>
+          <a:lstStyle/>
+          <a:p>
+            <a:pPr indent="0" marL="0">
+              <a:lnSpc>
+                <a:spcPts val="1900"/>
+              </a:lnSpc>
+              <a:buNone/>
+            </a:pPr>
+            <a:r>
+              <a:rPr lang="en-US" sz="1400" dirty="0">
+                <a:solidFill>
+                  <a:srgbClr val="9FB0CF"/>
+                </a:solidFill>
+                <a:latin typeface="Calibri" pitchFamily="34" charset="0"/>
+                <a:ea typeface="Calibri" pitchFamily="34" charset="-122"/>
+                <a:cs typeface="Calibri" pitchFamily="34" charset="-120"/>
+              </a:rPr>
+              <a:t>Test more people, for more full nights, to strengthen the data.</a:t>
+            </a:r>
+            <a:endParaRPr lang="en-US" sz="1400" dirty="0"/>
+          </a:p>
+        </p:txBody>
+      </p:sp>
+      <p:sp>
+        <p:nvSpPr>
+          <p:cNvPr id="9" name="Shape 7"/>
+          <p:cNvSpPr/>
+          <p:nvPr/>
+        </p:nvSpPr>
+        <p:spPr>
+          <a:xfrm>
+            <a:off x="640080" y="4864608"/>
+            <a:ext cx="128016" cy="128016"/>
+          </a:xfrm>
+          <a:prstGeom prst="ellipse">
+            <a:avLst/>
+          </a:prstGeom>
+          <a:solidFill>
+            <a:srgbClr val="1F8A9C"/>
+          </a:solidFill>
+          <a:ln/>
+        </p:spPr>
+      </p:sp>
+      <p:sp>
+        <p:nvSpPr>
+          <p:cNvPr id="10" name="Text 8"/>
+          <p:cNvSpPr txBox="1"/>
+          <p:nvPr/>
+        </p:nvSpPr>
+        <p:spPr>
+          <a:xfrm>
+            <a:off x="932688" y="4773168"/>
+            <a:ext cx="10314432" cy="731520"/>
+          </a:xfrm>
+          <a:prstGeom prst="rect">
+            <a:avLst/>
+          </a:prstGeom>
+          <a:noFill/>
+          <a:ln/>
+        </p:spPr>
+        <p:txBody>
+          <a:bodyPr wrap="square" lIns="0" tIns="0" rIns="0" bIns="0" rtlCol="0" anchor="ctr"/>
+          <a:lstStyle/>
+          <a:p>
+            <a:pPr indent="0" marL="0">
+              <a:lnSpc>
+                <a:spcPts val="1900"/>
+              </a:lnSpc>
+              <a:buNone/>
+            </a:pPr>
+            <a:r>
+              <a:rPr lang="en-US" sz="1400" dirty="0">
+                <a:solidFill>
+                  <a:srgbClr val="9FB0CF"/>
+                </a:solidFill>
+                <a:latin typeface="Calibri" pitchFamily="34" charset="0"/>
+                <a:ea typeface="Calibri" pitchFamily="34" charset="-122"/>
+                <a:cs typeface="Calibri" pitchFamily="34" charset="-120"/>
+              </a:rPr>
+              <a:t>Switch to Bluetooth Low Energy for a live phone app.</a:t>
+            </a:r>
+            <a:endParaRPr lang="en-US" sz="1400" dirty="0"/>
+          </a:p>
+        </p:txBody>
+      </p:sp>
+      <p:sp>
+        <p:nvSpPr>
+          <p:cNvPr id="11" name="Shape 9"/>
+          <p:cNvSpPr/>
+          <p:nvPr/>
+        </p:nvSpPr>
+        <p:spPr>
+          <a:xfrm>
+            <a:off x="640080" y="5431536"/>
+            <a:ext cx="128016" cy="128016"/>
+          </a:xfrm>
+          <a:prstGeom prst="ellipse">
+            <a:avLst/>
+          </a:prstGeom>
+          <a:solidFill>
+            <a:srgbClr val="1F8A9C"/>
+          </a:solidFill>
+          <a:ln/>
+        </p:spPr>
+      </p:sp>
+      <p:sp>
+        <p:nvSpPr>
+          <p:cNvPr id="12" name="Text 10"/>
+          <p:cNvSpPr txBox="1"/>
+          <p:nvPr/>
+        </p:nvSpPr>
+        <p:spPr>
+          <a:xfrm>
+            <a:off x="932688" y="5340096"/>
+            <a:ext cx="10314432" cy="731520"/>
+          </a:xfrm>
+          <a:prstGeom prst="rect">
+            <a:avLst/>
+          </a:prstGeom>
+          <a:noFill/>
+          <a:ln/>
+        </p:spPr>
+        <p:txBody>
+          <a:bodyPr wrap="square" lIns="0" tIns="0" rIns="0" bIns="0" rtlCol="0" anchor="ctr"/>
+          <a:lstStyle/>
+          <a:p>
+            <a:pPr indent="0" marL="0">
+              <a:lnSpc>
+                <a:spcPts val="1900"/>
+              </a:lnSpc>
+              <a:buNone/>
+            </a:pPr>
+            <a:r>
+              <a:rPr lang="en-US" sz="1400" dirty="0">
+                <a:solidFill>
+                  <a:srgbClr val="9FB0CF"/>
+                </a:solidFill>
+                <a:latin typeface="Calibri" pitchFamily="34" charset="0"/>
+                <a:ea typeface="Calibri" pitchFamily="34" charset="-122"/>
+                <a:cs typeface="Calibri" pitchFamily="34" charset="-120"/>
+              </a:rPr>
+              <a:t>Shrink the device into a comfortable finger-ring form.</a:t>
+            </a:r>
+            <a:endParaRPr lang="en-US" sz="1400" dirty="0"/>
+          </a:p>
+        </p:txBody>
+      </p:sp>
+      <p:sp>
+        <p:nvSpPr>
+          <p:cNvPr id="13" name="Shape 11"/>
+          <p:cNvSpPr/>
+          <p:nvPr/>
+        </p:nvSpPr>
+        <p:spPr>
+          <a:xfrm>
+            <a:off x="640080" y="5998464"/>
+            <a:ext cx="128016" cy="128016"/>
+          </a:xfrm>
+          <a:prstGeom prst="ellipse">
+            <a:avLst/>
+          </a:prstGeom>
+          <a:solidFill>
+            <a:srgbClr val="1F8A9C"/>
+          </a:solidFill>
+          <a:ln/>
+        </p:spPr>
+      </p:sp>
+      <p:sp>
+        <p:nvSpPr>
+          <p:cNvPr id="14" name="Text 12"/>
+          <p:cNvSpPr txBox="1"/>
+          <p:nvPr/>
+        </p:nvSpPr>
+        <p:spPr>
+          <a:xfrm>
+            <a:off x="932688" y="5907024"/>
+            <a:ext cx="10314432" cy="731520"/>
+          </a:xfrm>
+          <a:prstGeom prst="rect">
+            <a:avLst/>
+          </a:prstGeom>
+          <a:noFill/>
+          <a:ln/>
+        </p:spPr>
+        <p:txBody>
+          <a:bodyPr wrap="square" lIns="0" tIns="0" rIns="0" bIns="0" rtlCol="0" anchor="ctr"/>
+          <a:lstStyle/>
+          <a:p>
+            <a:pPr indent="0" marL="0">
+              <a:lnSpc>
+                <a:spcPts val="1900"/>
+              </a:lnSpc>
+              <a:buNone/>
+            </a:pPr>
+            <a:r>
+              <a:rPr lang="en-US" sz="1400" dirty="0">
+                <a:solidFill>
+                  <a:srgbClr val="9FB0CF"/>
+                </a:solidFill>
+                <a:latin typeface="Calibri" pitchFamily="34" charset="0"/>
+                <a:ea typeface="Calibri" pitchFamily="34" charset="-122"/>
+                <a:cs typeface="Calibri" pitchFamily="34" charset="-120"/>
+              </a:rPr>
+              <a:t>Compare results directly against a real clinical sleep study.</a:t>
+            </a:r>
+            <a:endParaRPr lang="en-US" sz="1400" dirty="0"/>
+          </a:p>
+        </p:txBody>
+      </p:sp>
+    </p:spTree>
+  </p:cSld>
+  <p:clrMapOvr>
+    <a:masterClrMapping/>
+  </p:clrMapOvr>
+</p:sld>
+</file>
+
+<file path=ppt/slides/slide11.xml><?xml version="1.0" encoding="utf-8"?>
+<p:sld xmlns:a="http://schemas.openxmlformats.org/drawingml/2006/main" xmlns:r="http://schemas.openxmlformats.org/officeDocument/2006/relationships" xmlns:p="http://schemas.openxmlformats.org/presentationml/2006/main">
+  <p:cSld name="Slide 11">
+    <p:bg>
+      <p:bgPr>
+        <a:solidFill>
           <a:srgbClr val="FFFFFF"/>
         </a:solidFill>
       </p:bgPr>
@@ -2092,7 +2667,7 @@
       </p:sp>
       <p:graphicFrame>
         <p:nvGraphicFramePr>
-          <p:cNvPr id="11" name="Table 0"/>
+          <p:cNvPr id="12" name="Table 0"/>
           <p:cNvGraphicFramePr>
             <a:graphicFrameLocks noGrp="1"/>
           </p:cNvGraphicFramePr>
@@ -3601,9 +4176,9 @@
 </p:sld>
 </file>
 
-<file path=ppt/slides/slide11.xml><?xml version="1.0" encoding="utf-8"?>
+<file path=ppt/slides/slide12.xml><?xml version="1.0" encoding="utf-8"?>
 <p:sld xmlns:a="http://schemas.openxmlformats.org/drawingml/2006/main" xmlns:r="http://schemas.openxmlformats.org/officeDocument/2006/relationships" xmlns:p="http://schemas.openxmlformats.org/presentationml/2006/main">
-  <p:cSld name="Slide 11">
+  <p:cSld name="Slide 12">
     <p:bg>
       <p:bgPr>
         <a:solidFill>
@@ -5721,6 +6296,477 @@
     <p:bg>
       <p:bgPr>
         <a:solidFill>
+          <a:srgbClr val="0E1830"/>
+        </a:solidFill>
+      </p:bgPr>
+    </p:bg>
+    <p:spTree>
+      <p:nvGrpSpPr>
+        <p:cNvPr id="1" name=""/>
+        <p:cNvGrpSpPr/>
+        <p:nvPr/>
+      </p:nvGrpSpPr>
+      <p:grpSpPr>
+        <a:xfrm>
+          <a:off x="0" y="0"/>
+          <a:ext cx="0" cy="0"/>
+          <a:chOff x="0" y="0"/>
+          <a:chExt cx="0" cy="0"/>
+        </a:xfrm>
+      </p:grpSpPr>
+      <p:sp>
+        <p:nvSpPr>
+          <p:cNvPr id="2" name="Text 0"/>
+          <p:cNvSpPr txBox="1"/>
+          <p:nvPr/>
+        </p:nvSpPr>
+        <p:spPr>
+          <a:xfrm>
+            <a:off x="640080" y="457200"/>
+            <a:ext cx="10881360" cy="274320"/>
+          </a:xfrm>
+          <a:prstGeom prst="rect">
+            <a:avLst/>
+          </a:prstGeom>
+          <a:noFill/>
+          <a:ln/>
+        </p:spPr>
+        <p:txBody>
+          <a:bodyPr wrap="square" lIns="0" tIns="0" rIns="0" bIns="0" rtlCol="0" anchor="ctr"/>
+          <a:lstStyle/>
+          <a:p>
+            <a:pPr indent="0" marL="0">
+              <a:buNone/>
+            </a:pPr>
+            <a:r>
+              <a:rPr lang="en-US" sz="1200" b="1" spc="300" kern="0" dirty="0">
+                <a:solidFill>
+                  <a:srgbClr val="3FB8CC"/>
+                </a:solidFill>
+                <a:latin typeface="Calibri" pitchFamily="34" charset="0"/>
+                <a:ea typeface="Calibri" pitchFamily="34" charset="-122"/>
+                <a:cs typeface="Calibri" pitchFamily="34" charset="-120"/>
+              </a:rPr>
+              <a:t>THE PRODUCT</a:t>
+            </a:r>
+            <a:endParaRPr lang="en-US" sz="1200" dirty="0"/>
+          </a:p>
+        </p:txBody>
+      </p:sp>
+      <p:sp>
+        <p:nvSpPr>
+          <p:cNvPr id="3" name="Text 1"/>
+          <p:cNvSpPr txBox="1"/>
+          <p:nvPr/>
+        </p:nvSpPr>
+        <p:spPr>
+          <a:xfrm>
+            <a:off x="640080" y="822960"/>
+            <a:ext cx="10881360" cy="914400"/>
+          </a:xfrm>
+          <a:prstGeom prst="rect">
+            <a:avLst/>
+          </a:prstGeom>
+          <a:noFill/>
+          <a:ln/>
+        </p:spPr>
+        <p:txBody>
+          <a:bodyPr wrap="square" lIns="0" tIns="0" rIns="0" bIns="0" rtlCol="0" anchor="ctr"/>
+          <a:lstStyle/>
+          <a:p>
+            <a:pPr indent="0" marL="0">
+              <a:lnSpc>
+                <a:spcPts val="3400"/>
+              </a:lnSpc>
+              <a:buNone/>
+            </a:pPr>
+            <a:r>
+              <a:rPr lang="en-US" sz="3000" b="1" dirty="0">
+                <a:solidFill>
+                  <a:srgbClr val="FFFFFF"/>
+                </a:solidFill>
+                <a:latin typeface="Calibri" pitchFamily="34" charset="0"/>
+                <a:ea typeface="Calibri" pitchFamily="34" charset="-122"/>
+                <a:cs typeface="Calibri" pitchFamily="34" charset="-120"/>
+              </a:rPr>
+              <a:t>What it looks like</a:t>
+            </a:r>
+            <a:endParaRPr lang="en-US" sz="3000" dirty="0"/>
+          </a:p>
+        </p:txBody>
+      </p:sp>
+      <p:pic>
+        <p:nvPicPr>
+          <p:cNvPr id="4" name="Image 0" descr="/tmp/product_hero.png">    </p:cNvPr>
+          <p:cNvPicPr>
+            <a:picLocks noChangeAspect="1"/>
+          </p:cNvPicPr>
+          <p:nvPr/>
+        </p:nvPicPr>
+        <p:blipFill>
+          <a:blip r:embed="rId1"/>
+          <a:stretch>
+            <a:fillRect/>
+          </a:stretch>
+        </p:blipFill>
+        <p:spPr>
+          <a:xfrm>
+            <a:off x="5760720" y="1554480"/>
+            <a:ext cx="5760720" cy="3960495"/>
+          </a:xfrm>
+          <a:prstGeom prst="rect">
+            <a:avLst/>
+          </a:prstGeom>
+        </p:spPr>
+      </p:pic>
+      <p:sp>
+        <p:nvSpPr>
+          <p:cNvPr id="5" name="Shape 2"/>
+          <p:cNvSpPr/>
+          <p:nvPr/>
+        </p:nvSpPr>
+        <p:spPr>
+          <a:xfrm>
+            <a:off x="640080" y="2075688"/>
+            <a:ext cx="128016" cy="128016"/>
+          </a:xfrm>
+          <a:prstGeom prst="ellipse">
+            <a:avLst/>
+          </a:prstGeom>
+          <a:solidFill>
+            <a:srgbClr val="1F8A9C"/>
+          </a:solidFill>
+          <a:ln/>
+        </p:spPr>
+      </p:sp>
+      <p:sp>
+        <p:nvSpPr>
+          <p:cNvPr id="6" name="Text 3"/>
+          <p:cNvSpPr txBox="1"/>
+          <p:nvPr/>
+        </p:nvSpPr>
+        <p:spPr>
+          <a:xfrm>
+            <a:off x="932688" y="1984248"/>
+            <a:ext cx="4553712" cy="731520"/>
+          </a:xfrm>
+          <a:prstGeom prst="rect">
+            <a:avLst/>
+          </a:prstGeom>
+          <a:noFill/>
+          <a:ln/>
+        </p:spPr>
+        <p:txBody>
+          <a:bodyPr wrap="square" lIns="0" tIns="0" rIns="0" bIns="0" rtlCol="0" anchor="ctr"/>
+          <a:lstStyle/>
+          <a:p>
+            <a:pPr indent="0" marL="0">
+              <a:lnSpc>
+                <a:spcPts val="1950"/>
+              </a:lnSpc>
+              <a:buNone/>
+            </a:pPr>
+            <a:r>
+              <a:rPr lang="en-US" sz="1450" dirty="0">
+                <a:solidFill>
+                  <a:srgbClr val="9FB0CF"/>
+                </a:solidFill>
+                <a:latin typeface="Calibri" pitchFamily="34" charset="0"/>
+                <a:ea typeface="Calibri" pitchFamily="34" charset="-122"/>
+                <a:cs typeface="Calibri" pitchFamily="34" charset="-120"/>
+              </a:rPr>
+              <a:t>Machined body with a glass screen showing your sleep report.</a:t>
+            </a:r>
+            <a:endParaRPr lang="en-US" sz="1450" dirty="0"/>
+          </a:p>
+        </p:txBody>
+      </p:sp>
+      <p:sp>
+        <p:nvSpPr>
+          <p:cNvPr id="7" name="Shape 4"/>
+          <p:cNvSpPr/>
+          <p:nvPr/>
+        </p:nvSpPr>
+        <p:spPr>
+          <a:xfrm>
+            <a:off x="640080" y="2642616"/>
+            <a:ext cx="128016" cy="128016"/>
+          </a:xfrm>
+          <a:prstGeom prst="ellipse">
+            <a:avLst/>
+          </a:prstGeom>
+          <a:solidFill>
+            <a:srgbClr val="1F8A9C"/>
+          </a:solidFill>
+          <a:ln/>
+        </p:spPr>
+      </p:sp>
+      <p:sp>
+        <p:nvSpPr>
+          <p:cNvPr id="8" name="Text 5"/>
+          <p:cNvSpPr txBox="1"/>
+          <p:nvPr/>
+        </p:nvSpPr>
+        <p:spPr>
+          <a:xfrm>
+            <a:off x="932688" y="2551176"/>
+            <a:ext cx="4553712" cy="731520"/>
+          </a:xfrm>
+          <a:prstGeom prst="rect">
+            <a:avLst/>
+          </a:prstGeom>
+          <a:noFill/>
+          <a:ln/>
+        </p:spPr>
+        <p:txBody>
+          <a:bodyPr wrap="square" lIns="0" tIns="0" rIns="0" bIns="0" rtlCol="0" anchor="ctr"/>
+          <a:lstStyle/>
+          <a:p>
+            <a:pPr indent="0" marL="0">
+              <a:lnSpc>
+                <a:spcPts val="1950"/>
+              </a:lnSpc>
+              <a:buNone/>
+            </a:pPr>
+            <a:r>
+              <a:rPr lang="en-US" sz="1450" dirty="0">
+                <a:solidFill>
+                  <a:srgbClr val="9FB0CF"/>
+                </a:solidFill>
+                <a:latin typeface="Calibri" pitchFamily="34" charset="0"/>
+                <a:ea typeface="Calibri" pitchFamily="34" charset="-122"/>
+                <a:cs typeface="Calibri" pitchFamily="34" charset="-120"/>
+              </a:rPr>
+              <a:t>Soft velcro band holds the processor, battery and Bluetooth.</a:t>
+            </a:r>
+            <a:endParaRPr lang="en-US" sz="1450" dirty="0"/>
+          </a:p>
+        </p:txBody>
+      </p:sp>
+      <p:sp>
+        <p:nvSpPr>
+          <p:cNvPr id="9" name="Shape 6"/>
+          <p:cNvSpPr/>
+          <p:nvPr/>
+        </p:nvSpPr>
+        <p:spPr>
+          <a:xfrm>
+            <a:off x="640080" y="3209544"/>
+            <a:ext cx="128016" cy="128016"/>
+          </a:xfrm>
+          <a:prstGeom prst="ellipse">
+            <a:avLst/>
+          </a:prstGeom>
+          <a:solidFill>
+            <a:srgbClr val="1F8A9C"/>
+          </a:solidFill>
+          <a:ln/>
+        </p:spPr>
+      </p:sp>
+      <p:sp>
+        <p:nvSpPr>
+          <p:cNvPr id="10" name="Text 7"/>
+          <p:cNvSpPr txBox="1"/>
+          <p:nvPr/>
+        </p:nvSpPr>
+        <p:spPr>
+          <a:xfrm>
+            <a:off x="932688" y="3118104"/>
+            <a:ext cx="4553712" cy="731520"/>
+          </a:xfrm>
+          <a:prstGeom prst="rect">
+            <a:avLst/>
+          </a:prstGeom>
+          <a:noFill/>
+          <a:ln/>
+        </p:spPr>
+        <p:txBody>
+          <a:bodyPr wrap="square" lIns="0" tIns="0" rIns="0" bIns="0" rtlCol="0" anchor="ctr"/>
+          <a:lstStyle/>
+          <a:p>
+            <a:pPr indent="0" marL="0">
+              <a:lnSpc>
+                <a:spcPts val="1950"/>
+              </a:lnSpc>
+              <a:buNone/>
+            </a:pPr>
+            <a:r>
+              <a:rPr lang="en-US" sz="1450" dirty="0">
+                <a:solidFill>
+                  <a:srgbClr val="9FB0CF"/>
+                </a:solidFill>
+                <a:latin typeface="Calibri" pitchFamily="34" charset="0"/>
+                <a:ea typeface="Calibri" pitchFamily="34" charset="-122"/>
+                <a:cs typeface="Calibri" pitchFamily="34" charset="-120"/>
+              </a:rPr>
+              <a:t>A fingertip sensor reads blood oxygen and pulse.</a:t>
+            </a:r>
+            <a:endParaRPr lang="en-US" sz="1450" dirty="0"/>
+          </a:p>
+        </p:txBody>
+      </p:sp>
+      <p:sp>
+        <p:nvSpPr>
+          <p:cNvPr id="11" name="Shape 8"/>
+          <p:cNvSpPr/>
+          <p:nvPr/>
+        </p:nvSpPr>
+        <p:spPr>
+          <a:xfrm>
+            <a:off x="640080" y="3776472"/>
+            <a:ext cx="128016" cy="128016"/>
+          </a:xfrm>
+          <a:prstGeom prst="ellipse">
+            <a:avLst/>
+          </a:prstGeom>
+          <a:solidFill>
+            <a:srgbClr val="1F8A9C"/>
+          </a:solidFill>
+          <a:ln/>
+        </p:spPr>
+      </p:sp>
+      <p:sp>
+        <p:nvSpPr>
+          <p:cNvPr id="12" name="Text 9"/>
+          <p:cNvSpPr txBox="1"/>
+          <p:nvPr/>
+        </p:nvSpPr>
+        <p:spPr>
+          <a:xfrm>
+            <a:off x="932688" y="3685032"/>
+            <a:ext cx="4553712" cy="731520"/>
+          </a:xfrm>
+          <a:prstGeom prst="rect">
+            <a:avLst/>
+          </a:prstGeom>
+          <a:noFill/>
+          <a:ln/>
+        </p:spPr>
+        <p:txBody>
+          <a:bodyPr wrap="square" lIns="0" tIns="0" rIns="0" bIns="0" rtlCol="0" anchor="ctr"/>
+          <a:lstStyle/>
+          <a:p>
+            <a:pPr indent="0" marL="0">
+              <a:lnSpc>
+                <a:spcPts val="1950"/>
+              </a:lnSpc>
+              <a:buNone/>
+            </a:pPr>
+            <a:r>
+              <a:rPr lang="en-US" sz="1450" dirty="0">
+                <a:solidFill>
+                  <a:srgbClr val="9FB0CF"/>
+                </a:solidFill>
+                <a:latin typeface="Calibri" pitchFamily="34" charset="0"/>
+                <a:ea typeface="Calibri" pitchFamily="34" charset="-122"/>
+                <a:cs typeface="Calibri" pitchFamily="34" charset="-120"/>
+              </a:rPr>
+              <a:t>Charges by USB and runs all night, cordless.</a:t>
+            </a:r>
+            <a:endParaRPr lang="en-US" sz="1450" dirty="0"/>
+          </a:p>
+        </p:txBody>
+      </p:sp>
+      <p:sp>
+        <p:nvSpPr>
+          <p:cNvPr id="13" name="Shape 10"/>
+          <p:cNvSpPr/>
+          <p:nvPr/>
+        </p:nvSpPr>
+        <p:spPr>
+          <a:xfrm>
+            <a:off x="640080" y="4937760"/>
+            <a:ext cx="4846320" cy="914400"/>
+          </a:xfrm>
+          <a:prstGeom prst="roundRect">
+            <a:avLst>
+              <a:gd name="adj" fmla="val 10000"/>
+            </a:avLst>
+          </a:prstGeom>
+          <a:solidFill>
+            <a:srgbClr val="18233F"/>
+          </a:solidFill>
+          <a:ln w="12700">
+            <a:solidFill>
+              <a:srgbClr val="1F8A9C"/>
+            </a:solidFill>
+            <a:prstDash val="solid"/>
+          </a:ln>
+        </p:spPr>
+      </p:sp>
+      <p:sp>
+        <p:nvSpPr>
+          <p:cNvPr id="14" name="Text 11"/>
+          <p:cNvSpPr txBox="1"/>
+          <p:nvPr/>
+        </p:nvSpPr>
+        <p:spPr>
+          <a:xfrm>
+            <a:off x="868680" y="5120640"/>
+            <a:ext cx="4480560" cy="640080"/>
+          </a:xfrm>
+          <a:prstGeom prst="rect">
+            <a:avLst/>
+          </a:prstGeom>
+          <a:noFill/>
+          <a:ln/>
+        </p:spPr>
+        <p:txBody>
+          <a:bodyPr wrap="square" lIns="0" tIns="0" rIns="0" bIns="0" rtlCol="0" anchor="ctr"/>
+          <a:lstStyle/>
+          <a:p>
+            <a:pPr indent="0" marL="0">
+              <a:lnSpc>
+                <a:spcPts val="1800"/>
+              </a:lnSpc>
+              <a:buNone/>
+            </a:pPr>
+            <a:r>
+              <a:rPr lang="en-US" sz="1300" b="1" dirty="0">
+                <a:solidFill>
+                  <a:srgbClr val="3FB8CC"/>
+                </a:solidFill>
+                <a:latin typeface="Calibri" pitchFamily="34" charset="0"/>
+                <a:ea typeface="Calibri" pitchFamily="34" charset="-122"/>
+                <a:cs typeface="Calibri" pitchFamily="34" charset="-120"/>
+              </a:rPr>
+              <a:t>Live demo:  </a:t>
+            </a:r>
+            <a:pPr indent="0" marL="0">
+              <a:lnSpc>
+                <a:spcPts val="1800"/>
+              </a:lnSpc>
+              <a:buNone/>
+            </a:pPr>
+            <a:r>
+              <a:rPr lang="en-US" sz="1300" dirty="0">
+                <a:solidFill>
+                  <a:srgbClr val="FFFFFF"/>
+                </a:solidFill>
+                <a:latin typeface="Calibri" pitchFamily="34" charset="0"/>
+                <a:ea typeface="Calibri" pitchFamily="34" charset="-122"/>
+                <a:cs typeface="Calibri" pitchFamily="34" charset="-120"/>
+              </a:rPr>
+              <a:t>an interactive 3D model can be spun around on screen at the fair.</a:t>
+            </a:r>
+            <a:endParaRPr lang="en-US" sz="1300" dirty="0"/>
+          </a:p>
+        </p:txBody>
+      </p:sp>
+    </p:spTree>
+  </p:cSld>
+  <p:clrMapOvr>
+    <a:masterClrMapping/>
+  </p:clrMapOvr>
+</p:sld>
+</file>
+
+<file path=ppt/slides/slide6.xml><?xml version="1.0" encoding="utf-8"?>
+<p:sld xmlns:a="http://schemas.openxmlformats.org/drawingml/2006/main" xmlns:r="http://schemas.openxmlformats.org/officeDocument/2006/relationships" xmlns:p="http://schemas.openxmlformats.org/presentationml/2006/main">
+  <p:cSld name="Slide 6">
+    <p:bg>
+      <p:bgPr>
+        <a:solidFill>
           <a:srgbClr val="FFFFFF"/>
         </a:solidFill>
       </p:bgPr>
@@ -5951,7 +6997,7 @@
       </p:sp>
       <p:graphicFrame>
         <p:nvGraphicFramePr>
-          <p:cNvPr id="6" name="Table 0"/>
+          <p:cNvPr id="7" name="Table 0"/>
           <p:cNvGraphicFramePr>
             <a:graphicFrameLocks noGrp="1"/>
           </p:cNvGraphicFramePr>
@@ -6785,9 +7831,9 @@
 </p:sld>
 </file>
 
-<file path=ppt/slides/slide6.xml><?xml version="1.0" encoding="utf-8"?>
+<file path=ppt/slides/slide7.xml><?xml version="1.0" encoding="utf-8"?>
 <p:sld xmlns:a="http://schemas.openxmlformats.org/drawingml/2006/main" xmlns:r="http://schemas.openxmlformats.org/officeDocument/2006/relationships" xmlns:p="http://schemas.openxmlformats.org/presentationml/2006/main">
-  <p:cSld name="Slide 6">
+  <p:cSld name="Slide 7">
     <p:bg>
       <p:bgPr>
         <a:solidFill>
@@ -7204,7 +8250,7 @@
       </p:sp>
       <p:graphicFrame>
         <p:nvGraphicFramePr>
-          <p:cNvPr id="7" name="Table 0"/>
+          <p:cNvPr id="8" name="Table 0"/>
           <p:cNvGraphicFramePr>
             <a:graphicFrameLocks noGrp="1"/>
           </p:cNvGraphicFramePr>
@@ -7901,9 +8947,9 @@
 </p:sld>
 </file>
 
-<file path=ppt/slides/slide7.xml><?xml version="1.0" encoding="utf-8"?>
+<file path=ppt/slides/slide8.xml><?xml version="1.0" encoding="utf-8"?>
 <p:sld xmlns:a="http://schemas.openxmlformats.org/drawingml/2006/main" xmlns:r="http://schemas.openxmlformats.org/officeDocument/2006/relationships" xmlns:p="http://schemas.openxmlformats.org/presentationml/2006/main">
-  <p:cSld name="Slide 7">
+  <p:cSld name="Slide 8">
     <p:bg>
       <p:bgPr>
         <a:solidFill>
@@ -8365,631 +9411,6 @@
               <a:t>a simple change — sleeping on your side — could reduce events.</a:t>
             </a:r>
             <a:endParaRPr lang="en-US" sz="1400" dirty="0"/>
-          </a:p>
-        </p:txBody>
-      </p:sp>
-    </p:spTree>
-  </p:cSld>
-  <p:clrMapOvr>
-    <a:masterClrMapping/>
-  </p:clrMapOvr>
-</p:sld>
-</file>
-
-<file path=ppt/slides/slide8.xml><?xml version="1.0" encoding="utf-8"?>
-<p:sld xmlns:a="http://schemas.openxmlformats.org/drawingml/2006/main" xmlns:r="http://schemas.openxmlformats.org/officeDocument/2006/relationships" xmlns:p="http://schemas.openxmlformats.org/presentationml/2006/main">
-  <p:cSld name="Slide 8">
-    <p:bg>
-      <p:bgPr>
-        <a:solidFill>
-          <a:srgbClr val="0E1830"/>
-        </a:solidFill>
-      </p:bgPr>
-    </p:bg>
-    <p:spTree>
-      <p:nvGrpSpPr>
-        <p:cNvPr id="1" name=""/>
-        <p:cNvGrpSpPr/>
-        <p:nvPr/>
-      </p:nvGrpSpPr>
-      <p:grpSpPr>
-        <a:xfrm>
-          <a:off x="0" y="0"/>
-          <a:ext cx="0" cy="0"/>
-          <a:chOff x="0" y="0"/>
-          <a:chExt cx="0" cy="0"/>
-        </a:xfrm>
-      </p:grpSpPr>
-      <p:sp>
-        <p:nvSpPr>
-          <p:cNvPr id="2" name="Text 0"/>
-          <p:cNvSpPr txBox="1"/>
-          <p:nvPr/>
-        </p:nvSpPr>
-        <p:spPr>
-          <a:xfrm>
-            <a:off x="640080" y="457200"/>
-            <a:ext cx="10881360" cy="274320"/>
-          </a:xfrm>
-          <a:prstGeom prst="rect">
-            <a:avLst/>
-          </a:prstGeom>
-          <a:noFill/>
-          <a:ln/>
-        </p:spPr>
-        <p:txBody>
-          <a:bodyPr wrap="square" lIns="0" tIns="0" rIns="0" bIns="0" rtlCol="0" anchor="ctr"/>
-          <a:lstStyle/>
-          <a:p>
-            <a:pPr indent="0" marL="0">
-              <a:buNone/>
-            </a:pPr>
-            <a:r>
-              <a:rPr lang="en-US" sz="1200" b="1" spc="300" kern="0" dirty="0">
-                <a:solidFill>
-                  <a:srgbClr val="3FB8CC"/>
-                </a:solidFill>
-                <a:latin typeface="Calibri" pitchFamily="34" charset="0"/>
-                <a:ea typeface="Calibri" pitchFamily="34" charset="-122"/>
-                <a:cs typeface="Calibri" pitchFamily="34" charset="-120"/>
-              </a:rPr>
-              <a:t>ANALYSIS</a:t>
-            </a:r>
-            <a:endParaRPr lang="en-US" sz="1200" dirty="0"/>
-          </a:p>
-        </p:txBody>
-      </p:sp>
-      <p:sp>
-        <p:nvSpPr>
-          <p:cNvPr id="3" name="Text 1"/>
-          <p:cNvSpPr txBox="1"/>
-          <p:nvPr/>
-        </p:nvSpPr>
-        <p:spPr>
-          <a:xfrm>
-            <a:off x="640080" y="822960"/>
-            <a:ext cx="10881360" cy="914400"/>
-          </a:xfrm>
-          <a:prstGeom prst="rect">
-            <a:avLst/>
-          </a:prstGeom>
-          <a:noFill/>
-          <a:ln/>
-        </p:spPr>
-        <p:txBody>
-          <a:bodyPr wrap="square" lIns="0" tIns="0" rIns="0" bIns="0" rtlCol="0" anchor="ctr"/>
-          <a:lstStyle/>
-          <a:p>
-            <a:pPr indent="0" marL="0">
-              <a:lnSpc>
-                <a:spcPts val="3400"/>
-              </a:lnSpc>
-              <a:buNone/>
-            </a:pPr>
-            <a:r>
-              <a:rPr lang="en-US" sz="3000" b="1" dirty="0">
-                <a:solidFill>
-                  <a:srgbClr val="FFFFFF"/>
-                </a:solidFill>
-                <a:latin typeface="Calibri" pitchFamily="34" charset="0"/>
-                <a:ea typeface="Calibri" pitchFamily="34" charset="-122"/>
-                <a:cs typeface="Calibri" pitchFamily="34" charset="-120"/>
-              </a:rPr>
-              <a:t>What the results mean</a:t>
-            </a:r>
-            <a:endParaRPr lang="en-US" sz="3000" dirty="0"/>
-          </a:p>
-        </p:txBody>
-      </p:sp>
-      <p:sp>
-        <p:nvSpPr>
-          <p:cNvPr id="4" name="Text 2"/>
-          <p:cNvSpPr txBox="1"/>
-          <p:nvPr/>
-        </p:nvSpPr>
-        <p:spPr>
-          <a:xfrm>
-            <a:off x="640080" y="1828800"/>
-            <a:ext cx="5120640" cy="365760"/>
-          </a:xfrm>
-          <a:prstGeom prst="rect">
-            <a:avLst/>
-          </a:prstGeom>
-          <a:noFill/>
-          <a:ln/>
-        </p:spPr>
-        <p:txBody>
-          <a:bodyPr wrap="square" lIns="0" tIns="0" rIns="0" bIns="0" rtlCol="0" anchor="ctr"/>
-          <a:lstStyle/>
-          <a:p>
-            <a:pPr indent="0" marL="0">
-              <a:buNone/>
-            </a:pPr>
-            <a:r>
-              <a:rPr lang="en-US" sz="1600" b="1" dirty="0">
-                <a:solidFill>
-                  <a:srgbClr val="3FB8CC"/>
-                </a:solidFill>
-                <a:latin typeface="Calibri" pitchFamily="34" charset="0"/>
-                <a:ea typeface="Calibri" pitchFamily="34" charset="-122"/>
-                <a:cs typeface="Calibri" pitchFamily="34" charset="-120"/>
-              </a:rPr>
-              <a:t>Interpretation</a:t>
-            </a:r>
-            <a:endParaRPr lang="en-US" sz="1600" dirty="0"/>
-          </a:p>
-        </p:txBody>
-      </p:sp>
-      <p:sp>
-        <p:nvSpPr>
-          <p:cNvPr id="5" name="Shape 3"/>
-          <p:cNvSpPr/>
-          <p:nvPr/>
-        </p:nvSpPr>
-        <p:spPr>
-          <a:xfrm>
-            <a:off x="640080" y="2350008"/>
-            <a:ext cx="128016" cy="128016"/>
-          </a:xfrm>
-          <a:prstGeom prst="ellipse">
-            <a:avLst/>
-          </a:prstGeom>
-          <a:solidFill>
-            <a:srgbClr val="1F8A9C"/>
-          </a:solidFill>
-          <a:ln/>
-        </p:spPr>
-      </p:sp>
-      <p:sp>
-        <p:nvSpPr>
-          <p:cNvPr id="6" name="Text 4"/>
-          <p:cNvSpPr txBox="1"/>
-          <p:nvPr/>
-        </p:nvSpPr>
-        <p:spPr>
-          <a:xfrm>
-            <a:off x="932688" y="2258568"/>
-            <a:ext cx="5010912" cy="731520"/>
-          </a:xfrm>
-          <a:prstGeom prst="rect">
-            <a:avLst/>
-          </a:prstGeom>
-          <a:noFill/>
-          <a:ln/>
-        </p:spPr>
-        <p:txBody>
-          <a:bodyPr wrap="square" lIns="0" tIns="0" rIns="0" bIns="0" rtlCol="0" anchor="ctr"/>
-          <a:lstStyle/>
-          <a:p>
-            <a:pPr indent="0" marL="0">
-              <a:lnSpc>
-                <a:spcPts val="1850"/>
-              </a:lnSpc>
-              <a:buNone/>
-            </a:pPr>
-            <a:r>
-              <a:rPr lang="en-US" sz="1350" dirty="0">
-                <a:solidFill>
-                  <a:srgbClr val="9FB0CF"/>
-                </a:solidFill>
-                <a:latin typeface="Calibri" pitchFamily="34" charset="0"/>
-                <a:ea typeface="Calibri" pitchFamily="34" charset="-122"/>
-                <a:cs typeface="Calibri" pitchFamily="34" charset="-120"/>
-              </a:rPr>
-              <a:t>The device agreed with a reference oximeter within ~0.6% — accurate enough to trust its readings.</a:t>
-            </a:r>
-            <a:endParaRPr lang="en-US" sz="1350" dirty="0"/>
-          </a:p>
-        </p:txBody>
-      </p:sp>
-      <p:sp>
-        <p:nvSpPr>
-          <p:cNvPr id="7" name="Shape 5"/>
-          <p:cNvSpPr/>
-          <p:nvPr/>
-        </p:nvSpPr>
-        <p:spPr>
-          <a:xfrm>
-            <a:off x="640080" y="3218688"/>
-            <a:ext cx="128016" cy="128016"/>
-          </a:xfrm>
-          <a:prstGeom prst="ellipse">
-            <a:avLst/>
-          </a:prstGeom>
-          <a:solidFill>
-            <a:srgbClr val="1F8A9C"/>
-          </a:solidFill>
-          <a:ln/>
-        </p:spPr>
-      </p:sp>
-      <p:sp>
-        <p:nvSpPr>
-          <p:cNvPr id="8" name="Text 6"/>
-          <p:cNvSpPr txBox="1"/>
-          <p:nvPr/>
-        </p:nvSpPr>
-        <p:spPr>
-          <a:xfrm>
-            <a:off x="932688" y="3127248"/>
-            <a:ext cx="5010912" cy="731520"/>
-          </a:xfrm>
-          <a:prstGeom prst="rect">
-            <a:avLst/>
-          </a:prstGeom>
-          <a:noFill/>
-          <a:ln/>
-        </p:spPr>
-        <p:txBody>
-          <a:bodyPr wrap="square" lIns="0" tIns="0" rIns="0" bIns="0" rtlCol="0" anchor="ctr"/>
-          <a:lstStyle/>
-          <a:p>
-            <a:pPr indent="0" marL="0">
-              <a:lnSpc>
-                <a:spcPts val="1850"/>
-              </a:lnSpc>
-              <a:buNone/>
-            </a:pPr>
-            <a:r>
-              <a:rPr lang="en-US" sz="1350" dirty="0">
-                <a:solidFill>
-                  <a:srgbClr val="9FB0CF"/>
-                </a:solidFill>
-                <a:latin typeface="Calibri" pitchFamily="34" charset="0"/>
-                <a:ea typeface="Calibri" pitchFamily="34" charset="-122"/>
-                <a:cs typeface="Calibri" pitchFamily="34" charset="-120"/>
-              </a:rPr>
-              <a:t>It reliably flagged the oxygen drops that mark apnea events.</a:t>
-            </a:r>
-            <a:endParaRPr lang="en-US" sz="1350" dirty="0"/>
-          </a:p>
-        </p:txBody>
-      </p:sp>
-      <p:sp>
-        <p:nvSpPr>
-          <p:cNvPr id="9" name="Shape 7"/>
-          <p:cNvSpPr/>
-          <p:nvPr/>
-        </p:nvSpPr>
-        <p:spPr>
-          <a:xfrm>
-            <a:off x="640080" y="3785616"/>
-            <a:ext cx="128016" cy="128016"/>
-          </a:xfrm>
-          <a:prstGeom prst="ellipse">
-            <a:avLst/>
-          </a:prstGeom>
-          <a:solidFill>
-            <a:srgbClr val="1F8A9C"/>
-          </a:solidFill>
-          <a:ln/>
-        </p:spPr>
-      </p:sp>
-      <p:sp>
-        <p:nvSpPr>
-          <p:cNvPr id="10" name="Text 8"/>
-          <p:cNvSpPr txBox="1"/>
-          <p:nvPr/>
-        </p:nvSpPr>
-        <p:spPr>
-          <a:xfrm>
-            <a:off x="932688" y="3694176"/>
-            <a:ext cx="5010912" cy="731520"/>
-          </a:xfrm>
-          <a:prstGeom prst="rect">
-            <a:avLst/>
-          </a:prstGeom>
-          <a:noFill/>
-          <a:ln/>
-        </p:spPr>
-        <p:txBody>
-          <a:bodyPr wrap="square" lIns="0" tIns="0" rIns="0" bIns="0" rtlCol="0" anchor="ctr"/>
-          <a:lstStyle/>
-          <a:p>
-            <a:pPr indent="0" marL="0">
-              <a:lnSpc>
-                <a:spcPts val="1850"/>
-              </a:lnSpc>
-              <a:buNone/>
-            </a:pPr>
-            <a:r>
-              <a:rPr lang="en-US" sz="1350" dirty="0">
-                <a:solidFill>
-                  <a:srgbClr val="9FB0CF"/>
-                </a:solidFill>
-                <a:latin typeface="Calibri" pitchFamily="34" charset="0"/>
-                <a:ea typeface="Calibri" pitchFamily="34" charset="-122"/>
-                <a:cs typeface="Calibri" pitchFamily="34" charset="-120"/>
-              </a:rPr>
-              <a:t>Back-sleeping produced the most events, matching medical literature.</a:t>
-            </a:r>
-            <a:endParaRPr lang="en-US" sz="1350" dirty="0"/>
-          </a:p>
-        </p:txBody>
-      </p:sp>
-      <p:sp>
-        <p:nvSpPr>
-          <p:cNvPr id="11" name="Text 9"/>
-          <p:cNvSpPr txBox="1"/>
-          <p:nvPr/>
-        </p:nvSpPr>
-        <p:spPr>
-          <a:xfrm>
-            <a:off x="6309360" y="1828800"/>
-            <a:ext cx="5120640" cy="365760"/>
-          </a:xfrm>
-          <a:prstGeom prst="rect">
-            <a:avLst/>
-          </a:prstGeom>
-          <a:noFill/>
-          <a:ln/>
-        </p:spPr>
-        <p:txBody>
-          <a:bodyPr wrap="square" lIns="0" tIns="0" rIns="0" bIns="0" rtlCol="0" anchor="ctr"/>
-          <a:lstStyle/>
-          <a:p>
-            <a:pPr indent="0" marL="0">
-              <a:buNone/>
-            </a:pPr>
-            <a:r>
-              <a:rPr lang="en-US" sz="1600" b="1" dirty="0">
-                <a:solidFill>
-                  <a:srgbClr val="E4568A"/>
-                </a:solidFill>
-                <a:latin typeface="Calibri" pitchFamily="34" charset="0"/>
-                <a:ea typeface="Calibri" pitchFamily="34" charset="-122"/>
-                <a:cs typeface="Calibri" pitchFamily="34" charset="-120"/>
-              </a:rPr>
-              <a:t>Sources of error</a:t>
-            </a:r>
-            <a:endParaRPr lang="en-US" sz="1600" dirty="0"/>
-          </a:p>
-        </p:txBody>
-      </p:sp>
-      <p:sp>
-        <p:nvSpPr>
-          <p:cNvPr id="12" name="Shape 10"/>
-          <p:cNvSpPr/>
-          <p:nvPr/>
-        </p:nvSpPr>
-        <p:spPr>
-          <a:xfrm>
-            <a:off x="6309360" y="2350008"/>
-            <a:ext cx="128016" cy="128016"/>
-          </a:xfrm>
-          <a:prstGeom prst="ellipse">
-            <a:avLst/>
-          </a:prstGeom>
-          <a:solidFill>
-            <a:srgbClr val="1F8A9C"/>
-          </a:solidFill>
-          <a:ln/>
-        </p:spPr>
-      </p:sp>
-      <p:sp>
-        <p:nvSpPr>
-          <p:cNvPr id="13" name="Text 11"/>
-          <p:cNvSpPr txBox="1"/>
-          <p:nvPr/>
-        </p:nvSpPr>
-        <p:spPr>
-          <a:xfrm>
-            <a:off x="6601968" y="2258568"/>
-            <a:ext cx="4919472" cy="731520"/>
-          </a:xfrm>
-          <a:prstGeom prst="rect">
-            <a:avLst/>
-          </a:prstGeom>
-          <a:noFill/>
-          <a:ln/>
-        </p:spPr>
-        <p:txBody>
-          <a:bodyPr wrap="square" lIns="0" tIns="0" rIns="0" bIns="0" rtlCol="0" anchor="ctr"/>
-          <a:lstStyle/>
-          <a:p>
-            <a:pPr indent="0" marL="0">
-              <a:lnSpc>
-                <a:spcPts val="1850"/>
-              </a:lnSpc>
-              <a:buNone/>
-            </a:pPr>
-            <a:r>
-              <a:rPr lang="en-US" sz="1350" dirty="0">
-                <a:solidFill>
-                  <a:srgbClr val="9FB0CF"/>
-                </a:solidFill>
-                <a:latin typeface="Calibri" pitchFamily="34" charset="0"/>
-                <a:ea typeface="Calibri" pitchFamily="34" charset="-122"/>
-                <a:cs typeface="Calibri" pitchFamily="34" charset="-120"/>
-              </a:rPr>
-              <a:t>A $8 sensor is less precise than clinical equipment.</a:t>
-            </a:r>
-            <a:endParaRPr lang="en-US" sz="1350" dirty="0"/>
-          </a:p>
-        </p:txBody>
-      </p:sp>
-      <p:sp>
-        <p:nvSpPr>
-          <p:cNvPr id="14" name="Shape 12"/>
-          <p:cNvSpPr/>
-          <p:nvPr/>
-        </p:nvSpPr>
-        <p:spPr>
-          <a:xfrm>
-            <a:off x="6309360" y="2916936"/>
-            <a:ext cx="128016" cy="128016"/>
-          </a:xfrm>
-          <a:prstGeom prst="ellipse">
-            <a:avLst/>
-          </a:prstGeom>
-          <a:solidFill>
-            <a:srgbClr val="1F8A9C"/>
-          </a:solidFill>
-          <a:ln/>
-        </p:spPr>
-      </p:sp>
-      <p:sp>
-        <p:nvSpPr>
-          <p:cNvPr id="15" name="Text 13"/>
-          <p:cNvSpPr txBox="1"/>
-          <p:nvPr/>
-        </p:nvSpPr>
-        <p:spPr>
-          <a:xfrm>
-            <a:off x="6601968" y="2825496"/>
-            <a:ext cx="4919472" cy="731520"/>
-          </a:xfrm>
-          <a:prstGeom prst="rect">
-            <a:avLst/>
-          </a:prstGeom>
-          <a:noFill/>
-          <a:ln/>
-        </p:spPr>
-        <p:txBody>
-          <a:bodyPr wrap="square" lIns="0" tIns="0" rIns="0" bIns="0" rtlCol="0" anchor="ctr"/>
-          <a:lstStyle/>
-          <a:p>
-            <a:pPr indent="0" marL="0">
-              <a:lnSpc>
-                <a:spcPts val="1850"/>
-              </a:lnSpc>
-              <a:buNone/>
-            </a:pPr>
-            <a:r>
-              <a:rPr lang="en-US" sz="1350" dirty="0">
-                <a:solidFill>
-                  <a:srgbClr val="9FB0CF"/>
-                </a:solidFill>
-                <a:latin typeface="Calibri" pitchFamily="34" charset="0"/>
-                <a:ea typeface="Calibri" pitchFamily="34" charset="-122"/>
-                <a:cs typeface="Calibri" pitchFamily="34" charset="-120"/>
-              </a:rPr>
-              <a:t>Breath-holds while awake imitate, but aren’t identical to, real apnea.</a:t>
-            </a:r>
-            <a:endParaRPr lang="en-US" sz="1350" dirty="0"/>
-          </a:p>
-        </p:txBody>
-      </p:sp>
-      <p:sp>
-        <p:nvSpPr>
-          <p:cNvPr id="16" name="Shape 14"/>
-          <p:cNvSpPr/>
-          <p:nvPr/>
-        </p:nvSpPr>
-        <p:spPr>
-          <a:xfrm>
-            <a:off x="6309360" y="3785616"/>
-            <a:ext cx="128016" cy="128016"/>
-          </a:xfrm>
-          <a:prstGeom prst="ellipse">
-            <a:avLst/>
-          </a:prstGeom>
-          <a:solidFill>
-            <a:srgbClr val="1F8A9C"/>
-          </a:solidFill>
-          <a:ln/>
-        </p:spPr>
-      </p:sp>
-      <p:sp>
-        <p:nvSpPr>
-          <p:cNvPr id="17" name="Text 15"/>
-          <p:cNvSpPr txBox="1"/>
-          <p:nvPr/>
-        </p:nvSpPr>
-        <p:spPr>
-          <a:xfrm>
-            <a:off x="6601968" y="3694176"/>
-            <a:ext cx="4919472" cy="731520"/>
-          </a:xfrm>
-          <a:prstGeom prst="rect">
-            <a:avLst/>
-          </a:prstGeom>
-          <a:noFill/>
-          <a:ln/>
-        </p:spPr>
-        <p:txBody>
-          <a:bodyPr wrap="square" lIns="0" tIns="0" rIns="0" bIns="0" rtlCol="0" anchor="ctr"/>
-          <a:lstStyle/>
-          <a:p>
-            <a:pPr indent="0" marL="0">
-              <a:lnSpc>
-                <a:spcPts val="1850"/>
-              </a:lnSpc>
-              <a:buNone/>
-            </a:pPr>
-            <a:r>
-              <a:rPr lang="en-US" sz="1350" dirty="0">
-                <a:solidFill>
-                  <a:srgbClr val="9FB0CF"/>
-                </a:solidFill>
-                <a:latin typeface="Calibri" pitchFamily="34" charset="0"/>
-                <a:ea typeface="Calibri" pitchFamily="34" charset="-122"/>
-                <a:cs typeface="Calibri" pitchFamily="34" charset="-120"/>
-              </a:rPr>
-              <a:t>Tested on one person over few nights — a small sample.</a:t>
-            </a:r>
-            <a:endParaRPr lang="en-US" sz="1350" dirty="0"/>
-          </a:p>
-        </p:txBody>
-      </p:sp>
-      <p:sp>
-        <p:nvSpPr>
-          <p:cNvPr id="18" name="Shape 16"/>
-          <p:cNvSpPr/>
-          <p:nvPr/>
-        </p:nvSpPr>
-        <p:spPr>
-          <a:xfrm>
-            <a:off x="6309360" y="4352544"/>
-            <a:ext cx="128016" cy="128016"/>
-          </a:xfrm>
-          <a:prstGeom prst="ellipse">
-            <a:avLst/>
-          </a:prstGeom>
-          <a:solidFill>
-            <a:srgbClr val="1F8A9C"/>
-          </a:solidFill>
-          <a:ln/>
-        </p:spPr>
-      </p:sp>
-      <p:sp>
-        <p:nvSpPr>
-          <p:cNvPr id="19" name="Text 17"/>
-          <p:cNvSpPr txBox="1"/>
-          <p:nvPr/>
-        </p:nvSpPr>
-        <p:spPr>
-          <a:xfrm>
-            <a:off x="6601968" y="4261104"/>
-            <a:ext cx="4919472" cy="731520"/>
-          </a:xfrm>
-          <a:prstGeom prst="rect">
-            <a:avLst/>
-          </a:prstGeom>
-          <a:noFill/>
-          <a:ln/>
-        </p:spPr>
-        <p:txBody>
-          <a:bodyPr wrap="square" lIns="0" tIns="0" rIns="0" bIns="0" rtlCol="0" anchor="ctr"/>
-          <a:lstStyle/>
-          <a:p>
-            <a:pPr indent="0" marL="0">
-              <a:lnSpc>
-                <a:spcPts val="1850"/>
-              </a:lnSpc>
-              <a:buNone/>
-            </a:pPr>
-            <a:r>
-              <a:rPr lang="en-US" sz="1350" dirty="0">
-                <a:solidFill>
-                  <a:srgbClr val="9FB0CF"/>
-                </a:solidFill>
-                <a:latin typeface="Calibri" pitchFamily="34" charset="0"/>
-                <a:ea typeface="Calibri" pitchFamily="34" charset="-122"/>
-                <a:cs typeface="Calibri" pitchFamily="34" charset="-120"/>
-              </a:rPr>
-              <a:t>Finger movement adds noise the software must smooth out.</a:t>
-            </a:r>
-            <a:endParaRPr lang="en-US" sz="1350" dirty="0"/>
           </a:p>
         </p:txBody>
       </p:sp>
@@ -9058,7 +9479,7 @@
                 <a:ea typeface="Calibri" pitchFamily="34" charset="-122"/>
                 <a:cs typeface="Calibri" pitchFamily="34" charset="-120"/>
               </a:rPr>
-              <a:t>CONCLUSION</a:t>
+              <a:t>ANALYSIS</a:t>
             </a:r>
             <a:endParaRPr lang="en-US" sz="1200" dirty="0"/>
           </a:p>
@@ -9100,7 +9521,7 @@
                 <a:ea typeface="Calibri" pitchFamily="34" charset="-122"/>
                 <a:cs typeface="Calibri" pitchFamily="34" charset="-120"/>
               </a:rPr>
-              <a:t>Back to the hypothesis</a:t>
+              <a:t>What the results mean</a:t>
             </a:r>
             <a:endParaRPr lang="en-US" sz="3000" dirty="0"/>
           </a:p>
@@ -9108,138 +9529,52 @@
       </p:sp>
       <p:sp>
         <p:nvSpPr>
-          <p:cNvPr id="4" name="Shape 2"/>
+          <p:cNvPr id="4" name="Text 2"/>
+          <p:cNvSpPr txBox="1"/>
+          <p:nvPr/>
+        </p:nvSpPr>
+        <p:spPr>
+          <a:xfrm>
+            <a:off x="640080" y="1828800"/>
+            <a:ext cx="5120640" cy="365760"/>
+          </a:xfrm>
+          <a:prstGeom prst="rect">
+            <a:avLst/>
+          </a:prstGeom>
+          <a:noFill/>
+          <a:ln/>
+        </p:spPr>
+        <p:txBody>
+          <a:bodyPr wrap="square" lIns="0" tIns="0" rIns="0" bIns="0" rtlCol="0" anchor="ctr"/>
+          <a:lstStyle/>
+          <a:p>
+            <a:pPr indent="0" marL="0">
+              <a:buNone/>
+            </a:pPr>
+            <a:r>
+              <a:rPr lang="en-US" sz="1600" b="1" dirty="0">
+                <a:solidFill>
+                  <a:srgbClr val="3FB8CC"/>
+                </a:solidFill>
+                <a:latin typeface="Calibri" pitchFamily="34" charset="0"/>
+                <a:ea typeface="Calibri" pitchFamily="34" charset="-122"/>
+                <a:cs typeface="Calibri" pitchFamily="34" charset="-120"/>
+              </a:rPr>
+              <a:t>Interpretation</a:t>
+            </a:r>
+            <a:endParaRPr lang="en-US" sz="1600" dirty="0"/>
+          </a:p>
+        </p:txBody>
+      </p:sp>
+      <p:sp>
+        <p:nvSpPr>
+          <p:cNvPr id="5" name="Shape 3"/>
           <p:cNvSpPr/>
           <p:nvPr/>
         </p:nvSpPr>
         <p:spPr>
           <a:xfrm>
-            <a:off x="640080" y="1828800"/>
-            <a:ext cx="10881360" cy="1280160"/>
-          </a:xfrm>
-          <a:prstGeom prst="roundRect">
-            <a:avLst>
-              <a:gd name="adj" fmla="val 7143"/>
-            </a:avLst>
-          </a:prstGeom>
-          <a:solidFill>
-            <a:srgbClr val="18233F"/>
-          </a:solidFill>
-          <a:ln w="12700">
-            <a:solidFill>
-              <a:srgbClr val="1F8A9C"/>
-            </a:solidFill>
-            <a:prstDash val="solid"/>
-          </a:ln>
-        </p:spPr>
-      </p:sp>
-      <p:sp>
-        <p:nvSpPr>
-          <p:cNvPr id="5" name="Text 3"/>
-          <p:cNvSpPr txBox="1"/>
-          <p:nvPr/>
-        </p:nvSpPr>
-        <p:spPr>
-          <a:xfrm>
-            <a:off x="914400" y="2011680"/>
-            <a:ext cx="10332720" cy="1005840"/>
-          </a:xfrm>
-          <a:prstGeom prst="rect">
-            <a:avLst/>
-          </a:prstGeom>
-          <a:noFill/>
-          <a:ln/>
-        </p:spPr>
-        <p:txBody>
-          <a:bodyPr wrap="square" lIns="0" tIns="0" rIns="0" bIns="0" rtlCol="0" anchor="ctr"/>
-          <a:lstStyle/>
-          <a:p>
-            <a:pPr indent="0" marL="0">
-              <a:lnSpc>
-                <a:spcPts val="2300"/>
-              </a:lnSpc>
-              <a:buNone/>
-            </a:pPr>
-            <a:r>
-              <a:rPr lang="en-US" sz="1600" b="1" dirty="0">
-                <a:solidFill>
-                  <a:srgbClr val="3FB8CC"/>
-                </a:solidFill>
-                <a:latin typeface="Calibri" pitchFamily="34" charset="0"/>
-                <a:ea typeface="Calibri" pitchFamily="34" charset="-122"/>
-                <a:cs typeface="Calibri" pitchFamily="34" charset="-120"/>
-              </a:rPr>
-              <a:t>Hypothesis supported. </a:t>
-            </a:r>
-            <a:pPr indent="0" marL="0">
-              <a:lnSpc>
-                <a:spcPts val="2300"/>
-              </a:lnSpc>
-              <a:buNone/>
-            </a:pPr>
-            <a:r>
-              <a:rPr lang="en-US" sz="1600" dirty="0">
-                <a:solidFill>
-                  <a:srgbClr val="FFFFFF"/>
-                </a:solidFill>
-                <a:latin typeface="Calibri" pitchFamily="34" charset="0"/>
-                <a:ea typeface="Calibri" pitchFamily="34" charset="-122"/>
-                <a:cs typeface="Calibri" pitchFamily="34" charset="-120"/>
-              </a:rPr>
-              <a:t>A $35 wearable detected apnea’s oxygen drops, agreed closely with a medical oximeter, estimated an AHI severity, and revealed that back-sleeping caused more events.</a:t>
-            </a:r>
-            <a:endParaRPr lang="en-US" sz="1600" dirty="0"/>
-          </a:p>
-        </p:txBody>
-      </p:sp>
-      <p:sp>
-        <p:nvSpPr>
-          <p:cNvPr id="6" name="Text 4"/>
-          <p:cNvSpPr txBox="1"/>
-          <p:nvPr/>
-        </p:nvSpPr>
-        <p:spPr>
-          <a:xfrm>
-            <a:off x="640080" y="3474720"/>
-            <a:ext cx="10058400" cy="365760"/>
-          </a:xfrm>
-          <a:prstGeom prst="rect">
-            <a:avLst/>
-          </a:prstGeom>
-          <a:noFill/>
-          <a:ln/>
-        </p:spPr>
-        <p:txBody>
-          <a:bodyPr wrap="square" lIns="0" tIns="0" rIns="0" bIns="0" rtlCol="0" anchor="ctr"/>
-          <a:lstStyle/>
-          <a:p>
-            <a:pPr indent="0" marL="0">
-              <a:buNone/>
-            </a:pPr>
-            <a:r>
-              <a:rPr lang="en-US" sz="1600" b="1" dirty="0">
-                <a:solidFill>
-                  <a:srgbClr val="E4568A"/>
-                </a:solidFill>
-                <a:latin typeface="Calibri" pitchFamily="34" charset="0"/>
-                <a:ea typeface="Calibri" pitchFamily="34" charset="-122"/>
-                <a:cs typeface="Calibri" pitchFamily="34" charset="-120"/>
-              </a:rPr>
-              <a:t>Further considerations &amp; improvements</a:t>
-            </a:r>
-            <a:endParaRPr lang="en-US" sz="1600" dirty="0"/>
-          </a:p>
-        </p:txBody>
-      </p:sp>
-      <p:sp>
-        <p:nvSpPr>
-          <p:cNvPr id="7" name="Shape 5"/>
-          <p:cNvSpPr/>
-          <p:nvPr/>
-        </p:nvSpPr>
-        <p:spPr>
-          <a:xfrm>
-            <a:off x="640080" y="3995928"/>
+            <a:off x="640080" y="2350008"/>
             <a:ext cx="128016" cy="128016"/>
           </a:xfrm>
           <a:prstGeom prst="ellipse">
@@ -9253,14 +9588,14 @@
       </p:sp>
       <p:sp>
         <p:nvSpPr>
-          <p:cNvPr id="8" name="Text 6"/>
+          <p:cNvPr id="6" name="Text 4"/>
           <p:cNvSpPr txBox="1"/>
           <p:nvPr/>
         </p:nvSpPr>
         <p:spPr>
           <a:xfrm>
-            <a:off x="932688" y="3904488"/>
-            <a:ext cx="10314432" cy="731520"/>
+            <a:off x="932688" y="2258568"/>
+            <a:ext cx="5010912" cy="731520"/>
           </a:xfrm>
           <a:prstGeom prst="rect">
             <a:avLst/>
@@ -9274,12 +9609,12 @@
           <a:p>
             <a:pPr indent="0" marL="0">
               <a:lnSpc>
-                <a:spcPts val="1900"/>
+                <a:spcPts val="1850"/>
               </a:lnSpc>
               <a:buNone/>
             </a:pPr>
             <a:r>
-              <a:rPr lang="en-US" sz="1400" dirty="0">
+              <a:rPr lang="en-US" sz="1350" dirty="0">
                 <a:solidFill>
                   <a:srgbClr val="9FB0CF"/>
                 </a:solidFill>
@@ -9287,21 +9622,21 @@
                 <a:ea typeface="Calibri" pitchFamily="34" charset="-122"/>
                 <a:cs typeface="Calibri" pitchFamily="34" charset="-120"/>
               </a:rPr>
-              <a:t>Test more people, for more full nights, to strengthen the data.</a:t>
-            </a:r>
-            <a:endParaRPr lang="en-US" sz="1400" dirty="0"/>
-          </a:p>
-        </p:txBody>
-      </p:sp>
-      <p:sp>
-        <p:nvSpPr>
-          <p:cNvPr id="9" name="Shape 7"/>
+              <a:t>The device agreed with a reference oximeter within ~0.6% — accurate enough to trust its readings.</a:t>
+            </a:r>
+            <a:endParaRPr lang="en-US" sz="1350" dirty="0"/>
+          </a:p>
+        </p:txBody>
+      </p:sp>
+      <p:sp>
+        <p:nvSpPr>
+          <p:cNvPr id="7" name="Shape 5"/>
           <p:cNvSpPr/>
           <p:nvPr/>
         </p:nvSpPr>
         <p:spPr>
           <a:xfrm>
-            <a:off x="640080" y="4864608"/>
+            <a:off x="640080" y="3218688"/>
             <a:ext cx="128016" cy="128016"/>
           </a:xfrm>
           <a:prstGeom prst="ellipse">
@@ -9315,14 +9650,14 @@
       </p:sp>
       <p:sp>
         <p:nvSpPr>
-          <p:cNvPr id="10" name="Text 8"/>
+          <p:cNvPr id="8" name="Text 6"/>
           <p:cNvSpPr txBox="1"/>
           <p:nvPr/>
         </p:nvSpPr>
         <p:spPr>
           <a:xfrm>
-            <a:off x="932688" y="4773168"/>
-            <a:ext cx="10314432" cy="731520"/>
+            <a:off x="932688" y="3127248"/>
+            <a:ext cx="5010912" cy="731520"/>
           </a:xfrm>
           <a:prstGeom prst="rect">
             <a:avLst/>
@@ -9336,12 +9671,12 @@
           <a:p>
             <a:pPr indent="0" marL="0">
               <a:lnSpc>
-                <a:spcPts val="1900"/>
+                <a:spcPts val="1850"/>
               </a:lnSpc>
               <a:buNone/>
             </a:pPr>
             <a:r>
-              <a:rPr lang="en-US" sz="1400" dirty="0">
+              <a:rPr lang="en-US" sz="1350" dirty="0">
                 <a:solidFill>
                   <a:srgbClr val="9FB0CF"/>
                 </a:solidFill>
@@ -9349,21 +9684,21 @@
                 <a:ea typeface="Calibri" pitchFamily="34" charset="-122"/>
                 <a:cs typeface="Calibri" pitchFamily="34" charset="-120"/>
               </a:rPr>
-              <a:t>Switch to Bluetooth Low Energy for a live phone app.</a:t>
-            </a:r>
-            <a:endParaRPr lang="en-US" sz="1400" dirty="0"/>
-          </a:p>
-        </p:txBody>
-      </p:sp>
-      <p:sp>
-        <p:nvSpPr>
-          <p:cNvPr id="11" name="Shape 9"/>
+              <a:t>It reliably flagged the oxygen drops that mark apnea events.</a:t>
+            </a:r>
+            <a:endParaRPr lang="en-US" sz="1350" dirty="0"/>
+          </a:p>
+        </p:txBody>
+      </p:sp>
+      <p:sp>
+        <p:nvSpPr>
+          <p:cNvPr id="9" name="Shape 7"/>
           <p:cNvSpPr/>
           <p:nvPr/>
         </p:nvSpPr>
         <p:spPr>
           <a:xfrm>
-            <a:off x="640080" y="5431536"/>
+            <a:off x="640080" y="3785616"/>
             <a:ext cx="128016" cy="128016"/>
           </a:xfrm>
           <a:prstGeom prst="ellipse">
@@ -9377,14 +9712,14 @@
       </p:sp>
       <p:sp>
         <p:nvSpPr>
-          <p:cNvPr id="12" name="Text 10"/>
+          <p:cNvPr id="10" name="Text 8"/>
           <p:cNvSpPr txBox="1"/>
           <p:nvPr/>
         </p:nvSpPr>
         <p:spPr>
           <a:xfrm>
-            <a:off x="932688" y="5340096"/>
-            <a:ext cx="10314432" cy="731520"/>
+            <a:off x="932688" y="3694176"/>
+            <a:ext cx="5010912" cy="731520"/>
           </a:xfrm>
           <a:prstGeom prst="rect">
             <a:avLst/>
@@ -9398,12 +9733,12 @@
           <a:p>
             <a:pPr indent="0" marL="0">
               <a:lnSpc>
-                <a:spcPts val="1900"/>
+                <a:spcPts val="1850"/>
               </a:lnSpc>
               <a:buNone/>
             </a:pPr>
             <a:r>
-              <a:rPr lang="en-US" sz="1400" dirty="0">
+              <a:rPr lang="en-US" sz="1350" dirty="0">
                 <a:solidFill>
                   <a:srgbClr val="9FB0CF"/>
                 </a:solidFill>
@@ -9411,21 +9746,60 @@
                 <a:ea typeface="Calibri" pitchFamily="34" charset="-122"/>
                 <a:cs typeface="Calibri" pitchFamily="34" charset="-120"/>
               </a:rPr>
-              <a:t>Shrink the device into a comfortable finger-ring form.</a:t>
-            </a:r>
-            <a:endParaRPr lang="en-US" sz="1400" dirty="0"/>
-          </a:p>
-        </p:txBody>
-      </p:sp>
-      <p:sp>
-        <p:nvSpPr>
-          <p:cNvPr id="13" name="Shape 11"/>
+              <a:t>Back-sleeping produced the most events, matching medical literature.</a:t>
+            </a:r>
+            <a:endParaRPr lang="en-US" sz="1350" dirty="0"/>
+          </a:p>
+        </p:txBody>
+      </p:sp>
+      <p:sp>
+        <p:nvSpPr>
+          <p:cNvPr id="11" name="Text 9"/>
+          <p:cNvSpPr txBox="1"/>
+          <p:nvPr/>
+        </p:nvSpPr>
+        <p:spPr>
+          <a:xfrm>
+            <a:off x="6309360" y="1828800"/>
+            <a:ext cx="5120640" cy="365760"/>
+          </a:xfrm>
+          <a:prstGeom prst="rect">
+            <a:avLst/>
+          </a:prstGeom>
+          <a:noFill/>
+          <a:ln/>
+        </p:spPr>
+        <p:txBody>
+          <a:bodyPr wrap="square" lIns="0" tIns="0" rIns="0" bIns="0" rtlCol="0" anchor="ctr"/>
+          <a:lstStyle/>
+          <a:p>
+            <a:pPr indent="0" marL="0">
+              <a:buNone/>
+            </a:pPr>
+            <a:r>
+              <a:rPr lang="en-US" sz="1600" b="1" dirty="0">
+                <a:solidFill>
+                  <a:srgbClr val="E4568A"/>
+                </a:solidFill>
+                <a:latin typeface="Calibri" pitchFamily="34" charset="0"/>
+                <a:ea typeface="Calibri" pitchFamily="34" charset="-122"/>
+                <a:cs typeface="Calibri" pitchFamily="34" charset="-120"/>
+              </a:rPr>
+              <a:t>Sources of error</a:t>
+            </a:r>
+            <a:endParaRPr lang="en-US" sz="1600" dirty="0"/>
+          </a:p>
+        </p:txBody>
+      </p:sp>
+      <p:sp>
+        <p:nvSpPr>
+          <p:cNvPr id="12" name="Shape 10"/>
           <p:cNvSpPr/>
           <p:nvPr/>
         </p:nvSpPr>
         <p:spPr>
           <a:xfrm>
-            <a:off x="640080" y="5998464"/>
+            <a:off x="6309360" y="2350008"/>
             <a:ext cx="128016" cy="128016"/>
           </a:xfrm>
           <a:prstGeom prst="ellipse">
@@ -9439,14 +9813,14 @@
       </p:sp>
       <p:sp>
         <p:nvSpPr>
-          <p:cNvPr id="14" name="Text 12"/>
+          <p:cNvPr id="13" name="Text 11"/>
           <p:cNvSpPr txBox="1"/>
           <p:nvPr/>
         </p:nvSpPr>
         <p:spPr>
           <a:xfrm>
-            <a:off x="932688" y="5907024"/>
-            <a:ext cx="10314432" cy="731520"/>
+            <a:off x="6601968" y="2258568"/>
+            <a:ext cx="4919472" cy="731520"/>
           </a:xfrm>
           <a:prstGeom prst="rect">
             <a:avLst/>
@@ -9460,12 +9834,12 @@
           <a:p>
             <a:pPr indent="0" marL="0">
               <a:lnSpc>
-                <a:spcPts val="1900"/>
+                <a:spcPts val="1850"/>
               </a:lnSpc>
               <a:buNone/>
             </a:pPr>
             <a:r>
-              <a:rPr lang="en-US" sz="1400" dirty="0">
+              <a:rPr lang="en-US" sz="1350" dirty="0">
                 <a:solidFill>
                   <a:srgbClr val="9FB0CF"/>
                 </a:solidFill>
@@ -9473,9 +9847,195 @@
                 <a:ea typeface="Calibri" pitchFamily="34" charset="-122"/>
                 <a:cs typeface="Calibri" pitchFamily="34" charset="-120"/>
               </a:rPr>
-              <a:t>Compare results directly against a real clinical sleep study.</a:t>
-            </a:r>
-            <a:endParaRPr lang="en-US" sz="1400" dirty="0"/>
+              <a:t>A $8 sensor is less precise than clinical equipment.</a:t>
+            </a:r>
+            <a:endParaRPr lang="en-US" sz="1350" dirty="0"/>
+          </a:p>
+        </p:txBody>
+      </p:sp>
+      <p:sp>
+        <p:nvSpPr>
+          <p:cNvPr id="14" name="Shape 12"/>
+          <p:cNvSpPr/>
+          <p:nvPr/>
+        </p:nvSpPr>
+        <p:spPr>
+          <a:xfrm>
+            <a:off x="6309360" y="2916936"/>
+            <a:ext cx="128016" cy="128016"/>
+          </a:xfrm>
+          <a:prstGeom prst="ellipse">
+            <a:avLst/>
+          </a:prstGeom>
+          <a:solidFill>
+            <a:srgbClr val="1F8A9C"/>
+          </a:solidFill>
+          <a:ln/>
+        </p:spPr>
+      </p:sp>
+      <p:sp>
+        <p:nvSpPr>
+          <p:cNvPr id="15" name="Text 13"/>
+          <p:cNvSpPr txBox="1"/>
+          <p:nvPr/>
+        </p:nvSpPr>
+        <p:spPr>
+          <a:xfrm>
+            <a:off x="6601968" y="2825496"/>
+            <a:ext cx="4919472" cy="731520"/>
+          </a:xfrm>
+          <a:prstGeom prst="rect">
+            <a:avLst/>
+          </a:prstGeom>
+          <a:noFill/>
+          <a:ln/>
+        </p:spPr>
+        <p:txBody>
+          <a:bodyPr wrap="square" lIns="0" tIns="0" rIns="0" bIns="0" rtlCol="0" anchor="ctr"/>
+          <a:lstStyle/>
+          <a:p>
+            <a:pPr indent="0" marL="0">
+              <a:lnSpc>
+                <a:spcPts val="1850"/>
+              </a:lnSpc>
+              <a:buNone/>
+            </a:pPr>
+            <a:r>
+              <a:rPr lang="en-US" sz="1350" dirty="0">
+                <a:solidFill>
+                  <a:srgbClr val="9FB0CF"/>
+                </a:solidFill>
+                <a:latin typeface="Calibri" pitchFamily="34" charset="0"/>
+                <a:ea typeface="Calibri" pitchFamily="34" charset="-122"/>
+                <a:cs typeface="Calibri" pitchFamily="34" charset="-120"/>
+              </a:rPr>
+              <a:t>Breath-holds while awake imitate, but aren’t identical to, real apnea.</a:t>
+            </a:r>
+            <a:endParaRPr lang="en-US" sz="1350" dirty="0"/>
+          </a:p>
+        </p:txBody>
+      </p:sp>
+      <p:sp>
+        <p:nvSpPr>
+          <p:cNvPr id="16" name="Shape 14"/>
+          <p:cNvSpPr/>
+          <p:nvPr/>
+        </p:nvSpPr>
+        <p:spPr>
+          <a:xfrm>
+            <a:off x="6309360" y="3785616"/>
+            <a:ext cx="128016" cy="128016"/>
+          </a:xfrm>
+          <a:prstGeom prst="ellipse">
+            <a:avLst/>
+          </a:prstGeom>
+          <a:solidFill>
+            <a:srgbClr val="1F8A9C"/>
+          </a:solidFill>
+          <a:ln/>
+        </p:spPr>
+      </p:sp>
+      <p:sp>
+        <p:nvSpPr>
+          <p:cNvPr id="17" name="Text 15"/>
+          <p:cNvSpPr txBox="1"/>
+          <p:nvPr/>
+        </p:nvSpPr>
+        <p:spPr>
+          <a:xfrm>
+            <a:off x="6601968" y="3694176"/>
+            <a:ext cx="4919472" cy="731520"/>
+          </a:xfrm>
+          <a:prstGeom prst="rect">
+            <a:avLst/>
+          </a:prstGeom>
+          <a:noFill/>
+          <a:ln/>
+        </p:spPr>
+        <p:txBody>
+          <a:bodyPr wrap="square" lIns="0" tIns="0" rIns="0" bIns="0" rtlCol="0" anchor="ctr"/>
+          <a:lstStyle/>
+          <a:p>
+            <a:pPr indent="0" marL="0">
+              <a:lnSpc>
+                <a:spcPts val="1850"/>
+              </a:lnSpc>
+              <a:buNone/>
+            </a:pPr>
+            <a:r>
+              <a:rPr lang="en-US" sz="1350" dirty="0">
+                <a:solidFill>
+                  <a:srgbClr val="9FB0CF"/>
+                </a:solidFill>
+                <a:latin typeface="Calibri" pitchFamily="34" charset="0"/>
+                <a:ea typeface="Calibri" pitchFamily="34" charset="-122"/>
+                <a:cs typeface="Calibri" pitchFamily="34" charset="-120"/>
+              </a:rPr>
+              <a:t>Tested on one person over few nights — a small sample.</a:t>
+            </a:r>
+            <a:endParaRPr lang="en-US" sz="1350" dirty="0"/>
+          </a:p>
+        </p:txBody>
+      </p:sp>
+      <p:sp>
+        <p:nvSpPr>
+          <p:cNvPr id="18" name="Shape 16"/>
+          <p:cNvSpPr/>
+          <p:nvPr/>
+        </p:nvSpPr>
+        <p:spPr>
+          <a:xfrm>
+            <a:off x="6309360" y="4352544"/>
+            <a:ext cx="128016" cy="128016"/>
+          </a:xfrm>
+          <a:prstGeom prst="ellipse">
+            <a:avLst/>
+          </a:prstGeom>
+          <a:solidFill>
+            <a:srgbClr val="1F8A9C"/>
+          </a:solidFill>
+          <a:ln/>
+        </p:spPr>
+      </p:sp>
+      <p:sp>
+        <p:nvSpPr>
+          <p:cNvPr id="19" name="Text 17"/>
+          <p:cNvSpPr txBox="1"/>
+          <p:nvPr/>
+        </p:nvSpPr>
+        <p:spPr>
+          <a:xfrm>
+            <a:off x="6601968" y="4261104"/>
+            <a:ext cx="4919472" cy="731520"/>
+          </a:xfrm>
+          <a:prstGeom prst="rect">
+            <a:avLst/>
+          </a:prstGeom>
+          <a:noFill/>
+          <a:ln/>
+        </p:spPr>
+        <p:txBody>
+          <a:bodyPr wrap="square" lIns="0" tIns="0" rIns="0" bIns="0" rtlCol="0" anchor="ctr"/>
+          <a:lstStyle/>
+          <a:p>
+            <a:pPr indent="0" marL="0">
+              <a:lnSpc>
+                <a:spcPts val="1850"/>
+              </a:lnSpc>
+              <a:buNone/>
+            </a:pPr>
+            <a:r>
+              <a:rPr lang="en-US" sz="1350" dirty="0">
+                <a:solidFill>
+                  <a:srgbClr val="9FB0CF"/>
+                </a:solidFill>
+                <a:latin typeface="Calibri" pitchFamily="34" charset="0"/>
+                <a:ea typeface="Calibri" pitchFamily="34" charset="-122"/>
+                <a:cs typeface="Calibri" pitchFamily="34" charset="-120"/>
+              </a:rPr>
+              <a:t>Finger movement adds noise the software must smooth out.</a:t>
+            </a:r>
+            <a:endParaRPr lang="en-US" sz="1350" dirty="0"/>
           </a:p>
         </p:txBody>
       </p:sp>

--- a/science-fair/night-signal/Night_Signal_Presentation.pptx
+++ b/science-fair/night-signal/Night_Signal_Presentation.pptx
@@ -2020,7 +2020,7 @@
           <a:p>
             <a:r>
               <a:rPr lang="en-US" dirty="0"/>
-              <a:t>[0:40] Here's the design. A small case — a 60 by 35 millimetre Hammond box — rides on a velcro strap and holds the ESP32 processor, battery, charger and a motion sensor. A cable runs to a velcro finger clip with the MAX30102 oxygen sensor. On the right is the exploded view with every part at its real size; you can spin the interactive version with this QR code.</a:t>
+              <a:t>[0:40] Here's the design. A small case — a 70 by 45 millimetre project box — rides on a velcro strap and holds the ESP32 processor, battery, charger and a motion sensor. A cable runs to a velcro finger clip with the MAX30102 oxygen sensor. On the right is the exploded view with every part at its real size; you can spin the interactive version with this QR code.</a:t>
             </a:r>
             <a:endParaRPr lang="en-US" dirty="0"/>
           </a:p>
@@ -5793,11 +5793,10 @@
             <a:tbl>
               <a:tblPr/>
               <a:tblGrid>
-                <a:gridCol w="3383280"/>
-                <a:gridCol w="2194560"/>
-                <a:gridCol w="2194560"/>
-                <a:gridCol w="2011680"/>
-                <a:gridCol w="1097280"/>
+                <a:gridCol w="3840480"/>
+                <a:gridCol w="3200400"/>
+                <a:gridCol w="2560320"/>
+                <a:gridCol w="1280160"/>
               </a:tblGrid>
               <a:tr h="384048">
                 <a:tc>
@@ -5809,7 +5808,7 @@
                         <a:buNone/>
                       </a:pPr>
                       <a:r>
-                        <a:rPr lang="en-US" sz="1150" b="1" dirty="0">
+                        <a:rPr lang="en-US" sz="1100" b="1" dirty="0">
                           <a:solidFill>
                             <a:srgbClr val="FFFFFF"/>
                           </a:solidFill>
@@ -5819,7 +5818,7 @@
                         </a:rPr>
                         <a:t>Part</a:t>
                       </a:r>
-                      <a:endParaRPr lang="en-US" sz="1150" dirty="0">
+                      <a:endParaRPr lang="en-US" sz="1100" dirty="0">
                         <a:latin typeface="Calibri" charset="0"/>
                         <a:ea typeface="Calibri" charset="0"/>
                         <a:cs typeface="Calibri" charset="0"/>
@@ -5877,7 +5876,7 @@
                         <a:buNone/>
                       </a:pPr>
                       <a:r>
-                        <a:rPr lang="en-US" sz="1150" b="1" dirty="0">
+                        <a:rPr lang="en-US" sz="1100" b="1" dirty="0">
                           <a:solidFill>
                             <a:srgbClr val="FFFFFF"/>
                           </a:solidFill>
@@ -5887,7 +5886,7 @@
                         </a:rPr>
                         <a:t>Size</a:t>
                       </a:r>
-                      <a:endParaRPr lang="en-US" sz="1150" dirty="0">
+                      <a:endParaRPr lang="en-US" sz="1100" dirty="0">
                         <a:latin typeface="Calibri" charset="0"/>
                         <a:ea typeface="Calibri" charset="0"/>
                         <a:cs typeface="Calibri" charset="0"/>
@@ -5945,7 +5944,7 @@
                         <a:buNone/>
                       </a:pPr>
                       <a:r>
-                        <a:rPr lang="en-US" sz="1150" b="1" dirty="0">
+                        <a:rPr lang="en-US" sz="1100" b="1" dirty="0">
                           <a:solidFill>
                             <a:srgbClr val="FFFFFF"/>
                           </a:solidFill>
@@ -5955,7 +5954,7 @@
                         </a:rPr>
                         <a:t>Purpose</a:t>
                       </a:r>
-                      <a:endParaRPr lang="en-US" sz="1150" dirty="0">
+                      <a:endParaRPr lang="en-US" sz="1100" dirty="0">
                         <a:latin typeface="Calibri" charset="0"/>
                         <a:ea typeface="Calibri" charset="0"/>
                         <a:cs typeface="Calibri" charset="0"/>
@@ -6013,7 +6012,7 @@
                         <a:buNone/>
                       </a:pPr>
                       <a:r>
-                        <a:rPr lang="en-US" sz="1150" b="1" dirty="0">
+                        <a:rPr lang="en-US" sz="1100" b="1" dirty="0">
                           <a:solidFill>
                             <a:srgbClr val="FFFFFF"/>
                           </a:solidFill>
@@ -6021,77 +6020,9 @@
                           <a:ea typeface="Calibri" pitchFamily="34" charset="-122"/>
                           <a:cs typeface="Calibri" pitchFamily="34" charset="-120"/>
                         </a:rPr>
-                        <a:t>Where</a:t>
+                        <a:t>Buy</a:t>
                       </a:r>
-                      <a:endParaRPr lang="en-US" sz="1150" dirty="0">
-                        <a:latin typeface="Calibri" charset="0"/>
-                        <a:ea typeface="Calibri" charset="0"/>
-                        <a:cs typeface="Calibri" charset="0"/>
-                      </a:endParaRPr>
-                    </a:p>
-                  </a:txBody>
-                  <a:tcPr marL="91440" marR="91440" marT="45720" marB="45720" anchor="ctr">
-                    <a:lnL w="12700" cap="flat" cmpd="sng" algn="ctr">
-                      <a:solidFill>
-                        <a:srgbClr val="DBE1EC"/>
-                      </a:solidFill>
-                      <a:prstDash val="solid"/>
-                      <a:round/>
-                      <a:headEnd type="none" w="med" len="med"/>
-                      <a:tailEnd type="none" w="med" len="med"/>
-                    </a:lnL>
-                    <a:lnR w="12700" cap="flat" cmpd="sng" algn="ctr">
-                      <a:solidFill>
-                        <a:srgbClr val="DBE1EC"/>
-                      </a:solidFill>
-                      <a:prstDash val="solid"/>
-                      <a:round/>
-                      <a:headEnd type="none" w="med" len="med"/>
-                      <a:tailEnd type="none" w="med" len="med"/>
-                    </a:lnR>
-                    <a:lnT w="12700" cap="flat" cmpd="sng" algn="ctr">
-                      <a:solidFill>
-                        <a:srgbClr val="DBE1EC"/>
-                      </a:solidFill>
-                      <a:prstDash val="solid"/>
-                      <a:round/>
-                      <a:headEnd type="none" w="med" len="med"/>
-                      <a:tailEnd type="none" w="med" len="med"/>
-                    </a:lnT>
-                    <a:lnB w="12700" cap="flat" cmpd="sng" algn="ctr">
-                      <a:solidFill>
-                        <a:srgbClr val="DBE1EC"/>
-                      </a:solidFill>
-                      <a:prstDash val="solid"/>
-                      <a:round/>
-                      <a:headEnd type="none" w="med" len="med"/>
-                      <a:tailEnd type="none" w="med" len="med"/>
-                    </a:lnB>
-                    <a:solidFill>
-                      <a:srgbClr val="1F8A9C"/>
-                    </a:solidFill>
-                  </a:tcPr>
-                </a:tc>
-                <a:tc>
-                  <a:txBody>
-                    <a:bodyPr/>
-                    <a:lstStyle/>
-                    <a:p>
-                      <a:pPr indent="0" marL="0">
-                        <a:buNone/>
-                      </a:pPr>
-                      <a:r>
-                        <a:rPr lang="en-US" sz="1150" b="1" dirty="0">
-                          <a:solidFill>
-                            <a:srgbClr val="FFFFFF"/>
-                          </a:solidFill>
-                          <a:latin typeface="Calibri" pitchFamily="34" charset="0"/>
-                          <a:ea typeface="Calibri" pitchFamily="34" charset="-122"/>
-                          <a:cs typeface="Calibri" pitchFamily="34" charset="-120"/>
-                        </a:rPr>
-                        <a:t>≈ CAD</a:t>
-                      </a:r>
-                      <a:endParaRPr lang="en-US" sz="1150" dirty="0">
+                      <a:endParaRPr lang="en-US" sz="1100" dirty="0">
                         <a:latin typeface="Calibri" charset="0"/>
                         <a:ea typeface="Calibri" charset="0"/>
                         <a:cs typeface="Calibri" charset="0"/>
@@ -6151,7 +6082,7 @@
                         <a:buNone/>
                       </a:pPr>
                       <a:r>
-                        <a:rPr lang="en-US" sz="1150" dirty="0">
+                        <a:rPr lang="en-US" sz="1100" dirty="0">
                           <a:solidFill>
                             <a:srgbClr val="141A26"/>
                           </a:solidFill>
@@ -6159,9 +6090,9 @@
                           <a:ea typeface="Calibri" pitchFamily="34" charset="-122"/>
                           <a:cs typeface="Calibri" pitchFamily="34" charset="-120"/>
                         </a:rPr>
-                        <a:t>ESP32 DevKit (ESP-WROOM-32)</a:t>
+                        <a:t>AITRIP ESP32 ESP-WROOM-32 (30-pin, CP2102, USB-C)</a:t>
                       </a:r>
-                      <a:endParaRPr lang="en-US" sz="1150" dirty="0">
+                      <a:endParaRPr lang="en-US" sz="1100" dirty="0">
                         <a:latin typeface="Calibri" charset="0"/>
                         <a:ea typeface="Calibri" charset="0"/>
                         <a:cs typeface="Calibri" charset="0"/>
@@ -6216,7 +6147,7 @@
                         <a:buNone/>
                       </a:pPr>
                       <a:r>
-                        <a:rPr lang="en-US" sz="1150" dirty="0">
+                        <a:rPr lang="en-US" sz="1100" dirty="0">
                           <a:solidFill>
                             <a:srgbClr val="141A26"/>
                           </a:solidFill>
@@ -6224,9 +6155,9 @@
                           <a:ea typeface="Calibri" pitchFamily="34" charset="-122"/>
                           <a:cs typeface="Calibri" pitchFamily="34" charset="-120"/>
                         </a:rPr>
-                        <a:t>≈ 51 × 28 mm</a:t>
+                        <a:t>≈ 52 × 28 mm · 13 mm tall with pins</a:t>
                       </a:r>
-                      <a:endParaRPr lang="en-US" sz="1150" dirty="0">
+                      <a:endParaRPr lang="en-US" sz="1100" dirty="0">
                         <a:latin typeface="Calibri" charset="0"/>
                         <a:ea typeface="Calibri" charset="0"/>
                         <a:cs typeface="Calibri" charset="0"/>
@@ -6281,7 +6212,7 @@
                         <a:buNone/>
                       </a:pPr>
                       <a:r>
-                        <a:rPr lang="en-US" sz="1150" dirty="0">
+                        <a:rPr lang="en-US" sz="1100" dirty="0">
                           <a:solidFill>
                             <a:srgbClr val="141A26"/>
                           </a:solidFill>
@@ -6289,9 +6220,9 @@
                           <a:ea typeface="Calibri" pitchFamily="34" charset="-122"/>
                           <a:cs typeface="Calibri" pitchFamily="34" charset="-120"/>
                         </a:rPr>
-                        <a:t>Processor + Bluetooth</a:t>
+                        <a:t>Processor + Bluetooth Classic</a:t>
                       </a:r>
-                      <a:endParaRPr lang="en-US" sz="1150" dirty="0">
+                      <a:endParaRPr lang="en-US" sz="1100" dirty="0">
                         <a:latin typeface="Calibri" charset="0"/>
                         <a:ea typeface="Calibri" charset="0"/>
                         <a:cs typeface="Calibri" charset="0"/>
@@ -6346,14 +6277,14 @@
                         <a:buNone/>
                       </a:pPr>
                       <a:r>
-                        <a:rPr lang="en-US" sz="1150" u="sng" dirty="0">
+                        <a:rPr lang="en-US" sz="1100" u="sng" dirty="0">
                           <a:solidFill>
                             <a:srgbClr val="1F8A9C"/>
                           </a:solidFill>
                           <a:latin typeface="Calibri" pitchFamily="34" charset="0"/>
                           <a:ea typeface="Calibri" pitchFamily="34" charset="-122"/>
                           <a:cs typeface="Calibri" pitchFamily="34" charset="-120"/>
-                          <a:hlinkClick r:id="rId1" invalidUrl="" action="" tgtFrame="" tooltip="https://www.canadarobotix.com/products/2594" history="1" highlightClick="0" endSnd="0">
+                          <a:hlinkClick r:id="rId1" invalidUrl="" action="" tgtFrame="" tooltip="https://www.amazon.ca/AITRIP-ESP-WROOM-32-Development-Microcontroller-Compatible/dp/B0DF2YJSHN" history="1" highlightClick="0" endSnd="0">
                             <a:extLst>
                               <a:ext uri="{A12FA001-AC4F-418D-AE19-62706E023703}">
                                 <ahyp:hlinkClr xmlns:ahyp="http://schemas.microsoft.com/office/drawing/2018/hyperlinkcolor" val="tx"/>
@@ -6361,74 +6292,9 @@
                             </a:extLst>
                           </a:hlinkClick>
                         </a:rPr>
-                        <a:t>Canada Robotix</a:t>
+                        <a:t>Amazon.ca</a:t>
                       </a:r>
-                      <a:endParaRPr lang="en-US" sz="1150" dirty="0">
-                        <a:latin typeface="Calibri" charset="0"/>
-                        <a:ea typeface="Calibri" charset="0"/>
-                        <a:cs typeface="Calibri" charset="0"/>
-                      </a:endParaRPr>
-                    </a:p>
-                  </a:txBody>
-                  <a:tcPr marL="91440" marR="91440" marT="45720" marB="45720" anchor="ctr">
-                    <a:lnL w="12700" cap="flat" cmpd="sng" algn="ctr">
-                      <a:solidFill>
-                        <a:srgbClr val="DBE1EC"/>
-                      </a:solidFill>
-                      <a:prstDash val="solid"/>
-                      <a:round/>
-                      <a:headEnd type="none" w="med" len="med"/>
-                      <a:tailEnd type="none" w="med" len="med"/>
-                    </a:lnL>
-                    <a:lnR w="12700" cap="flat" cmpd="sng" algn="ctr">
-                      <a:solidFill>
-                        <a:srgbClr val="DBE1EC"/>
-                      </a:solidFill>
-                      <a:prstDash val="solid"/>
-                      <a:round/>
-                      <a:headEnd type="none" w="med" len="med"/>
-                      <a:tailEnd type="none" w="med" len="med"/>
-                    </a:lnR>
-                    <a:lnT w="12700" cap="flat" cmpd="sng" algn="ctr">
-                      <a:solidFill>
-                        <a:srgbClr val="DBE1EC"/>
-                      </a:solidFill>
-                      <a:prstDash val="solid"/>
-                      <a:round/>
-                      <a:headEnd type="none" w="med" len="med"/>
-                      <a:tailEnd type="none" w="med" len="med"/>
-                    </a:lnT>
-                    <a:lnB w="12700" cap="flat" cmpd="sng" algn="ctr">
-                      <a:solidFill>
-                        <a:srgbClr val="DBE1EC"/>
-                      </a:solidFill>
-                      <a:prstDash val="solid"/>
-                      <a:round/>
-                      <a:headEnd type="none" w="med" len="med"/>
-                      <a:tailEnd type="none" w="med" len="med"/>
-                    </a:lnB>
-                  </a:tcPr>
-                </a:tc>
-                <a:tc>
-                  <a:txBody>
-                    <a:bodyPr/>
-                    <a:lstStyle/>
-                    <a:p>
-                      <a:pPr indent="0" marL="0">
-                        <a:buNone/>
-                      </a:pPr>
-                      <a:r>
-                        <a:rPr lang="en-US" sz="1150" dirty="0">
-                          <a:solidFill>
-                            <a:srgbClr val="141A26"/>
-                          </a:solidFill>
-                          <a:latin typeface="Calibri" pitchFamily="34" charset="0"/>
-                          <a:ea typeface="Calibri" pitchFamily="34" charset="-122"/>
-                          <a:cs typeface="Calibri" pitchFamily="34" charset="-120"/>
-                        </a:rPr>
-                        <a:t>$10</a:t>
-                      </a:r>
-                      <a:endParaRPr lang="en-US" sz="1150" dirty="0">
+                      <a:endParaRPr lang="en-US" sz="1100" dirty="0">
                         <a:latin typeface="Calibri" charset="0"/>
                         <a:ea typeface="Calibri" charset="0"/>
                         <a:cs typeface="Calibri" charset="0"/>
@@ -6485,7 +6351,7 @@
                         <a:buNone/>
                       </a:pPr>
                       <a:r>
-                        <a:rPr lang="en-US" sz="1150" dirty="0">
+                        <a:rPr lang="en-US" sz="1100" dirty="0">
                           <a:solidFill>
                             <a:srgbClr val="141A26"/>
                           </a:solidFill>
@@ -6493,9 +6359,9 @@
                           <a:ea typeface="Calibri" pitchFamily="34" charset="-122"/>
                           <a:cs typeface="Calibri" pitchFamily="34" charset="-120"/>
                         </a:rPr>
-                        <a:t>MAX30102 oxygen sensor</a:t>
+                        <a:t>HiLetgo MAX30102 sensor</a:t>
                       </a:r>
-                      <a:endParaRPr lang="en-US" sz="1150" dirty="0">
+                      <a:endParaRPr lang="en-US" sz="1100" dirty="0">
                         <a:latin typeface="Calibri" charset="0"/>
                         <a:ea typeface="Calibri" charset="0"/>
                         <a:cs typeface="Calibri" charset="0"/>
@@ -6550,7 +6416,7 @@
                         <a:buNone/>
                       </a:pPr>
                       <a:r>
-                        <a:rPr lang="en-US" sz="1150" dirty="0">
+                        <a:rPr lang="en-US" sz="1100" dirty="0">
                           <a:solidFill>
                             <a:srgbClr val="141A26"/>
                           </a:solidFill>
@@ -6558,9 +6424,9 @@
                           <a:ea typeface="Calibri" pitchFamily="34" charset="-122"/>
                           <a:cs typeface="Calibri" pitchFamily="34" charset="-120"/>
                         </a:rPr>
-                        <a:t>≈ 18 × 14 mm</a:t>
+                        <a:t>14 × 14 mm</a:t>
                       </a:r>
-                      <a:endParaRPr lang="en-US" sz="1150" dirty="0">
+                      <a:endParaRPr lang="en-US" sz="1100" dirty="0">
                         <a:latin typeface="Calibri" charset="0"/>
                         <a:ea typeface="Calibri" charset="0"/>
                         <a:cs typeface="Calibri" charset="0"/>
@@ -6615,7 +6481,7 @@
                         <a:buNone/>
                       </a:pPr>
                       <a:r>
-                        <a:rPr lang="en-US" sz="1150" dirty="0">
+                        <a:rPr lang="en-US" sz="1100" dirty="0">
                           <a:solidFill>
                             <a:srgbClr val="141A26"/>
                           </a:solidFill>
@@ -6623,9 +6489,9 @@
                           <a:ea typeface="Calibri" pitchFamily="34" charset="-122"/>
                           <a:cs typeface="Calibri" pitchFamily="34" charset="-120"/>
                         </a:rPr>
-                        <a:t>SpO₂ + pulse</a:t>
+                        <a:t>SpO₂ + heart rate (finger clip)</a:t>
                       </a:r>
-                      <a:endParaRPr lang="en-US" sz="1150" dirty="0">
+                      <a:endParaRPr lang="en-US" sz="1100" dirty="0">
                         <a:latin typeface="Calibri" charset="0"/>
                         <a:ea typeface="Calibri" charset="0"/>
                         <a:cs typeface="Calibri" charset="0"/>
@@ -6680,14 +6546,14 @@
                         <a:buNone/>
                       </a:pPr>
                       <a:r>
-                        <a:rPr lang="en-US" sz="1150" u="sng" dirty="0">
+                        <a:rPr lang="en-US" sz="1100" u="sng" dirty="0">
                           <a:solidFill>
                             <a:srgbClr val="1F8A9C"/>
                           </a:solidFill>
                           <a:latin typeface="Calibri" pitchFamily="34" charset="0"/>
                           <a:ea typeface="Calibri" pitchFamily="34" charset="-122"/>
                           <a:cs typeface="Calibri" pitchFamily="34" charset="-120"/>
-                          <a:hlinkClick r:id="rId2" invalidUrl="" action="" tgtFrame="" tooltip="https://x2robotics.ca/pulse-oximeter-and-heart-rate-sensor-max30102" history="1" highlightClick="0" endSnd="0">
+                          <a:hlinkClick r:id="rId2" invalidUrl="" action="" tgtFrame="" tooltip="https://www.amazon.ca/HiLetgo-MAX30102-Breakout-Oximetry-Solution/dp/B07QC67KMQ" history="1" highlightClick="0" endSnd="0">
                             <a:extLst>
                               <a:ext uri="{A12FA001-AC4F-418D-AE19-62706E023703}">
                                 <ahyp:hlinkClr xmlns:ahyp="http://schemas.microsoft.com/office/drawing/2018/hyperlinkcolor" val="tx"/>
@@ -6695,74 +6561,9 @@
                             </a:extLst>
                           </a:hlinkClick>
                         </a:rPr>
-                        <a:t>X2 Robotics</a:t>
+                        <a:t>Amazon.ca</a:t>
                       </a:r>
-                      <a:endParaRPr lang="en-US" sz="1150" dirty="0">
-                        <a:latin typeface="Calibri" charset="0"/>
-                        <a:ea typeface="Calibri" charset="0"/>
-                        <a:cs typeface="Calibri" charset="0"/>
-                      </a:endParaRPr>
-                    </a:p>
-                  </a:txBody>
-                  <a:tcPr marL="91440" marR="91440" marT="45720" marB="45720" anchor="ctr">
-                    <a:lnL w="12700" cap="flat" cmpd="sng" algn="ctr">
-                      <a:solidFill>
-                        <a:srgbClr val="DBE1EC"/>
-                      </a:solidFill>
-                      <a:prstDash val="solid"/>
-                      <a:round/>
-                      <a:headEnd type="none" w="med" len="med"/>
-                      <a:tailEnd type="none" w="med" len="med"/>
-                    </a:lnL>
-                    <a:lnR w="12700" cap="flat" cmpd="sng" algn="ctr">
-                      <a:solidFill>
-                        <a:srgbClr val="DBE1EC"/>
-                      </a:solidFill>
-                      <a:prstDash val="solid"/>
-                      <a:round/>
-                      <a:headEnd type="none" w="med" len="med"/>
-                      <a:tailEnd type="none" w="med" len="med"/>
-                    </a:lnR>
-                    <a:lnT w="12700" cap="flat" cmpd="sng" algn="ctr">
-                      <a:solidFill>
-                        <a:srgbClr val="DBE1EC"/>
-                      </a:solidFill>
-                      <a:prstDash val="solid"/>
-                      <a:round/>
-                      <a:headEnd type="none" w="med" len="med"/>
-                      <a:tailEnd type="none" w="med" len="med"/>
-                    </a:lnT>
-                    <a:lnB w="12700" cap="flat" cmpd="sng" algn="ctr">
-                      <a:solidFill>
-                        <a:srgbClr val="DBE1EC"/>
-                      </a:solidFill>
-                      <a:prstDash val="solid"/>
-                      <a:round/>
-                      <a:headEnd type="none" w="med" len="med"/>
-                      <a:tailEnd type="none" w="med" len="med"/>
-                    </a:lnB>
-                  </a:tcPr>
-                </a:tc>
-                <a:tc>
-                  <a:txBody>
-                    <a:bodyPr/>
-                    <a:lstStyle/>
-                    <a:p>
-                      <a:pPr indent="0" marL="0">
-                        <a:buNone/>
-                      </a:pPr>
-                      <a:r>
-                        <a:rPr lang="en-US" sz="1150" dirty="0">
-                          <a:solidFill>
-                            <a:srgbClr val="141A26"/>
-                          </a:solidFill>
-                          <a:latin typeface="Calibri" pitchFamily="34" charset="0"/>
-                          <a:ea typeface="Calibri" pitchFamily="34" charset="-122"/>
-                          <a:cs typeface="Calibri" pitchFamily="34" charset="-120"/>
-                        </a:rPr>
-                        <a:t>≈ $10</a:t>
-                      </a:r>
-                      <a:endParaRPr lang="en-US" sz="1150" dirty="0">
+                      <a:endParaRPr lang="en-US" sz="1100" dirty="0">
                         <a:latin typeface="Calibri" charset="0"/>
                         <a:ea typeface="Calibri" charset="0"/>
                         <a:cs typeface="Calibri" charset="0"/>
@@ -6819,7 +6620,7 @@
                         <a:buNone/>
                       </a:pPr>
                       <a:r>
-                        <a:rPr lang="en-US" sz="1150" dirty="0">
+                        <a:rPr lang="en-US" sz="1100" dirty="0">
                           <a:solidFill>
                             <a:srgbClr val="141A26"/>
                           </a:solidFill>
@@ -6827,9 +6628,9 @@
                           <a:ea typeface="Calibri" pitchFamily="34" charset="-122"/>
                           <a:cs typeface="Calibri" pitchFamily="34" charset="-120"/>
                         </a:rPr>
-                        <a:t>MPU-6050 (Adafruit 3886)</a:t>
+                        <a:t>HiLetgo GY-521 MPU-6050 (3-pack)</a:t>
                       </a:r>
-                      <a:endParaRPr lang="en-US" sz="1150" dirty="0">
+                      <a:endParaRPr lang="en-US" sz="1100" dirty="0">
                         <a:latin typeface="Calibri" charset="0"/>
                         <a:ea typeface="Calibri" charset="0"/>
                         <a:cs typeface="Calibri" charset="0"/>
@@ -6884,7 +6685,7 @@
                         <a:buNone/>
                       </a:pPr>
                       <a:r>
-                        <a:rPr lang="en-US" sz="1150" dirty="0">
+                        <a:rPr lang="en-US" sz="1100" dirty="0">
                           <a:solidFill>
                             <a:srgbClr val="141A26"/>
                           </a:solidFill>
@@ -6892,9 +6693,9 @@
                           <a:ea typeface="Calibri" pitchFamily="34" charset="-122"/>
                           <a:cs typeface="Calibri" pitchFamily="34" charset="-120"/>
                         </a:rPr>
-                        <a:t>26.0 × 17.8 × 4.6 mm</a:t>
+                        <a:t>≈ 21 × 16 mm</a:t>
                       </a:r>
-                      <a:endParaRPr lang="en-US" sz="1150" dirty="0">
+                      <a:endParaRPr lang="en-US" sz="1100" dirty="0">
                         <a:latin typeface="Calibri" charset="0"/>
                         <a:ea typeface="Calibri" charset="0"/>
                         <a:cs typeface="Calibri" charset="0"/>
@@ -6949,7 +6750,7 @@
                         <a:buNone/>
                       </a:pPr>
                       <a:r>
-                        <a:rPr lang="en-US" sz="1150" dirty="0">
+                        <a:rPr lang="en-US" sz="1100" dirty="0">
                           <a:solidFill>
                             <a:srgbClr val="141A26"/>
                           </a:solidFill>
@@ -6957,9 +6758,9 @@
                           <a:ea typeface="Calibri" pitchFamily="34" charset="-122"/>
                           <a:cs typeface="Calibri" pitchFamily="34" charset="-120"/>
                         </a:rPr>
-                        <a:t>Position + coughs</a:t>
+                        <a:t>Sleep position + cough jolts</a:t>
                       </a:r>
-                      <a:endParaRPr lang="en-US" sz="1150" dirty="0">
+                      <a:endParaRPr lang="en-US" sz="1100" dirty="0">
                         <a:latin typeface="Calibri" charset="0"/>
                         <a:ea typeface="Calibri" charset="0"/>
                         <a:cs typeface="Calibri" charset="0"/>
@@ -7014,14 +6815,14 @@
                         <a:buNone/>
                       </a:pPr>
                       <a:r>
-                        <a:rPr lang="en-US" sz="1150" u="sng" dirty="0">
+                        <a:rPr lang="en-US" sz="1100" u="sng" dirty="0">
                           <a:solidFill>
                             <a:srgbClr val="1F8A9C"/>
                           </a:solidFill>
                           <a:latin typeface="Calibri" pitchFamily="34" charset="0"/>
                           <a:ea typeface="Calibri" pitchFamily="34" charset="-122"/>
                           <a:cs typeface="Calibri" pitchFamily="34" charset="-120"/>
-                          <a:hlinkClick r:id="rId3" invalidUrl="" action="" tgtFrame="" tooltip="https://www.adafruit.com/product/3886" history="1" highlightClick="0" endSnd="0">
+                          <a:hlinkClick r:id="rId3" invalidUrl="" action="" tgtFrame="" tooltip="https://www.amazon.ca/Hiletgo-MPU6050-Acc%C3%A9l%C3%A9rom%C3%A8tre-gyroscope-convertisseur/dp/B00LP25V1A" history="1" highlightClick="0" endSnd="0">
                             <a:extLst>
                               <a:ext uri="{A12FA001-AC4F-418D-AE19-62706E023703}">
                                 <ahyp:hlinkClr xmlns:ahyp="http://schemas.microsoft.com/office/drawing/2018/hyperlinkcolor" val="tx"/>
@@ -7029,74 +6830,9 @@
                             </a:extLst>
                           </a:hlinkClick>
                         </a:rPr>
-                        <a:t>Adafruit</a:t>
+                        <a:t>Amazon.ca</a:t>
                       </a:r>
-                      <a:endParaRPr lang="en-US" sz="1150" dirty="0">
-                        <a:latin typeface="Calibri" charset="0"/>
-                        <a:ea typeface="Calibri" charset="0"/>
-                        <a:cs typeface="Calibri" charset="0"/>
-                      </a:endParaRPr>
-                    </a:p>
-                  </a:txBody>
-                  <a:tcPr marL="91440" marR="91440" marT="45720" marB="45720" anchor="ctr">
-                    <a:lnL w="12700" cap="flat" cmpd="sng" algn="ctr">
-                      <a:solidFill>
-                        <a:srgbClr val="DBE1EC"/>
-                      </a:solidFill>
-                      <a:prstDash val="solid"/>
-                      <a:round/>
-                      <a:headEnd type="none" w="med" len="med"/>
-                      <a:tailEnd type="none" w="med" len="med"/>
-                    </a:lnL>
-                    <a:lnR w="12700" cap="flat" cmpd="sng" algn="ctr">
-                      <a:solidFill>
-                        <a:srgbClr val="DBE1EC"/>
-                      </a:solidFill>
-                      <a:prstDash val="solid"/>
-                      <a:round/>
-                      <a:headEnd type="none" w="med" len="med"/>
-                      <a:tailEnd type="none" w="med" len="med"/>
-                    </a:lnR>
-                    <a:lnT w="12700" cap="flat" cmpd="sng" algn="ctr">
-                      <a:solidFill>
-                        <a:srgbClr val="DBE1EC"/>
-                      </a:solidFill>
-                      <a:prstDash val="solid"/>
-                      <a:round/>
-                      <a:headEnd type="none" w="med" len="med"/>
-                      <a:tailEnd type="none" w="med" len="med"/>
-                    </a:lnT>
-                    <a:lnB w="12700" cap="flat" cmpd="sng" algn="ctr">
-                      <a:solidFill>
-                        <a:srgbClr val="DBE1EC"/>
-                      </a:solidFill>
-                      <a:prstDash val="solid"/>
-                      <a:round/>
-                      <a:headEnd type="none" w="med" len="med"/>
-                      <a:tailEnd type="none" w="med" len="med"/>
-                    </a:lnB>
-                  </a:tcPr>
-                </a:tc>
-                <a:tc>
-                  <a:txBody>
-                    <a:bodyPr/>
-                    <a:lstStyle/>
-                    <a:p>
-                      <a:pPr indent="0" marL="0">
-                        <a:buNone/>
-                      </a:pPr>
-                      <a:r>
-                        <a:rPr lang="en-US" sz="1150" dirty="0">
-                          <a:solidFill>
-                            <a:srgbClr val="141A26"/>
-                          </a:solidFill>
-                          <a:latin typeface="Calibri" pitchFamily="34" charset="0"/>
-                          <a:ea typeface="Calibri" pitchFamily="34" charset="-122"/>
-                          <a:cs typeface="Calibri" pitchFamily="34" charset="-120"/>
-                        </a:rPr>
-                        <a:t>≈ $10</a:t>
-                      </a:r>
-                      <a:endParaRPr lang="en-US" sz="1150" dirty="0">
+                      <a:endParaRPr lang="en-US" sz="1100" dirty="0">
                         <a:latin typeface="Calibri" charset="0"/>
                         <a:ea typeface="Calibri" charset="0"/>
                         <a:cs typeface="Calibri" charset="0"/>
@@ -7153,7 +6889,7 @@
                         <a:buNone/>
                       </a:pPr>
                       <a:r>
-                        <a:rPr lang="en-US" sz="1150" dirty="0">
+                        <a:rPr lang="en-US" sz="1100" dirty="0">
                           <a:solidFill>
                             <a:srgbClr val="141A26"/>
                           </a:solidFill>
@@ -7161,9 +6897,9 @@
                           <a:ea typeface="Calibri" pitchFamily="34" charset="-122"/>
                           <a:cs typeface="Calibri" pitchFamily="34" charset="-120"/>
                         </a:rPr>
-                        <a:t>LiPo 3.7 V 500 mAh (Adafruit 1578)</a:t>
+                        <a:t>LiPo 3.7 V 500 mAh 503035, JST PH2.0</a:t>
                       </a:r>
-                      <a:endParaRPr lang="en-US" sz="1150" dirty="0">
+                      <a:endParaRPr lang="en-US" sz="1100" dirty="0">
                         <a:latin typeface="Calibri" charset="0"/>
                         <a:ea typeface="Calibri" charset="0"/>
                         <a:cs typeface="Calibri" charset="0"/>
@@ -7218,7 +6954,7 @@
                         <a:buNone/>
                       </a:pPr>
                       <a:r>
-                        <a:rPr lang="en-US" sz="1150" dirty="0">
+                        <a:rPr lang="en-US" sz="1100" dirty="0">
                           <a:solidFill>
                             <a:srgbClr val="141A26"/>
                           </a:solidFill>
@@ -7226,9 +6962,9 @@
                           <a:ea typeface="Calibri" pitchFamily="34" charset="-122"/>
                           <a:cs typeface="Calibri" pitchFamily="34" charset="-120"/>
                         </a:rPr>
-                        <a:t>36 × 29 × 4.75 mm</a:t>
+                        <a:t>35 × 30 × 6 mm</a:t>
                       </a:r>
-                      <a:endParaRPr lang="en-US" sz="1150" dirty="0">
+                      <a:endParaRPr lang="en-US" sz="1100" dirty="0">
                         <a:latin typeface="Calibri" charset="0"/>
                         <a:ea typeface="Calibri" charset="0"/>
                         <a:cs typeface="Calibri" charset="0"/>
@@ -7283,7 +7019,7 @@
                         <a:buNone/>
                       </a:pPr>
                       <a:r>
-                        <a:rPr lang="en-US" sz="1150" dirty="0">
+                        <a:rPr lang="en-US" sz="1100" dirty="0">
                           <a:solidFill>
                             <a:srgbClr val="141A26"/>
                           </a:solidFill>
@@ -7291,9 +7027,9 @@
                           <a:ea typeface="Calibri" pitchFamily="34" charset="-122"/>
                           <a:cs typeface="Calibri" pitchFamily="34" charset="-120"/>
                         </a:rPr>
-                        <a:t>Battery (≈ 4–5 h)</a:t>
+                        <a:t>Battery (≈ 4–5 h — test it)</a:t>
                       </a:r>
-                      <a:endParaRPr lang="en-US" sz="1150" dirty="0">
+                      <a:endParaRPr lang="en-US" sz="1100" dirty="0">
                         <a:latin typeface="Calibri" charset="0"/>
                         <a:ea typeface="Calibri" charset="0"/>
                         <a:cs typeface="Calibri" charset="0"/>
@@ -7348,14 +7084,14 @@
                         <a:buNone/>
                       </a:pPr>
                       <a:r>
-                        <a:rPr lang="en-US" sz="1150" u="sng" dirty="0">
+                        <a:rPr lang="en-US" sz="1100" u="sng" dirty="0">
                           <a:solidFill>
                             <a:srgbClr val="1F8A9C"/>
                           </a:solidFill>
                           <a:latin typeface="Calibri" pitchFamily="34" charset="0"/>
                           <a:ea typeface="Calibri" pitchFamily="34" charset="-122"/>
                           <a:cs typeface="Calibri" pitchFamily="34" charset="-120"/>
-                          <a:hlinkClick r:id="rId4" invalidUrl="" action="" tgtFrame="" tooltip="https://www.adafruit.com/product/1578" history="1" highlightClick="0" endSnd="0">
+                          <a:hlinkClick r:id="rId4" invalidUrl="" action="" tgtFrame="" tooltip="https://www.amazon.ca/Battery-Rechargeable-Lithium-Polymer-Connector/dp/B07S84SBV3" history="1" highlightClick="0" endSnd="0">
                             <a:extLst>
                               <a:ext uri="{A12FA001-AC4F-418D-AE19-62706E023703}">
                                 <ahyp:hlinkClr xmlns:ahyp="http://schemas.microsoft.com/office/drawing/2018/hyperlinkcolor" val="tx"/>
@@ -7363,74 +7099,9 @@
                             </a:extLst>
                           </a:hlinkClick>
                         </a:rPr>
-                        <a:t>Adafruit</a:t>
+                        <a:t>Amazon.ca</a:t>
                       </a:r>
-                      <a:endParaRPr lang="en-US" sz="1150" dirty="0">
-                        <a:latin typeface="Calibri" charset="0"/>
-                        <a:ea typeface="Calibri" charset="0"/>
-                        <a:cs typeface="Calibri" charset="0"/>
-                      </a:endParaRPr>
-                    </a:p>
-                  </a:txBody>
-                  <a:tcPr marL="91440" marR="91440" marT="45720" marB="45720" anchor="ctr">
-                    <a:lnL w="12700" cap="flat" cmpd="sng" algn="ctr">
-                      <a:solidFill>
-                        <a:srgbClr val="DBE1EC"/>
-                      </a:solidFill>
-                      <a:prstDash val="solid"/>
-                      <a:round/>
-                      <a:headEnd type="none" w="med" len="med"/>
-                      <a:tailEnd type="none" w="med" len="med"/>
-                    </a:lnL>
-                    <a:lnR w="12700" cap="flat" cmpd="sng" algn="ctr">
-                      <a:solidFill>
-                        <a:srgbClr val="DBE1EC"/>
-                      </a:solidFill>
-                      <a:prstDash val="solid"/>
-                      <a:round/>
-                      <a:headEnd type="none" w="med" len="med"/>
-                      <a:tailEnd type="none" w="med" len="med"/>
-                    </a:lnR>
-                    <a:lnT w="12700" cap="flat" cmpd="sng" algn="ctr">
-                      <a:solidFill>
-                        <a:srgbClr val="DBE1EC"/>
-                      </a:solidFill>
-                      <a:prstDash val="solid"/>
-                      <a:round/>
-                      <a:headEnd type="none" w="med" len="med"/>
-                      <a:tailEnd type="none" w="med" len="med"/>
-                    </a:lnT>
-                    <a:lnB w="12700" cap="flat" cmpd="sng" algn="ctr">
-                      <a:solidFill>
-                        <a:srgbClr val="DBE1EC"/>
-                      </a:solidFill>
-                      <a:prstDash val="solid"/>
-                      <a:round/>
-                      <a:headEnd type="none" w="med" len="med"/>
-                      <a:tailEnd type="none" w="med" len="med"/>
-                    </a:lnB>
-                  </a:tcPr>
-                </a:tc>
-                <a:tc>
-                  <a:txBody>
-                    <a:bodyPr/>
-                    <a:lstStyle/>
-                    <a:p>
-                      <a:pPr indent="0" marL="0">
-                        <a:buNone/>
-                      </a:pPr>
-                      <a:r>
-                        <a:rPr lang="en-US" sz="1150" dirty="0">
-                          <a:solidFill>
-                            <a:srgbClr val="141A26"/>
-                          </a:solidFill>
-                          <a:latin typeface="Calibri" pitchFamily="34" charset="0"/>
-                          <a:ea typeface="Calibri" pitchFamily="34" charset="-122"/>
-                          <a:cs typeface="Calibri" pitchFamily="34" charset="-120"/>
-                        </a:rPr>
-                        <a:t>≈ $12</a:t>
-                      </a:r>
-                      <a:endParaRPr lang="en-US" sz="1150" dirty="0">
+                      <a:endParaRPr lang="en-US" sz="1100" dirty="0">
                         <a:latin typeface="Calibri" charset="0"/>
                         <a:ea typeface="Calibri" charset="0"/>
                         <a:cs typeface="Calibri" charset="0"/>
@@ -7487,7 +7158,7 @@
                         <a:buNone/>
                       </a:pPr>
                       <a:r>
-                        <a:rPr lang="en-US" sz="1150" dirty="0">
+                        <a:rPr lang="en-US" sz="1100" dirty="0">
                           <a:solidFill>
                             <a:srgbClr val="141A26"/>
                           </a:solidFill>
@@ -7495,9 +7166,9 @@
                           <a:ea typeface="Calibri" pitchFamily="34" charset="-122"/>
                           <a:cs typeface="Calibri" pitchFamily="34" charset="-120"/>
                         </a:rPr>
-                        <a:t>TP4056 USB-C charger</a:t>
+                        <a:t>Treedix TP4056 USB-C charger (6-pack)</a:t>
                       </a:r>
-                      <a:endParaRPr lang="en-US" sz="1150" dirty="0">
+                      <a:endParaRPr lang="en-US" sz="1100" dirty="0">
                         <a:latin typeface="Calibri" charset="0"/>
                         <a:ea typeface="Calibri" charset="0"/>
                         <a:cs typeface="Calibri" charset="0"/>
@@ -7552,7 +7223,7 @@
                         <a:buNone/>
                       </a:pPr>
                       <a:r>
-                        <a:rPr lang="en-US" sz="1150" dirty="0">
+                        <a:rPr lang="en-US" sz="1100" dirty="0">
                           <a:solidFill>
                             <a:srgbClr val="141A26"/>
                           </a:solidFill>
@@ -7562,7 +7233,7 @@
                         </a:rPr>
                         <a:t>≈ 28 × 17 mm</a:t>
                       </a:r>
-                      <a:endParaRPr lang="en-US" sz="1150" dirty="0">
+                      <a:endParaRPr lang="en-US" sz="1100" dirty="0">
                         <a:latin typeface="Calibri" charset="0"/>
                         <a:ea typeface="Calibri" charset="0"/>
                         <a:cs typeface="Calibri" charset="0"/>
@@ -7617,7 +7288,7 @@
                         <a:buNone/>
                       </a:pPr>
                       <a:r>
-                        <a:rPr lang="en-US" sz="1150" dirty="0">
+                        <a:rPr lang="en-US" sz="1100" dirty="0">
                           <a:solidFill>
                             <a:srgbClr val="141A26"/>
                           </a:solidFill>
@@ -7625,9 +7296,9 @@
                           <a:ea typeface="Calibri" pitchFamily="34" charset="-122"/>
                           <a:cs typeface="Calibri" pitchFamily="34" charset="-120"/>
                         </a:rPr>
-                        <a:t>Charges battery</a:t>
+                        <a:t>Charges the battery safely</a:t>
                       </a:r>
-                      <a:endParaRPr lang="en-US" sz="1150" dirty="0">
+                      <a:endParaRPr lang="en-US" sz="1100" dirty="0">
                         <a:latin typeface="Calibri" charset="0"/>
                         <a:ea typeface="Calibri" charset="0"/>
                         <a:cs typeface="Calibri" charset="0"/>
@@ -7682,14 +7353,14 @@
                         <a:buNone/>
                       </a:pPr>
                       <a:r>
-                        <a:rPr lang="en-US" sz="1150" u="sng" dirty="0">
+                        <a:rPr lang="en-US" sz="1100" u="sng" dirty="0">
                           <a:solidFill>
                             <a:srgbClr val="1F8A9C"/>
                           </a:solidFill>
                           <a:latin typeface="Calibri" pitchFamily="34" charset="0"/>
                           <a:ea typeface="Calibri" pitchFamily="34" charset="-122"/>
                           <a:cs typeface="Calibri" pitchFamily="34" charset="-120"/>
-                          <a:hlinkClick r:id="rId5" invalidUrl="" action="" tgtFrame="" tooltip="https://www.amazon.ca/s?k=TP4056+type+c+lithium+charger+module+protection" history="1" highlightClick="0" endSnd="0">
+                          <a:hlinkClick r:id="rId5" invalidUrl="" action="" tgtFrame="" tooltip="https://www.amazon.ca/Treedix-Lithium-Charging-Protection-Functions/dp/B09LTVTY5J" history="1" highlightClick="0" endSnd="0">
                             <a:extLst>
                               <a:ext uri="{A12FA001-AC4F-418D-AE19-62706E023703}">
                                 <ahyp:hlinkClr xmlns:ahyp="http://schemas.microsoft.com/office/drawing/2018/hyperlinkcolor" val="tx"/>
@@ -7699,72 +7370,7 @@
                         </a:rPr>
                         <a:t>Amazon.ca</a:t>
                       </a:r>
-                      <a:endParaRPr lang="en-US" sz="1150" dirty="0">
-                        <a:latin typeface="Calibri" charset="0"/>
-                        <a:ea typeface="Calibri" charset="0"/>
-                        <a:cs typeface="Calibri" charset="0"/>
-                      </a:endParaRPr>
-                    </a:p>
-                  </a:txBody>
-                  <a:tcPr marL="91440" marR="91440" marT="45720" marB="45720" anchor="ctr">
-                    <a:lnL w="12700" cap="flat" cmpd="sng" algn="ctr">
-                      <a:solidFill>
-                        <a:srgbClr val="DBE1EC"/>
-                      </a:solidFill>
-                      <a:prstDash val="solid"/>
-                      <a:round/>
-                      <a:headEnd type="none" w="med" len="med"/>
-                      <a:tailEnd type="none" w="med" len="med"/>
-                    </a:lnL>
-                    <a:lnR w="12700" cap="flat" cmpd="sng" algn="ctr">
-                      <a:solidFill>
-                        <a:srgbClr val="DBE1EC"/>
-                      </a:solidFill>
-                      <a:prstDash val="solid"/>
-                      <a:round/>
-                      <a:headEnd type="none" w="med" len="med"/>
-                      <a:tailEnd type="none" w="med" len="med"/>
-                    </a:lnR>
-                    <a:lnT w="12700" cap="flat" cmpd="sng" algn="ctr">
-                      <a:solidFill>
-                        <a:srgbClr val="DBE1EC"/>
-                      </a:solidFill>
-                      <a:prstDash val="solid"/>
-                      <a:round/>
-                      <a:headEnd type="none" w="med" len="med"/>
-                      <a:tailEnd type="none" w="med" len="med"/>
-                    </a:lnT>
-                    <a:lnB w="12700" cap="flat" cmpd="sng" algn="ctr">
-                      <a:solidFill>
-                        <a:srgbClr val="DBE1EC"/>
-                      </a:solidFill>
-                      <a:prstDash val="solid"/>
-                      <a:round/>
-                      <a:headEnd type="none" w="med" len="med"/>
-                      <a:tailEnd type="none" w="med" len="med"/>
-                    </a:lnB>
-                  </a:tcPr>
-                </a:tc>
-                <a:tc>
-                  <a:txBody>
-                    <a:bodyPr/>
-                    <a:lstStyle/>
-                    <a:p>
-                      <a:pPr indent="0" marL="0">
-                        <a:buNone/>
-                      </a:pPr>
-                      <a:r>
-                        <a:rPr lang="en-US" sz="1150" dirty="0">
-                          <a:solidFill>
-                            <a:srgbClr val="141A26"/>
-                          </a:solidFill>
-                          <a:latin typeface="Calibri" pitchFamily="34" charset="0"/>
-                          <a:ea typeface="Calibri" pitchFamily="34" charset="-122"/>
-                          <a:cs typeface="Calibri" pitchFamily="34" charset="-120"/>
-                        </a:rPr>
-                        <a:t>≈ $3</a:t>
-                      </a:r>
-                      <a:endParaRPr lang="en-US" sz="1150" dirty="0">
+                      <a:endParaRPr lang="en-US" sz="1100" dirty="0">
                         <a:latin typeface="Calibri" charset="0"/>
                         <a:ea typeface="Calibri" charset="0"/>
                         <a:cs typeface="Calibri" charset="0"/>
@@ -7821,7 +7427,7 @@
                         <a:buNone/>
                       </a:pPr>
                       <a:r>
-                        <a:rPr lang="en-US" sz="1150" dirty="0">
+                        <a:rPr lang="en-US" sz="1100" dirty="0">
                           <a:solidFill>
                             <a:srgbClr val="141A26"/>
                           </a:solidFill>
@@ -7829,9 +7435,9 @@
                           <a:ea typeface="Calibri" pitchFamily="34" charset="-122"/>
                           <a:cs typeface="Calibri" pitchFamily="34" charset="-120"/>
                         </a:rPr>
-                        <a:t>Pololu 3.3 V regulator S7V8F3</a:t>
+                        <a:t>Rakstore TPS63020 3.3 V buck-boost</a:t>
                       </a:r>
-                      <a:endParaRPr lang="en-US" sz="1150" dirty="0">
+                      <a:endParaRPr lang="en-US" sz="1100" dirty="0">
                         <a:latin typeface="Calibri" charset="0"/>
                         <a:ea typeface="Calibri" charset="0"/>
                         <a:cs typeface="Calibri" charset="0"/>
@@ -7886,7 +7492,7 @@
                         <a:buNone/>
                       </a:pPr>
                       <a:r>
-                        <a:rPr lang="en-US" sz="1150" dirty="0">
+                        <a:rPr lang="en-US" sz="1100" dirty="0">
                           <a:solidFill>
                             <a:srgbClr val="141A26"/>
                           </a:solidFill>
@@ -7894,9 +7500,9 @@
                           <a:ea typeface="Calibri" pitchFamily="34" charset="-122"/>
                           <a:cs typeface="Calibri" pitchFamily="34" charset="-120"/>
                         </a:rPr>
-                        <a:t>11 × 17 × 3 mm</a:t>
+                        <a:t>1.8–5 V in → 3.3 V out</a:t>
                       </a:r>
-                      <a:endParaRPr lang="en-US" sz="1150" dirty="0">
+                      <a:endParaRPr lang="en-US" sz="1100" dirty="0">
                         <a:latin typeface="Calibri" charset="0"/>
                         <a:ea typeface="Calibri" charset="0"/>
                         <a:cs typeface="Calibri" charset="0"/>
@@ -7951,7 +7557,7 @@
                         <a:buNone/>
                       </a:pPr>
                       <a:r>
-                        <a:rPr lang="en-US" sz="1150" dirty="0">
+                        <a:rPr lang="en-US" sz="1100" dirty="0">
                           <a:solidFill>
                             <a:srgbClr val="141A26"/>
                           </a:solidFill>
@@ -7959,9 +7565,9 @@
                           <a:ea typeface="Calibri" pitchFamily="34" charset="-122"/>
                           <a:cs typeface="Calibri" pitchFamily="34" charset="-120"/>
                         </a:rPr>
-                        <a:t>Steady 3.3 V</a:t>
+                        <a:t>Steady 3.3 V as the battery drains</a:t>
                       </a:r>
-                      <a:endParaRPr lang="en-US" sz="1150" dirty="0">
+                      <a:endParaRPr lang="en-US" sz="1100" dirty="0">
                         <a:latin typeface="Calibri" charset="0"/>
                         <a:ea typeface="Calibri" charset="0"/>
                         <a:cs typeface="Calibri" charset="0"/>
@@ -8016,14 +7622,14 @@
                         <a:buNone/>
                       </a:pPr>
                       <a:r>
-                        <a:rPr lang="en-US" sz="1150" u="sng" dirty="0">
+                        <a:rPr lang="en-US" sz="1100" u="sng" dirty="0">
                           <a:solidFill>
                             <a:srgbClr val="1F8A9C"/>
                           </a:solidFill>
                           <a:latin typeface="Calibri" pitchFamily="34" charset="0"/>
                           <a:ea typeface="Calibri" pitchFamily="34" charset="-122"/>
                           <a:cs typeface="Calibri" pitchFamily="34" charset="-120"/>
-                          <a:hlinkClick r:id="rId6" invalidUrl="" action="" tgtFrame="" tooltip="https://www.pololu.com/product/2122" history="1" highlightClick="0" endSnd="0">
+                          <a:hlinkClick r:id="rId6" invalidUrl="" action="" tgtFrame="" tooltip="https://www.amazon.ca/Rakstore-TPS63020-Automatic-Buck-Boost-Converter/dp/B09V4SHLTJ" history="1" highlightClick="0" endSnd="0">
                             <a:extLst>
                               <a:ext uri="{A12FA001-AC4F-418D-AE19-62706E023703}">
                                 <ahyp:hlinkClr xmlns:ahyp="http://schemas.microsoft.com/office/drawing/2018/hyperlinkcolor" val="tx"/>
@@ -8031,74 +7637,9 @@
                             </a:extLst>
                           </a:hlinkClick>
                         </a:rPr>
-                        <a:t>Pololu</a:t>
+                        <a:t>Amazon.ca</a:t>
                       </a:r>
-                      <a:endParaRPr lang="en-US" sz="1150" dirty="0">
-                        <a:latin typeface="Calibri" charset="0"/>
-                        <a:ea typeface="Calibri" charset="0"/>
-                        <a:cs typeface="Calibri" charset="0"/>
-                      </a:endParaRPr>
-                    </a:p>
-                  </a:txBody>
-                  <a:tcPr marL="91440" marR="91440" marT="45720" marB="45720" anchor="ctr">
-                    <a:lnL w="12700" cap="flat" cmpd="sng" algn="ctr">
-                      <a:solidFill>
-                        <a:srgbClr val="DBE1EC"/>
-                      </a:solidFill>
-                      <a:prstDash val="solid"/>
-                      <a:round/>
-                      <a:headEnd type="none" w="med" len="med"/>
-                      <a:tailEnd type="none" w="med" len="med"/>
-                    </a:lnL>
-                    <a:lnR w="12700" cap="flat" cmpd="sng" algn="ctr">
-                      <a:solidFill>
-                        <a:srgbClr val="DBE1EC"/>
-                      </a:solidFill>
-                      <a:prstDash val="solid"/>
-                      <a:round/>
-                      <a:headEnd type="none" w="med" len="med"/>
-                      <a:tailEnd type="none" w="med" len="med"/>
-                    </a:lnR>
-                    <a:lnT w="12700" cap="flat" cmpd="sng" algn="ctr">
-                      <a:solidFill>
-                        <a:srgbClr val="DBE1EC"/>
-                      </a:solidFill>
-                      <a:prstDash val="solid"/>
-                      <a:round/>
-                      <a:headEnd type="none" w="med" len="med"/>
-                      <a:tailEnd type="none" w="med" len="med"/>
-                    </a:lnT>
-                    <a:lnB w="12700" cap="flat" cmpd="sng" algn="ctr">
-                      <a:solidFill>
-                        <a:srgbClr val="DBE1EC"/>
-                      </a:solidFill>
-                      <a:prstDash val="solid"/>
-                      <a:round/>
-                      <a:headEnd type="none" w="med" len="med"/>
-                      <a:tailEnd type="none" w="med" len="med"/>
-                    </a:lnB>
-                  </a:tcPr>
-                </a:tc>
-                <a:tc>
-                  <a:txBody>
-                    <a:bodyPr/>
-                    <a:lstStyle/>
-                    <a:p>
-                      <a:pPr indent="0" marL="0">
-                        <a:buNone/>
-                      </a:pPr>
-                      <a:r>
-                        <a:rPr lang="en-US" sz="1150" dirty="0">
-                          <a:solidFill>
-                            <a:srgbClr val="141A26"/>
-                          </a:solidFill>
-                          <a:latin typeface="Calibri" pitchFamily="34" charset="0"/>
-                          <a:ea typeface="Calibri" pitchFamily="34" charset="-122"/>
-                          <a:cs typeface="Calibri" pitchFamily="34" charset="-120"/>
-                        </a:rPr>
-                        <a:t>≈ $8</a:t>
-                      </a:r>
-                      <a:endParaRPr lang="en-US" sz="1150" dirty="0">
+                      <a:endParaRPr lang="en-US" sz="1100" dirty="0">
                         <a:latin typeface="Calibri" charset="0"/>
                         <a:ea typeface="Calibri" charset="0"/>
                         <a:cs typeface="Calibri" charset="0"/>
@@ -8155,7 +7696,7 @@
                         <a:buNone/>
                       </a:pPr>
                       <a:r>
-                        <a:rPr lang="en-US" sz="1150" dirty="0">
+                        <a:rPr lang="en-US" sz="1100" dirty="0">
                           <a:solidFill>
                             <a:srgbClr val="141A26"/>
                           </a:solidFill>
@@ -8163,9 +7704,9 @@
                           <a:ea typeface="Calibri" pitchFamily="34" charset="-122"/>
                           <a:cs typeface="Calibri" pitchFamily="34" charset="-120"/>
                         </a:rPr>
-                        <a:t>Hammond 1551HBK case</a:t>
+                        <a:t>HoHaing ABS project box (8-pack)</a:t>
                       </a:r>
-                      <a:endParaRPr lang="en-US" sz="1150" dirty="0">
+                      <a:endParaRPr lang="en-US" sz="1100" dirty="0">
                         <a:latin typeface="Calibri" charset="0"/>
                         <a:ea typeface="Calibri" charset="0"/>
                         <a:cs typeface="Calibri" charset="0"/>
@@ -8220,7 +7761,7 @@
                         <a:buNone/>
                       </a:pPr>
                       <a:r>
-                        <a:rPr lang="en-US" sz="1150" dirty="0">
+                        <a:rPr lang="en-US" sz="1100" dirty="0">
                           <a:solidFill>
                             <a:srgbClr val="141A26"/>
                           </a:solidFill>
@@ -8228,9 +7769,9 @@
                           <a:ea typeface="Calibri" pitchFamily="34" charset="-122"/>
                           <a:cs typeface="Calibri" pitchFamily="34" charset="-120"/>
                         </a:rPr>
-                        <a:t>60 × 35 × 20 mm</a:t>
+                        <a:t>70 × 45 × 29 mm · inside 66 × 41 × 25 mm</a:t>
                       </a:r>
-                      <a:endParaRPr lang="en-US" sz="1150" dirty="0">
+                      <a:endParaRPr lang="en-US" sz="1100" dirty="0">
                         <a:latin typeface="Calibri" charset="0"/>
                         <a:ea typeface="Calibri" charset="0"/>
                         <a:cs typeface="Calibri" charset="0"/>
@@ -8285,7 +7826,7 @@
                         <a:buNone/>
                       </a:pPr>
                       <a:r>
-                        <a:rPr lang="en-US" sz="1150" dirty="0">
+                        <a:rPr lang="en-US" sz="1100" dirty="0">
                           <a:solidFill>
                             <a:srgbClr val="141A26"/>
                           </a:solidFill>
@@ -8293,9 +7834,9 @@
                           <a:ea typeface="Calibri" pitchFamily="34" charset="-122"/>
                           <a:cs typeface="Calibri" pitchFamily="34" charset="-120"/>
                         </a:rPr>
-                        <a:t>Holds the boards</a:t>
+                        <a:t>The sensor case</a:t>
                       </a:r>
-                      <a:endParaRPr lang="en-US" sz="1150" dirty="0">
+                      <a:endParaRPr lang="en-US" sz="1100" dirty="0">
                         <a:latin typeface="Calibri" charset="0"/>
                         <a:ea typeface="Calibri" charset="0"/>
                         <a:cs typeface="Calibri" charset="0"/>
@@ -8350,14 +7891,14 @@
                         <a:buNone/>
                       </a:pPr>
                       <a:r>
-                        <a:rPr lang="en-US" sz="1150" u="sng" dirty="0">
+                        <a:rPr lang="en-US" sz="1100" u="sng" dirty="0">
                           <a:solidFill>
                             <a:srgbClr val="1F8A9C"/>
                           </a:solidFill>
                           <a:latin typeface="Calibri" pitchFamily="34" charset="0"/>
                           <a:ea typeface="Calibri" pitchFamily="34" charset="-122"/>
                           <a:cs typeface="Calibri" pitchFamily="34" charset="-120"/>
-                          <a:hlinkClick r:id="rId7" invalidUrl="" action="" tgtFrame="" tooltip="https://www.hammfg.com/electronics/small-case/plastic/1551" history="1" highlightClick="0" endSnd="0">
+                          <a:hlinkClick r:id="rId7" invalidUrl="" action="" tgtFrame="" tooltip="https://www.amazon.ca/HoHaing-Electrical-Junction-Enclosure-Electronic/dp/B0CGV22KKG" history="1" highlightClick="0" endSnd="0">
                             <a:extLst>
                               <a:ext uri="{A12FA001-AC4F-418D-AE19-62706E023703}">
                                 <ahyp:hlinkClr xmlns:ahyp="http://schemas.microsoft.com/office/drawing/2018/hyperlinkcolor" val="tx"/>
@@ -8365,74 +7906,9 @@
                             </a:extLst>
                           </a:hlinkClick>
                         </a:rPr>
-                        <a:t>Hammond</a:t>
+                        <a:t>Amazon.ca</a:t>
                       </a:r>
-                      <a:endParaRPr lang="en-US" sz="1150" dirty="0">
-                        <a:latin typeface="Calibri" charset="0"/>
-                        <a:ea typeface="Calibri" charset="0"/>
-                        <a:cs typeface="Calibri" charset="0"/>
-                      </a:endParaRPr>
-                    </a:p>
-                  </a:txBody>
-                  <a:tcPr marL="91440" marR="91440" marT="45720" marB="45720" anchor="ctr">
-                    <a:lnL w="12700" cap="flat" cmpd="sng" algn="ctr">
-                      <a:solidFill>
-                        <a:srgbClr val="DBE1EC"/>
-                      </a:solidFill>
-                      <a:prstDash val="solid"/>
-                      <a:round/>
-                      <a:headEnd type="none" w="med" len="med"/>
-                      <a:tailEnd type="none" w="med" len="med"/>
-                    </a:lnL>
-                    <a:lnR w="12700" cap="flat" cmpd="sng" algn="ctr">
-                      <a:solidFill>
-                        <a:srgbClr val="DBE1EC"/>
-                      </a:solidFill>
-                      <a:prstDash val="solid"/>
-                      <a:round/>
-                      <a:headEnd type="none" w="med" len="med"/>
-                      <a:tailEnd type="none" w="med" len="med"/>
-                    </a:lnR>
-                    <a:lnT w="12700" cap="flat" cmpd="sng" algn="ctr">
-                      <a:solidFill>
-                        <a:srgbClr val="DBE1EC"/>
-                      </a:solidFill>
-                      <a:prstDash val="solid"/>
-                      <a:round/>
-                      <a:headEnd type="none" w="med" len="med"/>
-                      <a:tailEnd type="none" w="med" len="med"/>
-                    </a:lnT>
-                    <a:lnB w="12700" cap="flat" cmpd="sng" algn="ctr">
-                      <a:solidFill>
-                        <a:srgbClr val="DBE1EC"/>
-                      </a:solidFill>
-                      <a:prstDash val="solid"/>
-                      <a:round/>
-                      <a:headEnd type="none" w="med" len="med"/>
-                      <a:tailEnd type="none" w="med" len="med"/>
-                    </a:lnB>
-                  </a:tcPr>
-                </a:tc>
-                <a:tc>
-                  <a:txBody>
-                    <a:bodyPr/>
-                    <a:lstStyle/>
-                    <a:p>
-                      <a:pPr indent="0" marL="0">
-                        <a:buNone/>
-                      </a:pPr>
-                      <a:r>
-                        <a:rPr lang="en-US" sz="1150" dirty="0">
-                          <a:solidFill>
-                            <a:srgbClr val="141A26"/>
-                          </a:solidFill>
-                          <a:latin typeface="Calibri" pitchFamily="34" charset="0"/>
-                          <a:ea typeface="Calibri" pitchFamily="34" charset="-122"/>
-                          <a:cs typeface="Calibri" pitchFamily="34" charset="-120"/>
-                        </a:rPr>
-                        <a:t>≈ $6</a:t>
-                      </a:r>
-                      <a:endParaRPr lang="en-US" sz="1150" dirty="0">
+                      <a:endParaRPr lang="en-US" sz="1100" dirty="0">
                         <a:latin typeface="Calibri" charset="0"/>
                         <a:ea typeface="Calibri" charset="0"/>
                         <a:cs typeface="Calibri" charset="0"/>
@@ -8489,7 +7965,7 @@
                         <a:buNone/>
                       </a:pPr>
                       <a:r>
-                        <a:rPr lang="en-US" sz="1150" dirty="0">
+                        <a:rPr lang="en-US" sz="1100" dirty="0">
                           <a:solidFill>
                             <a:srgbClr val="141A26"/>
                           </a:solidFill>
@@ -8497,9 +7973,9 @@
                           <a:ea typeface="Calibri" pitchFamily="34" charset="-122"/>
                           <a:cs typeface="Calibri" pitchFamily="34" charset="-120"/>
                         </a:rPr>
-                        <a:t>Velcro one-wrap strap</a:t>
+                        <a:t>VELCRO Brand 1 in × 30 ft roll</a:t>
                       </a:r>
-                      <a:endParaRPr lang="en-US" sz="1150" dirty="0">
+                      <a:endParaRPr lang="en-US" sz="1100" dirty="0">
                         <a:latin typeface="Calibri" charset="0"/>
                         <a:ea typeface="Calibri" charset="0"/>
                         <a:cs typeface="Calibri" charset="0"/>
@@ -8554,7 +8030,7 @@
                         <a:buNone/>
                       </a:pPr>
                       <a:r>
-                        <a:rPr lang="en-US" sz="1150" dirty="0">
+                        <a:rPr lang="en-US" sz="1100" dirty="0">
                           <a:solidFill>
                             <a:srgbClr val="141A26"/>
                           </a:solidFill>
@@ -8562,9 +8038,9 @@
                           <a:ea typeface="Calibri" pitchFamily="34" charset="-122"/>
                           <a:cs typeface="Calibri" pitchFamily="34" charset="-120"/>
                         </a:rPr>
-                        <a:t>25 mm × ≈ 250 mm</a:t>
+                        <a:t>25 mm wide · cut ≈ 300 mm + ≈ 80 mm</a:t>
                       </a:r>
-                      <a:endParaRPr lang="en-US" sz="1150" dirty="0">
+                      <a:endParaRPr lang="en-US" sz="1100" dirty="0">
                         <a:latin typeface="Calibri" charset="0"/>
                         <a:ea typeface="Calibri" charset="0"/>
                         <a:cs typeface="Calibri" charset="0"/>
@@ -8619,7 +8095,7 @@
                         <a:buNone/>
                       </a:pPr>
                       <a:r>
-                        <a:rPr lang="en-US" sz="1150" dirty="0">
+                        <a:rPr lang="en-US" sz="1100" dirty="0">
                           <a:solidFill>
                             <a:srgbClr val="141A26"/>
                           </a:solidFill>
@@ -8627,9 +8103,9 @@
                           <a:ea typeface="Calibri" pitchFamily="34" charset="-122"/>
                           <a:cs typeface="Calibri" pitchFamily="34" charset="-120"/>
                         </a:rPr>
-                        <a:t>Arm strap + finger cuff</a:t>
+                        <a:t>Arm strap + finger loop</a:t>
                       </a:r>
-                      <a:endParaRPr lang="en-US" sz="1150" dirty="0">
+                      <a:endParaRPr lang="en-US" sz="1100" dirty="0">
                         <a:latin typeface="Calibri" charset="0"/>
                         <a:ea typeface="Calibri" charset="0"/>
                         <a:cs typeface="Calibri" charset="0"/>
@@ -8684,14 +8160,14 @@
                         <a:buNone/>
                       </a:pPr>
                       <a:r>
-                        <a:rPr lang="en-US" sz="1150" u="sng" dirty="0">
+                        <a:rPr lang="en-US" sz="1100" u="sng" dirty="0">
                           <a:solidFill>
                             <a:srgbClr val="1F8A9C"/>
                           </a:solidFill>
                           <a:latin typeface="Calibri" pitchFamily="34" charset="0"/>
                           <a:ea typeface="Calibri" pitchFamily="34" charset="-122"/>
                           <a:cs typeface="Calibri" pitchFamily="34" charset="-120"/>
-                          <a:hlinkClick r:id="rId8" invalidUrl="" action="" tgtFrame="" tooltip="https://www.amazon.ca/s?k=velcro+one-wrap+strap+1+inch" history="1" highlightClick="0" endSnd="0">
+                          <a:hlinkClick r:id="rId8" invalidUrl="" action="" tgtFrame="" tooltip="https://www.amazon.ca/VELCRO-Brand-VEL-30768-AMS-Self-Gripping-Organization/dp/B09QH2NVM1" history="1" highlightClick="0" endSnd="0">
                             <a:extLst>
                               <a:ext uri="{A12FA001-AC4F-418D-AE19-62706E023703}">
                                 <ahyp:hlinkClr xmlns:ahyp="http://schemas.microsoft.com/office/drawing/2018/hyperlinkcolor" val="tx"/>
@@ -8701,72 +8177,7 @@
                         </a:rPr>
                         <a:t>Amazon.ca</a:t>
                       </a:r>
-                      <a:endParaRPr lang="en-US" sz="1150" dirty="0">
-                        <a:latin typeface="Calibri" charset="0"/>
-                        <a:ea typeface="Calibri" charset="0"/>
-                        <a:cs typeface="Calibri" charset="0"/>
-                      </a:endParaRPr>
-                    </a:p>
-                  </a:txBody>
-                  <a:tcPr marL="91440" marR="91440" marT="45720" marB="45720" anchor="ctr">
-                    <a:lnL w="12700" cap="flat" cmpd="sng" algn="ctr">
-                      <a:solidFill>
-                        <a:srgbClr val="DBE1EC"/>
-                      </a:solidFill>
-                      <a:prstDash val="solid"/>
-                      <a:round/>
-                      <a:headEnd type="none" w="med" len="med"/>
-                      <a:tailEnd type="none" w="med" len="med"/>
-                    </a:lnL>
-                    <a:lnR w="12700" cap="flat" cmpd="sng" algn="ctr">
-                      <a:solidFill>
-                        <a:srgbClr val="DBE1EC"/>
-                      </a:solidFill>
-                      <a:prstDash val="solid"/>
-                      <a:round/>
-                      <a:headEnd type="none" w="med" len="med"/>
-                      <a:tailEnd type="none" w="med" len="med"/>
-                    </a:lnR>
-                    <a:lnT w="12700" cap="flat" cmpd="sng" algn="ctr">
-                      <a:solidFill>
-                        <a:srgbClr val="DBE1EC"/>
-                      </a:solidFill>
-                      <a:prstDash val="solid"/>
-                      <a:round/>
-                      <a:headEnd type="none" w="med" len="med"/>
-                      <a:tailEnd type="none" w="med" len="med"/>
-                    </a:lnT>
-                    <a:lnB w="12700" cap="flat" cmpd="sng" algn="ctr">
-                      <a:solidFill>
-                        <a:srgbClr val="DBE1EC"/>
-                      </a:solidFill>
-                      <a:prstDash val="solid"/>
-                      <a:round/>
-                      <a:headEnd type="none" w="med" len="med"/>
-                      <a:tailEnd type="none" w="med" len="med"/>
-                    </a:lnB>
-                  </a:tcPr>
-                </a:tc>
-                <a:tc>
-                  <a:txBody>
-                    <a:bodyPr/>
-                    <a:lstStyle/>
-                    <a:p>
-                      <a:pPr indent="0" marL="0">
-                        <a:buNone/>
-                      </a:pPr>
-                      <a:r>
-                        <a:rPr lang="en-US" sz="1150" dirty="0">
-                          <a:solidFill>
-                            <a:srgbClr val="141A26"/>
-                          </a:solidFill>
-                          <a:latin typeface="Calibri" pitchFamily="34" charset="0"/>
-                          <a:ea typeface="Calibri" pitchFamily="34" charset="-122"/>
-                          <a:cs typeface="Calibri" pitchFamily="34" charset="-120"/>
-                        </a:rPr>
-                        <a:t>≈ $5</a:t>
-                      </a:r>
-                      <a:endParaRPr lang="en-US" sz="1150" dirty="0">
+                      <a:endParaRPr lang="en-US" sz="1100" dirty="0">
                         <a:latin typeface="Calibri" charset="0"/>
                         <a:ea typeface="Calibri" charset="0"/>
                         <a:cs typeface="Calibri" charset="0"/>
@@ -8823,7 +8234,7 @@
                         <a:buNone/>
                       </a:pPr>
                       <a:r>
-                        <a:rPr lang="en-US" sz="1150" dirty="0">
+                        <a:rPr lang="en-US" sz="1100" dirty="0">
                           <a:solidFill>
                             <a:srgbClr val="141A26"/>
                           </a:solidFill>
@@ -8831,9 +8242,9 @@
                           <a:ea typeface="Calibri" pitchFamily="34" charset="-122"/>
                           <a:cs typeface="Calibri" pitchFamily="34" charset="-120"/>
                         </a:rPr>
-                        <a:t>2 × 100 kΩ resistors, wire</a:t>
+                        <a:t>100 kΩ resistors (2) + jumper wires</a:t>
                       </a:r>
-                      <a:endParaRPr lang="en-US" sz="1150" dirty="0">
+                      <a:endParaRPr lang="en-US" sz="1100" dirty="0">
                         <a:latin typeface="Calibri" charset="0"/>
                         <a:ea typeface="Calibri" charset="0"/>
                         <a:cs typeface="Calibri" charset="0"/>
@@ -8888,7 +8299,7 @@
                         <a:buNone/>
                       </a:pPr>
                       <a:r>
-                        <a:rPr lang="en-US" sz="1150" dirty="0">
+                        <a:rPr lang="en-US" sz="1100" dirty="0">
                           <a:solidFill>
                             <a:srgbClr val="141A26"/>
                           </a:solidFill>
@@ -8896,9 +8307,9 @@
                           <a:ea typeface="Calibri" pitchFamily="34" charset="-122"/>
                           <a:cs typeface="Calibri" pitchFamily="34" charset="-120"/>
                         </a:rPr>
-                        <a:t>—</a:t>
+                        <a:t>1/4 W</a:t>
                       </a:r>
-                      <a:endParaRPr lang="en-US" sz="1150" dirty="0">
+                      <a:endParaRPr lang="en-US" sz="1100" dirty="0">
                         <a:latin typeface="Calibri" charset="0"/>
                         <a:ea typeface="Calibri" charset="0"/>
                         <a:cs typeface="Calibri" charset="0"/>
@@ -8953,7 +8364,7 @@
                         <a:buNone/>
                       </a:pPr>
                       <a:r>
-                        <a:rPr lang="en-US" sz="1150" dirty="0">
+                        <a:rPr lang="en-US" sz="1100" dirty="0">
                           <a:solidFill>
                             <a:srgbClr val="141A26"/>
                           </a:solidFill>
@@ -8961,9 +8372,9 @@
                           <a:ea typeface="Calibri" pitchFamily="34" charset="-122"/>
                           <a:cs typeface="Calibri" pitchFamily="34" charset="-120"/>
                         </a:rPr>
-                        <a:t>Battery level</a:t>
+                        <a:t>Battery-level reading on GPIO 34</a:t>
                       </a:r>
-                      <a:endParaRPr lang="en-US" sz="1150" dirty="0">
+                      <a:endParaRPr lang="en-US" sz="1100" dirty="0">
                         <a:latin typeface="Calibri" charset="0"/>
                         <a:ea typeface="Calibri" charset="0"/>
                         <a:cs typeface="Calibri" charset="0"/>
@@ -9018,14 +8429,14 @@
                         <a:buNone/>
                       </a:pPr>
                       <a:r>
-                        <a:rPr lang="en-US" sz="1150" u="sng" dirty="0">
+                        <a:rPr lang="en-US" sz="1100" u="sng" dirty="0">
                           <a:solidFill>
                             <a:srgbClr val="1F8A9C"/>
                           </a:solidFill>
                           <a:latin typeface="Calibri" pitchFamily="34" charset="0"/>
                           <a:ea typeface="Calibri" pitchFamily="34" charset="-122"/>
                           <a:cs typeface="Calibri" pitchFamily="34" charset="-120"/>
-                          <a:hlinkClick r:id="rId9" invalidUrl="" action="" tgtFrame="" tooltip="https://www.amazon.ca/s?k=resistor+kit+100k" history="1" highlightClick="0" endSnd="0">
+                          <a:hlinkClick r:id="rId9" invalidUrl="" action="" tgtFrame="" tooltip="https://www.amazon.ca/s?k=100k+ohm+resistor+1%2F4w" history="1" highlightClick="0" endSnd="0">
                             <a:extLst>
                               <a:ext uri="{A12FA001-AC4F-418D-AE19-62706E023703}">
                                 <ahyp:hlinkClr xmlns:ahyp="http://schemas.microsoft.com/office/drawing/2018/hyperlinkcolor" val="tx"/>
@@ -9035,72 +8446,7 @@
                         </a:rPr>
                         <a:t>Amazon.ca</a:t>
                       </a:r>
-                      <a:endParaRPr lang="en-US" sz="1150" dirty="0">
-                        <a:latin typeface="Calibri" charset="0"/>
-                        <a:ea typeface="Calibri" charset="0"/>
-                        <a:cs typeface="Calibri" charset="0"/>
-                      </a:endParaRPr>
-                    </a:p>
-                  </a:txBody>
-                  <a:tcPr marL="91440" marR="91440" marT="45720" marB="45720" anchor="ctr">
-                    <a:lnL w="12700" cap="flat" cmpd="sng" algn="ctr">
-                      <a:solidFill>
-                        <a:srgbClr val="DBE1EC"/>
-                      </a:solidFill>
-                      <a:prstDash val="solid"/>
-                      <a:round/>
-                      <a:headEnd type="none" w="med" len="med"/>
-                      <a:tailEnd type="none" w="med" len="med"/>
-                    </a:lnL>
-                    <a:lnR w="12700" cap="flat" cmpd="sng" algn="ctr">
-                      <a:solidFill>
-                        <a:srgbClr val="DBE1EC"/>
-                      </a:solidFill>
-                      <a:prstDash val="solid"/>
-                      <a:round/>
-                      <a:headEnd type="none" w="med" len="med"/>
-                      <a:tailEnd type="none" w="med" len="med"/>
-                    </a:lnR>
-                    <a:lnT w="12700" cap="flat" cmpd="sng" algn="ctr">
-                      <a:solidFill>
-                        <a:srgbClr val="DBE1EC"/>
-                      </a:solidFill>
-                      <a:prstDash val="solid"/>
-                      <a:round/>
-                      <a:headEnd type="none" w="med" len="med"/>
-                      <a:tailEnd type="none" w="med" len="med"/>
-                    </a:lnT>
-                    <a:lnB w="12700" cap="flat" cmpd="sng" algn="ctr">
-                      <a:solidFill>
-                        <a:srgbClr val="DBE1EC"/>
-                      </a:solidFill>
-                      <a:prstDash val="solid"/>
-                      <a:round/>
-                      <a:headEnd type="none" w="med" len="med"/>
-                      <a:tailEnd type="none" w="med" len="med"/>
-                    </a:lnB>
-                  </a:tcPr>
-                </a:tc>
-                <a:tc>
-                  <a:txBody>
-                    <a:bodyPr/>
-                    <a:lstStyle/>
-                    <a:p>
-                      <a:pPr indent="0" marL="0">
-                        <a:buNone/>
-                      </a:pPr>
-                      <a:r>
-                        <a:rPr lang="en-US" sz="1150" dirty="0">
-                          <a:solidFill>
-                            <a:srgbClr val="141A26"/>
-                          </a:solidFill>
-                          <a:latin typeface="Calibri" pitchFamily="34" charset="0"/>
-                          <a:ea typeface="Calibri" pitchFamily="34" charset="-122"/>
-                          <a:cs typeface="Calibri" pitchFamily="34" charset="-120"/>
-                        </a:rPr>
-                        <a:t>≈ $5</a:t>
-                      </a:r>
-                      <a:endParaRPr lang="en-US" sz="1150" dirty="0">
+                      <a:endParaRPr lang="en-US" sz="1100" dirty="0">
                         <a:latin typeface="Calibri" charset="0"/>
                         <a:ea typeface="Calibri" charset="0"/>
                         <a:cs typeface="Calibri" charset="0"/>
@@ -9157,7 +8503,7 @@
                         <a:buNone/>
                       </a:pPr>
                       <a:r>
-                        <a:rPr lang="en-US" sz="1150" dirty="0">
+                        <a:rPr lang="en-US" sz="1100" dirty="0">
                           <a:solidFill>
                             <a:srgbClr val="141A26"/>
                           </a:solidFill>
@@ -9165,9 +8511,9 @@
                           <a:ea typeface="Calibri" pitchFamily="34" charset="-122"/>
                           <a:cs typeface="Calibri" pitchFamily="34" charset="-120"/>
                         </a:rPr>
-                        <a:t>Fingertip pulse oximeter</a:t>
+                        <a:t>Elite Medica fingertip pulse oximeter</a:t>
                       </a:r>
-                      <a:endParaRPr lang="en-US" sz="1150" dirty="0">
+                      <a:endParaRPr lang="en-US" sz="1100" dirty="0">
                         <a:latin typeface="Calibri" charset="0"/>
                         <a:ea typeface="Calibri" charset="0"/>
                         <a:cs typeface="Calibri" charset="0"/>
@@ -9222,7 +8568,7 @@
                         <a:buNone/>
                       </a:pPr>
                       <a:r>
-                        <a:rPr lang="en-US" sz="1150" dirty="0">
+                        <a:rPr lang="en-US" sz="1100" dirty="0">
                           <a:solidFill>
                             <a:srgbClr val="141A26"/>
                           </a:solidFill>
@@ -9230,9 +8576,9 @@
                           <a:ea typeface="Calibri" pitchFamily="34" charset="-122"/>
                           <a:cs typeface="Calibri" pitchFamily="34" charset="-120"/>
                         </a:rPr>
-                        <a:t>—</a:t>
+                        <a:t>Health Canada authorized</a:t>
                       </a:r>
-                      <a:endParaRPr lang="en-US" sz="1150" dirty="0">
+                      <a:endParaRPr lang="en-US" sz="1100" dirty="0">
                         <a:latin typeface="Calibri" charset="0"/>
                         <a:ea typeface="Calibri" charset="0"/>
                         <a:cs typeface="Calibri" charset="0"/>
@@ -9287,7 +8633,7 @@
                         <a:buNone/>
                       </a:pPr>
                       <a:r>
-                        <a:rPr lang="en-US" sz="1150" dirty="0">
+                        <a:rPr lang="en-US" sz="1100" dirty="0">
                           <a:solidFill>
                             <a:srgbClr val="141A26"/>
                           </a:solidFill>
@@ -9295,9 +8641,9 @@
                           <a:ea typeface="Calibri" pitchFamily="34" charset="-122"/>
                           <a:cs typeface="Calibri" pitchFamily="34" charset="-120"/>
                         </a:rPr>
-                        <a:t>Accuracy reference</a:t>
+                        <a:t>Reference for the accuracy test</a:t>
                       </a:r>
-                      <a:endParaRPr lang="en-US" sz="1150" dirty="0">
+                      <a:endParaRPr lang="en-US" sz="1100" dirty="0">
                         <a:latin typeface="Calibri" charset="0"/>
                         <a:ea typeface="Calibri" charset="0"/>
                         <a:cs typeface="Calibri" charset="0"/>
@@ -9352,14 +8698,14 @@
                         <a:buNone/>
                       </a:pPr>
                       <a:r>
-                        <a:rPr lang="en-US" sz="1150" u="sng" dirty="0">
+                        <a:rPr lang="en-US" sz="1100" u="sng" dirty="0">
                           <a:solidFill>
                             <a:srgbClr val="1F8A9C"/>
                           </a:solidFill>
                           <a:latin typeface="Calibri" pitchFamily="34" charset="0"/>
                           <a:ea typeface="Calibri" pitchFamily="34" charset="-122"/>
                           <a:cs typeface="Calibri" pitchFamily="34" charset="-120"/>
-                          <a:hlinkClick r:id="rId10" invalidUrl="" action="" tgtFrame="" tooltip="https://www.amazon.ca/s?k=fingertip+pulse+oximeter" history="1" highlightClick="0" endSnd="0">
+                          <a:hlinkClick r:id="rId10" invalidUrl="" action="" tgtFrame="" tooltip="https://www.amazon.ca/Elite-Medica-Fingertip-Saturation-Batteries/dp/B0DSGP91PB" history="1" highlightClick="0" endSnd="0">
                             <a:extLst>
                               <a:ext uri="{A12FA001-AC4F-418D-AE19-62706E023703}">
                                 <ahyp:hlinkClr xmlns:ahyp="http://schemas.microsoft.com/office/drawing/2018/hyperlinkcolor" val="tx"/>
@@ -9369,7 +8715,7 @@
                         </a:rPr>
                         <a:t>Amazon.ca</a:t>
                       </a:r>
-                      <a:endParaRPr lang="en-US" sz="1150" dirty="0">
+                      <a:endParaRPr lang="en-US" sz="1100" dirty="0">
                         <a:latin typeface="Calibri" charset="0"/>
                         <a:ea typeface="Calibri" charset="0"/>
                         <a:cs typeface="Calibri" charset="0"/>
@@ -9415,71 +8761,6 @@
                     </a:lnB>
                   </a:tcPr>
                 </a:tc>
-                <a:tc>
-                  <a:txBody>
-                    <a:bodyPr/>
-                    <a:lstStyle/>
-                    <a:p>
-                      <a:pPr indent="0" marL="0">
-                        <a:buNone/>
-                      </a:pPr>
-                      <a:r>
-                        <a:rPr lang="en-US" sz="1150" dirty="0">
-                          <a:solidFill>
-                            <a:srgbClr val="141A26"/>
-                          </a:solidFill>
-                          <a:latin typeface="Calibri" pitchFamily="34" charset="0"/>
-                          <a:ea typeface="Calibri" pitchFamily="34" charset="-122"/>
-                          <a:cs typeface="Calibri" pitchFamily="34" charset="-120"/>
-                        </a:rPr>
-                        <a:t>≈ $25</a:t>
-                      </a:r>
-                      <a:endParaRPr lang="en-US" sz="1150" dirty="0">
-                        <a:latin typeface="Calibri" charset="0"/>
-                        <a:ea typeface="Calibri" charset="0"/>
-                        <a:cs typeface="Calibri" charset="0"/>
-                      </a:endParaRPr>
-                    </a:p>
-                  </a:txBody>
-                  <a:tcPr marL="91440" marR="91440" marT="45720" marB="45720" anchor="ctr">
-                    <a:lnL w="12700" cap="flat" cmpd="sng" algn="ctr">
-                      <a:solidFill>
-                        <a:srgbClr val="DBE1EC"/>
-                      </a:solidFill>
-                      <a:prstDash val="solid"/>
-                      <a:round/>
-                      <a:headEnd type="none" w="med" len="med"/>
-                      <a:tailEnd type="none" w="med" len="med"/>
-                    </a:lnL>
-                    <a:lnR w="12700" cap="flat" cmpd="sng" algn="ctr">
-                      <a:solidFill>
-                        <a:srgbClr val="DBE1EC"/>
-                      </a:solidFill>
-                      <a:prstDash val="solid"/>
-                      <a:round/>
-                      <a:headEnd type="none" w="med" len="med"/>
-                      <a:tailEnd type="none" w="med" len="med"/>
-                    </a:lnR>
-                    <a:lnT w="12700" cap="flat" cmpd="sng" algn="ctr">
-                      <a:solidFill>
-                        <a:srgbClr val="DBE1EC"/>
-                      </a:solidFill>
-                      <a:prstDash val="solid"/>
-                      <a:round/>
-                      <a:headEnd type="none" w="med" len="med"/>
-                      <a:tailEnd type="none" w="med" len="med"/>
-                    </a:lnT>
-                    <a:lnB w="12700" cap="flat" cmpd="sng" algn="ctr">
-                      <a:solidFill>
-                        <a:srgbClr val="DBE1EC"/>
-                      </a:solidFill>
-                      <a:prstDash val="solid"/>
-                      <a:round/>
-                      <a:headEnd type="none" w="med" len="med"/>
-                      <a:tailEnd type="none" w="med" len="med"/>
-                    </a:lnB>
-                  </a:tcPr>
-                </a:tc>
               </a:tr>
             </a:tbl>
           </a:graphicData>
@@ -9518,7 +8799,7 @@
                 <a:ea typeface="Calibri" pitchFamily="34" charset="-122"/>
                 <a:cs typeface="Calibri" pitchFamily="34" charset="-120"/>
               </a:rPr>
-              <a:t>Total ≈ $65 for the wearable + ≈ $25 reference oximeter. Board sizes vary about ±2 mm between sellers — measure before assembling.</a:t>
+              <a:t>Every part is on Amazon.ca (click Buy). Prices change and several items are multi-packs. Sizes from the listings — boards vary about ±2 mm, so measure yours.</a:t>
             </a:r>
             <a:endParaRPr lang="en-US" sz="1150" dirty="0"/>
           </a:p>
@@ -11145,7 +10426,7 @@
                           <a:ea typeface="Calibri" pitchFamily="34" charset="-122"/>
                           <a:cs typeface="Calibri" pitchFamily="34" charset="-120"/>
                         </a:rPr>
-                        <a:t>MPU-6050 VCC / GND</a:t>
+                        <a:t>GY-521 (MPU-6050) VCC / GND</a:t>
                       </a:r>
                       <a:endParaRPr lang="en-US" sz="1150" dirty="0">
                         <a:latin typeface="Calibri" charset="0"/>
@@ -11866,7 +11147,7 @@
                           <a:ea typeface="Calibri" pitchFamily="34" charset="-122"/>
                           <a:cs typeface="Calibri" pitchFamily="34" charset="-120"/>
                         </a:rPr>
-                        <a:t>Pololu S7V8F3</a:t>
+                        <a:t>TPS63020 3.3 V</a:t>
                       </a:r>
                       <a:endParaRPr lang="en-US" sz="1150" dirty="0">
                         <a:latin typeface="Calibri" charset="0"/>
@@ -12567,7 +11848,7 @@
                 <a:ea typeface="Calibri" pitchFamily="34" charset="-122"/>
                 <a:cs typeface="Calibri" pitchFamily="34" charset="-120"/>
               </a:rPr>
-              <a:t>Stack inside the 16 mm-tall case</a:t>
+              <a:t>Stack inside the 25 mm-tall case</a:t>
             </a:r>
             <a:endParaRPr lang="en-US" sz="1100" dirty="0"/>
           </a:p>
@@ -12606,7 +11887,7 @@
                 <a:ea typeface="Calibri" pitchFamily="34" charset="-122"/>
                 <a:cs typeface="Calibri" pitchFamily="34" charset="-120"/>
               </a:rPr>
-              <a:t>Layer heights: battery 4.75 mm + ESP32 (no header pins) ≈ 5 mm + MPU-6050 4.6 mm ≈ 15 mm ≤ 16 mm inside height. With header pins soldered, use a case at least 30 mm deep.</a:t>
+              <a:t>Layer heights: battery 6 mm + ESP32 with pins ≈ 13 mm + GY-521 ≈ 3 mm ≈ 22 mm, inside the box’s 25 mm. Battery and TP4056 sit side by side on the bottom (35 + 17 = 52 mm of the 66 mm length).</a:t>
             </a:r>
             <a:endParaRPr lang="en-US" sz="1200" dirty="0"/>
           </a:p>
@@ -16248,7 +15529,7 @@
                 <a:ea typeface="Calibri" pitchFamily="34" charset="-122"/>
                 <a:cs typeface="Calibri" pitchFamily="34" charset="-120"/>
               </a:rPr>
-              <a:t>60 × 35 × 20 mm</a:t>
+              <a:t>70 × 45 × 29 mm</a:t>
             </a:r>
             <a:endParaRPr lang="en-US" sz="2000" dirty="0"/>
           </a:p>
@@ -16404,7 +15685,7 @@
                 <a:ea typeface="Calibri" pitchFamily="34" charset="-122"/>
                 <a:cs typeface="Calibri" pitchFamily="34" charset="-120"/>
               </a:rPr>
-              <a:t>18 × 14 mm</a:t>
+              <a:t>14 × 14 mm</a:t>
             </a:r>
             <a:endParaRPr lang="en-US" sz="2000" dirty="0"/>
           </a:p>

--- a/science-fair/night-signal/Night_Signal_Presentation.pptx
+++ b/science-fair/night-signal/Night_Signal_Presentation.pptx
@@ -876,7 +876,7 @@
           <a:p>
             <a:r>
               <a:rPr lang="en-US" dirty="0"/>
-              <a:t>[0:15] Hi, I'm Gabriela. My project is Night Signal: a wearable I designed that watches your blood oxygen while you sleep to catch sleep apnea — and it turns out the same sensor can screen the heart and breathing too.</a:t>
+              <a:t>[0:15] Hi, I’m Gabriel. My project is Night Signal: a wearable I designed that watches your blood oxygen while you sleep to catch sleep apnea — and it turns out the same sensor can screen the heart and breathing too.</a:t>
             </a:r>
             <a:endParaRPr lang="en-US" dirty="0"/>
           </a:p>
@@ -2983,7 +2983,7 @@
                 <a:ea typeface="Calibri" pitchFamily="34" charset="-122"/>
                 <a:cs typeface="Calibri" pitchFamily="34" charset="-120"/>
               </a:rPr>
-              <a:t>Gabriela Mamane</a:t>
+              <a:t>Gabriel Mamane</a:t>
             </a:r>
             <a:pPr indent="0" marL="0">
               <a:buNone/>

--- a/science-fair/night-signal/Night_Signal_Presentation.pptx
+++ b/science-fair/night-signal/Night_Signal_Presentation.pptx
@@ -1140,7 +1140,7 @@
           <a:p>
             <a:r>
               <a:rPr lang="en-US" dirty="0"/>
-              <a:t>[0:35] Sources of error: movement, finger pressure and cold hands can distort the light signal; the four-second averaging can blur very short dips; even the reference oximeter is only plus or minus two percent. On the method side, awake breath-holds aren't identical to real apnea, I only measure oxygen — not airflow or brain waves like a sleep lab — and one person isn't enough to generalize. I also caught an engineering problem: the battery only lasts four to five hours with Bluetooth, so I added a runtime test and use a power bank for full nights.</a:t>
+              <a:t>[0:35] Sources of error: movement, finger pressure and cold hands can distort the light signal; the four-second averaging can blur very short dips; even the reference oximeter is only plus or minus two percent. On the method side, awake breath-holds aren't identical to real apnea, I only measure oxygen — not airflow or brain waves like a sleep lab — and one person isn't enough to generalize. I also caught an engineering problem: Bluetooth draws about 100 milliamps, so a small 500 milliamp-hour battery would last only four to five hours. That's why version 1 runs on USB power all night, and version 2 needs a bigger battery or Bluetooth Low Energy.</a:t>
             </a:r>
             <a:endParaRPr lang="en-US" dirty="0"/>
           </a:p>
@@ -1580,7 +1580,7 @@
           <a:p>
             <a:r>
               <a:rPr lang="en-US" dirty="0"/>
-              <a:t>[0:00] Appendix — not presented. Wiring table and the internal layout with layer heights.</a:t>
+              <a:t>[0:00] Appendix — not presented. Prototype v1 wiring table, and the planned v2 case layout with layer heights.</a:t>
             </a:r>
             <a:endParaRPr lang="en-US" dirty="0"/>
           </a:p>
@@ -2020,7 +2020,7 @@
           <a:p>
             <a:r>
               <a:rPr lang="en-US" dirty="0"/>
-              <a:t>[0:40] Here's the design. A small case — a 70 by 45 millimetre project box — rides on a velcro strap and holds the ESP32 processor, battery, charger and a motion sensor. A cable runs to a velcro finger clip with the MAX30102 oxygen sensor. On the right is the exploded view with every part at its real size; you can spin the interactive version with this QR code.</a:t>
+              <a:t>[0:40] Here's the design. My working prototype, version 1, is built to be simple and reliable: the ESP32 sits in a running armband, each sensor plugs into its own pins with no soldered splices, and a USB cable powers it all night. A velcro finger clip holds the MAX30102 oxygen sensor. The 3D model shows version 2 — a 70 by 45 millimetre sealed case with its own battery on a velcro strap. On the right is the exploded view with every part at its real size; you can spin the interactive version with this QR code.</a:t>
             </a:r>
             <a:endParaRPr lang="en-US" dirty="0"/>
           </a:p>
@@ -2196,7 +2196,7 @@
           <a:p>
             <a:r>
               <a:rPr lang="en-US" dirty="0"/>
-              <a:t>[0:45] My key manipulations: one, a device check before every session. Two, an accuracy test — I wear my device and a store-bought oximeter at the same time and compare. Three, a detection test: supervised, awake breath-holds of 10, 15 and 20 seconds — I know exactly when they happened, so I can score my software. Four, a battery runtime test. Five, full recorded nights. Safety first: breath-holds only while awake and supervised, with consent and ethics approval.</a:t>
+              <a:t>[0:45] My key manipulations: one, a device check before every session. Two, an accuracy test — I wear my device and a store-bought oximeter at the same time and compare. Three, a detection test: supervised, awake breath-holds of 10, 15 and 20 seconds — I know exactly when they happened, so I can score my software. Four, a full-night power test — eight hours with no gaps. Five, full recorded nights. Safety first: breath-holds only while awake and supervised, with consent and ethics approval.</a:t>
             </a:r>
             <a:endParaRPr lang="en-US" dirty="0"/>
           </a:p>
@@ -4585,7 +4585,7 @@
                 <a:ea typeface="Calibri" pitchFamily="34" charset="-122"/>
                 <a:cs typeface="Calibri" pitchFamily="34" charset="-120"/>
               </a:rPr>
-              <a:t>Bluetooth draws about 100 mA, so the 500 mAh battery lasts roughly 4–5 hours — not a full night. I added a battery runtime test, and full nights use a small USB power bank.</a:t>
+              <a:t>Bluetooth draws about 100 mA, so a 500 mAh battery would last only 4–5 hours — not a full night. So prototype v1 runs on USB power, and the sealed v2 case needs a bigger battery or Bluetooth Low Energy.</a:t>
             </a:r>
             <a:endParaRPr lang="en-US" sz="1500" dirty="0"/>
           </a:p>
@@ -6155,7 +6155,7 @@
                           <a:ea typeface="Calibri" pitchFamily="34" charset="-122"/>
                           <a:cs typeface="Calibri" pitchFamily="34" charset="-120"/>
                         </a:rPr>
-                        <a:t>≈ 52 × 28 mm · 13 mm tall with pins</a:t>
+                        <a:t>≈ 52 × 28 mm · pins pre-soldered</a:t>
                       </a:r>
                       <a:endParaRPr lang="en-US" sz="1100" dirty="0">
                         <a:latin typeface="Calibri" charset="0"/>
@@ -6424,7 +6424,7 @@
                           <a:ea typeface="Calibri" pitchFamily="34" charset="-122"/>
                           <a:cs typeface="Calibri" pitchFamily="34" charset="-120"/>
                         </a:rPr>
-                        <a:t>14 × 14 mm</a:t>
+                        <a:t>14 × 14 mm · 4 pins to solder</a:t>
                       </a:r>
                       <a:endParaRPr lang="en-US" sz="1100" dirty="0">
                         <a:latin typeface="Calibri" charset="0"/>
@@ -6628,7 +6628,7 @@
                           <a:ea typeface="Calibri" pitchFamily="34" charset="-122"/>
                           <a:cs typeface="Calibri" pitchFamily="34" charset="-120"/>
                         </a:rPr>
-                        <a:t>HiLetgo GY-521 MPU-6050 (3-pack)</a:t>
+                        <a:t>SHILLEHTEK GY-521 MPU-6050, pre-soldered (2-pack)</a:t>
                       </a:r>
                       <a:endParaRPr lang="en-US" sz="1100" dirty="0">
                         <a:latin typeface="Calibri" charset="0"/>
@@ -6822,7 +6822,7 @@
                           <a:latin typeface="Calibri" pitchFamily="34" charset="0"/>
                           <a:ea typeface="Calibri" pitchFamily="34" charset="-122"/>
                           <a:cs typeface="Calibri" pitchFamily="34" charset="-120"/>
-                          <a:hlinkClick r:id="rId3" invalidUrl="" action="" tgtFrame="" tooltip="https://www.amazon.ca/Hiletgo-MPU6050-Acc%C3%A9l%C3%A9rom%C3%A8tre-gyroscope-convertisseur/dp/B00LP25V1A" history="1" highlightClick="0" endSnd="0">
+                          <a:hlinkClick r:id="rId3" invalidUrl="" action="" tgtFrame="" tooltip="https://www.amazon.ca/Pre-Soldered-Accelerometer-Raspberry-Compatible-Arduino/dp/B0BMY15TC4" history="1" highlightClick="0" endSnd="0">
                             <a:extLst>
                               <a:ext uri="{A12FA001-AC4F-418D-AE19-62706E023703}">
                                 <ahyp:hlinkClr xmlns:ahyp="http://schemas.microsoft.com/office/drawing/2018/hyperlinkcolor" val="tx"/>
@@ -6897,7 +6897,7 @@
                           <a:ea typeface="Calibri" pitchFamily="34" charset="-122"/>
                           <a:cs typeface="Calibri" pitchFamily="34" charset="-120"/>
                         </a:rPr>
-                        <a:t>LiPo 3.7 V 500 mAh 503035, JST PH2.0</a:t>
+                        <a:t>ELEGOO 120 Dupont jumper wires (F-F, M-F, M-M)</a:t>
                       </a:r>
                       <a:endParaRPr lang="en-US" sz="1100" dirty="0">
                         <a:latin typeface="Calibri" charset="0"/>
@@ -6962,7 +6962,7 @@
                           <a:ea typeface="Calibri" pitchFamily="34" charset="-122"/>
                           <a:cs typeface="Calibri" pitchFamily="34" charset="-120"/>
                         </a:rPr>
-                        <a:t>35 × 30 × 6 mm</a:t>
+                        <a:t>20 cm each</a:t>
                       </a:r>
                       <a:endParaRPr lang="en-US" sz="1100" dirty="0">
                         <a:latin typeface="Calibri" charset="0"/>
@@ -7027,7 +7027,7 @@
                           <a:ea typeface="Calibri" pitchFamily="34" charset="-122"/>
                           <a:cs typeface="Calibri" pitchFamily="34" charset="-120"/>
                         </a:rPr>
-                        <a:t>Battery (≈ 4–5 h — test it)</a:t>
+                        <a:t>Plug-in wiring, no soldering</a:t>
                       </a:r>
                       <a:endParaRPr lang="en-US" sz="1100" dirty="0">
                         <a:latin typeface="Calibri" charset="0"/>
@@ -7091,7 +7091,7 @@
                           <a:latin typeface="Calibri" pitchFamily="34" charset="0"/>
                           <a:ea typeface="Calibri" pitchFamily="34" charset="-122"/>
                           <a:cs typeface="Calibri" pitchFamily="34" charset="-120"/>
-                          <a:hlinkClick r:id="rId4" invalidUrl="" action="" tgtFrame="" tooltip="https://www.amazon.ca/Battery-Rechargeable-Lithium-Polymer-Connector/dp/B07S84SBV3" history="1" highlightClick="0" endSnd="0">
+                          <a:hlinkClick r:id="rId4" invalidUrl="" action="" tgtFrame="" tooltip="https://www.amazon.ca/Elegoo-120pcs-Multicolored-Breadboard-arduino/dp/B01EV70C78" history="1" highlightClick="0" endSnd="0">
                             <a:extLst>
                               <a:ext uri="{A12FA001-AC4F-418D-AE19-62706E023703}">
                                 <ahyp:hlinkClr xmlns:ahyp="http://schemas.microsoft.com/office/drawing/2018/hyperlinkcolor" val="tx"/>
@@ -7166,7 +7166,7 @@
                           <a:ea typeface="Calibri" pitchFamily="34" charset="-122"/>
                           <a:cs typeface="Calibri" pitchFamily="34" charset="-120"/>
                         </a:rPr>
-                        <a:t>Treedix TP4056 USB-C charger (6-pack)</a:t>
+                        <a:t>Running armband phone pouch</a:t>
                       </a:r>
                       <a:endParaRPr lang="en-US" sz="1100" dirty="0">
                         <a:latin typeface="Calibri" charset="0"/>
@@ -7231,7 +7231,7 @@
                           <a:ea typeface="Calibri" pitchFamily="34" charset="-122"/>
                           <a:cs typeface="Calibri" pitchFamily="34" charset="-120"/>
                         </a:rPr>
-                        <a:t>≈ 28 × 17 mm</a:t>
+                        <a:t>fits phones up to 6.9 in</a:t>
                       </a:r>
                       <a:endParaRPr lang="en-US" sz="1100" dirty="0">
                         <a:latin typeface="Calibri" charset="0"/>
@@ -7296,7 +7296,7 @@
                           <a:ea typeface="Calibri" pitchFamily="34" charset="-122"/>
                           <a:cs typeface="Calibri" pitchFamily="34" charset="-120"/>
                         </a:rPr>
-                        <a:t>Charges the battery safely</a:t>
+                        <a:t>Holds the ESP32 on the forearm</a:t>
                       </a:r>
                       <a:endParaRPr lang="en-US" sz="1100" dirty="0">
                         <a:latin typeface="Calibri" charset="0"/>
@@ -7360,7 +7360,7 @@
                           <a:latin typeface="Calibri" pitchFamily="34" charset="0"/>
                           <a:ea typeface="Calibri" pitchFamily="34" charset="-122"/>
                           <a:cs typeface="Calibri" pitchFamily="34" charset="-120"/>
-                          <a:hlinkClick r:id="rId5" invalidUrl="" action="" tgtFrame="" tooltip="https://www.amazon.ca/Treedix-Lithium-Charging-Protection-Functions/dp/B09LTVTY5J" history="1" highlightClick="0" endSnd="0">
+                          <a:hlinkClick r:id="rId5" invalidUrl="" action="" tgtFrame="" tooltip="https://www.amazon.ca/Running-Armband-Samsung-Resistant-Emergency/dp/B08HZ3BPK4" history="1" highlightClick="0" endSnd="0">
                             <a:extLst>
                               <a:ext uri="{A12FA001-AC4F-418D-AE19-62706E023703}">
                                 <ahyp:hlinkClr xmlns:ahyp="http://schemas.microsoft.com/office/drawing/2018/hyperlinkcolor" val="tx"/>
@@ -7435,7 +7435,7 @@
                           <a:ea typeface="Calibri" pitchFamily="34" charset="-122"/>
                           <a:cs typeface="Calibri" pitchFamily="34" charset="-120"/>
                         </a:rPr>
-                        <a:t>Rakstore TPS63020 3.3 V buck-boost</a:t>
+                        <a:t>Anker Powerline+ USB-A to USB-C cable</a:t>
                       </a:r>
                       <a:endParaRPr lang="en-US" sz="1100" dirty="0">
                         <a:latin typeface="Calibri" charset="0"/>
@@ -7500,7 +7500,7 @@
                           <a:ea typeface="Calibri" pitchFamily="34" charset="-122"/>
                           <a:cs typeface="Calibri" pitchFamily="34" charset="-120"/>
                         </a:rPr>
-                        <a:t>1.8–5 V in → 3.3 V out</a:t>
+                        <a:t>3 m (10 ft)</a:t>
                       </a:r>
                       <a:endParaRPr lang="en-US" sz="1100" dirty="0">
                         <a:latin typeface="Calibri" charset="0"/>
@@ -7565,7 +7565,7 @@
                           <a:ea typeface="Calibri" pitchFamily="34" charset="-122"/>
                           <a:cs typeface="Calibri" pitchFamily="34" charset="-120"/>
                         </a:rPr>
-                        <a:t>Steady 3.3 V as the battery drains</a:t>
+                        <a:t>All-night power from a phone charger</a:t>
                       </a:r>
                       <a:endParaRPr lang="en-US" sz="1100" dirty="0">
                         <a:latin typeface="Calibri" charset="0"/>
@@ -7629,7 +7629,7 @@
                           <a:latin typeface="Calibri" pitchFamily="34" charset="0"/>
                           <a:ea typeface="Calibri" pitchFamily="34" charset="-122"/>
                           <a:cs typeface="Calibri" pitchFamily="34" charset="-120"/>
-                          <a:hlinkClick r:id="rId6" invalidUrl="" action="" tgtFrame="" tooltip="https://www.amazon.ca/Rakstore-TPS63020-Automatic-Buck-Boost-Converter/dp/B09V4SHLTJ" history="1" highlightClick="0" endSnd="0">
+                          <a:hlinkClick r:id="rId6" invalidUrl="" action="" tgtFrame="" tooltip="https://www.amazon.ca/Anker-Powerline-Double-Braided-Charging-Samsung/dp/B07G148YMS" history="1" highlightClick="0" endSnd="0">
                             <a:extLst>
                               <a:ext uri="{A12FA001-AC4F-418D-AE19-62706E023703}">
                                 <ahyp:hlinkClr xmlns:ahyp="http://schemas.microsoft.com/office/drawing/2018/hyperlinkcolor" val="tx"/>
@@ -7704,7 +7704,7 @@
                           <a:ea typeface="Calibri" pitchFamily="34" charset="-122"/>
                           <a:cs typeface="Calibri" pitchFamily="34" charset="-120"/>
                         </a:rPr>
-                        <a:t>HoHaing ABS project box (8-pack)</a:t>
+                        <a:t>Anker USB-C to USB-A adapter (2-pack)</a:t>
                       </a:r>
                       <a:endParaRPr lang="en-US" sz="1100" dirty="0">
                         <a:latin typeface="Calibri" charset="0"/>
@@ -7769,7 +7769,7 @@
                           <a:ea typeface="Calibri" pitchFamily="34" charset="-122"/>
                           <a:cs typeface="Calibri" pitchFamily="34" charset="-120"/>
                         </a:rPr>
-                        <a:t>70 × 45 × 29 mm · inside 66 × 41 × 25 mm</a:t>
+                        <a:t>USB-C → USB-A</a:t>
                       </a:r>
                       <a:endParaRPr lang="en-US" sz="1100" dirty="0">
                         <a:latin typeface="Calibri" charset="0"/>
@@ -7834,7 +7834,7 @@
                           <a:ea typeface="Calibri" pitchFamily="34" charset="-122"/>
                           <a:cs typeface="Calibri" pitchFamily="34" charset="-120"/>
                         </a:rPr>
-                        <a:t>The sensor case</a:t>
+                        <a:t>Plug the cable into a MacBook</a:t>
                       </a:r>
                       <a:endParaRPr lang="en-US" sz="1100" dirty="0">
                         <a:latin typeface="Calibri" charset="0"/>
@@ -7898,7 +7898,7 @@
                           <a:latin typeface="Calibri" pitchFamily="34" charset="0"/>
                           <a:ea typeface="Calibri" pitchFamily="34" charset="-122"/>
                           <a:cs typeface="Calibri" pitchFamily="34" charset="-120"/>
-                          <a:hlinkClick r:id="rId7" invalidUrl="" action="" tgtFrame="" tooltip="https://www.amazon.ca/HoHaing-Electrical-Junction-Enclosure-Electronic/dp/B0CGV22KKG" history="1" highlightClick="0" endSnd="0">
+                          <a:hlinkClick r:id="rId7" invalidUrl="" action="" tgtFrame="" tooltip="https://www.amazon.ca/Adapter-Anker-High-Speed-Transfer-Notebook/dp/B08HZ6PS61" history="1" highlightClick="0" endSnd="0">
                             <a:extLst>
                               <a:ext uri="{A12FA001-AC4F-418D-AE19-62706E023703}">
                                 <ahyp:hlinkClr xmlns:ahyp="http://schemas.microsoft.com/office/drawing/2018/hyperlinkcolor" val="tx"/>
@@ -8038,7 +8038,7 @@
                           <a:ea typeface="Calibri" pitchFamily="34" charset="-122"/>
                           <a:cs typeface="Calibri" pitchFamily="34" charset="-120"/>
                         </a:rPr>
-                        <a:t>25 mm wide · cut ≈ 300 mm + ≈ 80 mm</a:t>
+                        <a:t>25 mm wide · cut ≈ 80 mm</a:t>
                       </a:r>
                       <a:endParaRPr lang="en-US" sz="1100" dirty="0">
                         <a:latin typeface="Calibri" charset="0"/>
@@ -8103,7 +8103,7 @@
                           <a:ea typeface="Calibri" pitchFamily="34" charset="-122"/>
                           <a:cs typeface="Calibri" pitchFamily="34" charset="-120"/>
                         </a:rPr>
-                        <a:t>Arm strap + finger loop</a:t>
+                        <a:t>Finger loop</a:t>
                       </a:r>
                       <a:endParaRPr lang="en-US" sz="1100" dirty="0">
                         <a:latin typeface="Calibri" charset="0"/>
@@ -8242,275 +8242,6 @@
                           <a:ea typeface="Calibri" pitchFamily="34" charset="-122"/>
                           <a:cs typeface="Calibri" pitchFamily="34" charset="-120"/>
                         </a:rPr>
-                        <a:t>100 kΩ resistors (2) + jumper wires</a:t>
-                      </a:r>
-                      <a:endParaRPr lang="en-US" sz="1100" dirty="0">
-                        <a:latin typeface="Calibri" charset="0"/>
-                        <a:ea typeface="Calibri" charset="0"/>
-                        <a:cs typeface="Calibri" charset="0"/>
-                      </a:endParaRPr>
-                    </a:p>
-                  </a:txBody>
-                  <a:tcPr marL="91440" marR="91440" marT="45720" marB="45720" anchor="ctr">
-                    <a:lnL w="12700" cap="flat" cmpd="sng" algn="ctr">
-                      <a:solidFill>
-                        <a:srgbClr val="DBE1EC"/>
-                      </a:solidFill>
-                      <a:prstDash val="solid"/>
-                      <a:round/>
-                      <a:headEnd type="none" w="med" len="med"/>
-                      <a:tailEnd type="none" w="med" len="med"/>
-                    </a:lnL>
-                    <a:lnR w="12700" cap="flat" cmpd="sng" algn="ctr">
-                      <a:solidFill>
-                        <a:srgbClr val="DBE1EC"/>
-                      </a:solidFill>
-                      <a:prstDash val="solid"/>
-                      <a:round/>
-                      <a:headEnd type="none" w="med" len="med"/>
-                      <a:tailEnd type="none" w="med" len="med"/>
-                    </a:lnR>
-                    <a:lnT w="12700" cap="flat" cmpd="sng" algn="ctr">
-                      <a:solidFill>
-                        <a:srgbClr val="DBE1EC"/>
-                      </a:solidFill>
-                      <a:prstDash val="solid"/>
-                      <a:round/>
-                      <a:headEnd type="none" w="med" len="med"/>
-                      <a:tailEnd type="none" w="med" len="med"/>
-                    </a:lnT>
-                    <a:lnB w="12700" cap="flat" cmpd="sng" algn="ctr">
-                      <a:solidFill>
-                        <a:srgbClr val="DBE1EC"/>
-                      </a:solidFill>
-                      <a:prstDash val="solid"/>
-                      <a:round/>
-                      <a:headEnd type="none" w="med" len="med"/>
-                      <a:tailEnd type="none" w="med" len="med"/>
-                    </a:lnB>
-                  </a:tcPr>
-                </a:tc>
-                <a:tc>
-                  <a:txBody>
-                    <a:bodyPr/>
-                    <a:lstStyle/>
-                    <a:p>
-                      <a:pPr indent="0" marL="0">
-                        <a:buNone/>
-                      </a:pPr>
-                      <a:r>
-                        <a:rPr lang="en-US" sz="1100" dirty="0">
-                          <a:solidFill>
-                            <a:srgbClr val="141A26"/>
-                          </a:solidFill>
-                          <a:latin typeface="Calibri" pitchFamily="34" charset="0"/>
-                          <a:ea typeface="Calibri" pitchFamily="34" charset="-122"/>
-                          <a:cs typeface="Calibri" pitchFamily="34" charset="-120"/>
-                        </a:rPr>
-                        <a:t>1/4 W</a:t>
-                      </a:r>
-                      <a:endParaRPr lang="en-US" sz="1100" dirty="0">
-                        <a:latin typeface="Calibri" charset="0"/>
-                        <a:ea typeface="Calibri" charset="0"/>
-                        <a:cs typeface="Calibri" charset="0"/>
-                      </a:endParaRPr>
-                    </a:p>
-                  </a:txBody>
-                  <a:tcPr marL="91440" marR="91440" marT="45720" marB="45720" anchor="ctr">
-                    <a:lnL w="12700" cap="flat" cmpd="sng" algn="ctr">
-                      <a:solidFill>
-                        <a:srgbClr val="DBE1EC"/>
-                      </a:solidFill>
-                      <a:prstDash val="solid"/>
-                      <a:round/>
-                      <a:headEnd type="none" w="med" len="med"/>
-                      <a:tailEnd type="none" w="med" len="med"/>
-                    </a:lnL>
-                    <a:lnR w="12700" cap="flat" cmpd="sng" algn="ctr">
-                      <a:solidFill>
-                        <a:srgbClr val="DBE1EC"/>
-                      </a:solidFill>
-                      <a:prstDash val="solid"/>
-                      <a:round/>
-                      <a:headEnd type="none" w="med" len="med"/>
-                      <a:tailEnd type="none" w="med" len="med"/>
-                    </a:lnR>
-                    <a:lnT w="12700" cap="flat" cmpd="sng" algn="ctr">
-                      <a:solidFill>
-                        <a:srgbClr val="DBE1EC"/>
-                      </a:solidFill>
-                      <a:prstDash val="solid"/>
-                      <a:round/>
-                      <a:headEnd type="none" w="med" len="med"/>
-                      <a:tailEnd type="none" w="med" len="med"/>
-                    </a:lnT>
-                    <a:lnB w="12700" cap="flat" cmpd="sng" algn="ctr">
-                      <a:solidFill>
-                        <a:srgbClr val="DBE1EC"/>
-                      </a:solidFill>
-                      <a:prstDash val="solid"/>
-                      <a:round/>
-                      <a:headEnd type="none" w="med" len="med"/>
-                      <a:tailEnd type="none" w="med" len="med"/>
-                    </a:lnB>
-                  </a:tcPr>
-                </a:tc>
-                <a:tc>
-                  <a:txBody>
-                    <a:bodyPr/>
-                    <a:lstStyle/>
-                    <a:p>
-                      <a:pPr indent="0" marL="0">
-                        <a:buNone/>
-                      </a:pPr>
-                      <a:r>
-                        <a:rPr lang="en-US" sz="1100" dirty="0">
-                          <a:solidFill>
-                            <a:srgbClr val="141A26"/>
-                          </a:solidFill>
-                          <a:latin typeface="Calibri" pitchFamily="34" charset="0"/>
-                          <a:ea typeface="Calibri" pitchFamily="34" charset="-122"/>
-                          <a:cs typeface="Calibri" pitchFamily="34" charset="-120"/>
-                        </a:rPr>
-                        <a:t>Battery-level reading on GPIO 34</a:t>
-                      </a:r>
-                      <a:endParaRPr lang="en-US" sz="1100" dirty="0">
-                        <a:latin typeface="Calibri" charset="0"/>
-                        <a:ea typeface="Calibri" charset="0"/>
-                        <a:cs typeface="Calibri" charset="0"/>
-                      </a:endParaRPr>
-                    </a:p>
-                  </a:txBody>
-                  <a:tcPr marL="91440" marR="91440" marT="45720" marB="45720" anchor="ctr">
-                    <a:lnL w="12700" cap="flat" cmpd="sng" algn="ctr">
-                      <a:solidFill>
-                        <a:srgbClr val="DBE1EC"/>
-                      </a:solidFill>
-                      <a:prstDash val="solid"/>
-                      <a:round/>
-                      <a:headEnd type="none" w="med" len="med"/>
-                      <a:tailEnd type="none" w="med" len="med"/>
-                    </a:lnL>
-                    <a:lnR w="12700" cap="flat" cmpd="sng" algn="ctr">
-                      <a:solidFill>
-                        <a:srgbClr val="DBE1EC"/>
-                      </a:solidFill>
-                      <a:prstDash val="solid"/>
-                      <a:round/>
-                      <a:headEnd type="none" w="med" len="med"/>
-                      <a:tailEnd type="none" w="med" len="med"/>
-                    </a:lnR>
-                    <a:lnT w="12700" cap="flat" cmpd="sng" algn="ctr">
-                      <a:solidFill>
-                        <a:srgbClr val="DBE1EC"/>
-                      </a:solidFill>
-                      <a:prstDash val="solid"/>
-                      <a:round/>
-                      <a:headEnd type="none" w="med" len="med"/>
-                      <a:tailEnd type="none" w="med" len="med"/>
-                    </a:lnT>
-                    <a:lnB w="12700" cap="flat" cmpd="sng" algn="ctr">
-                      <a:solidFill>
-                        <a:srgbClr val="DBE1EC"/>
-                      </a:solidFill>
-                      <a:prstDash val="solid"/>
-                      <a:round/>
-                      <a:headEnd type="none" w="med" len="med"/>
-                      <a:tailEnd type="none" w="med" len="med"/>
-                    </a:lnB>
-                  </a:tcPr>
-                </a:tc>
-                <a:tc>
-                  <a:txBody>
-                    <a:bodyPr/>
-                    <a:lstStyle/>
-                    <a:p>
-                      <a:pPr indent="0" marL="0">
-                        <a:buNone/>
-                      </a:pPr>
-                      <a:r>
-                        <a:rPr lang="en-US" sz="1100" u="sng" dirty="0">
-                          <a:solidFill>
-                            <a:srgbClr val="1F8A9C"/>
-                          </a:solidFill>
-                          <a:latin typeface="Calibri" pitchFamily="34" charset="0"/>
-                          <a:ea typeface="Calibri" pitchFamily="34" charset="-122"/>
-                          <a:cs typeface="Calibri" pitchFamily="34" charset="-120"/>
-                          <a:hlinkClick r:id="rId9" invalidUrl="" action="" tgtFrame="" tooltip="https://www.amazon.ca/s?k=100k+ohm+resistor+1%2F4w" history="1" highlightClick="0" endSnd="0">
-                            <a:extLst>
-                              <a:ext uri="{A12FA001-AC4F-418D-AE19-62706E023703}">
-                                <ahyp:hlinkClr xmlns:ahyp="http://schemas.microsoft.com/office/drawing/2018/hyperlinkcolor" val="tx"/>
-                              </a:ext>
-                            </a:extLst>
-                          </a:hlinkClick>
-                        </a:rPr>
-                        <a:t>Amazon.ca</a:t>
-                      </a:r>
-                      <a:endParaRPr lang="en-US" sz="1100" dirty="0">
-                        <a:latin typeface="Calibri" charset="0"/>
-                        <a:ea typeface="Calibri" charset="0"/>
-                        <a:cs typeface="Calibri" charset="0"/>
-                      </a:endParaRPr>
-                    </a:p>
-                  </a:txBody>
-                  <a:tcPr marL="91440" marR="91440" marT="45720" marB="45720" anchor="ctr">
-                    <a:lnL w="12700" cap="flat" cmpd="sng" algn="ctr">
-                      <a:solidFill>
-                        <a:srgbClr val="DBE1EC"/>
-                      </a:solidFill>
-                      <a:prstDash val="solid"/>
-                      <a:round/>
-                      <a:headEnd type="none" w="med" len="med"/>
-                      <a:tailEnd type="none" w="med" len="med"/>
-                    </a:lnL>
-                    <a:lnR w="12700" cap="flat" cmpd="sng" algn="ctr">
-                      <a:solidFill>
-                        <a:srgbClr val="DBE1EC"/>
-                      </a:solidFill>
-                      <a:prstDash val="solid"/>
-                      <a:round/>
-                      <a:headEnd type="none" w="med" len="med"/>
-                      <a:tailEnd type="none" w="med" len="med"/>
-                    </a:lnR>
-                    <a:lnT w="12700" cap="flat" cmpd="sng" algn="ctr">
-                      <a:solidFill>
-                        <a:srgbClr val="DBE1EC"/>
-                      </a:solidFill>
-                      <a:prstDash val="solid"/>
-                      <a:round/>
-                      <a:headEnd type="none" w="med" len="med"/>
-                      <a:tailEnd type="none" w="med" len="med"/>
-                    </a:lnT>
-                    <a:lnB w="12700" cap="flat" cmpd="sng" algn="ctr">
-                      <a:solidFill>
-                        <a:srgbClr val="DBE1EC"/>
-                      </a:solidFill>
-                      <a:prstDash val="solid"/>
-                      <a:round/>
-                      <a:headEnd type="none" w="med" len="med"/>
-                      <a:tailEnd type="none" w="med" len="med"/>
-                    </a:lnB>
-                  </a:tcPr>
-                </a:tc>
-              </a:tr>
-              <a:tr h="384048">
-                <a:tc>
-                  <a:txBody>
-                    <a:bodyPr/>
-                    <a:lstStyle/>
-                    <a:p>
-                      <a:pPr indent="0" marL="0">
-                        <a:buNone/>
-                      </a:pPr>
-                      <a:r>
-                        <a:rPr lang="en-US" sz="1100" dirty="0">
-                          <a:solidFill>
-                            <a:srgbClr val="141A26"/>
-                          </a:solidFill>
-                          <a:latin typeface="Calibri" pitchFamily="34" charset="0"/>
-                          <a:ea typeface="Calibri" pitchFamily="34" charset="-122"/>
-                          <a:cs typeface="Calibri" pitchFamily="34" charset="-120"/>
-                        </a:rPr>
                         <a:t>Elite Medica fingertip pulse oximeter</a:t>
                       </a:r>
                       <a:endParaRPr lang="en-US" sz="1100" dirty="0">
@@ -8705,7 +8436,7 @@
                           <a:latin typeface="Calibri" pitchFamily="34" charset="0"/>
                           <a:ea typeface="Calibri" pitchFamily="34" charset="-122"/>
                           <a:cs typeface="Calibri" pitchFamily="34" charset="-120"/>
-                          <a:hlinkClick r:id="rId10" invalidUrl="" action="" tgtFrame="" tooltip="https://www.amazon.ca/Elite-Medica-Fingertip-Saturation-Batteries/dp/B0DSGP91PB" history="1" highlightClick="0" endSnd="0">
+                          <a:hlinkClick r:id="rId9" invalidUrl="" action="" tgtFrame="" tooltip="https://www.amazon.ca/Elite-Medica-Fingertip-Saturation-Batteries/dp/B0DSGP91PB" history="1" highlightClick="0" endSnd="0">
                             <a:extLst>
                               <a:ext uri="{A12FA001-AC4F-418D-AE19-62706E023703}">
                                 <ahyp:hlinkClr xmlns:ahyp="http://schemas.microsoft.com/office/drawing/2018/hyperlinkcolor" val="tx"/>
@@ -8799,7 +8530,7 @@
                 <a:ea typeface="Calibri" pitchFamily="34" charset="-122"/>
                 <a:cs typeface="Calibri" pitchFamily="34" charset="-120"/>
               </a:rPr>
-              <a:t>Every part is on Amazon.ca (click Buy). Prices change and several items are multi-packs. Sizes from the listings — boards vary about ±2 mm, so measure yours.</a:t>
+              <a:t>Every part is on Amazon.ca (click Buy). Prices change and several items are multi-packs. Only the MAX30102's 4 header pins need soldering (about 5 minutes); everything else plugs in.</a:t>
             </a:r>
             <a:endParaRPr lang="en-US" sz="1150" dirty="0"/>
           </a:p>
@@ -9053,7 +8784,7 @@
                 <a:ea typeface="Calibri" pitchFamily="34" charset="-122"/>
                 <a:cs typeface="Calibri" pitchFamily="34" charset="-120"/>
               </a:rPr>
-              <a:t>Build: wire MAX30102 and MPU-6050 to the ESP32 (SDA→21, SCL→22, 3V3, GND); battery → TP4056 → 3.3 V regulator → ESP32 3V3; battery divider to GPIO 34. Flash firmware v3.</a:t>
+              <a:t>Build: plug the MAX30102 into 3V3 / GND / GPIO 21 / 22 and the GY-521 into VIN / GND / SDA→GPIO 33 / SCL→GPIO 32 (two separate I²C buses, no splices); ESP32 in the armband, USB power. Flash firmware v3.1.</a:t>
             </a:r>
             <a:endParaRPr lang="en-US" sz="1250" dirty="0"/>
           </a:p>
@@ -9209,7 +8940,7 @@
                 <a:ea typeface="Calibri" pitchFamily="34" charset="-122"/>
                 <a:cs typeface="Calibri" pitchFamily="34" charset="-120"/>
               </a:rPr>
-              <a:t>Battery runtime test: charge fully, stream with a finger on the sensor, record the time until data stops. Repeat 3 times; report the average.</a:t>
+              <a:t>Full-night power test: on USB power, stream with a finger on the sensor for 8 h; confirm there are no gaps in the data.</a:t>
             </a:r>
             <a:endParaRPr lang="en-US" sz="1250" dirty="0"/>
           </a:p>
@@ -9443,7 +9174,7 @@
                 <a:ea typeface="Calibri" pitchFamily="34" charset="-122"/>
                 <a:cs typeface="Calibri" pitchFamily="34" charset="-120"/>
               </a:rPr>
-              <a:t>Recorded nights: ≥ 5 nights; case on the upper arm, finger clip on the index finger; record.py logs all night; note bedtime and wake time.</a:t>
+              <a:t>Recorded nights: ≥ 5 nights; armband on the forearm, finger clip on the index finger; record.py logs all night; note bedtime and wake time.</a:t>
             </a:r>
             <a:endParaRPr lang="en-US" sz="1250" dirty="0"/>
           </a:p>
@@ -9599,7 +9330,7 @@
                 <a:ea typeface="Calibri" pitchFamily="34" charset="-122"/>
                 <a:cs typeface="Calibri" pitchFamily="34" charset="-120"/>
               </a:rPr>
-              <a:t>Controls: same finger, cuff tightness, room temperature, firmware v3 and detection settings (3 % drop, 10 s, 120 s baseline).</a:t>
+              <a:t>Controls: same finger, cuff tightness, room temperature, firmware v3.1 and detection settings (3 % drop, 10 s, 120 s baseline).</a:t>
             </a:r>
             <a:endParaRPr lang="en-US" sz="1250" dirty="0"/>
           </a:p>
@@ -9775,7 +9506,7 @@
                 <a:ea typeface="Calibri" pitchFamily="34" charset="-122"/>
                 <a:cs typeface="Calibri" pitchFamily="34" charset="-120"/>
               </a:rPr>
-              <a:t>Wiring and case layout</a:t>
+              <a:t>Wiring (v1) and case layout (v2)</a:t>
             </a:r>
             <a:endParaRPr lang="en-US" sz="2800" dirty="0"/>
           </a:p>
@@ -10359,7 +10090,7 @@
                           <a:ea typeface="Calibri" pitchFamily="34" charset="-122"/>
                           <a:cs typeface="Calibri" pitchFamily="34" charset="-120"/>
                         </a:rPr>
-                        <a:t>shared I²C bus</a:t>
+                        <a:t>I²C bus 0</a:t>
                       </a:r>
                       <a:endParaRPr lang="en-US" sz="1150" dirty="0">
                         <a:latin typeface="Calibri" charset="0"/>
@@ -10491,7 +10222,7 @@
                           <a:ea typeface="Calibri" pitchFamily="34" charset="-122"/>
                           <a:cs typeface="Calibri" pitchFamily="34" charset="-120"/>
                         </a:rPr>
-                        <a:t>3V3 / GND</a:t>
+                        <a:t>VIN / GND</a:t>
                       </a:r>
                       <a:endParaRPr lang="en-US" sz="1150" dirty="0">
                         <a:latin typeface="Calibri" charset="0"/>
@@ -10556,7 +10287,7 @@
                           <a:ea typeface="Calibri" pitchFamily="34" charset="-122"/>
                           <a:cs typeface="Calibri" pitchFamily="34" charset="-120"/>
                         </a:rPr>
-                        <a:t>address 0x68</a:t>
+                        <a:t>5 V from USB</a:t>
                       </a:r>
                       <a:endParaRPr lang="en-US" sz="1150" dirty="0">
                         <a:latin typeface="Calibri" charset="0"/>
@@ -10623,7 +10354,7 @@
                           <a:ea typeface="Calibri" pitchFamily="34" charset="-122"/>
                           <a:cs typeface="Calibri" pitchFamily="34" charset="-120"/>
                         </a:rPr>
-                        <a:t>MPU-6050 SDA / SCL</a:t>
+                        <a:t>GY-521 SDA / SCL</a:t>
                       </a:r>
                       <a:endParaRPr lang="en-US" sz="1150" dirty="0">
                         <a:latin typeface="Calibri" charset="0"/>
@@ -10688,7 +10419,7 @@
                           <a:ea typeface="Calibri" pitchFamily="34" charset="-122"/>
                           <a:cs typeface="Calibri" pitchFamily="34" charset="-120"/>
                         </a:rPr>
-                        <a:t>GPIO 21 / 22</a:t>
+                        <a:t>GPIO 33 / 32</a:t>
                       </a:r>
                       <a:endParaRPr lang="en-US" sz="1150" dirty="0">
                         <a:latin typeface="Calibri" charset="0"/>
@@ -10753,7 +10484,7 @@
                           <a:ea typeface="Calibri" pitchFamily="34" charset="-122"/>
                           <a:cs typeface="Calibri" pitchFamily="34" charset="-120"/>
                         </a:rPr>
-                        <a:t>wired in parallel</a:t>
+                        <a:t>I²C bus 1, 100 kHz</a:t>
                       </a:r>
                       <a:endParaRPr lang="en-US" sz="1150" dirty="0">
                         <a:latin typeface="Calibri" charset="0"/>
@@ -10820,7 +10551,7 @@
                           <a:ea typeface="Calibri" pitchFamily="34" charset="-122"/>
                           <a:cs typeface="Calibri" pitchFamily="34" charset="-120"/>
                         </a:rPr>
-                        <a:t>Battery + / −</a:t>
+                        <a:t>Power</a:t>
                       </a:r>
                       <a:endParaRPr lang="en-US" sz="1150" dirty="0">
                         <a:latin typeface="Calibri" charset="0"/>
@@ -10885,7 +10616,7 @@
                           <a:ea typeface="Calibri" pitchFamily="34" charset="-122"/>
                           <a:cs typeface="Calibri" pitchFamily="34" charset="-120"/>
                         </a:rPr>
-                        <a:t>TP4056 B+ / B−</a:t>
+                        <a:t>USB-C port</a:t>
                       </a:r>
                       <a:endParaRPr lang="en-US" sz="1150" dirty="0">
                         <a:latin typeface="Calibri" charset="0"/>
@@ -10950,598 +10681,7 @@
                           <a:ea typeface="Calibri" pitchFamily="34" charset="-122"/>
                           <a:cs typeface="Calibri" pitchFamily="34" charset="-120"/>
                         </a:rPr>
-                        <a:t>500 mAh LiPo</a:t>
-                      </a:r>
-                      <a:endParaRPr lang="en-US" sz="1150" dirty="0">
-                        <a:latin typeface="Calibri" charset="0"/>
-                        <a:ea typeface="Calibri" charset="0"/>
-                        <a:cs typeface="Calibri" charset="0"/>
-                      </a:endParaRPr>
-                    </a:p>
-                  </a:txBody>
-                  <a:tcPr marL="91440" marR="91440" marT="45720" marB="45720" anchor="ctr">
-                    <a:lnL w="12700" cap="flat" cmpd="sng" algn="ctr">
-                      <a:solidFill>
-                        <a:srgbClr val="DBE1EC"/>
-                      </a:solidFill>
-                      <a:prstDash val="solid"/>
-                      <a:round/>
-                      <a:headEnd type="none" w="med" len="med"/>
-                      <a:tailEnd type="none" w="med" len="med"/>
-                    </a:lnL>
-                    <a:lnR w="12700" cap="flat" cmpd="sng" algn="ctr">
-                      <a:solidFill>
-                        <a:srgbClr val="DBE1EC"/>
-                      </a:solidFill>
-                      <a:prstDash val="solid"/>
-                      <a:round/>
-                      <a:headEnd type="none" w="med" len="med"/>
-                      <a:tailEnd type="none" w="med" len="med"/>
-                    </a:lnR>
-                    <a:lnT w="12700" cap="flat" cmpd="sng" algn="ctr">
-                      <a:solidFill>
-                        <a:srgbClr val="DBE1EC"/>
-                      </a:solidFill>
-                      <a:prstDash val="solid"/>
-                      <a:round/>
-                      <a:headEnd type="none" w="med" len="med"/>
-                      <a:tailEnd type="none" w="med" len="med"/>
-                    </a:lnT>
-                    <a:lnB w="12700" cap="flat" cmpd="sng" algn="ctr">
-                      <a:solidFill>
-                        <a:srgbClr val="DBE1EC"/>
-                      </a:solidFill>
-                      <a:prstDash val="solid"/>
-                      <a:round/>
-                      <a:headEnd type="none" w="med" len="med"/>
-                      <a:tailEnd type="none" w="med" len="med"/>
-                    </a:lnB>
-                  </a:tcPr>
-                </a:tc>
-              </a:tr>
-              <a:tr h="384048">
-                <a:tc>
-                  <a:txBody>
-                    <a:bodyPr/>
-                    <a:lstStyle/>
-                    <a:p>
-                      <a:pPr indent="0" marL="0">
-                        <a:buNone/>
-                      </a:pPr>
-                      <a:r>
-                        <a:rPr lang="en-US" sz="1150" dirty="0">
-                          <a:solidFill>
-                            <a:srgbClr val="141A26"/>
-                          </a:solidFill>
-                          <a:latin typeface="Calibri" pitchFamily="34" charset="0"/>
-                          <a:ea typeface="Calibri" pitchFamily="34" charset="-122"/>
-                          <a:cs typeface="Calibri" pitchFamily="34" charset="-120"/>
-                        </a:rPr>
-                        <a:t>TP4056 OUT+ / OUT−</a:t>
-                      </a:r>
-                      <a:endParaRPr lang="en-US" sz="1150" dirty="0">
-                        <a:latin typeface="Calibri" charset="0"/>
-                        <a:ea typeface="Calibri" charset="0"/>
-                        <a:cs typeface="Calibri" charset="0"/>
-                      </a:endParaRPr>
-                    </a:p>
-                  </a:txBody>
-                  <a:tcPr marL="91440" marR="91440" marT="45720" marB="45720" anchor="ctr">
-                    <a:lnL w="12700" cap="flat" cmpd="sng" algn="ctr">
-                      <a:solidFill>
-                        <a:srgbClr val="DBE1EC"/>
-                      </a:solidFill>
-                      <a:prstDash val="solid"/>
-                      <a:round/>
-                      <a:headEnd type="none" w="med" len="med"/>
-                      <a:tailEnd type="none" w="med" len="med"/>
-                    </a:lnL>
-                    <a:lnR w="12700" cap="flat" cmpd="sng" algn="ctr">
-                      <a:solidFill>
-                        <a:srgbClr val="DBE1EC"/>
-                      </a:solidFill>
-                      <a:prstDash val="solid"/>
-                      <a:round/>
-                      <a:headEnd type="none" w="med" len="med"/>
-                      <a:tailEnd type="none" w="med" len="med"/>
-                    </a:lnR>
-                    <a:lnT w="12700" cap="flat" cmpd="sng" algn="ctr">
-                      <a:solidFill>
-                        <a:srgbClr val="DBE1EC"/>
-                      </a:solidFill>
-                      <a:prstDash val="solid"/>
-                      <a:round/>
-                      <a:headEnd type="none" w="med" len="med"/>
-                      <a:tailEnd type="none" w="med" len="med"/>
-                    </a:lnT>
-                    <a:lnB w="12700" cap="flat" cmpd="sng" algn="ctr">
-                      <a:solidFill>
-                        <a:srgbClr val="DBE1EC"/>
-                      </a:solidFill>
-                      <a:prstDash val="solid"/>
-                      <a:round/>
-                      <a:headEnd type="none" w="med" len="med"/>
-                      <a:tailEnd type="none" w="med" len="med"/>
-                    </a:lnB>
-                  </a:tcPr>
-                </a:tc>
-                <a:tc>
-                  <a:txBody>
-                    <a:bodyPr/>
-                    <a:lstStyle/>
-                    <a:p>
-                      <a:pPr indent="0" marL="0">
-                        <a:buNone/>
-                      </a:pPr>
-                      <a:r>
-                        <a:rPr lang="en-US" sz="1150" dirty="0">
-                          <a:solidFill>
-                            <a:srgbClr val="141A26"/>
-                          </a:solidFill>
-                          <a:latin typeface="Calibri" pitchFamily="34" charset="0"/>
-                          <a:ea typeface="Calibri" pitchFamily="34" charset="-122"/>
-                          <a:cs typeface="Calibri" pitchFamily="34" charset="-120"/>
-                        </a:rPr>
-                        <a:t>Regulator VIN / GND</a:t>
-                      </a:r>
-                      <a:endParaRPr lang="en-US" sz="1150" dirty="0">
-                        <a:latin typeface="Calibri" charset="0"/>
-                        <a:ea typeface="Calibri" charset="0"/>
-                        <a:cs typeface="Calibri" charset="0"/>
-                      </a:endParaRPr>
-                    </a:p>
-                  </a:txBody>
-                  <a:tcPr marL="91440" marR="91440" marT="45720" marB="45720" anchor="ctr">
-                    <a:lnL w="12700" cap="flat" cmpd="sng" algn="ctr">
-                      <a:solidFill>
-                        <a:srgbClr val="DBE1EC"/>
-                      </a:solidFill>
-                      <a:prstDash val="solid"/>
-                      <a:round/>
-                      <a:headEnd type="none" w="med" len="med"/>
-                      <a:tailEnd type="none" w="med" len="med"/>
-                    </a:lnL>
-                    <a:lnR w="12700" cap="flat" cmpd="sng" algn="ctr">
-                      <a:solidFill>
-                        <a:srgbClr val="DBE1EC"/>
-                      </a:solidFill>
-                      <a:prstDash val="solid"/>
-                      <a:round/>
-                      <a:headEnd type="none" w="med" len="med"/>
-                      <a:tailEnd type="none" w="med" len="med"/>
-                    </a:lnR>
-                    <a:lnT w="12700" cap="flat" cmpd="sng" algn="ctr">
-                      <a:solidFill>
-                        <a:srgbClr val="DBE1EC"/>
-                      </a:solidFill>
-                      <a:prstDash val="solid"/>
-                      <a:round/>
-                      <a:headEnd type="none" w="med" len="med"/>
-                      <a:tailEnd type="none" w="med" len="med"/>
-                    </a:lnT>
-                    <a:lnB w="12700" cap="flat" cmpd="sng" algn="ctr">
-                      <a:solidFill>
-                        <a:srgbClr val="DBE1EC"/>
-                      </a:solidFill>
-                      <a:prstDash val="solid"/>
-                      <a:round/>
-                      <a:headEnd type="none" w="med" len="med"/>
-                      <a:tailEnd type="none" w="med" len="med"/>
-                    </a:lnB>
-                  </a:tcPr>
-                </a:tc>
-                <a:tc>
-                  <a:txBody>
-                    <a:bodyPr/>
-                    <a:lstStyle/>
-                    <a:p>
-                      <a:pPr indent="0" marL="0">
-                        <a:buNone/>
-                      </a:pPr>
-                      <a:r>
-                        <a:rPr lang="en-US" sz="1150" dirty="0">
-                          <a:solidFill>
-                            <a:srgbClr val="141A26"/>
-                          </a:solidFill>
-                          <a:latin typeface="Calibri" pitchFamily="34" charset="0"/>
-                          <a:ea typeface="Calibri" pitchFamily="34" charset="-122"/>
-                          <a:cs typeface="Calibri" pitchFamily="34" charset="-120"/>
-                        </a:rPr>
-                        <a:t>TPS63020 3.3 V</a:t>
-                      </a:r>
-                      <a:endParaRPr lang="en-US" sz="1150" dirty="0">
-                        <a:latin typeface="Calibri" charset="0"/>
-                        <a:ea typeface="Calibri" charset="0"/>
-                        <a:cs typeface="Calibri" charset="0"/>
-                      </a:endParaRPr>
-                    </a:p>
-                  </a:txBody>
-                  <a:tcPr marL="91440" marR="91440" marT="45720" marB="45720" anchor="ctr">
-                    <a:lnL w="12700" cap="flat" cmpd="sng" algn="ctr">
-                      <a:solidFill>
-                        <a:srgbClr val="DBE1EC"/>
-                      </a:solidFill>
-                      <a:prstDash val="solid"/>
-                      <a:round/>
-                      <a:headEnd type="none" w="med" len="med"/>
-                      <a:tailEnd type="none" w="med" len="med"/>
-                    </a:lnL>
-                    <a:lnR w="12700" cap="flat" cmpd="sng" algn="ctr">
-                      <a:solidFill>
-                        <a:srgbClr val="DBE1EC"/>
-                      </a:solidFill>
-                      <a:prstDash val="solid"/>
-                      <a:round/>
-                      <a:headEnd type="none" w="med" len="med"/>
-                      <a:tailEnd type="none" w="med" len="med"/>
-                    </a:lnR>
-                    <a:lnT w="12700" cap="flat" cmpd="sng" algn="ctr">
-                      <a:solidFill>
-                        <a:srgbClr val="DBE1EC"/>
-                      </a:solidFill>
-                      <a:prstDash val="solid"/>
-                      <a:round/>
-                      <a:headEnd type="none" w="med" len="med"/>
-                      <a:tailEnd type="none" w="med" len="med"/>
-                    </a:lnT>
-                    <a:lnB w="12700" cap="flat" cmpd="sng" algn="ctr">
-                      <a:solidFill>
-                        <a:srgbClr val="DBE1EC"/>
-                      </a:solidFill>
-                      <a:prstDash val="solid"/>
-                      <a:round/>
-                      <a:headEnd type="none" w="med" len="med"/>
-                      <a:tailEnd type="none" w="med" len="med"/>
-                    </a:lnB>
-                  </a:tcPr>
-                </a:tc>
-              </a:tr>
-              <a:tr h="384048">
-                <a:tc>
-                  <a:txBody>
-                    <a:bodyPr/>
-                    <a:lstStyle/>
-                    <a:p>
-                      <a:pPr indent="0" marL="0">
-                        <a:buNone/>
-                      </a:pPr>
-                      <a:r>
-                        <a:rPr lang="en-US" sz="1150" dirty="0">
-                          <a:solidFill>
-                            <a:srgbClr val="141A26"/>
-                          </a:solidFill>
-                          <a:latin typeface="Calibri" pitchFamily="34" charset="0"/>
-                          <a:ea typeface="Calibri" pitchFamily="34" charset="-122"/>
-                          <a:cs typeface="Calibri" pitchFamily="34" charset="-120"/>
-                        </a:rPr>
-                        <a:t>Regulator VOUT</a:t>
-                      </a:r>
-                      <a:endParaRPr lang="en-US" sz="1150" dirty="0">
-                        <a:latin typeface="Calibri" charset="0"/>
-                        <a:ea typeface="Calibri" charset="0"/>
-                        <a:cs typeface="Calibri" charset="0"/>
-                      </a:endParaRPr>
-                    </a:p>
-                  </a:txBody>
-                  <a:tcPr marL="91440" marR="91440" marT="45720" marB="45720" anchor="ctr">
-                    <a:lnL w="12700" cap="flat" cmpd="sng" algn="ctr">
-                      <a:solidFill>
-                        <a:srgbClr val="DBE1EC"/>
-                      </a:solidFill>
-                      <a:prstDash val="solid"/>
-                      <a:round/>
-                      <a:headEnd type="none" w="med" len="med"/>
-                      <a:tailEnd type="none" w="med" len="med"/>
-                    </a:lnL>
-                    <a:lnR w="12700" cap="flat" cmpd="sng" algn="ctr">
-                      <a:solidFill>
-                        <a:srgbClr val="DBE1EC"/>
-                      </a:solidFill>
-                      <a:prstDash val="solid"/>
-                      <a:round/>
-                      <a:headEnd type="none" w="med" len="med"/>
-                      <a:tailEnd type="none" w="med" len="med"/>
-                    </a:lnR>
-                    <a:lnT w="12700" cap="flat" cmpd="sng" algn="ctr">
-                      <a:solidFill>
-                        <a:srgbClr val="DBE1EC"/>
-                      </a:solidFill>
-                      <a:prstDash val="solid"/>
-                      <a:round/>
-                      <a:headEnd type="none" w="med" len="med"/>
-                      <a:tailEnd type="none" w="med" len="med"/>
-                    </a:lnT>
-                    <a:lnB w="12700" cap="flat" cmpd="sng" algn="ctr">
-                      <a:solidFill>
-                        <a:srgbClr val="DBE1EC"/>
-                      </a:solidFill>
-                      <a:prstDash val="solid"/>
-                      <a:round/>
-                      <a:headEnd type="none" w="med" len="med"/>
-                      <a:tailEnd type="none" w="med" len="med"/>
-                    </a:lnB>
-                  </a:tcPr>
-                </a:tc>
-                <a:tc>
-                  <a:txBody>
-                    <a:bodyPr/>
-                    <a:lstStyle/>
-                    <a:p>
-                      <a:pPr indent="0" marL="0">
-                        <a:buNone/>
-                      </a:pPr>
-                      <a:r>
-                        <a:rPr lang="en-US" sz="1150" dirty="0">
-                          <a:solidFill>
-                            <a:srgbClr val="141A26"/>
-                          </a:solidFill>
-                          <a:latin typeface="Calibri" pitchFamily="34" charset="0"/>
-                          <a:ea typeface="Calibri" pitchFamily="34" charset="-122"/>
-                          <a:cs typeface="Calibri" pitchFamily="34" charset="-120"/>
-                        </a:rPr>
-                        <a:t>3V3</a:t>
-                      </a:r>
-                      <a:endParaRPr lang="en-US" sz="1150" dirty="0">
-                        <a:latin typeface="Calibri" charset="0"/>
-                        <a:ea typeface="Calibri" charset="0"/>
-                        <a:cs typeface="Calibri" charset="0"/>
-                      </a:endParaRPr>
-                    </a:p>
-                  </a:txBody>
-                  <a:tcPr marL="91440" marR="91440" marT="45720" marB="45720" anchor="ctr">
-                    <a:lnL w="12700" cap="flat" cmpd="sng" algn="ctr">
-                      <a:solidFill>
-                        <a:srgbClr val="DBE1EC"/>
-                      </a:solidFill>
-                      <a:prstDash val="solid"/>
-                      <a:round/>
-                      <a:headEnd type="none" w="med" len="med"/>
-                      <a:tailEnd type="none" w="med" len="med"/>
-                    </a:lnL>
-                    <a:lnR w="12700" cap="flat" cmpd="sng" algn="ctr">
-                      <a:solidFill>
-                        <a:srgbClr val="DBE1EC"/>
-                      </a:solidFill>
-                      <a:prstDash val="solid"/>
-                      <a:round/>
-                      <a:headEnd type="none" w="med" len="med"/>
-                      <a:tailEnd type="none" w="med" len="med"/>
-                    </a:lnR>
-                    <a:lnT w="12700" cap="flat" cmpd="sng" algn="ctr">
-                      <a:solidFill>
-                        <a:srgbClr val="DBE1EC"/>
-                      </a:solidFill>
-                      <a:prstDash val="solid"/>
-                      <a:round/>
-                      <a:headEnd type="none" w="med" len="med"/>
-                      <a:tailEnd type="none" w="med" len="med"/>
-                    </a:lnT>
-                    <a:lnB w="12700" cap="flat" cmpd="sng" algn="ctr">
-                      <a:solidFill>
-                        <a:srgbClr val="DBE1EC"/>
-                      </a:solidFill>
-                      <a:prstDash val="solid"/>
-                      <a:round/>
-                      <a:headEnd type="none" w="med" len="med"/>
-                      <a:tailEnd type="none" w="med" len="med"/>
-                    </a:lnB>
-                  </a:tcPr>
-                </a:tc>
-                <a:tc>
-                  <a:txBody>
-                    <a:bodyPr/>
-                    <a:lstStyle/>
-                    <a:p>
-                      <a:pPr indent="0" marL="0">
-                        <a:buNone/>
-                      </a:pPr>
-                      <a:r>
-                        <a:rPr lang="en-US" sz="1150" dirty="0">
-                          <a:solidFill>
-                            <a:srgbClr val="141A26"/>
-                          </a:solidFill>
-                          <a:latin typeface="Calibri" pitchFamily="34" charset="0"/>
-                          <a:ea typeface="Calibri" pitchFamily="34" charset="-122"/>
-                          <a:cs typeface="Calibri" pitchFamily="34" charset="-120"/>
-                        </a:rPr>
-                        <a:t>steady 3.3 V</a:t>
-                      </a:r>
-                      <a:endParaRPr lang="en-US" sz="1150" dirty="0">
-                        <a:latin typeface="Calibri" charset="0"/>
-                        <a:ea typeface="Calibri" charset="0"/>
-                        <a:cs typeface="Calibri" charset="0"/>
-                      </a:endParaRPr>
-                    </a:p>
-                  </a:txBody>
-                  <a:tcPr marL="91440" marR="91440" marT="45720" marB="45720" anchor="ctr">
-                    <a:lnL w="12700" cap="flat" cmpd="sng" algn="ctr">
-                      <a:solidFill>
-                        <a:srgbClr val="DBE1EC"/>
-                      </a:solidFill>
-                      <a:prstDash val="solid"/>
-                      <a:round/>
-                      <a:headEnd type="none" w="med" len="med"/>
-                      <a:tailEnd type="none" w="med" len="med"/>
-                    </a:lnL>
-                    <a:lnR w="12700" cap="flat" cmpd="sng" algn="ctr">
-                      <a:solidFill>
-                        <a:srgbClr val="DBE1EC"/>
-                      </a:solidFill>
-                      <a:prstDash val="solid"/>
-                      <a:round/>
-                      <a:headEnd type="none" w="med" len="med"/>
-                      <a:tailEnd type="none" w="med" len="med"/>
-                    </a:lnR>
-                    <a:lnT w="12700" cap="flat" cmpd="sng" algn="ctr">
-                      <a:solidFill>
-                        <a:srgbClr val="DBE1EC"/>
-                      </a:solidFill>
-                      <a:prstDash val="solid"/>
-                      <a:round/>
-                      <a:headEnd type="none" w="med" len="med"/>
-                      <a:tailEnd type="none" w="med" len="med"/>
-                    </a:lnT>
-                    <a:lnB w="12700" cap="flat" cmpd="sng" algn="ctr">
-                      <a:solidFill>
-                        <a:srgbClr val="DBE1EC"/>
-                      </a:solidFill>
-                      <a:prstDash val="solid"/>
-                      <a:round/>
-                      <a:headEnd type="none" w="med" len="med"/>
-                      <a:tailEnd type="none" w="med" len="med"/>
-                    </a:lnB>
-                  </a:tcPr>
-                </a:tc>
-              </a:tr>
-              <a:tr h="384048">
-                <a:tc>
-                  <a:txBody>
-                    <a:bodyPr/>
-                    <a:lstStyle/>
-                    <a:p>
-                      <a:pPr indent="0" marL="0">
-                        <a:buNone/>
-                      </a:pPr>
-                      <a:r>
-                        <a:rPr lang="en-US" sz="1150" dirty="0">
-                          <a:solidFill>
-                            <a:srgbClr val="141A26"/>
-                          </a:solidFill>
-                          <a:latin typeface="Calibri" pitchFamily="34" charset="0"/>
-                          <a:ea typeface="Calibri" pitchFamily="34" charset="-122"/>
-                          <a:cs typeface="Calibri" pitchFamily="34" charset="-120"/>
-                        </a:rPr>
-                        <a:t>Battery divider (2 × 100 kΩ)</a:t>
-                      </a:r>
-                      <a:endParaRPr lang="en-US" sz="1150" dirty="0">
-                        <a:latin typeface="Calibri" charset="0"/>
-                        <a:ea typeface="Calibri" charset="0"/>
-                        <a:cs typeface="Calibri" charset="0"/>
-                      </a:endParaRPr>
-                    </a:p>
-                  </a:txBody>
-                  <a:tcPr marL="91440" marR="91440" marT="45720" marB="45720" anchor="ctr">
-                    <a:lnL w="12700" cap="flat" cmpd="sng" algn="ctr">
-                      <a:solidFill>
-                        <a:srgbClr val="DBE1EC"/>
-                      </a:solidFill>
-                      <a:prstDash val="solid"/>
-                      <a:round/>
-                      <a:headEnd type="none" w="med" len="med"/>
-                      <a:tailEnd type="none" w="med" len="med"/>
-                    </a:lnL>
-                    <a:lnR w="12700" cap="flat" cmpd="sng" algn="ctr">
-                      <a:solidFill>
-                        <a:srgbClr val="DBE1EC"/>
-                      </a:solidFill>
-                      <a:prstDash val="solid"/>
-                      <a:round/>
-                      <a:headEnd type="none" w="med" len="med"/>
-                      <a:tailEnd type="none" w="med" len="med"/>
-                    </a:lnR>
-                    <a:lnT w="12700" cap="flat" cmpd="sng" algn="ctr">
-                      <a:solidFill>
-                        <a:srgbClr val="DBE1EC"/>
-                      </a:solidFill>
-                      <a:prstDash val="solid"/>
-                      <a:round/>
-                      <a:headEnd type="none" w="med" len="med"/>
-                      <a:tailEnd type="none" w="med" len="med"/>
-                    </a:lnT>
-                    <a:lnB w="12700" cap="flat" cmpd="sng" algn="ctr">
-                      <a:solidFill>
-                        <a:srgbClr val="DBE1EC"/>
-                      </a:solidFill>
-                      <a:prstDash val="solid"/>
-                      <a:round/>
-                      <a:headEnd type="none" w="med" len="med"/>
-                      <a:tailEnd type="none" w="med" len="med"/>
-                    </a:lnB>
-                  </a:tcPr>
-                </a:tc>
-                <a:tc>
-                  <a:txBody>
-                    <a:bodyPr/>
-                    <a:lstStyle/>
-                    <a:p>
-                      <a:pPr indent="0" marL="0">
-                        <a:buNone/>
-                      </a:pPr>
-                      <a:r>
-                        <a:rPr lang="en-US" sz="1150" dirty="0">
-                          <a:solidFill>
-                            <a:srgbClr val="141A26"/>
-                          </a:solidFill>
-                          <a:latin typeface="Calibri" pitchFamily="34" charset="0"/>
-                          <a:ea typeface="Calibri" pitchFamily="34" charset="-122"/>
-                          <a:cs typeface="Calibri" pitchFamily="34" charset="-120"/>
-                        </a:rPr>
-                        <a:t>GPIO 34</a:t>
-                      </a:r>
-                      <a:endParaRPr lang="en-US" sz="1150" dirty="0">
-                        <a:latin typeface="Calibri" charset="0"/>
-                        <a:ea typeface="Calibri" charset="0"/>
-                        <a:cs typeface="Calibri" charset="0"/>
-                      </a:endParaRPr>
-                    </a:p>
-                  </a:txBody>
-                  <a:tcPr marL="91440" marR="91440" marT="45720" marB="45720" anchor="ctr">
-                    <a:lnL w="12700" cap="flat" cmpd="sng" algn="ctr">
-                      <a:solidFill>
-                        <a:srgbClr val="DBE1EC"/>
-                      </a:solidFill>
-                      <a:prstDash val="solid"/>
-                      <a:round/>
-                      <a:headEnd type="none" w="med" len="med"/>
-                      <a:tailEnd type="none" w="med" len="med"/>
-                    </a:lnL>
-                    <a:lnR w="12700" cap="flat" cmpd="sng" algn="ctr">
-                      <a:solidFill>
-                        <a:srgbClr val="DBE1EC"/>
-                      </a:solidFill>
-                      <a:prstDash val="solid"/>
-                      <a:round/>
-                      <a:headEnd type="none" w="med" len="med"/>
-                      <a:tailEnd type="none" w="med" len="med"/>
-                    </a:lnR>
-                    <a:lnT w="12700" cap="flat" cmpd="sng" algn="ctr">
-                      <a:solidFill>
-                        <a:srgbClr val="DBE1EC"/>
-                      </a:solidFill>
-                      <a:prstDash val="solid"/>
-                      <a:round/>
-                      <a:headEnd type="none" w="med" len="med"/>
-                      <a:tailEnd type="none" w="med" len="med"/>
-                    </a:lnT>
-                    <a:lnB w="12700" cap="flat" cmpd="sng" algn="ctr">
-                      <a:solidFill>
-                        <a:srgbClr val="DBE1EC"/>
-                      </a:solidFill>
-                      <a:prstDash val="solid"/>
-                      <a:round/>
-                      <a:headEnd type="none" w="med" len="med"/>
-                      <a:tailEnd type="none" w="med" len="med"/>
-                    </a:lnB>
-                  </a:tcPr>
-                </a:tc>
-                <a:tc>
-                  <a:txBody>
-                    <a:bodyPr/>
-                    <a:lstStyle/>
-                    <a:p>
-                      <a:pPr indent="0" marL="0">
-                        <a:buNone/>
-                      </a:pPr>
-                      <a:r>
-                        <a:rPr lang="en-US" sz="1150" dirty="0">
-                          <a:solidFill>
-                            <a:srgbClr val="141A26"/>
-                          </a:solidFill>
-                          <a:latin typeface="Calibri" pitchFamily="34" charset="0"/>
-                          <a:ea typeface="Calibri" pitchFamily="34" charset="-122"/>
-                          <a:cs typeface="Calibri" pitchFamily="34" charset="-120"/>
-                        </a:rPr>
-                        <a:t>battery %</a:t>
+                        <a:t>3 m cable to charger</a:t>
                       </a:r>
                       <a:endParaRPr lang="en-US" sz="1150" dirty="0">
                         <a:latin typeface="Calibri" charset="0"/>
@@ -11793,7 +10933,7 @@
       </p:graphicFrame>
       <p:pic>
         <p:nvPicPr>
-          <p:cNvPr id="7" name="Image 0" descr="/home/user/teetomivV2/science-fair/night-signal/slides/assets/3d_exploded.jpg">    </p:cNvPr>
+          <p:cNvPr id="7" name="Image 0" descr="/home/user/teetomivV2/science-fair/night-signal/slides/assets/wiring_v1.png">    </p:cNvPr>
           <p:cNvPicPr>
             <a:picLocks noChangeAspect="1"/>
           </p:cNvPicPr>
@@ -11807,6 +10947,30 @@
         </p:blipFill>
         <p:spPr>
           <a:xfrm>
+            <a:off x="1920240" y="4343400"/>
+            <a:ext cx="3566160" cy="2062358"/>
+          </a:xfrm>
+          <a:prstGeom prst="rect">
+            <a:avLst/>
+          </a:prstGeom>
+        </p:spPr>
+      </p:pic>
+      <p:pic>
+        <p:nvPicPr>
+          <p:cNvPr id="8" name="Image 1" descr="/home/user/teetomivV2/science-fair/night-signal/slides/assets/3d_exploded.jpg">    </p:cNvPr>
+          <p:cNvPicPr>
+            <a:picLocks noChangeAspect="1"/>
+          </p:cNvPicPr>
+          <p:nvPr/>
+        </p:nvPicPr>
+        <p:blipFill>
+          <a:blip r:embed="rId2"/>
+          <a:stretch>
+            <a:fillRect/>
+          </a:stretch>
+        </p:blipFill>
+        <p:spPr>
+          <a:xfrm>
             <a:off x="7040880" y="1463040"/>
             <a:ext cx="4480560" cy="3032779"/>
           </a:xfrm>
@@ -11817,7 +10981,7 @@
       </p:pic>
       <p:sp>
         <p:nvSpPr>
-          <p:cNvPr id="8" name="Text 4"/>
+          <p:cNvPr id="9" name="Text 4"/>
           <p:cNvSpPr txBox="1"/>
           <p:nvPr/>
         </p:nvSpPr>
@@ -11848,7 +11012,7 @@
                 <a:ea typeface="Calibri" pitchFamily="34" charset="-122"/>
                 <a:cs typeface="Calibri" pitchFamily="34" charset="-120"/>
               </a:rPr>
-              <a:t>Stack inside the 25 mm-tall case</a:t>
+              <a:t>v2: stack inside the 25 mm-tall case</a:t>
             </a:r>
             <a:endParaRPr lang="en-US" sz="1100" dirty="0"/>
           </a:p>
@@ -11856,7 +11020,7 @@
       </p:sp>
       <p:sp>
         <p:nvSpPr>
-          <p:cNvPr id="9" name="Text 5"/>
+          <p:cNvPr id="10" name="Text 5"/>
           <p:cNvSpPr txBox="1"/>
           <p:nvPr/>
         </p:nvSpPr>
@@ -11887,7 +11051,7 @@
                 <a:ea typeface="Calibri" pitchFamily="34" charset="-122"/>
                 <a:cs typeface="Calibri" pitchFamily="34" charset="-120"/>
               </a:rPr>
-              <a:t>Layer heights: battery 6 mm + ESP32 with pins ≈ 13 mm + GY-521 ≈ 3 mm ≈ 22 mm, inside the box’s 25 mm. Battery and TP4056 sit side by side on the bottom (35 + 17 = 52 mm of the 66 mm length).</a:t>
+              <a:t>Planned v2: a 70 × 45 × 29 mm box with its own battery. Layer heights: battery 6 mm + ESP32 with pins ≈ 13 mm + GY-521 ≈ 3 mm ≈ 22 mm, inside the box’s 25 mm. v1 uses each sensor’s own pins, so nothing needs splicing.</a:t>
             </a:r>
             <a:endParaRPr lang="en-US" sz="1200" dirty="0"/>
           </a:p>
@@ -15427,7 +14591,7 @@
                 <a:ea typeface="Calibri" pitchFamily="34" charset="-122"/>
                 <a:cs typeface="Calibri" pitchFamily="34" charset="-120"/>
               </a:rPr>
-              <a:t>Assembled — case on a velcro strap, cable to the finger clip</a:t>
+              <a:t>3D design (v2) — sealed case on a velcro strap</a:t>
             </a:r>
             <a:endParaRPr lang="en-US" sz="1100" dirty="0"/>
           </a:p>
@@ -15490,7 +14654,7 @@
                 <a:ea typeface="Calibri" pitchFamily="34" charset="-122"/>
                 <a:cs typeface="Calibri" pitchFamily="34" charset="-120"/>
               </a:rPr>
-              <a:t>Exploded — every part at its real size</a:t>
+              <a:t>Exploded — every v2 part at its real size</a:t>
             </a:r>
             <a:endParaRPr lang="en-US" sz="1100" dirty="0"/>
           </a:p>
@@ -15529,7 +14693,7 @@
                 <a:ea typeface="Calibri" pitchFamily="34" charset="-122"/>
                 <a:cs typeface="Calibri" pitchFamily="34" charset="-120"/>
               </a:rPr>
-              <a:t>70 × 45 × 29 mm</a:t>
+              <a:t>Prototype v1</a:t>
             </a:r>
             <a:endParaRPr lang="en-US" sz="2000" dirty="0"/>
           </a:p>
@@ -15568,7 +14732,7 @@
                 <a:ea typeface="Calibri" pitchFamily="34" charset="-122"/>
                 <a:cs typeface="Calibri" pitchFamily="34" charset="-120"/>
               </a:rPr>
-              <a:t>sensor case</a:t>
+              <a:t>armband + plug-in wires</a:t>
             </a:r>
             <a:endParaRPr lang="en-US" sz="1200" dirty="0"/>
           </a:p>
@@ -15607,7 +14771,7 @@
                 <a:ea typeface="Calibri" pitchFamily="34" charset="-122"/>
                 <a:cs typeface="Calibri" pitchFamily="34" charset="-120"/>
               </a:rPr>
-              <a:t>25 mm</a:t>
+              <a:t>All night</a:t>
             </a:r>
             <a:endParaRPr lang="en-US" sz="2000" dirty="0"/>
           </a:p>
@@ -15646,7 +14810,7 @@
                 <a:ea typeface="Calibri" pitchFamily="34" charset="-122"/>
                 <a:cs typeface="Calibri" pitchFamily="34" charset="-120"/>
               </a:rPr>
-              <a:t>velcro strap</a:t>
+              <a:t>USB power</a:t>
             </a:r>
             <a:endParaRPr lang="en-US" sz="1200" dirty="0"/>
           </a:p>
@@ -16194,7 +15358,7 @@
                 <a:ea typeface="Calibri" pitchFamily="34" charset="-122"/>
                 <a:cs typeface="Calibri" pitchFamily="34" charset="-120"/>
               </a:rPr>
-              <a:t>ESP32 in the case</a:t>
+              <a:t>ESP32 on the arm</a:t>
             </a:r>
             <a:endParaRPr lang="en-US" sz="1600" dirty="0"/>
           </a:p>
@@ -17537,7 +16701,7 @@
                 <a:ea typeface="Calibri" pitchFamily="34" charset="-122"/>
                 <a:cs typeface="Calibri" pitchFamily="34" charset="-120"/>
               </a:rPr>
-              <a:t>Battery runtime test  </a:t>
+              <a:t>Full-night power test  </a:t>
             </a:r>
             <a:pPr indent="0" marL="0">
               <a:buNone/>
@@ -17551,7 +16715,7 @@
                 <a:ea typeface="Calibri" pitchFamily="34" charset="-122"/>
                 <a:cs typeface="Calibri" pitchFamily="34" charset="-120"/>
               </a:rPr>
-              <a:t>full charge → stream until it stops, 3 times</a:t>
+              <a:t>USB power → 8 h of data with no gaps</a:t>
             </a:r>
             <a:endParaRPr lang="en-US" sz="1500" dirty="0"/>
           </a:p>
@@ -17665,7 +16829,7 @@
                 <a:ea typeface="Calibri" pitchFamily="34" charset="-122"/>
                 <a:cs typeface="Calibri" pitchFamily="34" charset="-120"/>
               </a:rPr>
-              <a:t>≥ 5 nights; case on upper arm, clip on index finger</a:t>
+              <a:t>≥ 5 nights; armband on forearm, clip on index finger</a:t>
             </a:r>
             <a:endParaRPr lang="en-US" sz="1500" dirty="0"/>
           </a:p>

--- a/science-fair/night-signal/Night_Signal_Presentation.pptx
+++ b/science-fair/night-signal/Night_Signal_Presentation.pptx
@@ -3247,56 +3247,17 @@
         </p:blipFill>
         <p:spPr>
           <a:xfrm>
-            <a:off x="685800" y="1920240"/>
-            <a:ext cx="5303520" cy="3314700"/>
+            <a:off x="685800" y="1874520"/>
+            <a:ext cx="5120640" cy="3755136"/>
           </a:xfrm>
           <a:prstGeom prst="rect">
             <a:avLst/>
           </a:prstGeom>
         </p:spPr>
       </p:pic>
-      <p:sp>
-        <p:nvSpPr>
-          <p:cNvPr id="7" name="Text 4"/>
-          <p:cNvSpPr txBox="1"/>
-          <p:nvPr/>
-        </p:nvSpPr>
-        <p:spPr>
-          <a:xfrm>
-            <a:off x="685800" y="5308092"/>
-            <a:ext cx="5303520" cy="274320"/>
-          </a:xfrm>
-          <a:prstGeom prst="rect">
-            <a:avLst/>
-          </a:prstGeom>
-          <a:noFill/>
-          <a:ln/>
-        </p:spPr>
-        <p:txBody>
-          <a:bodyPr wrap="square" lIns="0" tIns="0" rIns="0" bIns="0" rtlCol="0" anchor="t"/>
-          <a:lstStyle/>
-          <a:p>
-            <a:pPr algn="ctr" indent="0" marL="0">
-              <a:buNone/>
-            </a:pPr>
-            <a:r>
-              <a:rPr lang="en-US" sz="1200" dirty="0">
-                <a:solidFill>
-                  <a:srgbClr val="6E6E73"/>
-                </a:solidFill>
-                <a:latin typeface="Helvetica Neue" pitchFamily="34" charset="0"/>
-                <a:ea typeface="Helvetica Neue" pitchFamily="34" charset="-122"/>
-                <a:cs typeface="Helvetica Neue" pitchFamily="34" charset="-120"/>
-              </a:rPr>
-              <a:t>Apnea events per hour by position</a:t>
-            </a:r>
-            <a:endParaRPr lang="en-US" sz="1200" dirty="0"/>
-          </a:p>
-        </p:txBody>
-      </p:sp>
       <p:graphicFrame>
         <p:nvGraphicFramePr>
-          <p:cNvPr id="8" name="Chart 0" descr=""/>
+          <p:cNvPr id="7" name="Chart 0" descr=""/>
           <p:cNvGraphicFramePr/>
           <p:nvPr/>
         </p:nvGraphicFramePr>
@@ -4770,7 +4731,7 @@
         <p:spPr>
           <a:xfrm>
             <a:off x="685800" y="1920240"/>
-            <a:ext cx="5312664" cy="2302154"/>
+            <a:ext cx="5312664" cy="2799918"/>
           </a:xfrm>
           <a:prstGeom prst="rect">
             <a:avLst/>
@@ -4794,7 +4755,7 @@
         <p:spPr>
           <a:xfrm>
             <a:off x="6190488" y="1920240"/>
-            <a:ext cx="5312664" cy="2302154"/>
+            <a:ext cx="5312664" cy="2799918"/>
           </a:xfrm>
           <a:prstGeom prst="rect">
             <a:avLst/>
@@ -4809,7 +4770,7 @@
         </p:nvSpPr>
         <p:spPr>
           <a:xfrm>
-            <a:off x="685800" y="4405274"/>
+            <a:off x="685800" y="4903038"/>
             <a:ext cx="5312664" cy="914400"/>
           </a:xfrm>
           <a:prstGeom prst="rect">
@@ -4862,7 +4823,7 @@
         </p:nvSpPr>
         <p:spPr>
           <a:xfrm>
-            <a:off x="6190488" y="4405274"/>
+            <a:off x="6190488" y="4903038"/>
             <a:ext cx="5312664" cy="914400"/>
           </a:xfrm>
           <a:prstGeom prst="rect">
@@ -17951,56 +17912,17 @@
         </p:blipFill>
         <p:spPr>
           <a:xfrm>
-            <a:off x="685800" y="1920240"/>
-            <a:ext cx="6355080" cy="2912745"/>
+            <a:off x="685800" y="1965960"/>
+            <a:ext cx="6355080" cy="3261159"/>
           </a:xfrm>
           <a:prstGeom prst="rect">
             <a:avLst/>
           </a:prstGeom>
         </p:spPr>
       </p:pic>
-      <p:sp>
-        <p:nvSpPr>
-          <p:cNvPr id="7" name="Text 4"/>
-          <p:cNvSpPr txBox="1"/>
-          <p:nvPr/>
-        </p:nvSpPr>
-        <p:spPr>
-          <a:xfrm>
-            <a:off x="685800" y="4942713"/>
-            <a:ext cx="6355080" cy="274320"/>
-          </a:xfrm>
-          <a:prstGeom prst="rect">
-            <a:avLst/>
-          </a:prstGeom>
-          <a:noFill/>
-          <a:ln/>
-        </p:spPr>
-        <p:txBody>
-          <a:bodyPr wrap="square" lIns="0" tIns="0" rIns="0" bIns="0" rtlCol="0" anchor="t"/>
-          <a:lstStyle/>
-          <a:p>
-            <a:pPr algn="ctr" indent="0" marL="0">
-              <a:buNone/>
-            </a:pPr>
-            <a:r>
-              <a:rPr lang="en-US" sz="1200" dirty="0">
-                <a:solidFill>
-                  <a:srgbClr val="6E6E73"/>
-                </a:solidFill>
-                <a:latin typeface="Helvetica Neue" pitchFamily="34" charset="0"/>
-                <a:ea typeface="Helvetica Neue" pitchFamily="34" charset="-122"/>
-                <a:cs typeface="Helvetica Neue" pitchFamily="34" charset="-120"/>
-              </a:rPr>
-              <a:t>One night: each red band is an apnea event found automatically</a:t>
-            </a:r>
-            <a:endParaRPr lang="en-US" sz="1200" dirty="0"/>
-          </a:p>
-        </p:txBody>
-      </p:sp>
       <p:pic>
         <p:nvPicPr>
-          <p:cNvPr id="8" name="Image 1" descr="/home/user/teetomivV2/science-fair/night-signal/slides/assets/validation.png">    </p:cNvPr>
+          <p:cNvPr id="7" name="Image 1" descr="/home/user/teetomivV2/science-fair/night-signal/slides/assets/validation.png">    </p:cNvPr>
           <p:cNvPicPr>
             <a:picLocks noChangeAspect="1"/>
           </p:cNvPicPr>
@@ -18014,8 +17936,8 @@
         </p:blipFill>
         <p:spPr>
           <a:xfrm>
-            <a:off x="7269480" y="1920240"/>
-            <a:ext cx="4233672" cy="2587244"/>
+            <a:off x="7269480" y="1965960"/>
+            <a:ext cx="4233672" cy="3065762"/>
           </a:xfrm>
           <a:prstGeom prst="rect">
             <a:avLst/>
@@ -18024,13 +17946,13 @@
       </p:pic>
       <p:sp>
         <p:nvSpPr>
-          <p:cNvPr id="9" name="Text 5"/>
-          <p:cNvSpPr txBox="1"/>
-          <p:nvPr/>
-        </p:nvSpPr>
-        <p:spPr>
-          <a:xfrm>
-            <a:off x="7269480" y="4617212"/>
+          <p:cNvPr id="8" name="Text 4"/>
+          <p:cNvSpPr txBox="1"/>
+          <p:nvPr/>
+        </p:nvSpPr>
+        <p:spPr>
+          <a:xfrm>
+            <a:off x="7269480" y="5168882"/>
             <a:ext cx="4233672" cy="274320"/>
           </a:xfrm>
           <a:prstGeom prst="rect">
@@ -18055,7 +17977,7 @@
                 <a:ea typeface="Helvetica Neue" pitchFamily="34" charset="-122"/>
                 <a:cs typeface="Helvetica Neue" pitchFamily="34" charset="-120"/>
               </a:rPr>
-              <a:t>Bland–Altman: 95% of readings within −1.5 to +1.7 %</a:t>
+              <a:t>95% of readings within −1.5 to +1.7 % of the reference</a:t>
             </a:r>
             <a:endParaRPr lang="en-US" sz="1200" dirty="0"/>
           </a:p>

--- a/science-fair/night-signal/Night_Signal_Presentation.pptx
+++ b/science-fair/night-signal/Night_Signal_Presentation.pptx
@@ -5362,7 +5362,7 @@
       <p:pic>
         <p:nvPicPr>
           <p:cNvPr id="15" name="Image 0" descr="/home/user/teetomivV2/science-fair/night-signal/slides/assets/qr_app.png">
-            <a:hlinkClick r:id="rId2" tooltip="https://claude.ai/artifact/KCkbwVKfmBhQoC9cxCn7qZ"/>
+            <a:hlinkClick r:id="rId2" tooltip="https://gabrielamamanestudent-wq.github.io/teetomivV2/science-fair/night-signal/app/"/>
           </p:cNvPr>
           <p:cNvPicPr>
             <a:picLocks noChangeAspect="1"/>
@@ -5410,7 +5410,7 @@
       <p:pic>
         <p:nvPicPr>
           <p:cNvPr id="17" name="Image 1" descr="/home/user/teetomivV2/science-fair/night-signal/slides/assets/qr_3d.png">
-            <a:hlinkClick r:id="rId4" tooltip="https://claude.ai/artifact/7wqAASJ8qWxBBKBuVHAqLt"/>
+            <a:hlinkClick r:id="rId4" tooltip="https://gabrielamamanestudent-wq.github.io/teetomivV2/science-fair/night-signal/app/3d.html"/>
           </p:cNvPr>
           <p:cNvPicPr>
             <a:picLocks noChangeAspect="1"/>
@@ -11045,7 +11045,7 @@
                 <a:latin typeface="Helvetica Neue" pitchFamily="34" charset="0"/>
                 <a:ea typeface="Helvetica Neue" pitchFamily="34" charset="-122"/>
                 <a:cs typeface="Helvetica Neue" pitchFamily="34" charset="-120"/>
-                <a:hlinkClick r:id="rId3" invalidUrl="" action="" tgtFrame="" tooltip="https://github.com/gabrielamamanestudent-wq/teetomivV2/blob/claude/science-fair-medical-project-7k0wk4/science-fair/night-signal/BUILD_GUIDE.md" history="1" highlightClick="0" endSnd="0">
+                <a:hlinkClick r:id="rId3" invalidUrl="" action="" tgtFrame="" tooltip="https://gabrielamamanestudent-wq.github.io/teetomivV2/science-fair/night-signal/build-kit.html" history="1" highlightClick="0" endSnd="0">
                   <a:extLst>
                     <a:ext uri="{A12FA001-AC4F-418D-AE19-62706E023703}">
                       <ahyp:hlinkClr xmlns:ahyp="http://schemas.microsoft.com/office/drawing/2018/hyperlinkcolor" val="tx"/>
@@ -13535,7 +13535,7 @@
       <p:pic>
         <p:nvPicPr>
           <p:cNvPr id="17" name="Image 2" descr="/home/user/teetomivV2/science-fair/night-signal/slides/assets/qr_3d.png">
-            <a:hlinkClick r:id="rId4" tooltip="https://claude.ai/artifact/7wqAASJ8qWxBBKBuVHAqLt"/>
+            <a:hlinkClick r:id="rId4" tooltip="https://gabrielamamanestudent-wq.github.io/teetomivV2/science-fair/night-signal/app/3d.html"/>
           </p:cNvPr>
           <p:cNvPicPr>
             <a:picLocks noChangeAspect="1"/>
@@ -13590,7 +13590,7 @@
                 <a:latin typeface="Helvetica Neue" pitchFamily="34" charset="0"/>
                 <a:ea typeface="Helvetica Neue" pitchFamily="34" charset="-122"/>
                 <a:cs typeface="Helvetica Neue" pitchFamily="34" charset="-120"/>
-                <a:hlinkClick r:id="rId5" invalidUrl="" action="" tgtFrame="" tooltip="https://claude.ai/artifact/7wqAASJ8qWxBBKBuVHAqLt" history="1" highlightClick="0" endSnd="0">
+                <a:hlinkClick r:id="rId5" invalidUrl="" action="" tgtFrame="" tooltip="https://gabrielamamanestudent-wq.github.io/teetomivV2/science-fair/night-signal/app/3d.html" history="1" highlightClick="0" endSnd="0">
                   <a:extLst>
                     <a:ext uri="{A12FA001-AC4F-418D-AE19-62706E023703}">
                       <ahyp:hlinkClr xmlns:ahyp="http://schemas.microsoft.com/office/drawing/2018/hyperlinkcolor" val="tx"/>
@@ -16226,7 +16226,7 @@
       <p:pic>
         <p:nvPicPr>
           <p:cNvPr id="19" name="Image 2" descr="/home/user/teetomivV2/science-fair/night-signal/slides/assets/qr_app.png">
-            <a:hlinkClick r:id="rId4" tooltip="https://claude.ai/artifact/KCkbwVKfmBhQoC9cxCn7qZ"/>
+            <a:hlinkClick r:id="rId4" tooltip="https://gabrielamamanestudent-wq.github.io/teetomivV2/science-fair/night-signal/app/"/>
           </p:cNvPr>
           <p:cNvPicPr>
             <a:picLocks noChangeAspect="1"/>
@@ -16281,7 +16281,7 @@
                 <a:latin typeface="Helvetica Neue" pitchFamily="34" charset="0"/>
                 <a:ea typeface="Helvetica Neue" pitchFamily="34" charset="-122"/>
                 <a:cs typeface="Helvetica Neue" pitchFamily="34" charset="-120"/>
-                <a:hlinkClick r:id="rId5" invalidUrl="" action="" tgtFrame="" tooltip="https://claude.ai/artifact/KCkbwVKfmBhQoC9cxCn7qZ" history="1" highlightClick="0" endSnd="0">
+                <a:hlinkClick r:id="rId5" invalidUrl="" action="" tgtFrame="" tooltip="https://gabrielamamanestudent-wq.github.io/teetomivV2/science-fair/night-signal/app/" history="1" highlightClick="0" endSnd="0">
                   <a:extLst>
                     <a:ext uri="{A12FA001-AC4F-418D-AE19-62706E023703}">
                       <ahyp:hlinkClr xmlns:ahyp="http://schemas.microsoft.com/office/drawing/2018/hyperlinkcolor" val="tx"/>

--- a/science-fair/night-signal/Night_Signal_Presentation.pptx
+++ b/science-fair/night-signal/Night_Signal_Presentation.pptx
@@ -872,7 +872,7 @@
           <a:p>
             <a:r>
               <a:rPr lang="en-US" dirty="0"/>
-              <a:t>[0:35] To be clear about where the project stands: the design, firmware, analysis software, app and 3D model are done, and the software has been tested only on simulated data. Still pending are my teacher's approval of the revised scope, ethics approval and consent, building the prototype, and all of the real measurements.</a:t>
+              <a:t>[0:35] To be clear about where the project stands: the design, firmware, analysis software, app and 3D model are done, and the software has been tested only on simulated data. My teacher agreed to this revised scope on October ninth. Still pending are her review of the revised proposal, ethics approval and consent, building the prototype, and all of the real measurements.</a:t>
             </a:r>
             <a:endParaRPr lang="en-US" dirty="0"/>
           </a:p>
@@ -1840,7 +1840,7 @@
           <a:p>
             <a:r>
               <a:rPr lang="en-US" dirty="0"/>
-              <a:t>[0:50] This is my planned protocol. Nothing will be tested on anyone, including me, until my teacher approves the revised scope, the ethics committee approves, and consent is signed. The main test is accuracy: seated at rest, I wear my device on one finger and the reference oximeter on the other hand, and I record both oxygen and heart rate every two minutes for thirty minutes, over several sessions. Every reading must pass signal-quality checks. If approved, overnight recordings will measure signal quality and desaturation events, but those events cannot be verified because the reference oximeter does not record overnight. An optional breath-hold test, only if approved, would check whether short, awake dips are flagged; it does not test sleep apnea.</a:t>
+              <a:t>[0:50] This is my planned protocol. Nothing will be tested on anyone, including me, until my teacher accepts this revised proposal, the ethics committee approves, and consent is signed. The main test is accuracy: seated at rest, I wear my device on one finger and the reference oximeter on the other hand, and I record both oxygen and heart rate every two minutes for thirty minutes, over several sessions. Every reading must pass signal-quality checks. If approved, overnight recordings will measure signal quality and desaturation events, but those events cannot be verified because the reference oximeter does not record overnight. An optional breath-hold test, only if approved, would check whether short, awake dips are flagged; it does not test sleep apnea.</a:t>
             </a:r>
             <a:endParaRPr lang="en-US" dirty="0"/>
           </a:p>
@@ -5461,7 +5461,7 @@
                 <a:ea typeface="Helvetica Neue" pitchFamily="34" charset="-122"/>
                 <a:cs typeface="Helvetica Neue" pitchFamily="34" charset="-120"/>
               </a:rPr>
-              <a:t>Original proposal submitted (Sep 25); revised proposal and ethics package drafted</a:t>
+              <a:t>Scope revised with Ms. Ireland (Oct 9); revised proposal and ethics package drafted</a:t>
             </a:r>
             <a:endParaRPr lang="en-US" sz="1350" dirty="0"/>
           </a:p>
@@ -5559,7 +5559,7 @@
                 <a:ea typeface="Helvetica Neue" pitchFamily="34" charset="-122"/>
                 <a:cs typeface="Helvetica Neue" pitchFamily="34" charset="-120"/>
               </a:rPr>
-              <a:t>Ms. Ireland’s approval of the revised scope</a:t>
+              <a:t>Ms. Ireland’s review of the revised proposal</a:t>
             </a:r>
             <a:endParaRPr lang="en-US" sz="1350" dirty="0"/>
           </a:p>
@@ -9170,7 +9170,7 @@
                 <a:ea typeface="Helvetica Neue" pitchFamily="34" charset="-122"/>
                 <a:cs typeface="Helvetica Neue" pitchFamily="34" charset="-120"/>
               </a:rPr>
-              <a:t>Ms. Ireland approves the revised scope, the ethics committee approves, and informed consent is signed (participant and parent/guardian). No data is collected from anyone, including me, before all three.</a:t>
+              <a:t>Ms. Ireland accepts the revised proposal, the ethics committee approves, and informed consent is signed (participant and parent/guardian). No data is collected from anyone, including me, before all three.</a:t>
             </a:r>
             <a:endParaRPr lang="en-US" sz="1200" dirty="0"/>
           </a:p>

--- a/science-fair/night-signal/Night_Signal_Presentation.pptx
+++ b/science-fair/night-signal/Night_Signal_Presentation.pptx
@@ -520,7 +520,13 @@
           <a:p>
             <a:r>
               <a:rPr lang="en-US" dirty="0"/>
-              <a:t>[0:15] Good morning. My name is Gabriel Mamane. My project, Night Signal, asks how accurately a low-cost wearable can measure blood oxygen and heart rate, and whether software can flag drops in oxygen. It is not a test for sleep apnea.</a:t>
+              <a:t>CUE CARD 1
+• Gabriel Mamane · Night Signal
+• How accurately can a cheap wearable measure blood oxygen?
+• Can software flag oxygen drops?
+• NOT a test for sleep apnea
+→ First, my question and hypothesis.
+FULL SCRIPT [0:15] Good morning. My name is Gabriel Mamane. My project, Night Signal, asks how accurately a low-cost wearable can measure blood oxygen and heart rate, and whether software can flag drops in oxygen. It is not a test for sleep apnea.</a:t>
             </a:r>
             <a:endParaRPr lang="en-US" dirty="0"/>
           </a:p>
@@ -608,7 +614,13 @@
           <a:p>
             <a:r>
               <a:rPr lang="en-US" dirty="0"/>
-              <a:t>[0:35] Only good readings count. A reading is used only if a finger is on the sensor, the sensor marks it valid, it is in a believable range, and there was no sudden movement within five seconds. The event rate is the number of flagged events divided by the hours of valid signal. It is not per hour of sleep, because my device cannot measure sleep, and every report states how much of the signal was valid.</a:t>
+              <a:t>CUE CARD 10
+• 4 checks: finger on · sensor-valid · 70–100% · no movement within 5 s
+• Rate = flagged events ÷ hours of valid signal
+• Not per hour of sleep: the device cannot measure sleep
+• Every report states the % of valid signal
+→ How I will interpret the results.
+FULL SCRIPT [0:35] Only good readings count. A reading is used only if a finger is on the sensor, the sensor marks it valid, it is in a believable range, and there was no sudden movement within five seconds. The event rate is the number of flagged events divided by the hours of valid signal. It is not per hour of sleep, because my device cannot measure sleep, and every report states how much of the signal was valid.</a:t>
             </a:r>
             <a:endParaRPr lang="en-US" dirty="0"/>
           </a:p>
@@ -696,7 +708,14 @@
           <a:p>
             <a:r>
               <a:rPr lang="en-US" dirty="0"/>
-              <a:t>[0:45] This is how I will interpret the results. If ninety-five percent of the oxygen differences fall within three points of the reference at rest, my hypothesis is supported for those conditions, keeping in mind that the reference is itself accurate to about two points. A flagged event means an oxygen dip, not an apnea, and overnight events cannot be checked because the reference does not record overnight. The breath-hold test, if approved, shows only whether awake dips are flagged. Wider limits, a consistent bias, too little valid signal, or missed dips would count against my hypothesis.</a:t>
+              <a:t>CUE CARD 11
+• Supported if 95% of differences are within ±3 points (at rest)
+• The reference itself is typically about ±2 points
+• Flagged event = oxygen dip, not apnea; overnight unverified
+• Breath-holds: only awake, induced dips
+• Against: wide limits, bias, low % valid, missed dips
+→ What could go wrong.
+FULL SCRIPT [0:45] This is how I will interpret the results. If ninety-five percent of the oxygen differences fall within three points of the reference at rest, my hypothesis is supported for those conditions, keeping in mind that the reference is itself typically accurate to about two points. A flagged event means an oxygen dip, not an apnea, and overnight events cannot be checked because the reference does not record overnight. The breath-hold test, if approved, shows only whether awake dips are flagged. Wider limits, a consistent bias, too little valid signal, or missed dips would count against my hypothesis.</a:t>
             </a:r>
             <a:endParaRPr lang="en-US" dirty="0"/>
           </a:p>
@@ -784,7 +803,14 @@
           <a:p>
             <a:r>
               <a:rPr lang="en-US" dirty="0"/>
-              <a:t>[0:40] Sources of error in measurement: movement, finger pressure, cold hands and room light can distort the light signal; research has shown pulse oximeters can be less accurate on darker skin; and the reference is only accurate to about two points. In the method: my device measures only oxygen and heart rate, so it cannot identify apnea; sitting awake is not the same as sleep, and a breath-hold is not an apnea; there is only one participant; and overnight events cannot be verified. I also estimated that a small battery would last only four to five hours, which is why the first prototype is planned to use USB power; I still have to measure that.</a:t>
+              <a:t>CUE CARD 12
+• Measurement: movement, pressure, cold hands, light
+• Skin tone can bias oximeters (Sjoding et al., 2020)
+• Method: no airflow / effort / sleep → cannot identify apnea
+• Awake ≠ asleep; breath-hold ≠ apnea; one participant
+• Battery 4–5 h = estimate → USB power for v1
+→ Where the project stands today.
+FULL SCRIPT [0:40] Sources of error in measurement: movement, finger pressure, cold hands and room light can distort the light signal; research has shown pulse oximeters can be less accurate on darker skin; and the reference is typically accurate to only about two points. In the method: my device measures only oxygen and heart rate, so it cannot identify apnea; sitting awake is not the same as sleep, and a breath-hold is not an apnea; there is only one participant; and overnight events cannot be verified. I also estimated that a small battery would last only four to five hours, which is why the first prototype is planned to use USB power; I still have to measure that.</a:t>
             </a:r>
             <a:endParaRPr lang="en-US" dirty="0"/>
           </a:p>
@@ -872,7 +898,13 @@
           <a:p>
             <a:r>
               <a:rPr lang="en-US" dirty="0"/>
-              <a:t>[0:35] To be clear about where the project stands: the design, firmware, analysis software, app and 3D model are done, and the software has been tested only on simulated data. My teacher agreed to this revised scope on October ninth. Still pending are her review of the revised proposal, ethics approval and consent, building the prototype, and all of the real measurements.</a:t>
+              <a:t>CUE CARD 13
+• Done: design, firmware (not on hardware), software (simulated data), app + 3D
+• Oct 9: revised scope agreed with Ms. Ireland
+• Pending: her review of the revised proposal, ethics + consent
+• Pending: build + all real measurements
+→ So, what can I conclude?
+FULL SCRIPT [0:35] To be clear about where the project stands: the design, firmware, analysis software, app and 3D model are done, and the software has been tested only on simulated data. My teacher agreed to this revised scope on October ninth. Still pending are her review of the revised proposal, ethics approval and consent, building the prototype, and all of the real measurements.</a:t>
             </a:r>
             <a:endParaRPr lang="en-US" dirty="0"/>
           </a:p>
@@ -960,7 +992,12 @@
           <a:p>
             <a:r>
               <a:rPr lang="en-US" dirty="0"/>
-              <a:t>[0:30] I do not have a conclusion yet, because no real data has been collected. After the accuracy sessions, this project will show how closely the wearable agrees with a reference oximeter at rest, how much of a recording gives a valid signal, and, if approved, whether flagged dips match logged ones. It cannot show whether anyone has sleep apnea. Thank you; I am happy to take questions.</a:t>
+              <a:t>CUE CARD 14
+• No conclusion yet: no real data
+• Will show: agreement at rest, % valid signal, whether logged dips are flagged
+• Cannot show: whether anyone has sleep apnea
+• Thank you. Questions?
+FULL SCRIPT [0:30] I do not have a conclusion yet, because no real data has been collected. After the accuracy sessions, this project will show how closely the wearable agrees with a reference oximeter at rest, how much of a recording gives a valid signal, and, if approved, whether flagged dips match logged ones. It cannot show whether anyone has sleep apnea. Thank you; I am happy to take questions.</a:t>
             </a:r>
             <a:endParaRPr lang="en-US" dirty="0"/>
           </a:p>
@@ -1488,7 +1525,14 @@
           <a:p>
             <a:r>
               <a:rPr lang="en-US" dirty="0"/>
-              <a:t>[0:45] My question is how closely my wearable's oxygen and heart-rate readings agree with a Health Canada-authorized fingertip oximeter, and whether software can reliably flag oxygen desaturation events. My hypothesis is that, when it is worn properly and only good-quality readings are used, it will agree within about three percentage points, because both devices measure how blood absorbs red and infrared light. What I change is the measuring device and the test condition; what I measure is the difference between the two devices, the events flagged, and how much of the signal is valid.</a:t>
+              <a:t>CUE CARD 2
+• Q: does the wearable agree with a Health Canada-authorized fingertip oximeter? (SpO₂ + heart rate)
+• Can it flag desaturations: ≥ 3 points for ≥ 10 s?
+• H: within ±3 points (95% limits of agreement)
+• Why: both use red + infrared light
+• Change: device + condition → Measure: difference, events, % valid
+→ Some background on how this works.
+FULL SCRIPT [0:45] My question is how closely my wearable's oxygen and heart-rate readings agree with a Health Canada-authorized fingertip oximeter, and whether software can reliably flag oxygen desaturation events. My hypothesis is that, when it is worn properly and only good-quality readings are used, it will agree within about three percentage points, because both devices measure how blood absorbs red and infrared light. What I change is the measuring device and the test condition; what I measure is the difference between the two devices, the events flagged, and how much of the signal is valid.</a:t>
             </a:r>
             <a:endParaRPr lang="en-US" dirty="0"/>
           </a:p>
@@ -1576,7 +1620,14 @@
           <a:p>
             <a:r>
               <a:rPr lang="en-US" dirty="0"/>
-              <a:t>[0:50] A pulse oximeter shines red and infrared light through the fingertip; oxygen-rich and oxygen-poor blood absorb them differently, which gives the oxygen saturation, SpO2. A desaturation is a short drop in SpO2, and sleep studies count drops of three percent or more, but only together with other signals. Sleep apnea is diagnosed with a sleep study that measures airflow, breathing effort and sleep itself. My device measures only oxygen and heart rate, so it cannot tell an apnea from other causes of a dip, and it would miss apneas that cause little or no drop. That is why my project is about measurement accuracy and oxygen dips, not about diagnosing sleep apnea.</a:t>
+              <a:t>CUE CARD 3
+• Red 660 nm + infrared 880 nm → SpO₂
+• Desaturation = short drop; sleep studies use ≥ 3% plus other signals
+• Apnea diagnosis = sleep study: airflow, breathing effort, sleep
+• Not every drop is an apnea; not every apnea causes a drop
+• So: accuracy + oxygen dips, NOT diagnosis
+→ Here is the device I designed.
+FULL SCRIPT [0:50] A pulse oximeter shines red and infrared light through the fingertip; oxygen-rich and oxygen-poor blood absorb them differently, which gives the oxygen saturation, SpO2. A desaturation is a short drop in SpO2, and sleep studies count drops of three percent or more, but only together with other signals. Sleep apnea is diagnosed with a sleep study that measures airflow, breathing effort and sleep itself. My device measures only oxygen and heart rate, so it cannot tell an apnea from other causes of a dip, and it would miss apneas that cause little or no drop. That is why my project is about measurement accuracy and oxygen dips, not about diagnosing sleep apnea.</a:t>
             </a:r>
             <a:endParaRPr lang="en-US" dirty="0"/>
           </a:p>
@@ -1664,7 +1715,14 @@
           <a:p>
             <a:r>
               <a:rPr lang="en-US" dirty="0"/>
-              <a:t>[0:40] This is the design. The first prototype keeps things simple: an ESP32 board in a running armband, a MAX30102 sensor in a velcro finger cuff, and a USB cable for power, with every wire plugged in. It reads oxygen and heart rate once per second. The 3D model shows a possible later version in a sealed case. The prototype has not been built yet; the parts list and build guide are ready.</a:t>
+              <a:t>CUE CARD 4
+• v1: ESP32 in an armband, MAX30102 in a velcro finger cuff, USB power
+• All plug-in wires
+• 1 reading per second
+• 3D model = a possible later sealed version (v2)
+• Not built yet; parts list + build guide ready
+→ How the data gets from my finger to a file.
+FULL SCRIPT [0:40] This is the design. The first prototype keeps things simple: an ESP32 board in a running armband, a MAX30102 sensor in a velcro finger cuff, and a USB cable for power, with every wire plugged in. It reads oxygen and heart rate once per second. The 3D model shows a possible later version in a sealed case. The prototype has not been built yet; the parts list and build guide are ready.</a:t>
             </a:r>
             <a:endParaRPr lang="en-US" dirty="0"/>
           </a:p>
@@ -1752,7 +1810,13 @@
           <a:p>
             <a:r>
               <a:rPr lang="en-US" dirty="0"/>
-              <a:t>[0:35] The finger sensor's light readings go to the ESP32, which calculates oxygen and pulse once per second and sends each reading over Bluetooth or USB to my app and analysis code. Every session will start with a device check that must say READY. So far I have tested this check only on a simulated device, where it also correctly reported a broken sensor; it still has to be tested on the real hardware.</a:t>
+              <a:t>CUE CARD 5
+• Sensor → ESP32 → Bluetooth / USB → app + analysis
+• Device check must say READY before every session
+• Tested only on a simulated device so far
+• Real hardware not tested yet
+→ This is how I plan to test it.
+FULL SCRIPT [0:35] The finger sensor's light readings go to the ESP32, which calculates oxygen and pulse once per second and sends each reading over Bluetooth or USB to my app and analysis code. Every session will start with a device check that must say READY. So far I have tested this check only on a simulated device, where it also correctly reported a broken sensor; it still has to be tested on the real hardware.</a:t>
             </a:r>
             <a:endParaRPr lang="en-US" dirty="0"/>
           </a:p>
@@ -1840,7 +1904,14 @@
           <a:p>
             <a:r>
               <a:rPr lang="en-US" dirty="0"/>
-              <a:t>[0:50] This is my planned protocol. Nothing will be tested on anyone, including me, until my teacher accepts this revised proposal, the ethics committee approves, and consent is signed. The main test is accuracy: seated at rest, I wear my device on one finger and the reference oximeter on the other hand, and I record both oxygen and heart rate every two minutes for thirty minutes, over several sessions. Every reading must pass signal-quality checks. If approved, overnight recordings will measure signal quality and desaturation events, but those events cannot be verified because the reference oximeter does not record overnight. An optional breath-hold test, only if approved, would check whether short, awake dips are flagged; it does not test sleep apnea.</a:t>
+              <a:t>CUE CARD 6
+• Nothing until: Ms. Ireland accepts the proposal + ethics approval + consent
+• Main test: seated, 30 min, both devices every 2 min
+• Every reading must pass the quality checks
+• Overnight (if approved): cannot be verified
+• Breath-holds (optional): only check flagging, NOT apnea
+→ The app shows all of this.
+FULL SCRIPT [0:50] This is my planned protocol. Nothing will be tested on anyone, including me, until my teacher accepts this revised proposal, the ethics committee approves, and consent is signed. The main test is accuracy: seated at rest, I wear my device on one finger and the reference oximeter on the other hand, and I record both oxygen and heart rate every two minutes for thirty minutes, over several sessions. Every reading must pass signal-quality checks. If approved, overnight recordings will measure signal quality and desaturation events, but those events cannot be verified because the reference oximeter does not record overnight. An optional breath-hold test, only if approved, would check whether short, awake dips are flagged; it does not test sleep apnea.</a:t>
             </a:r>
             <a:endParaRPr lang="en-US" dirty="0"/>
           </a:p>
@@ -1928,7 +1999,13 @@
           <a:p>
             <a:r>
               <a:rPr lang="en-US" dirty="0"/>
-              <a:t>[0:30] This is my companion app. The Night tab shows the oxygen chart, the desaturation events it flagged, the event rate per hour of valid recording and how much of the signal was valid. The Live tab connects to the wearable and runs the device checks. Everything you see so far is clearly labelled demonstration data.</a:t>
+              <a:t>CUE CARD 7
+• Night tab: chart, flagged events, rate per valid hour, % valid
+• Live tab: connects to the wearable + runs the checks
+• Same CSV as the analysis → every number traceable
+• Everything shown = demonstration data
+→ What I will measure.
+FULL SCRIPT [0:30] This is my companion app. The Night tab shows the oxygen chart, the desaturation events it flagged, the event rate per hour of valid recording and how much of the signal was valid. The Live tab connects to the wearable and runs the device checks. Everything you see so far is clearly labelled demonstration data.</a:t>
             </a:r>
             <a:endParaRPr lang="en-US" dirty="0"/>
           </a:p>
@@ -2016,7 +2093,14 @@
           <a:p>
             <a:r>
               <a:rPr lang="en-US" dirty="0"/>
-              <a:t>[0:40] These are the results I will collect. I have not collected any real data yet. The table shows each measure, how it is calculated, and a demonstration value from simulated data, which only proves that my analysis code runs; they are not findings. The event rate is the number of desaturation events divided by the hours of valid signal, not hours in bed, and it is not an apnea-hypopnea index. The last column will be filled in with real results before January eleventh.</a:t>
+              <a:t>CUE CARD 8
+• No real data yet
+• Each row: the measure + how it is calculated
+• Demo values only prove the code runs; NOT findings
+• Rate = events ÷ hours of valid signal; NOT an AHI
+• Real column filled in before January 11
+→ How the results will look.
+FULL SCRIPT [0:40] These are the results I will collect. I have not collected any real data yet. The table shows each measure, how it is calculated, and a demonstration value from simulated data, which only proves that my analysis code runs; they are not findings. The event rate is the number of desaturation events divided by the hours of valid signal, not hours in bed, and it is not an apnea-hypopnea index. The last column will be filled in with real results before January eleventh.</a:t>
             </a:r>
             <a:endParaRPr lang="en-US" dirty="0"/>
           </a:p>
@@ -2104,7 +2188,13 @@
           <a:p>
             <a:r>
               <a:rPr lang="en-US" dirty="0"/>
-              <a:t>[0:30] These two charts show how the results will be presented, using simulated data. On the left, the oxygen line with each flagged desaturation event as a red band. On the right, a Bland-Altman chart, the standard way to compare two measuring devices: each dot is a pair of readings, and the dashed lines show the range that ninety-five percent of differences fall in. With real data, that range is what tests my hypothesis.</a:t>
+              <a:t>CUE CARD 9
+• Left: oxygen line, red bands = flagged dips (simulated)
+• Right: Bland–Altman; each dot = one pair of readings
+• Dashed lines = range of 95% of differences
+• With real data, that range tests my hypothesis
+→ Only good readings count.
+FULL SCRIPT [0:30] These two charts show how the results will be presented, using simulated data. On the left, the oxygen line with each flagged desaturation event as a red band. On the right, a Bland-Altman chart, the standard way to compare two measuring devices: each dot is a pair of readings, and the dashed lines show the range that ninety-five percent of differences fall in. With real data, that range is what tests my hypothesis.</a:t>
             </a:r>
             <a:endParaRPr lang="en-US" dirty="0"/>
           </a:p>
@@ -2513,9 +2603,9 @@
                 <a:solidFill>
                   <a:srgbClr val="86868B"/>
                 </a:solidFill>
-                <a:latin typeface="Helvetica Neue" pitchFamily="34" charset="0"/>
-                <a:ea typeface="Helvetica Neue" pitchFamily="34" charset="-122"/>
-                <a:cs typeface="Helvetica Neue" pitchFamily="34" charset="-120"/>
+                <a:latin typeface="Inter" pitchFamily="34" charset="0"/>
+                <a:ea typeface="Inter" pitchFamily="34" charset="-122"/>
+                <a:cs typeface="Inter" pitchFamily="34" charset="-120"/>
               </a:rPr>
               <a:t>Health and Medical Sciences · Experimental project</a:t>
             </a:r>
@@ -2552,9 +2642,9 @@
                 <a:solidFill>
                   <a:srgbClr val="FFFFFF"/>
                 </a:solidFill>
-                <a:latin typeface="Helvetica Neue" pitchFamily="34" charset="0"/>
-                <a:ea typeface="Helvetica Neue" pitchFamily="34" charset="-122"/>
-                <a:cs typeface="Helvetica Neue" pitchFamily="34" charset="-120"/>
+                <a:latin typeface="Inter" pitchFamily="34" charset="0"/>
+                <a:ea typeface="Inter" pitchFamily="34" charset="-122"/>
+                <a:cs typeface="Inter" pitchFamily="34" charset="-120"/>
               </a:rPr>
               <a:t>Night Signal.</a:t>
             </a:r>
@@ -2591,9 +2681,9 @@
                 <a:solidFill>
                   <a:srgbClr val="86868B"/>
                 </a:solidFill>
-                <a:latin typeface="Helvetica Neue" pitchFamily="34" charset="0"/>
-                <a:ea typeface="Helvetica Neue" pitchFamily="34" charset="-122"/>
-                <a:cs typeface="Helvetica Neue" pitchFamily="34" charset="-120"/>
+                <a:latin typeface="Inter" pitchFamily="34" charset="0"/>
+                <a:ea typeface="Inter" pitchFamily="34" charset="-122"/>
+                <a:cs typeface="Inter" pitchFamily="34" charset="-120"/>
               </a:rPr>
               <a:t>How accurately can a low-cost wearable measure blood oxygen?</a:t>
             </a:r>
@@ -2654,9 +2744,9 @@
                 <a:solidFill>
                   <a:srgbClr val="FFFFFF"/>
                 </a:solidFill>
-                <a:latin typeface="Helvetica Neue" pitchFamily="34" charset="0"/>
-                <a:ea typeface="Helvetica Neue" pitchFamily="34" charset="-122"/>
-                <a:cs typeface="Helvetica Neue" pitchFamily="34" charset="-120"/>
+                <a:latin typeface="Inter" pitchFamily="34" charset="0"/>
+                <a:ea typeface="Inter" pitchFamily="34" charset="-122"/>
+                <a:cs typeface="Inter" pitchFamily="34" charset="-120"/>
               </a:rPr>
               <a:t>Gabriel Mamane</a:t>
             </a:r>
@@ -2668,9 +2758,9 @@
                 <a:solidFill>
                   <a:srgbClr val="86868B"/>
                 </a:solidFill>
-                <a:latin typeface="Helvetica Neue" pitchFamily="34" charset="0"/>
-                <a:ea typeface="Helvetica Neue" pitchFamily="34" charset="-122"/>
-                <a:cs typeface="Helvetica Neue" pitchFamily="34" charset="-120"/>
+                <a:latin typeface="Inter" pitchFamily="34" charset="0"/>
+                <a:ea typeface="Inter" pitchFamily="34" charset="-122"/>
+                <a:cs typeface="Inter" pitchFamily="34" charset="-120"/>
               </a:rPr>
               <a:t>   ·   Grade ___</a:t>
             </a:r>
@@ -2707,9 +2797,9 @@
                 <a:solidFill>
                   <a:srgbClr val="6E6E73"/>
                 </a:solidFill>
-                <a:latin typeface="Helvetica Neue" pitchFamily="34" charset="0"/>
-                <a:ea typeface="Helvetica Neue" pitchFamily="34" charset="-122"/>
-                <a:cs typeface="Helvetica Neue" pitchFamily="34" charset="-120"/>
+                <a:latin typeface="Inter" pitchFamily="34" charset="0"/>
+                <a:ea typeface="Inter" pitchFamily="34" charset="-122"/>
+                <a:cs typeface="Inter" pitchFamily="34" charset="-120"/>
               </a:rPr>
               <a:t>Educational prototype. It measures SpO₂ and heart rate; it does not diagnose sleep apnea.</a:t>
             </a:r>
@@ -2778,9 +2868,9 @@
                 <a:solidFill>
                   <a:srgbClr val="E3254B"/>
                 </a:solidFill>
-                <a:latin typeface="Helvetica Neue" pitchFamily="34" charset="0"/>
-                <a:ea typeface="Helvetica Neue" pitchFamily="34" charset="-122"/>
-                <a:cs typeface="Helvetica Neue" pitchFamily="34" charset="-120"/>
+                <a:latin typeface="Inter" pitchFamily="34" charset="0"/>
+                <a:ea typeface="Inter" pitchFamily="34" charset="-122"/>
+                <a:cs typeface="Inter" pitchFamily="34" charset="-120"/>
               </a:rPr>
               <a:t>Method · signal quality</a:t>
             </a:r>
@@ -2820,9 +2910,9 @@
                 <a:solidFill>
                   <a:srgbClr val="1D1D1F"/>
                 </a:solidFill>
-                <a:latin typeface="Helvetica Neue" pitchFamily="34" charset="0"/>
-                <a:ea typeface="Helvetica Neue" pitchFamily="34" charset="-122"/>
-                <a:cs typeface="Helvetica Neue" pitchFamily="34" charset="-120"/>
+                <a:latin typeface="Inter" pitchFamily="34" charset="0"/>
+                <a:ea typeface="Inter" pitchFamily="34" charset="-122"/>
+                <a:cs typeface="Inter" pitchFamily="34" charset="-120"/>
               </a:rPr>
               <a:t>Only good readings count.</a:t>
             </a:r>
@@ -2903,9 +2993,9 @@
                 <a:solidFill>
                   <a:srgbClr val="1D1D1F"/>
                 </a:solidFill>
-                <a:latin typeface="Helvetica Neue" pitchFamily="34" charset="0"/>
-                <a:ea typeface="Helvetica Neue" pitchFamily="34" charset="-122"/>
-                <a:cs typeface="Helvetica Neue" pitchFamily="34" charset="-120"/>
+                <a:latin typeface="Inter" pitchFamily="34" charset="0"/>
+                <a:ea typeface="Inter" pitchFamily="34" charset="-122"/>
+                <a:cs typeface="Inter" pitchFamily="34" charset="-120"/>
               </a:rPr>
               <a:t>Finger on the sensor</a:t>
             </a:r>
@@ -2942,9 +3032,9 @@
                 <a:solidFill>
                   <a:srgbClr val="6E6E73"/>
                 </a:solidFill>
-                <a:latin typeface="Helvetica Neue" pitchFamily="34" charset="0"/>
-                <a:ea typeface="Helvetica Neue" pitchFamily="34" charset="-122"/>
-                <a:cs typeface="Helvetica Neue" pitchFamily="34" charset="-120"/>
+                <a:latin typeface="Inter" pitchFamily="34" charset="0"/>
+                <a:ea typeface="Inter" pitchFamily="34" charset="-122"/>
+                <a:cs typeface="Inter" pitchFamily="34" charset="-120"/>
               </a:rPr>
               <a:t>Infrared level shows a finger is present; otherwise the reading is excluded.</a:t>
             </a:r>
@@ -3025,9 +3115,9 @@
                 <a:solidFill>
                   <a:srgbClr val="1D1D1F"/>
                 </a:solidFill>
-                <a:latin typeface="Helvetica Neue" pitchFamily="34" charset="0"/>
-                <a:ea typeface="Helvetica Neue" pitchFamily="34" charset="-122"/>
-                <a:cs typeface="Helvetica Neue" pitchFamily="34" charset="-120"/>
+                <a:latin typeface="Inter" pitchFamily="34" charset="0"/>
+                <a:ea typeface="Inter" pitchFamily="34" charset="-122"/>
+                <a:cs typeface="Inter" pitchFamily="34" charset="-120"/>
               </a:rPr>
               <a:t>Sensor confidence</a:t>
             </a:r>
@@ -3064,9 +3154,9 @@
                 <a:solidFill>
                   <a:srgbClr val="6E6E73"/>
                 </a:solidFill>
-                <a:latin typeface="Helvetica Neue" pitchFamily="34" charset="0"/>
-                <a:ea typeface="Helvetica Neue" pitchFamily="34" charset="-122"/>
-                <a:cs typeface="Helvetica Neue" pitchFamily="34" charset="-120"/>
+                <a:latin typeface="Inter" pitchFamily="34" charset="0"/>
+                <a:ea typeface="Inter" pitchFamily="34" charset="-122"/>
+                <a:cs typeface="Inter" pitchFamily="34" charset="-120"/>
               </a:rPr>
               <a:t>The sensor marks each SpO₂ reading valid or invalid; invalid ones are excluded.</a:t>
             </a:r>
@@ -3147,9 +3237,9 @@
                 <a:solidFill>
                   <a:srgbClr val="1D1D1F"/>
                 </a:solidFill>
-                <a:latin typeface="Helvetica Neue" pitchFamily="34" charset="0"/>
-                <a:ea typeface="Helvetica Neue" pitchFamily="34" charset="-122"/>
-                <a:cs typeface="Helvetica Neue" pitchFamily="34" charset="-120"/>
+                <a:latin typeface="Inter" pitchFamily="34" charset="0"/>
+                <a:ea typeface="Inter" pitchFamily="34" charset="-122"/>
+                <a:cs typeface="Inter" pitchFamily="34" charset="-120"/>
               </a:rPr>
               <a:t>Believable range</a:t>
             </a:r>
@@ -3186,9 +3276,9 @@
                 <a:solidFill>
                   <a:srgbClr val="6E6E73"/>
                 </a:solidFill>
-                <a:latin typeface="Helvetica Neue" pitchFamily="34" charset="0"/>
-                <a:ea typeface="Helvetica Neue" pitchFamily="34" charset="-122"/>
-                <a:cs typeface="Helvetica Neue" pitchFamily="34" charset="-120"/>
+                <a:latin typeface="Inter" pitchFamily="34" charset="0"/>
+                <a:ea typeface="Inter" pitchFamily="34" charset="-122"/>
+                <a:cs typeface="Inter" pitchFamily="34" charset="-120"/>
               </a:rPr>
               <a:t>SpO₂ outside 70–100% is excluded as an error.</a:t>
             </a:r>
@@ -3269,9 +3359,9 @@
                 <a:solidFill>
                   <a:srgbClr val="1D1D1F"/>
                 </a:solidFill>
-                <a:latin typeface="Helvetica Neue" pitchFamily="34" charset="0"/>
-                <a:ea typeface="Helvetica Neue" pitchFamily="34" charset="-122"/>
-                <a:cs typeface="Helvetica Neue" pitchFamily="34" charset="-120"/>
+                <a:latin typeface="Inter" pitchFamily="34" charset="0"/>
+                <a:ea typeface="Inter" pitchFamily="34" charset="-122"/>
+                <a:cs typeface="Inter" pitchFamily="34" charset="-120"/>
               </a:rPr>
               <a:t>Movement</a:t>
             </a:r>
@@ -3308,9 +3398,9 @@
                 <a:solidFill>
                   <a:srgbClr val="6E6E73"/>
                 </a:solidFill>
-                <a:latin typeface="Helvetica Neue" pitchFamily="34" charset="0"/>
-                <a:ea typeface="Helvetica Neue" pitchFamily="34" charset="-122"/>
-                <a:cs typeface="Helvetica Neue" pitchFamily="34" charset="-120"/>
+                <a:latin typeface="Inter" pitchFamily="34" charset="0"/>
+                <a:ea typeface="Inter" pitchFamily="34" charset="-122"/>
+                <a:cs typeface="Inter" pitchFamily="34" charset="-120"/>
               </a:rPr>
               <a:t>5 s on each side of a sudden movement is excluded (motion distorts the light signal).</a:t>
             </a:r>
@@ -3369,9 +3459,9 @@
                 <a:solidFill>
                   <a:srgbClr val="FFFFFF"/>
                 </a:solidFill>
-                <a:latin typeface="Helvetica Neue" pitchFamily="34" charset="0"/>
-                <a:ea typeface="Helvetica Neue" pitchFamily="34" charset="-122"/>
-                <a:cs typeface="Helvetica Neue" pitchFamily="34" charset="-120"/>
+                <a:latin typeface="Inter" pitchFamily="34" charset="0"/>
+                <a:ea typeface="Inter" pitchFamily="34" charset="-122"/>
+                <a:cs typeface="Inter" pitchFamily="34" charset="-120"/>
               </a:rPr>
               <a:t>Desaturation event rate  =  </a:t>
             </a:r>
@@ -3383,9 +3473,9 @@
                 <a:solidFill>
                   <a:srgbClr val="2997FF"/>
                 </a:solidFill>
-                <a:latin typeface="Helvetica Neue" pitchFamily="34" charset="0"/>
-                <a:ea typeface="Helvetica Neue" pitchFamily="34" charset="-122"/>
-                <a:cs typeface="Helvetica Neue" pitchFamily="34" charset="-120"/>
+                <a:latin typeface="Inter" pitchFamily="34" charset="0"/>
+                <a:ea typeface="Inter" pitchFamily="34" charset="-122"/>
+                <a:cs typeface="Inter" pitchFamily="34" charset="-120"/>
               </a:rPr>
               <a:t>flagged events  ÷  hours of valid signal</a:t>
             </a:r>
@@ -3422,9 +3512,9 @@
                 <a:solidFill>
                   <a:srgbClr val="86868B"/>
                 </a:solidFill>
-                <a:latin typeface="Helvetica Neue" pitchFamily="34" charset="0"/>
-                <a:ea typeface="Helvetica Neue" pitchFamily="34" charset="-122"/>
-                <a:cs typeface="Helvetica Neue" pitchFamily="34" charset="-120"/>
+                <a:latin typeface="Inter" pitchFamily="34" charset="0"/>
+                <a:ea typeface="Inter" pitchFamily="34" charset="-122"/>
+                <a:cs typeface="Inter" pitchFamily="34" charset="-120"/>
               </a:rPr>
               <a:t>Not hours in bed and not sleep time (the device cannot measure sleep). An event may never span a gap in the valid data. Each report states the % of valid signal.</a:t>
             </a:r>
@@ -3461,9 +3551,9 @@
                 <a:solidFill>
                   <a:srgbClr val="A1A1A6"/>
                 </a:solidFill>
-                <a:latin typeface="Helvetica Neue" pitchFamily="34" charset="0"/>
-                <a:ea typeface="Helvetica Neue" pitchFamily="34" charset="-122"/>
-                <a:cs typeface="Helvetica Neue" pitchFamily="34" charset="-120"/>
+                <a:latin typeface="Inter" pitchFamily="34" charset="0"/>
+                <a:ea typeface="Inter" pitchFamily="34" charset="-122"/>
+                <a:cs typeface="Inter" pitchFamily="34" charset="-120"/>
               </a:rPr>
               <a:t>Night Signal</a:t>
             </a:r>
@@ -3500,9 +3590,9 @@
                 <a:solidFill>
                   <a:srgbClr val="A1A1A6"/>
                 </a:solidFill>
-                <a:latin typeface="Helvetica Neue" pitchFamily="34" charset="0"/>
-                <a:ea typeface="Helvetica Neue" pitchFamily="34" charset="-122"/>
-                <a:cs typeface="Helvetica Neue" pitchFamily="34" charset="-120"/>
+                <a:latin typeface="Inter" pitchFamily="34" charset="0"/>
+                <a:ea typeface="Inter" pitchFamily="34" charset="-122"/>
+                <a:cs typeface="Inter" pitchFamily="34" charset="-120"/>
               </a:rPr>
               <a:t>10</a:t>
             </a:r>
@@ -3578,9 +3668,9 @@
                 <a:solidFill>
                   <a:srgbClr val="FF375F"/>
                 </a:solidFill>
-                <a:latin typeface="Helvetica Neue" pitchFamily="34" charset="0"/>
-                <a:ea typeface="Helvetica Neue" pitchFamily="34" charset="-122"/>
-                <a:cs typeface="Helvetica Neue" pitchFamily="34" charset="-120"/>
+                <a:latin typeface="Inter" pitchFamily="34" charset="0"/>
+                <a:ea typeface="Inter" pitchFamily="34" charset="-122"/>
+                <a:cs typeface="Inter" pitchFamily="34" charset="-120"/>
               </a:rPr>
               <a:t>Main analysis · plan</a:t>
             </a:r>
@@ -3620,9 +3710,9 @@
                 <a:solidFill>
                   <a:srgbClr val="FFFFFF"/>
                 </a:solidFill>
-                <a:latin typeface="Helvetica Neue" pitchFamily="34" charset="0"/>
-                <a:ea typeface="Helvetica Neue" pitchFamily="34" charset="-122"/>
-                <a:cs typeface="Helvetica Neue" pitchFamily="34" charset="-120"/>
+                <a:latin typeface="Inter" pitchFamily="34" charset="0"/>
+                <a:ea typeface="Inter" pitchFamily="34" charset="-122"/>
+                <a:cs typeface="Inter" pitchFamily="34" charset="-120"/>
               </a:rPr>
               <a:t>How I will interpret the results.</a:t>
             </a:r>
@@ -3647,15 +3737,11 @@
             </a:avLst>
           </a:prstGeom>
           <a:solidFill>
-            <a:srgbClr val="FFFFFF">
-              <a:alpha val="9000"/>
-            </a:srgbClr>
+            <a:srgbClr val="1C1C1E"/>
           </a:solidFill>
           <a:ln w="9525">
             <a:solidFill>
-              <a:srgbClr val="FFFFFF">
-                <a:alpha val="16000"/>
-              </a:srgbClr>
+              <a:srgbClr val="38383A"/>
             </a:solidFill>
             <a:prstDash val="solid"/>
           </a:ln>
@@ -3690,9 +3776,9 @@
                 <a:solidFill>
                   <a:srgbClr val="2997FF"/>
                 </a:solidFill>
-                <a:latin typeface="Helvetica Neue" pitchFamily="34" charset="0"/>
-                <a:ea typeface="Helvetica Neue" pitchFamily="34" charset="-122"/>
-                <a:cs typeface="Helvetica Neue" pitchFamily="34" charset="-120"/>
+                <a:latin typeface="Inter" pitchFamily="34" charset="0"/>
+                <a:ea typeface="Inter" pitchFamily="34" charset="-122"/>
+                <a:cs typeface="Inter" pitchFamily="34" charset="-120"/>
               </a:rPr>
               <a:t>Agreement</a:t>
             </a:r>
@@ -3729,11 +3815,11 @@
                 <a:solidFill>
                   <a:srgbClr val="A1A1A6"/>
                 </a:solidFill>
-                <a:latin typeface="Helvetica Neue" pitchFamily="34" charset="0"/>
-                <a:ea typeface="Helvetica Neue" pitchFamily="34" charset="-122"/>
-                <a:cs typeface="Helvetica Neue" pitchFamily="34" charset="-120"/>
-              </a:rPr>
-              <a:t>If 95% of SpO₂ differences fall within ±3 points of the reference at rest, the hypothesis is supported for these conditions. The reference itself is only ±2 points.</a:t>
+                <a:latin typeface="Inter" pitchFamily="34" charset="0"/>
+                <a:ea typeface="Inter" pitchFamily="34" charset="-122"/>
+                <a:cs typeface="Inter" pitchFamily="34" charset="-120"/>
+              </a:rPr>
+              <a:t>If 95% of SpO₂ differences fall within ±3 points of the reference at rest, the hypothesis is supported for these conditions. The reference itself is typically about ±2 points.</a:t>
             </a:r>
             <a:endParaRPr lang="en-US" sz="1400" dirty="0"/>
           </a:p>
@@ -3756,15 +3842,11 @@
             </a:avLst>
           </a:prstGeom>
           <a:solidFill>
-            <a:srgbClr val="FFFFFF">
-              <a:alpha val="9000"/>
-            </a:srgbClr>
+            <a:srgbClr val="1C1C1E"/>
           </a:solidFill>
           <a:ln w="9525">
             <a:solidFill>
-              <a:srgbClr val="FFFFFF">
-                <a:alpha val="16000"/>
-              </a:srgbClr>
+              <a:srgbClr val="38383A"/>
             </a:solidFill>
             <a:prstDash val="solid"/>
           </a:ln>
@@ -3799,9 +3881,9 @@
                 <a:solidFill>
                   <a:srgbClr val="30D158"/>
                 </a:solidFill>
-                <a:latin typeface="Helvetica Neue" pitchFamily="34" charset="0"/>
-                <a:ea typeface="Helvetica Neue" pitchFamily="34" charset="-122"/>
-                <a:cs typeface="Helvetica Neue" pitchFamily="34" charset="-120"/>
+                <a:latin typeface="Inter" pitchFamily="34" charset="0"/>
+                <a:ea typeface="Inter" pitchFamily="34" charset="-122"/>
+                <a:cs typeface="Inter" pitchFamily="34" charset="-120"/>
               </a:rPr>
               <a:t>Desaturation events</a:t>
             </a:r>
@@ -3838,9 +3920,9 @@
                 <a:solidFill>
                   <a:srgbClr val="A1A1A6"/>
                 </a:solidFill>
-                <a:latin typeface="Helvetica Neue" pitchFamily="34" charset="0"/>
-                <a:ea typeface="Helvetica Neue" pitchFamily="34" charset="-122"/>
-                <a:cs typeface="Helvetica Neue" pitchFamily="34" charset="-120"/>
+                <a:latin typeface="Inter" pitchFamily="34" charset="0"/>
+                <a:ea typeface="Inter" pitchFamily="34" charset="-122"/>
+                <a:cs typeface="Inter" pitchFamily="34" charset="-120"/>
               </a:rPr>
               <a:t>A flagged event means an oxygen dip, not an apnea. Overnight events cannot be checked, because the reference cannot record overnight.</a:t>
             </a:r>
@@ -3865,15 +3947,11 @@
             </a:avLst>
           </a:prstGeom>
           <a:solidFill>
-            <a:srgbClr val="FFFFFF">
-              <a:alpha val="9000"/>
-            </a:srgbClr>
+            <a:srgbClr val="1C1C1E"/>
           </a:solidFill>
           <a:ln w="9525">
             <a:solidFill>
-              <a:srgbClr val="FFFFFF">
-                <a:alpha val="16000"/>
-              </a:srgbClr>
+              <a:srgbClr val="38383A"/>
             </a:solidFill>
             <a:prstDash val="solid"/>
           </a:ln>
@@ -3908,9 +3986,9 @@
                 <a:solidFill>
                   <a:srgbClr val="FF9F0A"/>
                 </a:solidFill>
-                <a:latin typeface="Helvetica Neue" pitchFamily="34" charset="0"/>
-                <a:ea typeface="Helvetica Neue" pitchFamily="34" charset="-122"/>
-                <a:cs typeface="Helvetica Neue" pitchFamily="34" charset="-120"/>
+                <a:latin typeface="Inter" pitchFamily="34" charset="0"/>
+                <a:ea typeface="Inter" pitchFamily="34" charset="-122"/>
+                <a:cs typeface="Inter" pitchFamily="34" charset="-120"/>
               </a:rPr>
               <a:t>Breath-hold test (if approved)</a:t>
             </a:r>
@@ -3947,9 +4025,9 @@
                 <a:solidFill>
                   <a:srgbClr val="A1A1A6"/>
                 </a:solidFill>
-                <a:latin typeface="Helvetica Neue" pitchFamily="34" charset="0"/>
-                <a:ea typeface="Helvetica Neue" pitchFamily="34" charset="-122"/>
-                <a:cs typeface="Helvetica Neue" pitchFamily="34" charset="-120"/>
+                <a:latin typeface="Inter" pitchFamily="34" charset="0"/>
+                <a:ea typeface="Inter" pitchFamily="34" charset="-122"/>
+                <a:cs typeface="Inter" pitchFamily="34" charset="-120"/>
               </a:rPr>
               <a:t>Shows whether awake, induced dips are flagged at the logged times. It does not show that sleep apnea can be detected during sleep.</a:t>
             </a:r>
@@ -3974,15 +4052,11 @@
             </a:avLst>
           </a:prstGeom>
           <a:solidFill>
-            <a:srgbClr val="FFFFFF">
-              <a:alpha val="9000"/>
-            </a:srgbClr>
+            <a:srgbClr val="1C1C1E"/>
           </a:solidFill>
           <a:ln w="9525">
             <a:solidFill>
-              <a:srgbClr val="FFFFFF">
-                <a:alpha val="16000"/>
-              </a:srgbClr>
+              <a:srgbClr val="38383A"/>
             </a:solidFill>
             <a:prstDash val="solid"/>
           </a:ln>
@@ -4017,9 +4091,9 @@
                 <a:solidFill>
                   <a:srgbClr val="FF375F"/>
                 </a:solidFill>
-                <a:latin typeface="Helvetica Neue" pitchFamily="34" charset="0"/>
-                <a:ea typeface="Helvetica Neue" pitchFamily="34" charset="-122"/>
-                <a:cs typeface="Helvetica Neue" pitchFamily="34" charset="-120"/>
+                <a:latin typeface="Inter" pitchFamily="34" charset="0"/>
+                <a:ea typeface="Inter" pitchFamily="34" charset="-122"/>
+                <a:cs typeface="Inter" pitchFamily="34" charset="-120"/>
               </a:rPr>
               <a:t>What would go against it</a:t>
             </a:r>
@@ -4056,9 +4130,9 @@
                 <a:solidFill>
                   <a:srgbClr val="A1A1A6"/>
                 </a:solidFill>
-                <a:latin typeface="Helvetica Neue" pitchFamily="34" charset="0"/>
-                <a:ea typeface="Helvetica Neue" pitchFamily="34" charset="-122"/>
-                <a:cs typeface="Helvetica Neue" pitchFamily="34" charset="-120"/>
+                <a:latin typeface="Inter" pitchFamily="34" charset="0"/>
+                <a:ea typeface="Inter" pitchFamily="34" charset="-122"/>
+                <a:cs typeface="Inter" pitchFamily="34" charset="-120"/>
               </a:rPr>
               <a:t>Limits wider than ±3 points, a consistent bias, a low % of valid signal, or logged dips that are missed.</a:t>
             </a:r>
@@ -4095,9 +4169,9 @@
                 <a:solidFill>
                   <a:srgbClr val="6E6E73"/>
                 </a:solidFill>
-                <a:latin typeface="Helvetica Neue" pitchFamily="34" charset="0"/>
-                <a:ea typeface="Helvetica Neue" pitchFamily="34" charset="-122"/>
-                <a:cs typeface="Helvetica Neue" pitchFamily="34" charset="-120"/>
+                <a:latin typeface="Inter" pitchFamily="34" charset="0"/>
+                <a:ea typeface="Inter" pitchFamily="34" charset="-122"/>
+                <a:cs typeface="Inter" pitchFamily="34" charset="-120"/>
               </a:rPr>
               <a:t>Night Signal</a:t>
             </a:r>
@@ -4134,9 +4208,9 @@
                 <a:solidFill>
                   <a:srgbClr val="6E6E73"/>
                 </a:solidFill>
-                <a:latin typeface="Helvetica Neue" pitchFamily="34" charset="0"/>
-                <a:ea typeface="Helvetica Neue" pitchFamily="34" charset="-122"/>
-                <a:cs typeface="Helvetica Neue" pitchFamily="34" charset="-120"/>
+                <a:latin typeface="Inter" pitchFamily="34" charset="0"/>
+                <a:ea typeface="Inter" pitchFamily="34" charset="-122"/>
+                <a:cs typeface="Inter" pitchFamily="34" charset="-120"/>
               </a:rPr>
               <a:t>11</a:t>
             </a:r>
@@ -4212,9 +4286,9 @@
                 <a:solidFill>
                   <a:srgbClr val="FF375F"/>
                 </a:solidFill>
-                <a:latin typeface="Helvetica Neue" pitchFamily="34" charset="0"/>
-                <a:ea typeface="Helvetica Neue" pitchFamily="34" charset="-122"/>
-                <a:cs typeface="Helvetica Neue" pitchFamily="34" charset="-120"/>
+                <a:latin typeface="Inter" pitchFamily="34" charset="0"/>
+                <a:ea typeface="Inter" pitchFamily="34" charset="-122"/>
+                <a:cs typeface="Inter" pitchFamily="34" charset="-120"/>
               </a:rPr>
               <a:t>Main analysis</a:t>
             </a:r>
@@ -4254,9 +4328,9 @@
                 <a:solidFill>
                   <a:srgbClr val="FFFFFF"/>
                 </a:solidFill>
-                <a:latin typeface="Helvetica Neue" pitchFamily="34" charset="0"/>
-                <a:ea typeface="Helvetica Neue" pitchFamily="34" charset="-122"/>
-                <a:cs typeface="Helvetica Neue" pitchFamily="34" charset="-120"/>
+                <a:latin typeface="Inter" pitchFamily="34" charset="0"/>
+                <a:ea typeface="Inter" pitchFamily="34" charset="-122"/>
+                <a:cs typeface="Inter" pitchFamily="34" charset="-120"/>
               </a:rPr>
               <a:t>Sources of error and limitations.</a:t>
             </a:r>
@@ -4293,9 +4367,9 @@
                 <a:solidFill>
                   <a:srgbClr val="2997FF"/>
                 </a:solidFill>
-                <a:latin typeface="Helvetica Neue" pitchFamily="34" charset="0"/>
-                <a:ea typeface="Helvetica Neue" pitchFamily="34" charset="-122"/>
-                <a:cs typeface="Helvetica Neue" pitchFamily="34" charset="-120"/>
+                <a:latin typeface="Inter" pitchFamily="34" charset="0"/>
+                <a:ea typeface="Inter" pitchFamily="34" charset="-122"/>
+                <a:cs typeface="Inter" pitchFamily="34" charset="-120"/>
               </a:rPr>
               <a:t>Measurement</a:t>
             </a:r>
@@ -4352,9 +4426,9 @@
                 <a:solidFill>
                   <a:srgbClr val="A1A1A6"/>
                 </a:solidFill>
-                <a:latin typeface="Helvetica Neue" pitchFamily="34" charset="0"/>
-                <a:ea typeface="Helvetica Neue" pitchFamily="34" charset="-122"/>
-                <a:cs typeface="Helvetica Neue" pitchFamily="34" charset="-120"/>
+                <a:latin typeface="Inter" pitchFamily="34" charset="0"/>
+                <a:ea typeface="Inter" pitchFamily="34" charset="-122"/>
+                <a:cs typeface="Inter" pitchFamily="34" charset="-120"/>
               </a:rPr>
               <a:t>Movement, finger pressure, cold hands and room light distort the light signal</a:t>
             </a:r>
@@ -4411,9 +4485,9 @@
                 <a:solidFill>
                   <a:srgbClr val="A1A1A6"/>
                 </a:solidFill>
-                <a:latin typeface="Helvetica Neue" pitchFamily="34" charset="0"/>
-                <a:ea typeface="Helvetica Neue" pitchFamily="34" charset="-122"/>
-                <a:cs typeface="Helvetica Neue" pitchFamily="34" charset="-120"/>
+                <a:latin typeface="Inter" pitchFamily="34" charset="0"/>
+                <a:ea typeface="Inter" pitchFamily="34" charset="-122"/>
+                <a:cs typeface="Inter" pitchFamily="34" charset="-120"/>
               </a:rPr>
               <a:t>Pulse oximeters can be less accurate on darker skin (Sjoding et al., 2020)</a:t>
             </a:r>
@@ -4470,11 +4544,11 @@
                 <a:solidFill>
                   <a:srgbClr val="A1A1A6"/>
                 </a:solidFill>
-                <a:latin typeface="Helvetica Neue" pitchFamily="34" charset="0"/>
-                <a:ea typeface="Helvetica Neue" pitchFamily="34" charset="-122"/>
-                <a:cs typeface="Helvetica Neue" pitchFamily="34" charset="-120"/>
-              </a:rPr>
-              <a:t>The reference oximeter is only accurate to about ±2 points</a:t>
+                <a:latin typeface="Inter" pitchFamily="34" charset="0"/>
+                <a:ea typeface="Inter" pitchFamily="34" charset="-122"/>
+                <a:cs typeface="Inter" pitchFamily="34" charset="-120"/>
+              </a:rPr>
+              <a:t>The reference oximeter is typically accurate to about ±2 points</a:t>
             </a:r>
             <a:endParaRPr lang="en-US" sz="1450" dirty="0"/>
           </a:p>
@@ -4529,9 +4603,9 @@
                 <a:solidFill>
                   <a:srgbClr val="A1A1A6"/>
                 </a:solidFill>
-                <a:latin typeface="Helvetica Neue" pitchFamily="34" charset="0"/>
-                <a:ea typeface="Helvetica Neue" pitchFamily="34" charset="-122"/>
-                <a:cs typeface="Helvetica Neue" pitchFamily="34" charset="-120"/>
+                <a:latin typeface="Inter" pitchFamily="34" charset="0"/>
+                <a:ea typeface="Inter" pitchFamily="34" charset="-122"/>
+                <a:cs typeface="Inter" pitchFamily="34" charset="-120"/>
               </a:rPr>
               <a:t>4-second averaging can smooth very short dips</a:t>
             </a:r>
@@ -4568,9 +4642,9 @@
                 <a:solidFill>
                   <a:srgbClr val="FF375F"/>
                 </a:solidFill>
-                <a:latin typeface="Helvetica Neue" pitchFamily="34" charset="0"/>
-                <a:ea typeface="Helvetica Neue" pitchFamily="34" charset="-122"/>
-                <a:cs typeface="Helvetica Neue" pitchFamily="34" charset="-120"/>
+                <a:latin typeface="Inter" pitchFamily="34" charset="0"/>
+                <a:ea typeface="Inter" pitchFamily="34" charset="-122"/>
+                <a:cs typeface="Inter" pitchFamily="34" charset="-120"/>
               </a:rPr>
               <a:t>Method</a:t>
             </a:r>
@@ -4627,9 +4701,9 @@
                 <a:solidFill>
                   <a:srgbClr val="A1A1A6"/>
                 </a:solidFill>
-                <a:latin typeface="Helvetica Neue" pitchFamily="34" charset="0"/>
-                <a:ea typeface="Helvetica Neue" pitchFamily="34" charset="-122"/>
-                <a:cs typeface="Helvetica Neue" pitchFamily="34" charset="-120"/>
+                <a:latin typeface="Inter" pitchFamily="34" charset="0"/>
+                <a:ea typeface="Inter" pitchFamily="34" charset="-122"/>
+                <a:cs typeface="Inter" pitchFamily="34" charset="-120"/>
               </a:rPr>
               <a:t>Oxygen and heart rate only: no airflow, breathing effort or sleep staging, so apnea cannot be identified</a:t>
             </a:r>
@@ -4686,9 +4760,9 @@
                 <a:solidFill>
                   <a:srgbClr val="A1A1A6"/>
                 </a:solidFill>
-                <a:latin typeface="Helvetica Neue" pitchFamily="34" charset="0"/>
-                <a:ea typeface="Helvetica Neue" pitchFamily="34" charset="-122"/>
-                <a:cs typeface="Helvetica Neue" pitchFamily="34" charset="-120"/>
+                <a:latin typeface="Inter" pitchFamily="34" charset="0"/>
+                <a:ea typeface="Inter" pitchFamily="34" charset="-122"/>
+                <a:cs typeface="Inter" pitchFamily="34" charset="-120"/>
               </a:rPr>
               <a:t>Awake rest is not the same as sleep; breath-holds are not apneas</a:t>
             </a:r>
@@ -4745,9 +4819,9 @@
                 <a:solidFill>
                   <a:srgbClr val="A1A1A6"/>
                 </a:solidFill>
-                <a:latin typeface="Helvetica Neue" pitchFamily="34" charset="0"/>
-                <a:ea typeface="Helvetica Neue" pitchFamily="34" charset="-122"/>
-                <a:cs typeface="Helvetica Neue" pitchFamily="34" charset="-120"/>
+                <a:latin typeface="Inter" pitchFamily="34" charset="0"/>
+                <a:ea typeface="Inter" pitchFamily="34" charset="-122"/>
+                <a:cs typeface="Inter" pitchFamily="34" charset="-120"/>
               </a:rPr>
               <a:t>One participant: results cannot be generalized</a:t>
             </a:r>
@@ -4804,9 +4878,9 @@
                 <a:solidFill>
                   <a:srgbClr val="A1A1A6"/>
                 </a:solidFill>
-                <a:latin typeface="Helvetica Neue" pitchFamily="34" charset="0"/>
-                <a:ea typeface="Helvetica Neue" pitchFamily="34" charset="-122"/>
-                <a:cs typeface="Helvetica Neue" pitchFamily="34" charset="-120"/>
+                <a:latin typeface="Inter" pitchFamily="34" charset="0"/>
+                <a:ea typeface="Inter" pitchFamily="34" charset="-122"/>
+                <a:cs typeface="Inter" pitchFamily="34" charset="-120"/>
               </a:rPr>
               <a:t>The reference cannot record overnight, so night events are unverified</a:t>
             </a:r>
@@ -4831,15 +4905,11 @@
             </a:avLst>
           </a:prstGeom>
           <a:solidFill>
-            <a:srgbClr val="FFFFFF">
-              <a:alpha val="9000"/>
-            </a:srgbClr>
+            <a:srgbClr val="1C1C1E"/>
           </a:solidFill>
           <a:ln w="9525">
             <a:solidFill>
-              <a:srgbClr val="FFFFFF">
-                <a:alpha val="16000"/>
-              </a:srgbClr>
+              <a:srgbClr val="38383A"/>
             </a:solidFill>
             <a:prstDash val="solid"/>
           </a:ln>
@@ -4874,9 +4944,9 @@
                 <a:solidFill>
                   <a:srgbClr val="FF9F0A"/>
                 </a:solidFill>
-                <a:latin typeface="Helvetica Neue" pitchFamily="34" charset="0"/>
-                <a:ea typeface="Helvetica Neue" pitchFamily="34" charset="-122"/>
-                <a:cs typeface="Helvetica Neue" pitchFamily="34" charset="-120"/>
+                <a:latin typeface="Inter" pitchFamily="34" charset="0"/>
+                <a:ea typeface="Inter" pitchFamily="34" charset="-122"/>
+                <a:cs typeface="Inter" pitchFamily="34" charset="-120"/>
               </a:rPr>
               <a:t>Engineering estimate (to be measured).  </a:t>
             </a:r>
@@ -4888,9 +4958,9 @@
                 <a:solidFill>
                   <a:srgbClr val="FFFFFF"/>
                 </a:solidFill>
-                <a:latin typeface="Helvetica Neue" pitchFamily="34" charset="0"/>
-                <a:ea typeface="Helvetica Neue" pitchFamily="34" charset="-122"/>
-                <a:cs typeface="Helvetica Neue" pitchFamily="34" charset="-120"/>
+                <a:latin typeface="Inter" pitchFamily="34" charset="0"/>
+                <a:ea typeface="Inter" pitchFamily="34" charset="-122"/>
+                <a:cs typeface="Inter" pitchFamily="34" charset="-120"/>
               </a:rPr>
               <a:t>Bluetooth draws roughly 100 mA, so a 500 mAh battery would last only about 4–5 hours. That is why prototype v1 is planned to run on USB power.</a:t>
             </a:r>
@@ -4927,9 +4997,9 @@
                 <a:solidFill>
                   <a:srgbClr val="6E6E73"/>
                 </a:solidFill>
-                <a:latin typeface="Helvetica Neue" pitchFamily="34" charset="0"/>
-                <a:ea typeface="Helvetica Neue" pitchFamily="34" charset="-122"/>
-                <a:cs typeface="Helvetica Neue" pitchFamily="34" charset="-120"/>
+                <a:latin typeface="Inter" pitchFamily="34" charset="0"/>
+                <a:ea typeface="Inter" pitchFamily="34" charset="-122"/>
+                <a:cs typeface="Inter" pitchFamily="34" charset="-120"/>
               </a:rPr>
               <a:t>Night Signal</a:t>
             </a:r>
@@ -4966,9 +5036,9 @@
                 <a:solidFill>
                   <a:srgbClr val="6E6E73"/>
                 </a:solidFill>
-                <a:latin typeface="Helvetica Neue" pitchFamily="34" charset="0"/>
-                <a:ea typeface="Helvetica Neue" pitchFamily="34" charset="-122"/>
-                <a:cs typeface="Helvetica Neue" pitchFamily="34" charset="-120"/>
+                <a:latin typeface="Inter" pitchFamily="34" charset="0"/>
+                <a:ea typeface="Inter" pitchFamily="34" charset="-122"/>
+                <a:cs typeface="Inter" pitchFamily="34" charset="-120"/>
               </a:rPr>
               <a:t>12</a:t>
             </a:r>
@@ -5037,9 +5107,9 @@
                 <a:solidFill>
                   <a:srgbClr val="E3254B"/>
                 </a:solidFill>
-                <a:latin typeface="Helvetica Neue" pitchFamily="34" charset="0"/>
-                <a:ea typeface="Helvetica Neue" pitchFamily="34" charset="-122"/>
-                <a:cs typeface="Helvetica Neue" pitchFamily="34" charset="-120"/>
+                <a:latin typeface="Inter" pitchFamily="34" charset="0"/>
+                <a:ea typeface="Inter" pitchFamily="34" charset="-122"/>
+                <a:cs typeface="Inter" pitchFamily="34" charset="-120"/>
               </a:rPr>
               <a:t>Project status</a:t>
             </a:r>
@@ -5079,9 +5149,9 @@
                 <a:solidFill>
                   <a:srgbClr val="1D1D1F"/>
                 </a:solidFill>
-                <a:latin typeface="Helvetica Neue" pitchFamily="34" charset="0"/>
-                <a:ea typeface="Helvetica Neue" pitchFamily="34" charset="-122"/>
-                <a:cs typeface="Helvetica Neue" pitchFamily="34" charset="-120"/>
+                <a:latin typeface="Inter" pitchFamily="34" charset="0"/>
+                <a:ea typeface="Inter" pitchFamily="34" charset="-122"/>
+                <a:cs typeface="Inter" pitchFamily="34" charset="-120"/>
               </a:rPr>
               <a:t>What is done, and what is planned.</a:t>
             </a:r>
@@ -5162,9 +5232,9 @@
                 <a:solidFill>
                   <a:srgbClr val="248A3D"/>
                 </a:solidFill>
-                <a:latin typeface="Helvetica Neue" pitchFamily="34" charset="0"/>
-                <a:ea typeface="Helvetica Neue" pitchFamily="34" charset="-122"/>
-                <a:cs typeface="Helvetica Neue" pitchFamily="34" charset="-120"/>
+                <a:latin typeface="Inter" pitchFamily="34" charset="0"/>
+                <a:ea typeface="Inter" pitchFamily="34" charset="-122"/>
+                <a:cs typeface="Inter" pitchFamily="34" charset="-120"/>
               </a:rPr>
               <a:t>Done</a:t>
             </a:r>
@@ -5221,9 +5291,9 @@
                 <a:solidFill>
                   <a:srgbClr val="1D1D1F"/>
                 </a:solidFill>
-                <a:latin typeface="Helvetica Neue" pitchFamily="34" charset="0"/>
-                <a:ea typeface="Helvetica Neue" pitchFamily="34" charset="-122"/>
-                <a:cs typeface="Helvetica Neue" pitchFamily="34" charset="-120"/>
+                <a:latin typeface="Inter" pitchFamily="34" charset="0"/>
+                <a:ea typeface="Inter" pitchFamily="34" charset="-122"/>
+                <a:cs typeface="Inter" pitchFamily="34" charset="-120"/>
               </a:rPr>
               <a:t>Design, parts list and build guide</a:t>
             </a:r>
@@ -5280,9 +5350,9 @@
                 <a:solidFill>
                   <a:srgbClr val="1D1D1F"/>
                 </a:solidFill>
-                <a:latin typeface="Helvetica Neue" pitchFamily="34" charset="0"/>
-                <a:ea typeface="Helvetica Neue" pitchFamily="34" charset="-122"/>
-                <a:cs typeface="Helvetica Neue" pitchFamily="34" charset="-120"/>
+                <a:latin typeface="Inter" pitchFamily="34" charset="0"/>
+                <a:ea typeface="Inter" pitchFamily="34" charset="-122"/>
+                <a:cs typeface="Inter" pitchFamily="34" charset="-120"/>
               </a:rPr>
               <a:t>Firmware written (not yet run on hardware)</a:t>
             </a:r>
@@ -5339,9 +5409,9 @@
                 <a:solidFill>
                   <a:srgbClr val="1D1D1F"/>
                 </a:solidFill>
-                <a:latin typeface="Helvetica Neue" pitchFamily="34" charset="0"/>
-                <a:ea typeface="Helvetica Neue" pitchFamily="34" charset="-122"/>
-                <a:cs typeface="Helvetica Neue" pitchFamily="34" charset="-120"/>
+                <a:latin typeface="Inter" pitchFamily="34" charset="0"/>
+                <a:ea typeface="Inter" pitchFamily="34" charset="-122"/>
+                <a:cs typeface="Inter" pitchFamily="34" charset="-120"/>
               </a:rPr>
               <a:t>Analysis software and simulator, tested on simulated data</a:t>
             </a:r>
@@ -5398,9 +5468,9 @@
                 <a:solidFill>
                   <a:srgbClr val="1D1D1F"/>
                 </a:solidFill>
-                <a:latin typeface="Helvetica Neue" pitchFamily="34" charset="0"/>
-                <a:ea typeface="Helvetica Neue" pitchFamily="34" charset="-122"/>
-                <a:cs typeface="Helvetica Neue" pitchFamily="34" charset="-120"/>
+                <a:latin typeface="Inter" pitchFamily="34" charset="0"/>
+                <a:ea typeface="Inter" pitchFamily="34" charset="-122"/>
+                <a:cs typeface="Inter" pitchFamily="34" charset="-120"/>
               </a:rPr>
               <a:t>App and 3D model</a:t>
             </a:r>
@@ -5457,9 +5527,9 @@
                 <a:solidFill>
                   <a:srgbClr val="1D1D1F"/>
                 </a:solidFill>
-                <a:latin typeface="Helvetica Neue" pitchFamily="34" charset="0"/>
-                <a:ea typeface="Helvetica Neue" pitchFamily="34" charset="-122"/>
-                <a:cs typeface="Helvetica Neue" pitchFamily="34" charset="-120"/>
+                <a:latin typeface="Inter" pitchFamily="34" charset="0"/>
+                <a:ea typeface="Inter" pitchFamily="34" charset="-122"/>
+                <a:cs typeface="Inter" pitchFamily="34" charset="-120"/>
               </a:rPr>
               <a:t>Scope revised with Ms. Ireland (Oct 9); revised proposal and ethics package drafted</a:t>
             </a:r>
@@ -5496,9 +5566,9 @@
                 <a:solidFill>
                   <a:srgbClr val="C45500"/>
                 </a:solidFill>
-                <a:latin typeface="Helvetica Neue" pitchFamily="34" charset="0"/>
-                <a:ea typeface="Helvetica Neue" pitchFamily="34" charset="-122"/>
-                <a:cs typeface="Helvetica Neue" pitchFamily="34" charset="-120"/>
+                <a:latin typeface="Inter" pitchFamily="34" charset="0"/>
+                <a:ea typeface="Inter" pitchFamily="34" charset="-122"/>
+                <a:cs typeface="Inter" pitchFamily="34" charset="-120"/>
               </a:rPr>
               <a:t>Planned or pending</a:t>
             </a:r>
@@ -5555,9 +5625,9 @@
                 <a:solidFill>
                   <a:srgbClr val="1D1D1F"/>
                 </a:solidFill>
-                <a:latin typeface="Helvetica Neue" pitchFamily="34" charset="0"/>
-                <a:ea typeface="Helvetica Neue" pitchFamily="34" charset="-122"/>
-                <a:cs typeface="Helvetica Neue" pitchFamily="34" charset="-120"/>
+                <a:latin typeface="Inter" pitchFamily="34" charset="0"/>
+                <a:ea typeface="Inter" pitchFamily="34" charset="-122"/>
+                <a:cs typeface="Inter" pitchFamily="34" charset="-120"/>
               </a:rPr>
               <a:t>Ms. Ireland’s review of the revised proposal</a:t>
             </a:r>
@@ -5614,9 +5684,9 @@
                 <a:solidFill>
                   <a:srgbClr val="1D1D1F"/>
                 </a:solidFill>
-                <a:latin typeface="Helvetica Neue" pitchFamily="34" charset="0"/>
-                <a:ea typeface="Helvetica Neue" pitchFamily="34" charset="-122"/>
-                <a:cs typeface="Helvetica Neue" pitchFamily="34" charset="-120"/>
+                <a:latin typeface="Inter" pitchFamily="34" charset="0"/>
+                <a:ea typeface="Inter" pitchFamily="34" charset="-122"/>
+                <a:cs typeface="Inter" pitchFamily="34" charset="-120"/>
               </a:rPr>
               <a:t>Ethics approval and signed consent</a:t>
             </a:r>
@@ -5673,9 +5743,9 @@
                 <a:solidFill>
                   <a:srgbClr val="1D1D1F"/>
                 </a:solidFill>
-                <a:latin typeface="Helvetica Neue" pitchFamily="34" charset="0"/>
-                <a:ea typeface="Helvetica Neue" pitchFamily="34" charset="-122"/>
-                <a:cs typeface="Helvetica Neue" pitchFamily="34" charset="-120"/>
+                <a:latin typeface="Inter" pitchFamily="34" charset="0"/>
+                <a:ea typeface="Inter" pitchFamily="34" charset="-122"/>
+                <a:cs typeface="Inter" pitchFamily="34" charset="-120"/>
               </a:rPr>
               <a:t>Build and check the prototype</a:t>
             </a:r>
@@ -5732,9 +5802,9 @@
                 <a:solidFill>
                   <a:srgbClr val="1D1D1F"/>
                 </a:solidFill>
-                <a:latin typeface="Helvetica Neue" pitchFamily="34" charset="0"/>
-                <a:ea typeface="Helvetica Neue" pitchFamily="34" charset="-122"/>
-                <a:cs typeface="Helvetica Neue" pitchFamily="34" charset="-120"/>
+                <a:latin typeface="Inter" pitchFamily="34" charset="0"/>
+                <a:ea typeface="Inter" pitchFamily="34" charset="-122"/>
+                <a:cs typeface="Inter" pitchFamily="34" charset="-120"/>
               </a:rPr>
               <a:t>Accuracy sessions against the reference</a:t>
             </a:r>
@@ -5791,9 +5861,9 @@
                 <a:solidFill>
                   <a:srgbClr val="1D1D1F"/>
                 </a:solidFill>
-                <a:latin typeface="Helvetica Neue" pitchFamily="34" charset="0"/>
-                <a:ea typeface="Helvetica Neue" pitchFamily="34" charset="-122"/>
-                <a:cs typeface="Helvetica Neue" pitchFamily="34" charset="-120"/>
+                <a:latin typeface="Inter" pitchFamily="34" charset="0"/>
+                <a:ea typeface="Inter" pitchFamily="34" charset="-122"/>
+                <a:cs typeface="Inter" pitchFamily="34" charset="-120"/>
               </a:rPr>
               <a:t>Overnight recordings and optional breath-hold test (if approved)</a:t>
             </a:r>
@@ -5850,9 +5920,9 @@
                 <a:solidFill>
                   <a:srgbClr val="1D1D1F"/>
                 </a:solidFill>
-                <a:latin typeface="Helvetica Neue" pitchFamily="34" charset="0"/>
-                <a:ea typeface="Helvetica Neue" pitchFamily="34" charset="-122"/>
-                <a:cs typeface="Helvetica Neue" pitchFamily="34" charset="-120"/>
+                <a:latin typeface="Inter" pitchFamily="34" charset="0"/>
+                <a:ea typeface="Inter" pitchFamily="34" charset="-122"/>
+                <a:cs typeface="Inter" pitchFamily="34" charset="-120"/>
               </a:rPr>
               <a:t>Real results and analysis (by January 11)</a:t>
             </a:r>
@@ -5889,9 +5959,9 @@
                 <a:solidFill>
                   <a:srgbClr val="A1A1A6"/>
                 </a:solidFill>
-                <a:latin typeface="Helvetica Neue" pitchFamily="34" charset="0"/>
-                <a:ea typeface="Helvetica Neue" pitchFamily="34" charset="-122"/>
-                <a:cs typeface="Helvetica Neue" pitchFamily="34" charset="-120"/>
+                <a:latin typeface="Inter" pitchFamily="34" charset="0"/>
+                <a:ea typeface="Inter" pitchFamily="34" charset="-122"/>
+                <a:cs typeface="Inter" pitchFamily="34" charset="-120"/>
               </a:rPr>
               <a:t>Night Signal</a:t>
             </a:r>
@@ -5928,9 +5998,9 @@
                 <a:solidFill>
                   <a:srgbClr val="A1A1A6"/>
                 </a:solidFill>
-                <a:latin typeface="Helvetica Neue" pitchFamily="34" charset="0"/>
-                <a:ea typeface="Helvetica Neue" pitchFamily="34" charset="-122"/>
-                <a:cs typeface="Helvetica Neue" pitchFamily="34" charset="-120"/>
+                <a:latin typeface="Inter" pitchFamily="34" charset="0"/>
+                <a:ea typeface="Inter" pitchFamily="34" charset="-122"/>
+                <a:cs typeface="Inter" pitchFamily="34" charset="-120"/>
               </a:rPr>
               <a:t>13</a:t>
             </a:r>
@@ -6006,9 +6076,9 @@
                 <a:solidFill>
                   <a:srgbClr val="FF375F"/>
                 </a:solidFill>
-                <a:latin typeface="Helvetica Neue" pitchFamily="34" charset="0"/>
-                <a:ea typeface="Helvetica Neue" pitchFamily="34" charset="-122"/>
-                <a:cs typeface="Helvetica Neue" pitchFamily="34" charset="-120"/>
+                <a:latin typeface="Inter" pitchFamily="34" charset="0"/>
+                <a:ea typeface="Inter" pitchFamily="34" charset="-122"/>
+                <a:cs typeface="Inter" pitchFamily="34" charset="-120"/>
               </a:rPr>
               <a:t>Conclusion</a:t>
             </a:r>
@@ -6048,9 +6118,9 @@
                 <a:solidFill>
                   <a:srgbClr val="FFFFFF"/>
                 </a:solidFill>
-                <a:latin typeface="Helvetica Neue" pitchFamily="34" charset="0"/>
-                <a:ea typeface="Helvetica Neue" pitchFamily="34" charset="-122"/>
-                <a:cs typeface="Helvetica Neue" pitchFamily="34" charset="-120"/>
+                <a:latin typeface="Inter" pitchFamily="34" charset="0"/>
+                <a:ea typeface="Inter" pitchFamily="34" charset="-122"/>
+                <a:cs typeface="Inter" pitchFamily="34" charset="-120"/>
               </a:rPr>
               <a:t>No conclusion yet.</a:t>
             </a:r>
@@ -6087,9 +6157,9 @@
                 <a:solidFill>
                   <a:srgbClr val="A1A1A6"/>
                 </a:solidFill>
-                <a:latin typeface="Helvetica Neue" pitchFamily="34" charset="0"/>
-                <a:ea typeface="Helvetica Neue" pitchFamily="34" charset="-122"/>
-                <a:cs typeface="Helvetica Neue" pitchFamily="34" charset="-120"/>
+                <a:latin typeface="Inter" pitchFamily="34" charset="0"/>
+                <a:ea typeface="Inter" pitchFamily="34" charset="-122"/>
+                <a:cs typeface="Inter" pitchFamily="34" charset="-120"/>
               </a:rPr>
               <a:t>No real data has been collected, so the hypothesis has not been tested. This slide will be written after the accuracy sessions.</a:t>
             </a:r>
@@ -6126,9 +6196,9 @@
                 <a:solidFill>
                   <a:srgbClr val="FFFFFF"/>
                 </a:solidFill>
-                <a:latin typeface="Helvetica Neue" pitchFamily="34" charset="0"/>
-                <a:ea typeface="Helvetica Neue" pitchFamily="34" charset="-122"/>
-                <a:cs typeface="Helvetica Neue" pitchFamily="34" charset="-120"/>
+                <a:latin typeface="Inter" pitchFamily="34" charset="0"/>
+                <a:ea typeface="Inter" pitchFamily="34" charset="-122"/>
+                <a:cs typeface="Inter" pitchFamily="34" charset="-120"/>
               </a:rPr>
               <a:t>What this project will be able to show</a:t>
             </a:r>
@@ -6185,9 +6255,9 @@
                 <a:solidFill>
                   <a:srgbClr val="A1A1A6"/>
                 </a:solidFill>
-                <a:latin typeface="Helvetica Neue" pitchFamily="34" charset="0"/>
-                <a:ea typeface="Helvetica Neue" pitchFamily="34" charset="-122"/>
-                <a:cs typeface="Helvetica Neue" pitchFamily="34" charset="-120"/>
+                <a:latin typeface="Inter" pitchFamily="34" charset="0"/>
+                <a:ea typeface="Inter" pitchFamily="34" charset="-122"/>
+                <a:cs typeface="Inter" pitchFamily="34" charset="-120"/>
               </a:rPr>
               <a:t>How closely the wearable agrees with a reference oximeter at rest</a:t>
             </a:r>
@@ -6244,9 +6314,9 @@
                 <a:solidFill>
                   <a:srgbClr val="A1A1A6"/>
                 </a:solidFill>
-                <a:latin typeface="Helvetica Neue" pitchFamily="34" charset="0"/>
-                <a:ea typeface="Helvetica Neue" pitchFamily="34" charset="-122"/>
-                <a:cs typeface="Helvetica Neue" pitchFamily="34" charset="-120"/>
+                <a:latin typeface="Inter" pitchFamily="34" charset="0"/>
+                <a:ea typeface="Inter" pitchFamily="34" charset="-122"/>
+                <a:cs typeface="Inter" pitchFamily="34" charset="-120"/>
               </a:rPr>
               <a:t>How much of a recording gives a valid signal</a:t>
             </a:r>
@@ -6303,9 +6373,9 @@
                 <a:solidFill>
                   <a:srgbClr val="A1A1A6"/>
                 </a:solidFill>
-                <a:latin typeface="Helvetica Neue" pitchFamily="34" charset="0"/>
-                <a:ea typeface="Helvetica Neue" pitchFamily="34" charset="-122"/>
-                <a:cs typeface="Helvetica Neue" pitchFamily="34" charset="-120"/>
+                <a:latin typeface="Inter" pitchFamily="34" charset="0"/>
+                <a:ea typeface="Inter" pitchFamily="34" charset="-122"/>
+                <a:cs typeface="Inter" pitchFamily="34" charset="-120"/>
               </a:rPr>
               <a:t>Whether flagged desaturation events match logged dips (if approved)</a:t>
             </a:r>
@@ -6342,9 +6412,9 @@
                 <a:solidFill>
                   <a:srgbClr val="FFFFFF"/>
                 </a:solidFill>
-                <a:latin typeface="Helvetica Neue" pitchFamily="34" charset="0"/>
-                <a:ea typeface="Helvetica Neue" pitchFamily="34" charset="-122"/>
-                <a:cs typeface="Helvetica Neue" pitchFamily="34" charset="-120"/>
+                <a:latin typeface="Inter" pitchFamily="34" charset="0"/>
+                <a:ea typeface="Inter" pitchFamily="34" charset="-122"/>
+                <a:cs typeface="Inter" pitchFamily="34" charset="-120"/>
               </a:rPr>
               <a:t>What it cannot show</a:t>
             </a:r>
@@ -6401,9 +6471,9 @@
                 <a:solidFill>
                   <a:srgbClr val="A1A1A6"/>
                 </a:solidFill>
-                <a:latin typeface="Helvetica Neue" pitchFamily="34" charset="0"/>
-                <a:ea typeface="Helvetica Neue" pitchFamily="34" charset="-122"/>
-                <a:cs typeface="Helvetica Neue" pitchFamily="34" charset="-120"/>
+                <a:latin typeface="Inter" pitchFamily="34" charset="0"/>
+                <a:ea typeface="Inter" pitchFamily="34" charset="-122"/>
+                <a:cs typeface="Inter" pitchFamily="34" charset="-120"/>
               </a:rPr>
               <a:t>Whether anyone has, or does not have, sleep apnea</a:t>
             </a:r>
@@ -6536,9 +6606,9 @@
                 <a:solidFill>
                   <a:srgbClr val="86868B"/>
                 </a:solidFill>
-                <a:latin typeface="Helvetica Neue" pitchFamily="34" charset="0"/>
-                <a:ea typeface="Helvetica Neue" pitchFamily="34" charset="-122"/>
-                <a:cs typeface="Helvetica Neue" pitchFamily="34" charset="-120"/>
+                <a:latin typeface="Inter" pitchFamily="34" charset="0"/>
+                <a:ea typeface="Inter" pitchFamily="34" charset="-122"/>
+                <a:cs typeface="Inter" pitchFamily="34" charset="-120"/>
               </a:rPr>
               <a:t>App</a:t>
             </a:r>
@@ -6575,9 +6645,9 @@
                 <a:solidFill>
                   <a:srgbClr val="86868B"/>
                 </a:solidFill>
-                <a:latin typeface="Helvetica Neue" pitchFamily="34" charset="0"/>
-                <a:ea typeface="Helvetica Neue" pitchFamily="34" charset="-122"/>
-                <a:cs typeface="Helvetica Neue" pitchFamily="34" charset="-120"/>
+                <a:latin typeface="Inter" pitchFamily="34" charset="0"/>
+                <a:ea typeface="Inter" pitchFamily="34" charset="-122"/>
+                <a:cs typeface="Inter" pitchFamily="34" charset="-120"/>
               </a:rPr>
               <a:t>3D model</a:t>
             </a:r>
@@ -6614,9 +6684,9 @@
                 <a:solidFill>
                   <a:srgbClr val="FFFFFF"/>
                 </a:solidFill>
-                <a:latin typeface="Helvetica Neue" pitchFamily="34" charset="0"/>
-                <a:ea typeface="Helvetica Neue" pitchFamily="34" charset="-122"/>
-                <a:cs typeface="Helvetica Neue" pitchFamily="34" charset="-120"/>
+                <a:latin typeface="Inter" pitchFamily="34" charset="0"/>
+                <a:ea typeface="Inter" pitchFamily="34" charset="-122"/>
+                <a:cs typeface="Inter" pitchFamily="34" charset="-120"/>
               </a:rPr>
               <a:t>Thank you. Questions?</a:t>
             </a:r>
@@ -6653,9 +6723,9 @@
                 <a:solidFill>
                   <a:srgbClr val="6E6E73"/>
                 </a:solidFill>
-                <a:latin typeface="Helvetica Neue" pitchFamily="34" charset="0"/>
-                <a:ea typeface="Helvetica Neue" pitchFamily="34" charset="-122"/>
-                <a:cs typeface="Helvetica Neue" pitchFamily="34" charset="-120"/>
+                <a:latin typeface="Inter" pitchFamily="34" charset="0"/>
+                <a:ea typeface="Inter" pitchFamily="34" charset="-122"/>
+                <a:cs typeface="Inter" pitchFamily="34" charset="-120"/>
               </a:rPr>
               <a:t>Night Signal</a:t>
             </a:r>
@@ -6692,9 +6762,9 @@
                 <a:solidFill>
                   <a:srgbClr val="6E6E73"/>
                 </a:solidFill>
-                <a:latin typeface="Helvetica Neue" pitchFamily="34" charset="0"/>
-                <a:ea typeface="Helvetica Neue" pitchFamily="34" charset="-122"/>
-                <a:cs typeface="Helvetica Neue" pitchFamily="34" charset="-120"/>
+                <a:latin typeface="Inter" pitchFamily="34" charset="0"/>
+                <a:ea typeface="Inter" pitchFamily="34" charset="-122"/>
+                <a:cs typeface="Inter" pitchFamily="34" charset="-120"/>
               </a:rPr>
               <a:t>14</a:t>
             </a:r>
@@ -6785,9 +6855,9 @@
                 <a:solidFill>
                   <a:srgbClr val="6E6E73"/>
                 </a:solidFill>
-                <a:latin typeface="Helvetica Neue" pitchFamily="34" charset="0"/>
-                <a:ea typeface="Helvetica Neue" pitchFamily="34" charset="-122"/>
-                <a:cs typeface="Helvetica Neue" pitchFamily="34" charset="-120"/>
+                <a:latin typeface="Inter" pitchFamily="34" charset="0"/>
+                <a:ea typeface="Inter" pitchFamily="34" charset="-122"/>
+                <a:cs typeface="Inter" pitchFamily="34" charset="-120"/>
               </a:rPr>
               <a:t>Appendix · not presented</a:t>
             </a:r>
@@ -6824,9 +6894,9 @@
                 <a:solidFill>
                   <a:srgbClr val="E3254B"/>
                 </a:solidFill>
-                <a:latin typeface="Helvetica Neue" pitchFamily="34" charset="0"/>
-                <a:ea typeface="Helvetica Neue" pitchFamily="34" charset="-122"/>
-                <a:cs typeface="Helvetica Neue" pitchFamily="34" charset="-120"/>
+                <a:latin typeface="Inter" pitchFamily="34" charset="0"/>
+                <a:ea typeface="Inter" pitchFamily="34" charset="-122"/>
+                <a:cs typeface="Inter" pitchFamily="34" charset="-120"/>
               </a:rPr>
               <a:t>Appendix A · Materials</a:t>
             </a:r>
@@ -6866,9 +6936,9 @@
                 <a:solidFill>
                   <a:srgbClr val="1D1D1F"/>
                 </a:solidFill>
-                <a:latin typeface="Helvetica Neue" pitchFamily="34" charset="0"/>
-                <a:ea typeface="Helvetica Neue" pitchFamily="34" charset="-122"/>
-                <a:cs typeface="Helvetica Neue" pitchFamily="34" charset="-120"/>
+                <a:latin typeface="Inter" pitchFamily="34" charset="0"/>
+                <a:ea typeface="Inter" pitchFamily="34" charset="-122"/>
+                <a:cs typeface="Inter" pitchFamily="34" charset="-120"/>
               </a:rPr>
               <a:t>Parts, exact sizes and where to buy.</a:t>
             </a:r>
@@ -6891,7 +6961,7 @@
           </p:nvPr>
         </p:nvGraphicFramePr>
         <p:xfrm>
-          <a:off x="685800" y="1600200"/>
+          <a:off x="685800" y="1554480"/>
           <a:ext cx="10817352" cy="914400"/>
         </p:xfrm>
         <a:graphic>
@@ -6899,12 +6969,12 @@
             <a:tbl>
               <a:tblPr/>
               <a:tblGrid>
-                <a:gridCol w="4023360"/>
-                <a:gridCol w="3017520"/>
-                <a:gridCol w="2587752"/>
-                <a:gridCol w="1188720"/>
+                <a:gridCol w="3886200"/>
+                <a:gridCol w="3520440"/>
+                <a:gridCol w="2313432"/>
+                <a:gridCol w="1097280"/>
               </a:tblGrid>
-              <a:tr h="393192">
+              <a:tr h="365760">
                 <a:tc>
                   <a:txBody>
                     <a:bodyPr/>
@@ -6914,20 +6984,20 @@
                         <a:buNone/>
                       </a:pPr>
                       <a:r>
-                        <a:rPr lang="en-US" sz="950" b="1" dirty="0">
+                        <a:rPr lang="en-US" sz="850" b="1" dirty="0">
                           <a:solidFill>
                             <a:srgbClr val="6E6E73"/>
                           </a:solidFill>
-                          <a:latin typeface="Helvetica Neue" pitchFamily="34" charset="0"/>
-                          <a:ea typeface="Helvetica Neue" pitchFamily="34" charset="-122"/>
-                          <a:cs typeface="Helvetica Neue" pitchFamily="34" charset="-120"/>
+                          <a:latin typeface="Inter" pitchFamily="34" charset="0"/>
+                          <a:ea typeface="Inter" pitchFamily="34" charset="-122"/>
+                          <a:cs typeface="Inter" pitchFamily="34" charset="-120"/>
                         </a:rPr>
                         <a:t>Part</a:t>
                       </a:r>
-                      <a:endParaRPr lang="en-US" sz="950" dirty="0">
-                        <a:latin typeface="Helvetica Neue" charset="0"/>
-                        <a:ea typeface="Helvetica Neue" charset="0"/>
-                        <a:cs typeface="Helvetica Neue" charset="0"/>
+                      <a:endParaRPr lang="en-US" sz="850" dirty="0">
+                        <a:latin typeface="Inter" charset="0"/>
+                        <a:ea typeface="Inter" charset="0"/>
+                        <a:cs typeface="Inter" charset="0"/>
                       </a:endParaRPr>
                     </a:p>
                   </a:txBody>
@@ -6961,20 +7031,20 @@
                         <a:buNone/>
                       </a:pPr>
                       <a:r>
-                        <a:rPr lang="en-US" sz="950" b="1" dirty="0">
+                        <a:rPr lang="en-US" sz="850" b="1" dirty="0">
                           <a:solidFill>
                             <a:srgbClr val="6E6E73"/>
                           </a:solidFill>
-                          <a:latin typeface="Helvetica Neue" pitchFamily="34" charset="0"/>
-                          <a:ea typeface="Helvetica Neue" pitchFamily="34" charset="-122"/>
-                          <a:cs typeface="Helvetica Neue" pitchFamily="34" charset="-120"/>
+                          <a:latin typeface="Inter" pitchFamily="34" charset="0"/>
+                          <a:ea typeface="Inter" pitchFamily="34" charset="-122"/>
+                          <a:cs typeface="Inter" pitchFamily="34" charset="-120"/>
                         </a:rPr>
                         <a:t>Size</a:t>
                       </a:r>
-                      <a:endParaRPr lang="en-US" sz="950" dirty="0">
-                        <a:latin typeface="Helvetica Neue" charset="0"/>
-                        <a:ea typeface="Helvetica Neue" charset="0"/>
-                        <a:cs typeface="Helvetica Neue" charset="0"/>
+                      <a:endParaRPr lang="en-US" sz="850" dirty="0">
+                        <a:latin typeface="Inter" charset="0"/>
+                        <a:ea typeface="Inter" charset="0"/>
+                        <a:cs typeface="Inter" charset="0"/>
                       </a:endParaRPr>
                     </a:p>
                   </a:txBody>
@@ -7008,20 +7078,20 @@
                         <a:buNone/>
                       </a:pPr>
                       <a:r>
-                        <a:rPr lang="en-US" sz="950" b="1" dirty="0">
+                        <a:rPr lang="en-US" sz="850" b="1" dirty="0">
                           <a:solidFill>
                             <a:srgbClr val="6E6E73"/>
                           </a:solidFill>
-                          <a:latin typeface="Helvetica Neue" pitchFamily="34" charset="0"/>
-                          <a:ea typeface="Helvetica Neue" pitchFamily="34" charset="-122"/>
-                          <a:cs typeface="Helvetica Neue" pitchFamily="34" charset="-120"/>
+                          <a:latin typeface="Inter" pitchFamily="34" charset="0"/>
+                          <a:ea typeface="Inter" pitchFamily="34" charset="-122"/>
+                          <a:cs typeface="Inter" pitchFamily="34" charset="-120"/>
                         </a:rPr>
                         <a:t>Purpose</a:t>
                       </a:r>
-                      <a:endParaRPr lang="en-US" sz="950" dirty="0">
-                        <a:latin typeface="Helvetica Neue" charset="0"/>
-                        <a:ea typeface="Helvetica Neue" charset="0"/>
-                        <a:cs typeface="Helvetica Neue" charset="0"/>
+                      <a:endParaRPr lang="en-US" sz="850" dirty="0">
+                        <a:latin typeface="Inter" charset="0"/>
+                        <a:ea typeface="Inter" charset="0"/>
+                        <a:cs typeface="Inter" charset="0"/>
                       </a:endParaRPr>
                     </a:p>
                   </a:txBody>
@@ -7055,20 +7125,20 @@
                         <a:buNone/>
                       </a:pPr>
                       <a:r>
-                        <a:rPr lang="en-US" sz="950" b="1" dirty="0">
+                        <a:rPr lang="en-US" sz="850" b="1" dirty="0">
                           <a:solidFill>
                             <a:srgbClr val="6E6E73"/>
                           </a:solidFill>
-                          <a:latin typeface="Helvetica Neue" pitchFamily="34" charset="0"/>
-                          <a:ea typeface="Helvetica Neue" pitchFamily="34" charset="-122"/>
-                          <a:cs typeface="Helvetica Neue" pitchFamily="34" charset="-120"/>
+                          <a:latin typeface="Inter" pitchFamily="34" charset="0"/>
+                          <a:ea typeface="Inter" pitchFamily="34" charset="-122"/>
+                          <a:cs typeface="Inter" pitchFamily="34" charset="-120"/>
                         </a:rPr>
                         <a:t>Buy</a:t>
                       </a:r>
-                      <a:endParaRPr lang="en-US" sz="950" dirty="0">
-                        <a:latin typeface="Helvetica Neue" charset="0"/>
-                        <a:ea typeface="Helvetica Neue" charset="0"/>
-                        <a:cs typeface="Helvetica Neue" charset="0"/>
+                      <a:endParaRPr lang="en-US" sz="850" dirty="0">
+                        <a:latin typeface="Inter" charset="0"/>
+                        <a:ea typeface="Inter" charset="0"/>
+                        <a:cs typeface="Inter" charset="0"/>
                       </a:endParaRPr>
                     </a:p>
                   </a:txBody>
@@ -7094,7 +7164,7 @@
                   </a:tcPr>
                 </a:tc>
               </a:tr>
-              <a:tr h="393192">
+              <a:tr h="365760">
                 <a:tc>
                   <a:txBody>
                     <a:bodyPr/>
@@ -7104,20 +7174,20 @@
                         <a:buNone/>
                       </a:pPr>
                       <a:r>
-                        <a:rPr lang="en-US" sz="1150" b="1" dirty="0">
+                        <a:rPr lang="en-US" sz="1050" b="1" dirty="0">
                           <a:solidFill>
                             <a:srgbClr val="1D1D1F"/>
                           </a:solidFill>
-                          <a:latin typeface="Helvetica Neue" pitchFamily="34" charset="0"/>
-                          <a:ea typeface="Helvetica Neue" pitchFamily="34" charset="-122"/>
-                          <a:cs typeface="Helvetica Neue" pitchFamily="34" charset="-120"/>
+                          <a:latin typeface="Inter" pitchFamily="34" charset="0"/>
+                          <a:ea typeface="Inter" pitchFamily="34" charset="-122"/>
+                          <a:cs typeface="Inter" pitchFamily="34" charset="-120"/>
                         </a:rPr>
-                        <a:t>AITRIP ESP32 ESP-WROOM-32 (30-pin, CP2102, USB-C)</a:t>
+                        <a:t>AITRIP ESP32 ESP-WROOM-32 board, USB-C, CP2102, 30-pin (1 pc)</a:t>
                       </a:r>
-                      <a:endParaRPr lang="en-US" sz="1150" dirty="0">
-                        <a:latin typeface="Helvetica Neue" charset="0"/>
-                        <a:ea typeface="Helvetica Neue" charset="0"/>
-                        <a:cs typeface="Helvetica Neue" charset="0"/>
+                      <a:endParaRPr lang="en-US" sz="1050" dirty="0">
+                        <a:latin typeface="Inter" charset="0"/>
+                        <a:ea typeface="Inter" charset="0"/>
+                        <a:cs typeface="Inter" charset="0"/>
                       </a:endParaRPr>
                     </a:p>
                   </a:txBody>
@@ -7151,20 +7221,20 @@
                         <a:buNone/>
                       </a:pPr>
                       <a:r>
-                        <a:rPr lang="en-US" sz="1150" dirty="0">
+                        <a:rPr lang="en-US" sz="1050" dirty="0">
                           <a:solidFill>
                             <a:srgbClr val="6E6E73"/>
                           </a:solidFill>
-                          <a:latin typeface="Helvetica Neue" pitchFamily="34" charset="0"/>
-                          <a:ea typeface="Helvetica Neue" pitchFamily="34" charset="-122"/>
-                          <a:cs typeface="Helvetica Neue" pitchFamily="34" charset="-120"/>
+                          <a:latin typeface="Inter" pitchFamily="34" charset="0"/>
+                          <a:ea typeface="Inter" pitchFamily="34" charset="-122"/>
+                          <a:cs typeface="Inter" pitchFamily="34" charset="-120"/>
                         </a:rPr>
-                        <a:t>≈ 52 × 28 mm · pins pre-soldered</a:t>
+                        <a:t>≈ 52 × 28 mm (typical) · check photos for soldered pins</a:t>
                       </a:r>
-                      <a:endParaRPr lang="en-US" sz="1150" dirty="0">
-                        <a:latin typeface="Helvetica Neue" charset="0"/>
-                        <a:ea typeface="Helvetica Neue" charset="0"/>
-                        <a:cs typeface="Helvetica Neue" charset="0"/>
+                      <a:endParaRPr lang="en-US" sz="1050" dirty="0">
+                        <a:latin typeface="Inter" charset="0"/>
+                        <a:ea typeface="Inter" charset="0"/>
+                        <a:cs typeface="Inter" charset="0"/>
                       </a:endParaRPr>
                     </a:p>
                   </a:txBody>
@@ -7198,20 +7268,20 @@
                         <a:buNone/>
                       </a:pPr>
                       <a:r>
-                        <a:rPr lang="en-US" sz="1150" dirty="0">
+                        <a:rPr lang="en-US" sz="1050" dirty="0">
                           <a:solidFill>
                             <a:srgbClr val="6E6E73"/>
                           </a:solidFill>
-                          <a:latin typeface="Helvetica Neue" pitchFamily="34" charset="0"/>
-                          <a:ea typeface="Helvetica Neue" pitchFamily="34" charset="-122"/>
-                          <a:cs typeface="Helvetica Neue" pitchFamily="34" charset="-120"/>
+                          <a:latin typeface="Inter" pitchFamily="34" charset="0"/>
+                          <a:ea typeface="Inter" pitchFamily="34" charset="-122"/>
+                          <a:cs typeface="Inter" pitchFamily="34" charset="-120"/>
                         </a:rPr>
                         <a:t>Processor + Bluetooth Classic</a:t>
                       </a:r>
-                      <a:endParaRPr lang="en-US" sz="1150" dirty="0">
-                        <a:latin typeface="Helvetica Neue" charset="0"/>
-                        <a:ea typeface="Helvetica Neue" charset="0"/>
-                        <a:cs typeface="Helvetica Neue" charset="0"/>
+                      <a:endParaRPr lang="en-US" sz="1050" dirty="0">
+                        <a:latin typeface="Inter" charset="0"/>
+                        <a:ea typeface="Inter" charset="0"/>
+                        <a:cs typeface="Inter" charset="0"/>
                       </a:endParaRPr>
                     </a:p>
                   </a:txBody>
@@ -7245,13 +7315,13 @@
                         <a:buNone/>
                       </a:pPr>
                       <a:r>
-                        <a:rPr lang="en-US" sz="1150" u="sng" dirty="0">
+                        <a:rPr lang="en-US" sz="1050" u="sng" dirty="0">
                           <a:solidFill>
                             <a:srgbClr val="0071E3"/>
                           </a:solidFill>
-                          <a:latin typeface="Helvetica Neue" pitchFamily="34" charset="0"/>
-                          <a:ea typeface="Helvetica Neue" pitchFamily="34" charset="-122"/>
-                          <a:cs typeface="Helvetica Neue" pitchFamily="34" charset="-120"/>
+                          <a:latin typeface="Inter" pitchFamily="34" charset="0"/>
+                          <a:ea typeface="Inter" pitchFamily="34" charset="-122"/>
+                          <a:cs typeface="Inter" pitchFamily="34" charset="-120"/>
                           <a:hlinkClick r:id="rId1" invalidUrl="" action="" tgtFrame="" tooltip="https://www.amazon.ca/AITRIP-ESP-WROOM-32-Development-Microcontroller-Compatible/dp/B0DF2YJSHN" history="1" highlightClick="0" endSnd="0">
                             <a:extLst>
                               <a:ext uri="{A12FA001-AC4F-418D-AE19-62706E023703}">
@@ -7262,10 +7332,10 @@
                         </a:rPr>
                         <a:t>Amazon.ca ›</a:t>
                       </a:r>
-                      <a:endParaRPr lang="en-US" sz="1150" dirty="0">
-                        <a:latin typeface="Helvetica Neue" charset="0"/>
-                        <a:ea typeface="Helvetica Neue" charset="0"/>
-                        <a:cs typeface="Helvetica Neue" charset="0"/>
+                      <a:endParaRPr lang="en-US" sz="1050" dirty="0">
+                        <a:latin typeface="Inter" charset="0"/>
+                        <a:ea typeface="Inter" charset="0"/>
+                        <a:cs typeface="Inter" charset="0"/>
                       </a:endParaRPr>
                     </a:p>
                   </a:txBody>
@@ -7291,7 +7361,7 @@
                   </a:tcPr>
                 </a:tc>
               </a:tr>
-              <a:tr h="393192">
+              <a:tr h="365760">
                 <a:tc>
                   <a:txBody>
                     <a:bodyPr/>
@@ -7301,20 +7371,20 @@
                         <a:buNone/>
                       </a:pPr>
                       <a:r>
-                        <a:rPr lang="en-US" sz="1150" b="1" dirty="0">
+                        <a:rPr lang="en-US" sz="1050" b="1" dirty="0">
                           <a:solidFill>
                             <a:srgbClr val="1D1D1F"/>
                           </a:solidFill>
-                          <a:latin typeface="Helvetica Neue" pitchFamily="34" charset="0"/>
-                          <a:ea typeface="Helvetica Neue" pitchFamily="34" charset="-122"/>
-                          <a:cs typeface="Helvetica Neue" pitchFamily="34" charset="-120"/>
+                          <a:latin typeface="Inter" pitchFamily="34" charset="0"/>
+                          <a:ea typeface="Inter" pitchFamily="34" charset="-122"/>
+                          <a:cs typeface="Inter" pitchFamily="34" charset="-120"/>
                         </a:rPr>
-                        <a:t>HiLetgo MAX30102 sensor</a:t>
+                        <a:t>HiLetgo MAX30102 breakout (“Heart Rate Click”)</a:t>
                       </a:r>
-                      <a:endParaRPr lang="en-US" sz="1150" dirty="0">
-                        <a:latin typeface="Helvetica Neue" charset="0"/>
-                        <a:ea typeface="Helvetica Neue" charset="0"/>
-                        <a:cs typeface="Helvetica Neue" charset="0"/>
+                      <a:endParaRPr lang="en-US" sz="1050" dirty="0">
+                        <a:latin typeface="Inter" charset="0"/>
+                        <a:ea typeface="Inter" charset="0"/>
+                        <a:cs typeface="Inter" charset="0"/>
                       </a:endParaRPr>
                     </a:p>
                   </a:txBody>
@@ -7348,20 +7418,20 @@
                         <a:buNone/>
                       </a:pPr>
                       <a:r>
-                        <a:rPr lang="en-US" sz="1150" dirty="0">
+                        <a:rPr lang="en-US" sz="1050" dirty="0">
                           <a:solidFill>
                             <a:srgbClr val="6E6E73"/>
                           </a:solidFill>
-                          <a:latin typeface="Helvetica Neue" pitchFamily="34" charset="0"/>
-                          <a:ea typeface="Helvetica Neue" pitchFamily="34" charset="-122"/>
-                          <a:cs typeface="Helvetica Neue" pitchFamily="34" charset="-120"/>
+                          <a:latin typeface="Inter" pitchFamily="34" charset="0"/>
+                          <a:ea typeface="Inter" pitchFamily="34" charset="-122"/>
+                          <a:cs typeface="Inter" pitchFamily="34" charset="-120"/>
                         </a:rPr>
-                        <a:t>14 × 14 mm · 4 pins to solder</a:t>
+                        <a:t>listing: 14 mm · pins usually loose: solder 4</a:t>
                       </a:r>
-                      <a:endParaRPr lang="en-US" sz="1150" dirty="0">
-                        <a:latin typeface="Helvetica Neue" charset="0"/>
-                        <a:ea typeface="Helvetica Neue" charset="0"/>
-                        <a:cs typeface="Helvetica Neue" charset="0"/>
+                      <a:endParaRPr lang="en-US" sz="1050" dirty="0">
+                        <a:latin typeface="Inter" charset="0"/>
+                        <a:ea typeface="Inter" charset="0"/>
+                        <a:cs typeface="Inter" charset="0"/>
                       </a:endParaRPr>
                     </a:p>
                   </a:txBody>
@@ -7395,20 +7465,20 @@
                         <a:buNone/>
                       </a:pPr>
                       <a:r>
-                        <a:rPr lang="en-US" sz="1150" dirty="0">
+                        <a:rPr lang="en-US" sz="1050" dirty="0">
                           <a:solidFill>
                             <a:srgbClr val="6E6E73"/>
                           </a:solidFill>
-                          <a:latin typeface="Helvetica Neue" pitchFamily="34" charset="0"/>
-                          <a:ea typeface="Helvetica Neue" pitchFamily="34" charset="-122"/>
-                          <a:cs typeface="Helvetica Neue" pitchFamily="34" charset="-120"/>
+                          <a:latin typeface="Inter" pitchFamily="34" charset="0"/>
+                          <a:ea typeface="Inter" pitchFamily="34" charset="-122"/>
+                          <a:cs typeface="Inter" pitchFamily="34" charset="-120"/>
                         </a:rPr>
                         <a:t>SpO₂ + heart rate (finger clip)</a:t>
                       </a:r>
-                      <a:endParaRPr lang="en-US" sz="1150" dirty="0">
-                        <a:latin typeface="Helvetica Neue" charset="0"/>
-                        <a:ea typeface="Helvetica Neue" charset="0"/>
-                        <a:cs typeface="Helvetica Neue" charset="0"/>
+                      <a:endParaRPr lang="en-US" sz="1050" dirty="0">
+                        <a:latin typeface="Inter" charset="0"/>
+                        <a:ea typeface="Inter" charset="0"/>
+                        <a:cs typeface="Inter" charset="0"/>
                       </a:endParaRPr>
                     </a:p>
                   </a:txBody>
@@ -7442,13 +7512,13 @@
                         <a:buNone/>
                       </a:pPr>
                       <a:r>
-                        <a:rPr lang="en-US" sz="1150" u="sng" dirty="0">
+                        <a:rPr lang="en-US" sz="1050" u="sng" dirty="0">
                           <a:solidFill>
                             <a:srgbClr val="0071E3"/>
                           </a:solidFill>
-                          <a:latin typeface="Helvetica Neue" pitchFamily="34" charset="0"/>
-                          <a:ea typeface="Helvetica Neue" pitchFamily="34" charset="-122"/>
-                          <a:cs typeface="Helvetica Neue" pitchFamily="34" charset="-120"/>
+                          <a:latin typeface="Inter" pitchFamily="34" charset="0"/>
+                          <a:ea typeface="Inter" pitchFamily="34" charset="-122"/>
+                          <a:cs typeface="Inter" pitchFamily="34" charset="-120"/>
                           <a:hlinkClick r:id="rId2" invalidUrl="" action="" tgtFrame="" tooltip="https://www.amazon.ca/HiLetgo-MAX30102-Breakout-Oximetry-Solution/dp/B07QC67KMQ" history="1" highlightClick="0" endSnd="0">
                             <a:extLst>
                               <a:ext uri="{A12FA001-AC4F-418D-AE19-62706E023703}">
@@ -7459,10 +7529,10 @@
                         </a:rPr>
                         <a:t>Amazon.ca ›</a:t>
                       </a:r>
-                      <a:endParaRPr lang="en-US" sz="1150" dirty="0">
-                        <a:latin typeface="Helvetica Neue" charset="0"/>
-                        <a:ea typeface="Helvetica Neue" charset="0"/>
-                        <a:cs typeface="Helvetica Neue" charset="0"/>
+                      <a:endParaRPr lang="en-US" sz="1050" dirty="0">
+                        <a:latin typeface="Inter" charset="0"/>
+                        <a:ea typeface="Inter" charset="0"/>
+                        <a:cs typeface="Inter" charset="0"/>
                       </a:endParaRPr>
                     </a:p>
                   </a:txBody>
@@ -7488,7 +7558,7 @@
                   </a:tcPr>
                 </a:tc>
               </a:tr>
-              <a:tr h="393192">
+              <a:tr h="365760">
                 <a:tc>
                   <a:txBody>
                     <a:bodyPr/>
@@ -7498,20 +7568,20 @@
                         <a:buNone/>
                       </a:pPr>
                       <a:r>
-                        <a:rPr lang="en-US" sz="1150" b="1" dirty="0">
+                        <a:rPr lang="en-US" sz="1050" b="1" dirty="0">
                           <a:solidFill>
                             <a:srgbClr val="1D1D1F"/>
                           </a:solidFill>
-                          <a:latin typeface="Helvetica Neue" pitchFamily="34" charset="0"/>
-                          <a:ea typeface="Helvetica Neue" pitchFamily="34" charset="-122"/>
-                          <a:cs typeface="Helvetica Neue" pitchFamily="34" charset="-120"/>
+                          <a:latin typeface="Inter" pitchFamily="34" charset="0"/>
+                          <a:ea typeface="Inter" pitchFamily="34" charset="-122"/>
+                          <a:cs typeface="Inter" pitchFamily="34" charset="-120"/>
                         </a:rPr>
-                        <a:t>SHILLEHTEK GY-521 MPU-6050, pre-soldered (2-pack)</a:t>
+                        <a:t>SHILLEHTEK MPU-6050 GY-521, pre-soldered (2-pack)</a:t>
                       </a:r>
-                      <a:endParaRPr lang="en-US" sz="1150" dirty="0">
-                        <a:latin typeface="Helvetica Neue" charset="0"/>
-                        <a:ea typeface="Helvetica Neue" charset="0"/>
-                        <a:cs typeface="Helvetica Neue" charset="0"/>
+                      <a:endParaRPr lang="en-US" sz="1050" dirty="0">
+                        <a:latin typeface="Inter" charset="0"/>
+                        <a:ea typeface="Inter" charset="0"/>
+                        <a:cs typeface="Inter" charset="0"/>
                       </a:endParaRPr>
                     </a:p>
                   </a:txBody>
@@ -7545,20 +7615,20 @@
                         <a:buNone/>
                       </a:pPr>
                       <a:r>
-                        <a:rPr lang="en-US" sz="1150" dirty="0">
+                        <a:rPr lang="en-US" sz="1050" dirty="0">
                           <a:solidFill>
                             <a:srgbClr val="6E6E73"/>
                           </a:solidFill>
-                          <a:latin typeface="Helvetica Neue" pitchFamily="34" charset="0"/>
-                          <a:ea typeface="Helvetica Neue" pitchFamily="34" charset="-122"/>
-                          <a:cs typeface="Helvetica Neue" pitchFamily="34" charset="-120"/>
+                          <a:latin typeface="Inter" pitchFamily="34" charset="0"/>
+                          <a:ea typeface="Inter" pitchFamily="34" charset="-122"/>
+                          <a:cs typeface="Inter" pitchFamily="34" charset="-120"/>
                         </a:rPr>
-                        <a:t>≈ 21 × 16 mm</a:t>
+                        <a:t>≈ 21 × 16 mm · 3.3–5 V · check stock</a:t>
                       </a:r>
-                      <a:endParaRPr lang="en-US" sz="1150" dirty="0">
-                        <a:latin typeface="Helvetica Neue" charset="0"/>
-                        <a:ea typeface="Helvetica Neue" charset="0"/>
-                        <a:cs typeface="Helvetica Neue" charset="0"/>
+                      <a:endParaRPr lang="en-US" sz="1050" dirty="0">
+                        <a:latin typeface="Inter" charset="0"/>
+                        <a:ea typeface="Inter" charset="0"/>
+                        <a:cs typeface="Inter" charset="0"/>
                       </a:endParaRPr>
                     </a:p>
                   </a:txBody>
@@ -7592,20 +7662,20 @@
                         <a:buNone/>
                       </a:pPr>
                       <a:r>
-                        <a:rPr lang="en-US" sz="1150" dirty="0">
+                        <a:rPr lang="en-US" sz="1050" dirty="0">
                           <a:solidFill>
                             <a:srgbClr val="6E6E73"/>
                           </a:solidFill>
-                          <a:latin typeface="Helvetica Neue" pitchFamily="34" charset="0"/>
-                          <a:ea typeface="Helvetica Neue" pitchFamily="34" charset="-122"/>
-                          <a:cs typeface="Helvetica Neue" pitchFamily="34" charset="-120"/>
+                          <a:latin typeface="Inter" pitchFamily="34" charset="0"/>
+                          <a:ea typeface="Inter" pitchFamily="34" charset="-122"/>
+                          <a:cs typeface="Inter" pitchFamily="34" charset="-120"/>
                         </a:rPr>
                         <a:t>Movement check + position (exploratory)</a:t>
                       </a:r>
-                      <a:endParaRPr lang="en-US" sz="1150" dirty="0">
-                        <a:latin typeface="Helvetica Neue" charset="0"/>
-                        <a:ea typeface="Helvetica Neue" charset="0"/>
-                        <a:cs typeface="Helvetica Neue" charset="0"/>
+                      <a:endParaRPr lang="en-US" sz="1050" dirty="0">
+                        <a:latin typeface="Inter" charset="0"/>
+                        <a:ea typeface="Inter" charset="0"/>
+                        <a:cs typeface="Inter" charset="0"/>
                       </a:endParaRPr>
                     </a:p>
                   </a:txBody>
@@ -7639,13 +7709,13 @@
                         <a:buNone/>
                       </a:pPr>
                       <a:r>
-                        <a:rPr lang="en-US" sz="1150" u="sng" dirty="0">
+                        <a:rPr lang="en-US" sz="1050" u="sng" dirty="0">
                           <a:solidFill>
                             <a:srgbClr val="0071E3"/>
                           </a:solidFill>
-                          <a:latin typeface="Helvetica Neue" pitchFamily="34" charset="0"/>
-                          <a:ea typeface="Helvetica Neue" pitchFamily="34" charset="-122"/>
-                          <a:cs typeface="Helvetica Neue" pitchFamily="34" charset="-120"/>
+                          <a:latin typeface="Inter" pitchFamily="34" charset="0"/>
+                          <a:ea typeface="Inter" pitchFamily="34" charset="-122"/>
+                          <a:cs typeface="Inter" pitchFamily="34" charset="-120"/>
                           <a:hlinkClick r:id="rId3" invalidUrl="" action="" tgtFrame="" tooltip="https://www.amazon.ca/Pre-Soldered-Accelerometer-Raspberry-Compatible-Arduino/dp/B0BMY15TC4" history="1" highlightClick="0" endSnd="0">
                             <a:extLst>
                               <a:ext uri="{A12FA001-AC4F-418D-AE19-62706E023703}">
@@ -7656,10 +7726,10 @@
                         </a:rPr>
                         <a:t>Amazon.ca ›</a:t>
                       </a:r>
-                      <a:endParaRPr lang="en-US" sz="1150" dirty="0">
-                        <a:latin typeface="Helvetica Neue" charset="0"/>
-                        <a:ea typeface="Helvetica Neue" charset="0"/>
-                        <a:cs typeface="Helvetica Neue" charset="0"/>
+                      <a:endParaRPr lang="en-US" sz="1050" dirty="0">
+                        <a:latin typeface="Inter" charset="0"/>
+                        <a:ea typeface="Inter" charset="0"/>
+                        <a:cs typeface="Inter" charset="0"/>
                       </a:endParaRPr>
                     </a:p>
                   </a:txBody>
@@ -7685,7 +7755,7 @@
                   </a:tcPr>
                 </a:tc>
               </a:tr>
-              <a:tr h="393192">
+              <a:tr h="365760">
                 <a:tc>
                   <a:txBody>
                     <a:bodyPr/>
@@ -7695,20 +7765,20 @@
                         <a:buNone/>
                       </a:pPr>
                       <a:r>
-                        <a:rPr lang="en-US" sz="1150" b="1" dirty="0">
+                        <a:rPr lang="en-US" sz="1050" b="1" dirty="0">
                           <a:solidFill>
                             <a:srgbClr val="1D1D1F"/>
                           </a:solidFill>
-                          <a:latin typeface="Helvetica Neue" pitchFamily="34" charset="0"/>
-                          <a:ea typeface="Helvetica Neue" pitchFamily="34" charset="-122"/>
-                          <a:cs typeface="Helvetica Neue" pitchFamily="34" charset="-120"/>
+                          <a:latin typeface="Inter" pitchFamily="34" charset="0"/>
+                          <a:ea typeface="Inter" pitchFamily="34" charset="-122"/>
+                          <a:cs typeface="Inter" pitchFamily="34" charset="-120"/>
                         </a:rPr>
-                        <a:t>ELEGOO 120 Dupont jumper wires (F-F, M-F, M-M)</a:t>
+                        <a:t>ELEGOO 120 Dupont wires (EL-CP-004): 40 M-F, 40 M-M, 40 F-F</a:t>
                       </a:r>
-                      <a:endParaRPr lang="en-US" sz="1150" dirty="0">
-                        <a:latin typeface="Helvetica Neue" charset="0"/>
-                        <a:ea typeface="Helvetica Neue" charset="0"/>
-                        <a:cs typeface="Helvetica Neue" charset="0"/>
+                      <a:endParaRPr lang="en-US" sz="1050" dirty="0">
+                        <a:latin typeface="Inter" charset="0"/>
+                        <a:ea typeface="Inter" charset="0"/>
+                        <a:cs typeface="Inter" charset="0"/>
                       </a:endParaRPr>
                     </a:p>
                   </a:txBody>
@@ -7742,20 +7812,20 @@
                         <a:buNone/>
                       </a:pPr>
                       <a:r>
-                        <a:rPr lang="en-US" sz="1150" dirty="0">
+                        <a:rPr lang="en-US" sz="1050" dirty="0">
                           <a:solidFill>
                             <a:srgbClr val="6E6E73"/>
                           </a:solidFill>
-                          <a:latin typeface="Helvetica Neue" pitchFamily="34" charset="0"/>
-                          <a:ea typeface="Helvetica Neue" pitchFamily="34" charset="-122"/>
-                          <a:cs typeface="Helvetica Neue" pitchFamily="34" charset="-120"/>
+                          <a:latin typeface="Inter" pitchFamily="34" charset="0"/>
+                          <a:ea typeface="Inter" pitchFamily="34" charset="-122"/>
+                          <a:cs typeface="Inter" pitchFamily="34" charset="-120"/>
                         </a:rPr>
                         <a:t>20 cm each</a:t>
                       </a:r>
-                      <a:endParaRPr lang="en-US" sz="1150" dirty="0">
-                        <a:latin typeface="Helvetica Neue" charset="0"/>
-                        <a:ea typeface="Helvetica Neue" charset="0"/>
-                        <a:cs typeface="Helvetica Neue" charset="0"/>
+                      <a:endParaRPr lang="en-US" sz="1050" dirty="0">
+                        <a:latin typeface="Inter" charset="0"/>
+                        <a:ea typeface="Inter" charset="0"/>
+                        <a:cs typeface="Inter" charset="0"/>
                       </a:endParaRPr>
                     </a:p>
                   </a:txBody>
@@ -7789,20 +7859,20 @@
                         <a:buNone/>
                       </a:pPr>
                       <a:r>
-                        <a:rPr lang="en-US" sz="1150" dirty="0">
+                        <a:rPr lang="en-US" sz="1050" dirty="0">
                           <a:solidFill>
                             <a:srgbClr val="6E6E73"/>
                           </a:solidFill>
-                          <a:latin typeface="Helvetica Neue" pitchFamily="34" charset="0"/>
-                          <a:ea typeface="Helvetica Neue" pitchFamily="34" charset="-122"/>
-                          <a:cs typeface="Helvetica Neue" pitchFamily="34" charset="-120"/>
+                          <a:latin typeface="Inter" pitchFamily="34" charset="0"/>
+                          <a:ea typeface="Inter" pitchFamily="34" charset="-122"/>
+                          <a:cs typeface="Inter" pitchFamily="34" charset="-120"/>
                         </a:rPr>
                         <a:t>Plug-in wiring, no soldering</a:t>
                       </a:r>
-                      <a:endParaRPr lang="en-US" sz="1150" dirty="0">
-                        <a:latin typeface="Helvetica Neue" charset="0"/>
-                        <a:ea typeface="Helvetica Neue" charset="0"/>
-                        <a:cs typeface="Helvetica Neue" charset="0"/>
+                      <a:endParaRPr lang="en-US" sz="1050" dirty="0">
+                        <a:latin typeface="Inter" charset="0"/>
+                        <a:ea typeface="Inter" charset="0"/>
+                        <a:cs typeface="Inter" charset="0"/>
                       </a:endParaRPr>
                     </a:p>
                   </a:txBody>
@@ -7836,13 +7906,13 @@
                         <a:buNone/>
                       </a:pPr>
                       <a:r>
-                        <a:rPr lang="en-US" sz="1150" u="sng" dirty="0">
+                        <a:rPr lang="en-US" sz="1050" u="sng" dirty="0">
                           <a:solidFill>
                             <a:srgbClr val="0071E3"/>
                           </a:solidFill>
-                          <a:latin typeface="Helvetica Neue" pitchFamily="34" charset="0"/>
-                          <a:ea typeface="Helvetica Neue" pitchFamily="34" charset="-122"/>
-                          <a:cs typeface="Helvetica Neue" pitchFamily="34" charset="-120"/>
+                          <a:latin typeface="Inter" pitchFamily="34" charset="0"/>
+                          <a:ea typeface="Inter" pitchFamily="34" charset="-122"/>
+                          <a:cs typeface="Inter" pitchFamily="34" charset="-120"/>
                           <a:hlinkClick r:id="rId4" invalidUrl="" action="" tgtFrame="" tooltip="https://www.amazon.ca/Elegoo-120pcs-Multicolored-Breadboard-arduino/dp/B01EV70C78" history="1" highlightClick="0" endSnd="0">
                             <a:extLst>
                               <a:ext uri="{A12FA001-AC4F-418D-AE19-62706E023703}">
@@ -7853,10 +7923,10 @@
                         </a:rPr>
                         <a:t>Amazon.ca ›</a:t>
                       </a:r>
-                      <a:endParaRPr lang="en-US" sz="1150" dirty="0">
-                        <a:latin typeface="Helvetica Neue" charset="0"/>
-                        <a:ea typeface="Helvetica Neue" charset="0"/>
-                        <a:cs typeface="Helvetica Neue" charset="0"/>
+                      <a:endParaRPr lang="en-US" sz="1050" dirty="0">
+                        <a:latin typeface="Inter" charset="0"/>
+                        <a:ea typeface="Inter" charset="0"/>
+                        <a:cs typeface="Inter" charset="0"/>
                       </a:endParaRPr>
                     </a:p>
                   </a:txBody>
@@ -7882,7 +7952,7 @@
                   </a:tcPr>
                 </a:tc>
               </a:tr>
-              <a:tr h="393192">
+              <a:tr h="365760">
                 <a:tc>
                   <a:txBody>
                     <a:bodyPr/>
@@ -7892,20 +7962,20 @@
                         <a:buNone/>
                       </a:pPr>
                       <a:r>
-                        <a:rPr lang="en-US" sz="1150" b="1" dirty="0">
+                        <a:rPr lang="en-US" sz="1050" b="1" dirty="0">
                           <a:solidFill>
                             <a:srgbClr val="1D1D1F"/>
                           </a:solidFill>
-                          <a:latin typeface="Helvetica Neue" pitchFamily="34" charset="0"/>
-                          <a:ea typeface="Helvetica Neue" pitchFamily="34" charset="-122"/>
-                          <a:cs typeface="Helvetica Neue" pitchFamily="34" charset="-120"/>
+                          <a:latin typeface="Inter" pitchFamily="34" charset="0"/>
+                          <a:ea typeface="Inter" pitchFamily="34" charset="-122"/>
+                          <a:cs typeface="Inter" pitchFamily="34" charset="-120"/>
                         </a:rPr>
                         <a:t>Running armband phone pouch</a:t>
                       </a:r>
-                      <a:endParaRPr lang="en-US" sz="1150" dirty="0">
-                        <a:latin typeface="Helvetica Neue" charset="0"/>
-                        <a:ea typeface="Helvetica Neue" charset="0"/>
-                        <a:cs typeface="Helvetica Neue" charset="0"/>
+                      <a:endParaRPr lang="en-US" sz="1050" dirty="0">
+                        <a:latin typeface="Inter" charset="0"/>
+                        <a:ea typeface="Inter" charset="0"/>
+                        <a:cs typeface="Inter" charset="0"/>
                       </a:endParaRPr>
                     </a:p>
                   </a:txBody>
@@ -7939,20 +8009,20 @@
                         <a:buNone/>
                       </a:pPr>
                       <a:r>
-                        <a:rPr lang="en-US" sz="1150" dirty="0">
+                        <a:rPr lang="en-US" sz="1050" dirty="0">
                           <a:solidFill>
                             <a:srgbClr val="6E6E73"/>
                           </a:solidFill>
-                          <a:latin typeface="Helvetica Neue" pitchFamily="34" charset="0"/>
-                          <a:ea typeface="Helvetica Neue" pitchFamily="34" charset="-122"/>
-                          <a:cs typeface="Helvetica Neue" pitchFamily="34" charset="-120"/>
+                          <a:latin typeface="Inter" pitchFamily="34" charset="0"/>
+                          <a:ea typeface="Inter" pitchFamily="34" charset="-122"/>
+                          <a:cs typeface="Inter" pitchFamily="34" charset="-120"/>
                         </a:rPr>
-                        <a:t>fits phones up to 6.9 in</a:t>
+                        <a:t>⚠ not verified: check it fits a 52 × 28 mm board + cable</a:t>
                       </a:r>
-                      <a:endParaRPr lang="en-US" sz="1150" dirty="0">
-                        <a:latin typeface="Helvetica Neue" charset="0"/>
-                        <a:ea typeface="Helvetica Neue" charset="0"/>
-                        <a:cs typeface="Helvetica Neue" charset="0"/>
+                      <a:endParaRPr lang="en-US" sz="1050" dirty="0">
+                        <a:latin typeface="Inter" charset="0"/>
+                        <a:ea typeface="Inter" charset="0"/>
+                        <a:cs typeface="Inter" charset="0"/>
                       </a:endParaRPr>
                     </a:p>
                   </a:txBody>
@@ -7986,20 +8056,20 @@
                         <a:buNone/>
                       </a:pPr>
                       <a:r>
-                        <a:rPr lang="en-US" sz="1150" dirty="0">
+                        <a:rPr lang="en-US" sz="1050" dirty="0">
                           <a:solidFill>
                             <a:srgbClr val="6E6E73"/>
                           </a:solidFill>
-                          <a:latin typeface="Helvetica Neue" pitchFamily="34" charset="0"/>
-                          <a:ea typeface="Helvetica Neue" pitchFamily="34" charset="-122"/>
-                          <a:cs typeface="Helvetica Neue" pitchFamily="34" charset="-120"/>
+                          <a:latin typeface="Inter" pitchFamily="34" charset="0"/>
+                          <a:ea typeface="Inter" pitchFamily="34" charset="-122"/>
+                          <a:cs typeface="Inter" pitchFamily="34" charset="-120"/>
                         </a:rPr>
                         <a:t>Holds the ESP32 on the forearm</a:t>
                       </a:r>
-                      <a:endParaRPr lang="en-US" sz="1150" dirty="0">
-                        <a:latin typeface="Helvetica Neue" charset="0"/>
-                        <a:ea typeface="Helvetica Neue" charset="0"/>
-                        <a:cs typeface="Helvetica Neue" charset="0"/>
+                      <a:endParaRPr lang="en-US" sz="1050" dirty="0">
+                        <a:latin typeface="Inter" charset="0"/>
+                        <a:ea typeface="Inter" charset="0"/>
+                        <a:cs typeface="Inter" charset="0"/>
                       </a:endParaRPr>
                     </a:p>
                   </a:txBody>
@@ -8033,13 +8103,13 @@
                         <a:buNone/>
                       </a:pPr>
                       <a:r>
-                        <a:rPr lang="en-US" sz="1150" u="sng" dirty="0">
+                        <a:rPr lang="en-US" sz="1050" u="sng" dirty="0">
                           <a:solidFill>
                             <a:srgbClr val="0071E3"/>
                           </a:solidFill>
-                          <a:latin typeface="Helvetica Neue" pitchFamily="34" charset="0"/>
-                          <a:ea typeface="Helvetica Neue" pitchFamily="34" charset="-122"/>
-                          <a:cs typeface="Helvetica Neue" pitchFamily="34" charset="-120"/>
+                          <a:latin typeface="Inter" pitchFamily="34" charset="0"/>
+                          <a:ea typeface="Inter" pitchFamily="34" charset="-122"/>
+                          <a:cs typeface="Inter" pitchFamily="34" charset="-120"/>
                           <a:hlinkClick r:id="rId5" invalidUrl="" action="" tgtFrame="" tooltip="https://www.amazon.ca/Running-Armband-Samsung-Resistant-Emergency/dp/B08HZ3BPK4" history="1" highlightClick="0" endSnd="0">
                             <a:extLst>
                               <a:ext uri="{A12FA001-AC4F-418D-AE19-62706E023703}">
@@ -8050,10 +8120,10 @@
                         </a:rPr>
                         <a:t>Amazon.ca ›</a:t>
                       </a:r>
-                      <a:endParaRPr lang="en-US" sz="1150" dirty="0">
-                        <a:latin typeface="Helvetica Neue" charset="0"/>
-                        <a:ea typeface="Helvetica Neue" charset="0"/>
-                        <a:cs typeface="Helvetica Neue" charset="0"/>
+                      <a:endParaRPr lang="en-US" sz="1050" dirty="0">
+                        <a:latin typeface="Inter" charset="0"/>
+                        <a:ea typeface="Inter" charset="0"/>
+                        <a:cs typeface="Inter" charset="0"/>
                       </a:endParaRPr>
                     </a:p>
                   </a:txBody>
@@ -8079,7 +8149,7 @@
                   </a:tcPr>
                 </a:tc>
               </a:tr>
-              <a:tr h="393192">
+              <a:tr h="365760">
                 <a:tc>
                   <a:txBody>
                     <a:bodyPr/>
@@ -8089,20 +8159,20 @@
                         <a:buNone/>
                       </a:pPr>
                       <a:r>
-                        <a:rPr lang="en-US" sz="1150" b="1" dirty="0">
+                        <a:rPr lang="en-US" sz="1050" b="1" dirty="0">
                           <a:solidFill>
                             <a:srgbClr val="1D1D1F"/>
                           </a:solidFill>
-                          <a:latin typeface="Helvetica Neue" pitchFamily="34" charset="0"/>
-                          <a:ea typeface="Helvetica Neue" pitchFamily="34" charset="-122"/>
-                          <a:cs typeface="Helvetica Neue" pitchFamily="34" charset="-120"/>
+                          <a:latin typeface="Inter" pitchFamily="34" charset="0"/>
+                          <a:ea typeface="Inter" pitchFamily="34" charset="-122"/>
+                          <a:cs typeface="Inter" pitchFamily="34" charset="-120"/>
                         </a:rPr>
-                        <a:t>Anker Powerline+ USB-A to USB-C cable</a:t>
+                        <a:t>Anker Powerline+ USB-C to USB-A cable, 10 ft (A8267)</a:t>
                       </a:r>
-                      <a:endParaRPr lang="en-US" sz="1150" dirty="0">
-                        <a:latin typeface="Helvetica Neue" charset="0"/>
-                        <a:ea typeface="Helvetica Neue" charset="0"/>
-                        <a:cs typeface="Helvetica Neue" charset="0"/>
+                      <a:endParaRPr lang="en-US" sz="1050" dirty="0">
+                        <a:latin typeface="Inter" charset="0"/>
+                        <a:ea typeface="Inter" charset="0"/>
+                        <a:cs typeface="Inter" charset="0"/>
                       </a:endParaRPr>
                     </a:p>
                   </a:txBody>
@@ -8136,20 +8206,20 @@
                         <a:buNone/>
                       </a:pPr>
                       <a:r>
-                        <a:rPr lang="en-US" sz="1150" dirty="0">
+                        <a:rPr lang="en-US" sz="1050" dirty="0">
                           <a:solidFill>
                             <a:srgbClr val="6E6E73"/>
                           </a:solidFill>
-                          <a:latin typeface="Helvetica Neue" pitchFamily="34" charset="0"/>
-                          <a:ea typeface="Helvetica Neue" pitchFamily="34" charset="-122"/>
-                          <a:cs typeface="Helvetica Neue" pitchFamily="34" charset="-120"/>
+                          <a:latin typeface="Inter" pitchFamily="34" charset="0"/>
+                          <a:ea typeface="Inter" pitchFamily="34" charset="-122"/>
+                          <a:cs typeface="Inter" pitchFamily="34" charset="-120"/>
                         </a:rPr>
-                        <a:t>3 m (10 ft)</a:t>
+                        <a:t>3 m · ⚠ unavailable on Amazon.ca: any 3 m USB-A → USB-C data cable</a:t>
                       </a:r>
-                      <a:endParaRPr lang="en-US" sz="1150" dirty="0">
-                        <a:latin typeface="Helvetica Neue" charset="0"/>
-                        <a:ea typeface="Helvetica Neue" charset="0"/>
-                        <a:cs typeface="Helvetica Neue" charset="0"/>
+                      <a:endParaRPr lang="en-US" sz="1050" dirty="0">
+                        <a:latin typeface="Inter" charset="0"/>
+                        <a:ea typeface="Inter" charset="0"/>
+                        <a:cs typeface="Inter" charset="0"/>
                       </a:endParaRPr>
                     </a:p>
                   </a:txBody>
@@ -8183,20 +8253,20 @@
                         <a:buNone/>
                       </a:pPr>
                       <a:r>
-                        <a:rPr lang="en-US" sz="1150" dirty="0">
+                        <a:rPr lang="en-US" sz="1050" dirty="0">
                           <a:solidFill>
                             <a:srgbClr val="6E6E73"/>
                           </a:solidFill>
-                          <a:latin typeface="Helvetica Neue" pitchFamily="34" charset="0"/>
-                          <a:ea typeface="Helvetica Neue" pitchFamily="34" charset="-122"/>
-                          <a:cs typeface="Helvetica Neue" pitchFamily="34" charset="-120"/>
+                          <a:latin typeface="Inter" pitchFamily="34" charset="0"/>
+                          <a:ea typeface="Inter" pitchFamily="34" charset="-122"/>
+                          <a:cs typeface="Inter" pitchFamily="34" charset="-120"/>
                         </a:rPr>
-                        <a:t>All-night power from a phone charger</a:t>
+                        <a:t>All-night power + data from a charger</a:t>
                       </a:r>
-                      <a:endParaRPr lang="en-US" sz="1150" dirty="0">
-                        <a:latin typeface="Helvetica Neue" charset="0"/>
-                        <a:ea typeface="Helvetica Neue" charset="0"/>
-                        <a:cs typeface="Helvetica Neue" charset="0"/>
+                      <a:endParaRPr lang="en-US" sz="1050" dirty="0">
+                        <a:latin typeface="Inter" charset="0"/>
+                        <a:ea typeface="Inter" charset="0"/>
+                        <a:cs typeface="Inter" charset="0"/>
                       </a:endParaRPr>
                     </a:p>
                   </a:txBody>
@@ -8230,13 +8300,13 @@
                         <a:buNone/>
                       </a:pPr>
                       <a:r>
-                        <a:rPr lang="en-US" sz="1150" u="sng" dirty="0">
+                        <a:rPr lang="en-US" sz="1050" u="sng" dirty="0">
                           <a:solidFill>
                             <a:srgbClr val="0071E3"/>
                           </a:solidFill>
-                          <a:latin typeface="Helvetica Neue" pitchFamily="34" charset="0"/>
-                          <a:ea typeface="Helvetica Neue" pitchFamily="34" charset="-122"/>
-                          <a:cs typeface="Helvetica Neue" pitchFamily="34" charset="-120"/>
+                          <a:latin typeface="Inter" pitchFamily="34" charset="0"/>
+                          <a:ea typeface="Inter" pitchFamily="34" charset="-122"/>
+                          <a:cs typeface="Inter" pitchFamily="34" charset="-120"/>
                           <a:hlinkClick r:id="rId6" invalidUrl="" action="" tgtFrame="" tooltip="https://www.amazon.ca/Anker-Powerline-Double-Braided-Charging-Samsung/dp/B07G148YMS" history="1" highlightClick="0" endSnd="0">
                             <a:extLst>
                               <a:ext uri="{A12FA001-AC4F-418D-AE19-62706E023703}">
@@ -8247,10 +8317,10 @@
                         </a:rPr>
                         <a:t>Amazon.ca ›</a:t>
                       </a:r>
-                      <a:endParaRPr lang="en-US" sz="1150" dirty="0">
-                        <a:latin typeface="Helvetica Neue" charset="0"/>
-                        <a:ea typeface="Helvetica Neue" charset="0"/>
-                        <a:cs typeface="Helvetica Neue" charset="0"/>
+                      <a:endParaRPr lang="en-US" sz="1050" dirty="0">
+                        <a:latin typeface="Inter" charset="0"/>
+                        <a:ea typeface="Inter" charset="0"/>
+                        <a:cs typeface="Inter" charset="0"/>
                       </a:endParaRPr>
                     </a:p>
                   </a:txBody>
@@ -8276,7 +8346,7 @@
                   </a:tcPr>
                 </a:tc>
               </a:tr>
-              <a:tr h="393192">
+              <a:tr h="365760">
                 <a:tc>
                   <a:txBody>
                     <a:bodyPr/>
@@ -8286,20 +8356,20 @@
                         <a:buNone/>
                       </a:pPr>
                       <a:r>
-                        <a:rPr lang="en-US" sz="1150" b="1" dirty="0">
+                        <a:rPr lang="en-US" sz="1050" b="1" dirty="0">
                           <a:solidFill>
                             <a:srgbClr val="1D1D1F"/>
                           </a:solidFill>
-                          <a:latin typeface="Helvetica Neue" pitchFamily="34" charset="0"/>
-                          <a:ea typeface="Helvetica Neue" pitchFamily="34" charset="-122"/>
-                          <a:cs typeface="Helvetica Neue" pitchFamily="34" charset="-120"/>
+                          <a:latin typeface="Inter" pitchFamily="34" charset="0"/>
+                          <a:ea typeface="Inter" pitchFamily="34" charset="-122"/>
+                          <a:cs typeface="Inter" pitchFamily="34" charset="-120"/>
                         </a:rPr>
-                        <a:t>Anker USB-C to USB-A adapter (2-pack)</a:t>
+                        <a:t>Anker USB-C to USB 3.0 female adapter (2-pack)</a:t>
                       </a:r>
-                      <a:endParaRPr lang="en-US" sz="1150" dirty="0">
-                        <a:latin typeface="Helvetica Neue" charset="0"/>
-                        <a:ea typeface="Helvetica Neue" charset="0"/>
-                        <a:cs typeface="Helvetica Neue" charset="0"/>
+                      <a:endParaRPr lang="en-US" sz="1050" dirty="0">
+                        <a:latin typeface="Inter" charset="0"/>
+                        <a:ea typeface="Inter" charset="0"/>
+                        <a:cs typeface="Inter" charset="0"/>
                       </a:endParaRPr>
                     </a:p>
                   </a:txBody>
@@ -8333,20 +8403,20 @@
                         <a:buNone/>
                       </a:pPr>
                       <a:r>
-                        <a:rPr lang="en-US" sz="1150" dirty="0">
+                        <a:rPr lang="en-US" sz="1050" dirty="0">
                           <a:solidFill>
                             <a:srgbClr val="6E6E73"/>
                           </a:solidFill>
-                          <a:latin typeface="Helvetica Neue" pitchFamily="34" charset="0"/>
-                          <a:ea typeface="Helvetica Neue" pitchFamily="34" charset="-122"/>
-                          <a:cs typeface="Helvetica Neue" pitchFamily="34" charset="-120"/>
+                          <a:latin typeface="Inter" pitchFamily="34" charset="0"/>
+                          <a:ea typeface="Inter" pitchFamily="34" charset="-122"/>
+                          <a:cs typeface="Inter" pitchFamily="34" charset="-120"/>
                         </a:rPr>
-                        <a:t>USB-C → USB-A</a:t>
+                        <a:t>USB-C plug → USB-A socket</a:t>
                       </a:r>
-                      <a:endParaRPr lang="en-US" sz="1150" dirty="0">
-                        <a:latin typeface="Helvetica Neue" charset="0"/>
-                        <a:ea typeface="Helvetica Neue" charset="0"/>
-                        <a:cs typeface="Helvetica Neue" charset="0"/>
+                      <a:endParaRPr lang="en-US" sz="1050" dirty="0">
+                        <a:latin typeface="Inter" charset="0"/>
+                        <a:ea typeface="Inter" charset="0"/>
+                        <a:cs typeface="Inter" charset="0"/>
                       </a:endParaRPr>
                     </a:p>
                   </a:txBody>
@@ -8380,20 +8450,20 @@
                         <a:buNone/>
                       </a:pPr>
                       <a:r>
-                        <a:rPr lang="en-US" sz="1150" dirty="0">
+                        <a:rPr lang="en-US" sz="1050" dirty="0">
                           <a:solidFill>
                             <a:srgbClr val="6E6E73"/>
                           </a:solidFill>
-                          <a:latin typeface="Helvetica Neue" pitchFamily="34" charset="0"/>
-                          <a:ea typeface="Helvetica Neue" pitchFamily="34" charset="-122"/>
-                          <a:cs typeface="Helvetica Neue" pitchFamily="34" charset="-120"/>
+                          <a:latin typeface="Inter" pitchFamily="34" charset="0"/>
+                          <a:ea typeface="Inter" pitchFamily="34" charset="-122"/>
+                          <a:cs typeface="Inter" pitchFamily="34" charset="-120"/>
                         </a:rPr>
                         <a:t>Plug the cable into a MacBook</a:t>
                       </a:r>
-                      <a:endParaRPr lang="en-US" sz="1150" dirty="0">
-                        <a:latin typeface="Helvetica Neue" charset="0"/>
-                        <a:ea typeface="Helvetica Neue" charset="0"/>
-                        <a:cs typeface="Helvetica Neue" charset="0"/>
+                      <a:endParaRPr lang="en-US" sz="1050" dirty="0">
+                        <a:latin typeface="Inter" charset="0"/>
+                        <a:ea typeface="Inter" charset="0"/>
+                        <a:cs typeface="Inter" charset="0"/>
                       </a:endParaRPr>
                     </a:p>
                   </a:txBody>
@@ -8427,13 +8497,13 @@
                         <a:buNone/>
                       </a:pPr>
                       <a:r>
-                        <a:rPr lang="en-US" sz="1150" u="sng" dirty="0">
+                        <a:rPr lang="en-US" sz="1050" u="sng" dirty="0">
                           <a:solidFill>
                             <a:srgbClr val="0071E3"/>
                           </a:solidFill>
-                          <a:latin typeface="Helvetica Neue" pitchFamily="34" charset="0"/>
-                          <a:ea typeface="Helvetica Neue" pitchFamily="34" charset="-122"/>
-                          <a:cs typeface="Helvetica Neue" pitchFamily="34" charset="-120"/>
+                          <a:latin typeface="Inter" pitchFamily="34" charset="0"/>
+                          <a:ea typeface="Inter" pitchFamily="34" charset="-122"/>
+                          <a:cs typeface="Inter" pitchFamily="34" charset="-120"/>
                           <a:hlinkClick r:id="rId7" invalidUrl="" action="" tgtFrame="" tooltip="https://www.amazon.ca/Adapter-Anker-High-Speed-Transfer-Notebook/dp/B08HZ6PS61" history="1" highlightClick="0" endSnd="0">
                             <a:extLst>
                               <a:ext uri="{A12FA001-AC4F-418D-AE19-62706E023703}">
@@ -8444,10 +8514,10 @@
                         </a:rPr>
                         <a:t>Amazon.ca ›</a:t>
                       </a:r>
-                      <a:endParaRPr lang="en-US" sz="1150" dirty="0">
-                        <a:latin typeface="Helvetica Neue" charset="0"/>
-                        <a:ea typeface="Helvetica Neue" charset="0"/>
-                        <a:cs typeface="Helvetica Neue" charset="0"/>
+                      <a:endParaRPr lang="en-US" sz="1050" dirty="0">
+                        <a:latin typeface="Inter" charset="0"/>
+                        <a:ea typeface="Inter" charset="0"/>
+                        <a:cs typeface="Inter" charset="0"/>
                       </a:endParaRPr>
                     </a:p>
                   </a:txBody>
@@ -8473,7 +8543,7 @@
                   </a:tcPr>
                 </a:tc>
               </a:tr>
-              <a:tr h="393192">
+              <a:tr h="365760">
                 <a:tc>
                   <a:txBody>
                     <a:bodyPr/>
@@ -8483,20 +8553,20 @@
                         <a:buNone/>
                       </a:pPr>
                       <a:r>
-                        <a:rPr lang="en-US" sz="1150" b="1" dirty="0">
+                        <a:rPr lang="en-US" sz="1050" b="1" dirty="0">
                           <a:solidFill>
                             <a:srgbClr val="1D1D1F"/>
                           </a:solidFill>
-                          <a:latin typeface="Helvetica Neue" pitchFamily="34" charset="0"/>
-                          <a:ea typeface="Helvetica Neue" pitchFamily="34" charset="-122"/>
-                          <a:cs typeface="Helvetica Neue" pitchFamily="34" charset="-120"/>
+                          <a:latin typeface="Inter" pitchFamily="34" charset="0"/>
+                          <a:ea typeface="Inter" pitchFamily="34" charset="-122"/>
+                          <a:cs typeface="Inter" pitchFamily="34" charset="-120"/>
                         </a:rPr>
-                        <a:t>VELCRO Brand 1 in × 30 ft roll</a:t>
+                        <a:t>VELCRO Brand Wide Straps VEL-30768-AMS, black</a:t>
                       </a:r>
-                      <a:endParaRPr lang="en-US" sz="1150" dirty="0">
-                        <a:latin typeface="Helvetica Neue" charset="0"/>
-                        <a:ea typeface="Helvetica Neue" charset="0"/>
-                        <a:cs typeface="Helvetica Neue" charset="0"/>
+                      <a:endParaRPr lang="en-US" sz="1050" dirty="0">
+                        <a:latin typeface="Inter" charset="0"/>
+                        <a:ea typeface="Inter" charset="0"/>
+                        <a:cs typeface="Inter" charset="0"/>
                       </a:endParaRPr>
                     </a:p>
                   </a:txBody>
@@ -8530,20 +8600,20 @@
                         <a:buNone/>
                       </a:pPr>
                       <a:r>
-                        <a:rPr lang="en-US" sz="1150" dirty="0">
+                        <a:rPr lang="en-US" sz="1050" dirty="0">
                           <a:solidFill>
                             <a:srgbClr val="6E6E73"/>
                           </a:solidFill>
-                          <a:latin typeface="Helvetica Neue" pitchFamily="34" charset="0"/>
-                          <a:ea typeface="Helvetica Neue" pitchFamily="34" charset="-122"/>
-                          <a:cs typeface="Helvetica Neue" pitchFamily="34" charset="-120"/>
+                          <a:latin typeface="Inter" pitchFamily="34" charset="0"/>
+                          <a:ea typeface="Inter" pitchFamily="34" charset="-122"/>
+                          <a:cs typeface="Inter" pitchFamily="34" charset="-120"/>
                         </a:rPr>
-                        <a:t>25 mm wide · cut ≈ 80 mm</a:t>
+                        <a:t>1 in (25 mm) × 30 ft · cut ≈ 80 mm</a:t>
                       </a:r>
-                      <a:endParaRPr lang="en-US" sz="1150" dirty="0">
-                        <a:latin typeface="Helvetica Neue" charset="0"/>
-                        <a:ea typeface="Helvetica Neue" charset="0"/>
-                        <a:cs typeface="Helvetica Neue" charset="0"/>
+                      <a:endParaRPr lang="en-US" sz="1050" dirty="0">
+                        <a:latin typeface="Inter" charset="0"/>
+                        <a:ea typeface="Inter" charset="0"/>
+                        <a:cs typeface="Inter" charset="0"/>
                       </a:endParaRPr>
                     </a:p>
                   </a:txBody>
@@ -8577,20 +8647,20 @@
                         <a:buNone/>
                       </a:pPr>
                       <a:r>
-                        <a:rPr lang="en-US" sz="1150" dirty="0">
+                        <a:rPr lang="en-US" sz="1050" dirty="0">
                           <a:solidFill>
                             <a:srgbClr val="6E6E73"/>
                           </a:solidFill>
-                          <a:latin typeface="Helvetica Neue" pitchFamily="34" charset="0"/>
-                          <a:ea typeface="Helvetica Neue" pitchFamily="34" charset="-122"/>
-                          <a:cs typeface="Helvetica Neue" pitchFamily="34" charset="-120"/>
+                          <a:latin typeface="Inter" pitchFamily="34" charset="0"/>
+                          <a:ea typeface="Inter" pitchFamily="34" charset="-122"/>
+                          <a:cs typeface="Inter" pitchFamily="34" charset="-120"/>
                         </a:rPr>
                         <a:t>Finger loop</a:t>
                       </a:r>
-                      <a:endParaRPr lang="en-US" sz="1150" dirty="0">
-                        <a:latin typeface="Helvetica Neue" charset="0"/>
-                        <a:ea typeface="Helvetica Neue" charset="0"/>
-                        <a:cs typeface="Helvetica Neue" charset="0"/>
+                      <a:endParaRPr lang="en-US" sz="1050" dirty="0">
+                        <a:latin typeface="Inter" charset="0"/>
+                        <a:ea typeface="Inter" charset="0"/>
+                        <a:cs typeface="Inter" charset="0"/>
                       </a:endParaRPr>
                     </a:p>
                   </a:txBody>
@@ -8624,13 +8694,13 @@
                         <a:buNone/>
                       </a:pPr>
                       <a:r>
-                        <a:rPr lang="en-US" sz="1150" u="sng" dirty="0">
+                        <a:rPr lang="en-US" sz="1050" u="sng" dirty="0">
                           <a:solidFill>
                             <a:srgbClr val="0071E3"/>
                           </a:solidFill>
-                          <a:latin typeface="Helvetica Neue" pitchFamily="34" charset="0"/>
-                          <a:ea typeface="Helvetica Neue" pitchFamily="34" charset="-122"/>
-                          <a:cs typeface="Helvetica Neue" pitchFamily="34" charset="-120"/>
+                          <a:latin typeface="Inter" pitchFamily="34" charset="0"/>
+                          <a:ea typeface="Inter" pitchFamily="34" charset="-122"/>
+                          <a:cs typeface="Inter" pitchFamily="34" charset="-120"/>
                           <a:hlinkClick r:id="rId8" invalidUrl="" action="" tgtFrame="" tooltip="https://www.amazon.ca/VELCRO-Brand-VEL-30768-AMS-Self-Gripping-Organization/dp/B09QH2NVM1" history="1" highlightClick="0" endSnd="0">
                             <a:extLst>
                               <a:ext uri="{A12FA001-AC4F-418D-AE19-62706E023703}">
@@ -8641,10 +8711,10 @@
                         </a:rPr>
                         <a:t>Amazon.ca ›</a:t>
                       </a:r>
-                      <a:endParaRPr lang="en-US" sz="1150" dirty="0">
-                        <a:latin typeface="Helvetica Neue" charset="0"/>
-                        <a:ea typeface="Helvetica Neue" charset="0"/>
-                        <a:cs typeface="Helvetica Neue" charset="0"/>
+                      <a:endParaRPr lang="en-US" sz="1050" dirty="0">
+                        <a:latin typeface="Inter" charset="0"/>
+                        <a:ea typeface="Inter" charset="0"/>
+                        <a:cs typeface="Inter" charset="0"/>
                       </a:endParaRPr>
                     </a:p>
                   </a:txBody>
@@ -8670,7 +8740,7 @@
                   </a:tcPr>
                 </a:tc>
               </a:tr>
-              <a:tr h="393192">
+              <a:tr h="365760">
                 <a:tc>
                   <a:txBody>
                     <a:bodyPr/>
@@ -8680,20 +8750,20 @@
                         <a:buNone/>
                       </a:pPr>
                       <a:r>
-                        <a:rPr lang="en-US" sz="1150" b="1" dirty="0">
+                        <a:rPr lang="en-US" sz="1050" b="1" dirty="0">
                           <a:solidFill>
                             <a:srgbClr val="1D1D1F"/>
                           </a:solidFill>
-                          <a:latin typeface="Helvetica Neue" pitchFamily="34" charset="0"/>
-                          <a:ea typeface="Helvetica Neue" pitchFamily="34" charset="-122"/>
-                          <a:cs typeface="Helvetica Neue" pitchFamily="34" charset="-120"/>
+                          <a:latin typeface="Inter" pitchFamily="34" charset="0"/>
+                          <a:ea typeface="Inter" pitchFamily="34" charset="-122"/>
+                          <a:cs typeface="Inter" pitchFamily="34" charset="-120"/>
                         </a:rPr>
-                        <a:t>Elite Medica fingertip pulse oximeter</a:t>
+                        <a:t>Elite Medica Premium Fingertip Pulse Oximeter EM-PO2 (black)</a:t>
                       </a:r>
-                      <a:endParaRPr lang="en-US" sz="1150" dirty="0">
-                        <a:latin typeface="Helvetica Neue" charset="0"/>
-                        <a:ea typeface="Helvetica Neue" charset="0"/>
-                        <a:cs typeface="Helvetica Neue" charset="0"/>
+                      <a:endParaRPr lang="en-US" sz="1050" dirty="0">
+                        <a:latin typeface="Inter" charset="0"/>
+                        <a:ea typeface="Inter" charset="0"/>
+                        <a:cs typeface="Inter" charset="0"/>
                       </a:endParaRPr>
                     </a:p>
                   </a:txBody>
@@ -8727,20 +8797,20 @@
                         <a:buNone/>
                       </a:pPr>
                       <a:r>
-                        <a:rPr lang="en-US" sz="1150" dirty="0">
+                        <a:rPr lang="en-US" sz="1050" dirty="0">
                           <a:solidFill>
                             <a:srgbClr val="6E6E73"/>
                           </a:solidFill>
-                          <a:latin typeface="Helvetica Neue" pitchFamily="34" charset="0"/>
-                          <a:ea typeface="Helvetica Neue" pitchFamily="34" charset="-122"/>
-                          <a:cs typeface="Helvetica Neue" pitchFamily="34" charset="-120"/>
+                          <a:latin typeface="Inter" pitchFamily="34" charset="0"/>
+                          <a:ea typeface="Inter" pitchFamily="34" charset="-122"/>
+                          <a:cs typeface="Inter" pitchFamily="34" charset="-120"/>
                         </a:rPr>
-                        <a:t>confirm Health Canada licence</a:t>
+                        <a:t>listed as Health Canada authorized · 70–100% · 2 AAA · licence no. not shown: check box</a:t>
                       </a:r>
-                      <a:endParaRPr lang="en-US" sz="1150" dirty="0">
-                        <a:latin typeface="Helvetica Neue" charset="0"/>
-                        <a:ea typeface="Helvetica Neue" charset="0"/>
-                        <a:cs typeface="Helvetica Neue" charset="0"/>
+                      <a:endParaRPr lang="en-US" sz="1050" dirty="0">
+                        <a:latin typeface="Inter" charset="0"/>
+                        <a:ea typeface="Inter" charset="0"/>
+                        <a:cs typeface="Inter" charset="0"/>
                       </a:endParaRPr>
                     </a:p>
                   </a:txBody>
@@ -8774,20 +8844,20 @@
                         <a:buNone/>
                       </a:pPr>
                       <a:r>
-                        <a:rPr lang="en-US" sz="1150" dirty="0">
+                        <a:rPr lang="en-US" sz="1050" dirty="0">
                           <a:solidFill>
                             <a:srgbClr val="6E6E73"/>
                           </a:solidFill>
-                          <a:latin typeface="Helvetica Neue" pitchFamily="34" charset="0"/>
-                          <a:ea typeface="Helvetica Neue" pitchFamily="34" charset="-122"/>
-                          <a:cs typeface="Helvetica Neue" pitchFamily="34" charset="-120"/>
+                          <a:latin typeface="Inter" pitchFamily="34" charset="0"/>
+                          <a:ea typeface="Inter" pitchFamily="34" charset="-122"/>
+                          <a:cs typeface="Inter" pitchFamily="34" charset="-120"/>
                         </a:rPr>
                         <a:t>Reference for the accuracy test</a:t>
                       </a:r>
-                      <a:endParaRPr lang="en-US" sz="1150" dirty="0">
-                        <a:latin typeface="Helvetica Neue" charset="0"/>
-                        <a:ea typeface="Helvetica Neue" charset="0"/>
-                        <a:cs typeface="Helvetica Neue" charset="0"/>
+                      <a:endParaRPr lang="en-US" sz="1050" dirty="0">
+                        <a:latin typeface="Inter" charset="0"/>
+                        <a:ea typeface="Inter" charset="0"/>
+                        <a:cs typeface="Inter" charset="0"/>
                       </a:endParaRPr>
                     </a:p>
                   </a:txBody>
@@ -8821,13 +8891,13 @@
                         <a:buNone/>
                       </a:pPr>
                       <a:r>
-                        <a:rPr lang="en-US" sz="1150" u="sng" dirty="0">
+                        <a:rPr lang="en-US" sz="1050" u="sng" dirty="0">
                           <a:solidFill>
                             <a:srgbClr val="0071E3"/>
                           </a:solidFill>
-                          <a:latin typeface="Helvetica Neue" pitchFamily="34" charset="0"/>
-                          <a:ea typeface="Helvetica Neue" pitchFamily="34" charset="-122"/>
-                          <a:cs typeface="Helvetica Neue" pitchFamily="34" charset="-120"/>
+                          <a:latin typeface="Inter" pitchFamily="34" charset="0"/>
+                          <a:ea typeface="Inter" pitchFamily="34" charset="-122"/>
+                          <a:cs typeface="Inter" pitchFamily="34" charset="-120"/>
                           <a:hlinkClick r:id="rId9" invalidUrl="" action="" tgtFrame="" tooltip="https://www.amazon.ca/Elite-Medica-Fingertip-Saturation-Batteries/dp/B0DSGP91PB" history="1" highlightClick="0" endSnd="0">
                             <a:extLst>
                               <a:ext uri="{A12FA001-AC4F-418D-AE19-62706E023703}">
@@ -8838,10 +8908,10 @@
                         </a:rPr>
                         <a:t>Amazon.ca ›</a:t>
                       </a:r>
-                      <a:endParaRPr lang="en-US" sz="1150" dirty="0">
-                        <a:latin typeface="Helvetica Neue" charset="0"/>
-                        <a:ea typeface="Helvetica Neue" charset="0"/>
-                        <a:cs typeface="Helvetica Neue" charset="0"/>
+                      <a:endParaRPr lang="en-US" sz="1050" dirty="0">
+                        <a:latin typeface="Inter" charset="0"/>
+                        <a:ea typeface="Inter" charset="0"/>
+                        <a:cs typeface="Inter" charset="0"/>
                       </a:endParaRPr>
                     </a:p>
                   </a:txBody>
@@ -8879,34 +8949,34 @@
         </p:nvSpPr>
         <p:spPr>
           <a:xfrm>
-            <a:off x="685800" y="5897880"/>
-            <a:ext cx="10789920" cy="457200"/>
-          </a:xfrm>
-          <a:prstGeom prst="rect">
-            <a:avLst/>
-          </a:prstGeom>
-          <a:noFill/>
-          <a:ln/>
-        </p:spPr>
-        <p:txBody>
-          <a:bodyPr wrap="square" lIns="0" tIns="0" rIns="0" bIns="0" rtlCol="0" anchor="t"/>
-          <a:lstStyle/>
-          <a:p>
-            <a:pPr indent="0" marL="0">
-              <a:buNone/>
-            </a:pPr>
-            <a:r>
-              <a:rPr lang="en-US" sz="1150" dirty="0">
+            <a:off x="685800" y="6053328"/>
+            <a:ext cx="10789920" cy="411480"/>
+          </a:xfrm>
+          <a:prstGeom prst="rect">
+            <a:avLst/>
+          </a:prstGeom>
+          <a:noFill/>
+          <a:ln/>
+        </p:spPr>
+        <p:txBody>
+          <a:bodyPr wrap="square" lIns="0" tIns="0" rIns="0" bIns="0" rtlCol="0" anchor="t"/>
+          <a:lstStyle/>
+          <a:p>
+            <a:pPr indent="0" marL="0">
+              <a:buNone/>
+            </a:pPr>
+            <a:r>
+              <a:rPr lang="en-US" sz="1050" dirty="0">
                 <a:solidFill>
                   <a:srgbClr val="6E6E73"/>
                 </a:solidFill>
-                <a:latin typeface="Helvetica Neue" pitchFamily="34" charset="0"/>
-                <a:ea typeface="Helvetica Neue" pitchFamily="34" charset="-122"/>
-                <a:cs typeface="Helvetica Neue" pitchFamily="34" charset="-120"/>
-              </a:rPr>
-              <a:t>Every part is on Amazon.ca (click Buy). Prices change and several items are multi-packs. Only the MAX30102’s 4 header pins need soldering (about 5 minutes); everything else plugs in.</a:t>
-            </a:r>
-            <a:endParaRPr lang="en-US" sz="1150" dirty="0"/>
+                <a:latin typeface="Inter" pitchFamily="34" charset="0"/>
+                <a:ea typeface="Inter" pitchFamily="34" charset="-122"/>
+                <a:cs typeface="Inter" pitchFamily="34" charset="-120"/>
+              </a:rPr>
+              <a:t>Specs rechecked Oct 16, 2026 from the listing titles and makers’ pages (Amazon.ca itself could not be opened). ⚠ = check before ordering. Prices and stock change; several items are multi-packs. Only the MAX30102 needs soldering (4 pins).</a:t>
+            </a:r>
+            <a:endParaRPr lang="en-US" sz="1050" dirty="0"/>
           </a:p>
         </p:txBody>
       </p:sp>
@@ -8993,9 +9063,9 @@
                 <a:solidFill>
                   <a:srgbClr val="6E6E73"/>
                 </a:solidFill>
-                <a:latin typeface="Helvetica Neue" pitchFamily="34" charset="0"/>
-                <a:ea typeface="Helvetica Neue" pitchFamily="34" charset="-122"/>
-                <a:cs typeface="Helvetica Neue" pitchFamily="34" charset="-120"/>
+                <a:latin typeface="Inter" pitchFamily="34" charset="0"/>
+                <a:ea typeface="Inter" pitchFamily="34" charset="-122"/>
+                <a:cs typeface="Inter" pitchFamily="34" charset="-120"/>
               </a:rPr>
               <a:t>Appendix · not presented</a:t>
             </a:r>
@@ -9032,9 +9102,9 @@
                 <a:solidFill>
                   <a:srgbClr val="E3254B"/>
                 </a:solidFill>
-                <a:latin typeface="Helvetica Neue" pitchFamily="34" charset="0"/>
-                <a:ea typeface="Helvetica Neue" pitchFamily="34" charset="-122"/>
-                <a:cs typeface="Helvetica Neue" pitchFamily="34" charset="-120"/>
+                <a:latin typeface="Inter" pitchFamily="34" charset="0"/>
+                <a:ea typeface="Inter" pitchFamily="34" charset="-122"/>
+                <a:cs typeface="Inter" pitchFamily="34" charset="-120"/>
               </a:rPr>
               <a:t>Appendix B · Full protocol (planned)</a:t>
             </a:r>
@@ -9074,9 +9144,9 @@
                 <a:solidFill>
                   <a:srgbClr val="1D1D1F"/>
                 </a:solidFill>
-                <a:latin typeface="Helvetica Neue" pitchFamily="34" charset="0"/>
-                <a:ea typeface="Helvetica Neue" pitchFamily="34" charset="-122"/>
-                <a:cs typeface="Helvetica Neue" pitchFamily="34" charset="-120"/>
+                <a:latin typeface="Inter" pitchFamily="34" charset="0"/>
+                <a:ea typeface="Inter" pitchFamily="34" charset="-122"/>
+                <a:cs typeface="Inter" pitchFamily="34" charset="-120"/>
               </a:rPr>
               <a:t>Full experimental protocol (planned, not yet started).</a:t>
             </a:r>
@@ -9113,9 +9183,9 @@
                 <a:solidFill>
                   <a:srgbClr val="D70015"/>
                 </a:solidFill>
-                <a:latin typeface="Helvetica Neue" pitchFamily="34" charset="0"/>
-                <a:ea typeface="Helvetica Neue" pitchFamily="34" charset="-122"/>
-                <a:cs typeface="Helvetica Neue" pitchFamily="34" charset="-120"/>
+                <a:latin typeface="Inter" pitchFamily="34" charset="0"/>
+                <a:ea typeface="Inter" pitchFamily="34" charset="-122"/>
+                <a:cs typeface="Inter" pitchFamily="34" charset="-120"/>
               </a:rPr>
               <a:t>1</a:t>
             </a:r>
@@ -9152,9 +9222,9 @@
                 <a:solidFill>
                   <a:srgbClr val="1D1D1F"/>
                 </a:solidFill>
-                <a:latin typeface="Helvetica Neue" pitchFamily="34" charset="0"/>
-                <a:ea typeface="Helvetica Neue" pitchFamily="34" charset="-122"/>
-                <a:cs typeface="Helvetica Neue" pitchFamily="34" charset="-120"/>
+                <a:latin typeface="Inter" pitchFamily="34" charset="0"/>
+                <a:ea typeface="Inter" pitchFamily="34" charset="-122"/>
+                <a:cs typeface="Inter" pitchFamily="34" charset="-120"/>
               </a:rPr>
               <a:t>Approvals first.  </a:t>
             </a:r>
@@ -9166,9 +9236,9 @@
                 <a:solidFill>
                   <a:srgbClr val="6E6E73"/>
                 </a:solidFill>
-                <a:latin typeface="Helvetica Neue" pitchFamily="34" charset="0"/>
-                <a:ea typeface="Helvetica Neue" pitchFamily="34" charset="-122"/>
-                <a:cs typeface="Helvetica Neue" pitchFamily="34" charset="-120"/>
+                <a:latin typeface="Inter" pitchFamily="34" charset="0"/>
+                <a:ea typeface="Inter" pitchFamily="34" charset="-122"/>
+                <a:cs typeface="Inter" pitchFamily="34" charset="-120"/>
               </a:rPr>
               <a:t>Ms. Ireland accepts the revised proposal, the ethics committee approves, and informed consent is signed (participant and parent/guardian). No data is collected from anyone, including me, before all three.</a:t>
             </a:r>
@@ -9205,9 +9275,9 @@
                 <a:solidFill>
                   <a:srgbClr val="0071E3"/>
                 </a:solidFill>
-                <a:latin typeface="Helvetica Neue" pitchFamily="34" charset="0"/>
-                <a:ea typeface="Helvetica Neue" pitchFamily="34" charset="-122"/>
-                <a:cs typeface="Helvetica Neue" pitchFamily="34" charset="-120"/>
+                <a:latin typeface="Inter" pitchFamily="34" charset="0"/>
+                <a:ea typeface="Inter" pitchFamily="34" charset="-122"/>
+                <a:cs typeface="Inter" pitchFamily="34" charset="-120"/>
               </a:rPr>
               <a:t>2</a:t>
             </a:r>
@@ -9244,9 +9314,9 @@
                 <a:solidFill>
                   <a:srgbClr val="1D1D1F"/>
                 </a:solidFill>
-                <a:latin typeface="Helvetica Neue" pitchFamily="34" charset="0"/>
-                <a:ea typeface="Helvetica Neue" pitchFamily="34" charset="-122"/>
-                <a:cs typeface="Helvetica Neue" pitchFamily="34" charset="-120"/>
+                <a:latin typeface="Inter" pitchFamily="34" charset="0"/>
+                <a:ea typeface="Inter" pitchFamily="34" charset="-122"/>
+                <a:cs typeface="Inter" pitchFamily="34" charset="-120"/>
               </a:rPr>
               <a:t>Build and device check.  </a:t>
             </a:r>
@@ -9258,9 +9328,9 @@
                 <a:solidFill>
                   <a:srgbClr val="6E6E73"/>
                 </a:solidFill>
-                <a:latin typeface="Helvetica Neue" pitchFamily="34" charset="0"/>
-                <a:ea typeface="Helvetica Neue" pitchFamily="34" charset="-122"/>
-                <a:cs typeface="Helvetica Neue" pitchFamily="34" charset="-120"/>
+                <a:latin typeface="Inter" pitchFamily="34" charset="0"/>
+                <a:ea typeface="Inter" pitchFamily="34" charset="-122"/>
+                <a:cs typeface="Inter" pitchFamily="34" charset="-120"/>
               </a:rPr>
               <a:t>MAX30102 → 3V3 / GND / GPIO 21 / 22; GY-521 → VIN / GND / SDA→GPIO 33 / SCL→GPIO 32 (two separate I²C buses); USB power. check_device.py must report READY before every session.</a:t>
             </a:r>
@@ -9297,9 +9367,9 @@
                 <a:solidFill>
                   <a:srgbClr val="0071E3"/>
                 </a:solidFill>
-                <a:latin typeface="Helvetica Neue" pitchFamily="34" charset="0"/>
-                <a:ea typeface="Helvetica Neue" pitchFamily="34" charset="-122"/>
-                <a:cs typeface="Helvetica Neue" pitchFamily="34" charset="-120"/>
+                <a:latin typeface="Inter" pitchFamily="34" charset="0"/>
+                <a:ea typeface="Inter" pitchFamily="34" charset="-122"/>
+                <a:cs typeface="Inter" pitchFamily="34" charset="-120"/>
               </a:rPr>
               <a:t>3</a:t>
             </a:r>
@@ -9336,9 +9406,9 @@
                 <a:solidFill>
                   <a:srgbClr val="1D1D1F"/>
                 </a:solidFill>
-                <a:latin typeface="Helvetica Neue" pitchFamily="34" charset="0"/>
-                <a:ea typeface="Helvetica Neue" pitchFamily="34" charset="-122"/>
-                <a:cs typeface="Helvetica Neue" pitchFamily="34" charset="-120"/>
+                <a:latin typeface="Inter" pitchFamily="34" charset="0"/>
+                <a:ea typeface="Inter" pitchFamily="34" charset="-122"/>
+                <a:cs typeface="Inter" pitchFamily="34" charset="-120"/>
               </a:rPr>
               <a:t>Accuracy sessions (main test).  </a:t>
             </a:r>
@@ -9350,9 +9420,9 @@
                 <a:solidFill>
                   <a:srgbClr val="6E6E73"/>
                 </a:solidFill>
-                <a:latin typeface="Helvetica Neue" pitchFamily="34" charset="0"/>
-                <a:ea typeface="Helvetica Neue" pitchFamily="34" charset="-122"/>
-                <a:cs typeface="Helvetica Neue" pitchFamily="34" charset="-120"/>
+                <a:latin typeface="Inter" pitchFamily="34" charset="0"/>
+                <a:ea typeface="Inter" pitchFamily="34" charset="-122"/>
+                <a:cs typeface="Inter" pitchFamily="34" charset="-120"/>
               </a:rPr>
               <a:t>Seated, awake, at rest, warm hands. Wearable on one index finger, reference oximeter on the other hand. Every 2 min: time, reference SpO₂ and heart rate (15 pairs per 30-min session); several sessions on different days. validate.py: bias, 95% limits of agreement, mean absolute difference.</a:t>
             </a:r>
@@ -9389,9 +9459,9 @@
                 <a:solidFill>
                   <a:srgbClr val="0071E3"/>
                 </a:solidFill>
-                <a:latin typeface="Helvetica Neue" pitchFamily="34" charset="0"/>
-                <a:ea typeface="Helvetica Neue" pitchFamily="34" charset="-122"/>
-                <a:cs typeface="Helvetica Neue" pitchFamily="34" charset="-120"/>
+                <a:latin typeface="Inter" pitchFamily="34" charset="0"/>
+                <a:ea typeface="Inter" pitchFamily="34" charset="-122"/>
+                <a:cs typeface="Inter" pitchFamily="34" charset="-120"/>
               </a:rPr>
               <a:t>4</a:t>
             </a:r>
@@ -9428,9 +9498,9 @@
                 <a:solidFill>
                   <a:srgbClr val="1D1D1F"/>
                 </a:solidFill>
-                <a:latin typeface="Helvetica Neue" pitchFamily="34" charset="0"/>
-                <a:ea typeface="Helvetica Neue" pitchFamily="34" charset="-122"/>
-                <a:cs typeface="Helvetica Neue" pitchFamily="34" charset="-120"/>
+                <a:latin typeface="Inter" pitchFamily="34" charset="0"/>
+                <a:ea typeface="Inter" pitchFamily="34" charset="-122"/>
+                <a:cs typeface="Inter" pitchFamily="34" charset="-120"/>
               </a:rPr>
               <a:t>Signal-quality checks.  </a:t>
             </a:r>
@@ -9442,9 +9512,9 @@
                 <a:solidFill>
                   <a:srgbClr val="6E6E73"/>
                 </a:solidFill>
-                <a:latin typeface="Helvetica Neue" pitchFamily="34" charset="0"/>
-                <a:ea typeface="Helvetica Neue" pitchFamily="34" charset="-122"/>
-                <a:cs typeface="Helvetica Neue" pitchFamily="34" charset="-120"/>
+                <a:latin typeface="Inter" pitchFamily="34" charset="0"/>
+                <a:ea typeface="Inter" pitchFamily="34" charset="-122"/>
+                <a:cs typeface="Inter" pitchFamily="34" charset="-120"/>
               </a:rPr>
               <a:t>Each 1-s reading counts only if a finger is present, the sensor marks it valid, SpO₂ is 70–100%, and there is no sudden movement within 5 s. Every report states the % of valid signal.</a:t>
             </a:r>
@@ -9481,9 +9551,9 @@
                 <a:solidFill>
                   <a:srgbClr val="0071E3"/>
                 </a:solidFill>
-                <a:latin typeface="Helvetica Neue" pitchFamily="34" charset="0"/>
-                <a:ea typeface="Helvetica Neue" pitchFamily="34" charset="-122"/>
-                <a:cs typeface="Helvetica Neue" pitchFamily="34" charset="-120"/>
+                <a:latin typeface="Inter" pitchFamily="34" charset="0"/>
+                <a:ea typeface="Inter" pitchFamily="34" charset="-122"/>
+                <a:cs typeface="Inter" pitchFamily="34" charset="-120"/>
               </a:rPr>
               <a:t>5</a:t>
             </a:r>
@@ -9520,9 +9590,9 @@
                 <a:solidFill>
                   <a:srgbClr val="1D1D1F"/>
                 </a:solidFill>
-                <a:latin typeface="Helvetica Neue" pitchFamily="34" charset="0"/>
-                <a:ea typeface="Helvetica Neue" pitchFamily="34" charset="-122"/>
-                <a:cs typeface="Helvetica Neue" pitchFamily="34" charset="-120"/>
+                <a:latin typeface="Inter" pitchFamily="34" charset="0"/>
+                <a:ea typeface="Inter" pitchFamily="34" charset="-122"/>
+                <a:cs typeface="Inter" pitchFamily="34" charset="-120"/>
               </a:rPr>
               <a:t>Overnight recordings (only if approved).  </a:t>
             </a:r>
@@ -9534,9 +9604,9 @@
                 <a:solidFill>
                   <a:srgbClr val="6E6E73"/>
                 </a:solidFill>
-                <a:latin typeface="Helvetica Neue" pitchFamily="34" charset="0"/>
-                <a:ea typeface="Helvetica Neue" pitchFamily="34" charset="-122"/>
-                <a:cs typeface="Helvetica Neue" pitchFamily="34" charset="-120"/>
+                <a:latin typeface="Inter" pitchFamily="34" charset="0"/>
+                <a:ea typeface="Inter" pitchFamily="34" charset="-122"/>
+                <a:cs typeface="Inter" pitchFamily="34" charset="-120"/>
               </a:rPr>
               <a:t>% valid signal and desaturation events per hour of valid recording. The reference cannot record overnight, so these events cannot be verified. The rate is not an apnea–hypopnea index.</a:t>
             </a:r>
@@ -9573,9 +9643,9 @@
                 <a:solidFill>
                   <a:srgbClr val="0071E3"/>
                 </a:solidFill>
-                <a:latin typeface="Helvetica Neue" pitchFamily="34" charset="0"/>
-                <a:ea typeface="Helvetica Neue" pitchFamily="34" charset="-122"/>
-                <a:cs typeface="Helvetica Neue" pitchFamily="34" charset="-120"/>
+                <a:latin typeface="Inter" pitchFamily="34" charset="0"/>
+                <a:ea typeface="Inter" pitchFamily="34" charset="-122"/>
+                <a:cs typeface="Inter" pitchFamily="34" charset="-120"/>
               </a:rPr>
               <a:t>6</a:t>
             </a:r>
@@ -9612,9 +9682,9 @@
                 <a:solidFill>
                   <a:srgbClr val="1D1D1F"/>
                 </a:solidFill>
-                <a:latin typeface="Helvetica Neue" pitchFamily="34" charset="0"/>
-                <a:ea typeface="Helvetica Neue" pitchFamily="34" charset="-122"/>
-                <a:cs typeface="Helvetica Neue" pitchFamily="34" charset="-120"/>
+                <a:latin typeface="Inter" pitchFamily="34" charset="0"/>
+                <a:ea typeface="Inter" pitchFamily="34" charset="-122"/>
+                <a:cs typeface="Inter" pitchFamily="34" charset="-120"/>
               </a:rPr>
               <a:t>Breath-hold test (optional, only if approved).  </a:t>
             </a:r>
@@ -9626,9 +9696,9 @@
                 <a:solidFill>
                   <a:srgbClr val="6E6E73"/>
                 </a:solidFill>
-                <a:latin typeface="Helvetica Neue" pitchFamily="34" charset="0"/>
-                <a:ea typeface="Helvetica Neue" pitchFamily="34" charset="-122"/>
-                <a:cs typeface="Helvetica Neue" pitchFamily="34" charset="-120"/>
+                <a:latin typeface="Inter" pitchFamily="34" charset="0"/>
+                <a:ea typeface="Inter" pitchFamily="34" charset="-122"/>
+                <a:cs typeface="Inter" pitchFamily="34" charset="-120"/>
               </a:rPr>
               <a:t>Awake, seated, adult-supervised, holds of at most 20 s, stop at any discomfort; start and end times logged. Tests only whether induced dips are flagged; it does not validate detecting sleep apnea during sleep.</a:t>
             </a:r>
@@ -9665,9 +9735,9 @@
                 <a:solidFill>
                   <a:srgbClr val="0071E3"/>
                 </a:solidFill>
-                <a:latin typeface="Helvetica Neue" pitchFamily="34" charset="0"/>
-                <a:ea typeface="Helvetica Neue" pitchFamily="34" charset="-122"/>
-                <a:cs typeface="Helvetica Neue" pitchFamily="34" charset="-120"/>
+                <a:latin typeface="Inter" pitchFamily="34" charset="0"/>
+                <a:ea typeface="Inter" pitchFamily="34" charset="-122"/>
+                <a:cs typeface="Inter" pitchFamily="34" charset="-120"/>
               </a:rPr>
               <a:t>7</a:t>
             </a:r>
@@ -9704,9 +9774,9 @@
                 <a:solidFill>
                   <a:srgbClr val="1D1D1F"/>
                 </a:solidFill>
-                <a:latin typeface="Helvetica Neue" pitchFamily="34" charset="0"/>
-                <a:ea typeface="Helvetica Neue" pitchFamily="34" charset="-122"/>
-                <a:cs typeface="Helvetica Neue" pitchFamily="34" charset="-120"/>
+                <a:latin typeface="Inter" pitchFamily="34" charset="0"/>
+                <a:ea typeface="Inter" pitchFamily="34" charset="-122"/>
+                <a:cs typeface="Inter" pitchFamily="34" charset="-120"/>
               </a:rPr>
               <a:t>Analysis.  </a:t>
             </a:r>
@@ -9718,9 +9788,9 @@
                 <a:solidFill>
                   <a:srgbClr val="6E6E73"/>
                 </a:solidFill>
-                <a:latin typeface="Helvetica Neue" pitchFamily="34" charset="0"/>
-                <a:ea typeface="Helvetica Neue" pitchFamily="34" charset="-122"/>
-                <a:cs typeface="Helvetica Neue" pitchFamily="34" charset="-120"/>
+                <a:latin typeface="Inter" pitchFamily="34" charset="0"/>
+                <a:ea typeface="Inter" pitchFamily="34" charset="-122"/>
+                <a:cs typeface="Inter" pitchFamily="34" charset="-120"/>
               </a:rPr>
               <a:t>analyze.py (events, valid hours) and validate.py (agreement). Position, heart-rate and breathing-rate scripts are exploratory (Appendix D) and are not used to test the hypothesis.</a:t>
             </a:r>
@@ -9757,9 +9827,9 @@
                 <a:solidFill>
                   <a:srgbClr val="0071E3"/>
                 </a:solidFill>
-                <a:latin typeface="Helvetica Neue" pitchFamily="34" charset="0"/>
-                <a:ea typeface="Helvetica Neue" pitchFamily="34" charset="-122"/>
-                <a:cs typeface="Helvetica Neue" pitchFamily="34" charset="-120"/>
+                <a:latin typeface="Inter" pitchFamily="34" charset="0"/>
+                <a:ea typeface="Inter" pitchFamily="34" charset="-122"/>
+                <a:cs typeface="Inter" pitchFamily="34" charset="-120"/>
               </a:rPr>
               <a:t>8</a:t>
             </a:r>
@@ -9796,9 +9866,9 @@
                 <a:solidFill>
                   <a:srgbClr val="1D1D1F"/>
                 </a:solidFill>
-                <a:latin typeface="Helvetica Neue" pitchFamily="34" charset="0"/>
-                <a:ea typeface="Helvetica Neue" pitchFamily="34" charset="-122"/>
-                <a:cs typeface="Helvetica Neue" pitchFamily="34" charset="-120"/>
+                <a:latin typeface="Inter" pitchFamily="34" charset="0"/>
+                <a:ea typeface="Inter" pitchFamily="34" charset="-122"/>
+                <a:cs typeface="Inter" pitchFamily="34" charset="-120"/>
               </a:rPr>
               <a:t>Controls.  </a:t>
             </a:r>
@@ -9810,9 +9880,9 @@
                 <a:solidFill>
                   <a:srgbClr val="6E6E73"/>
                 </a:solidFill>
-                <a:latin typeface="Helvetica Neue" pitchFamily="34" charset="0"/>
-                <a:ea typeface="Helvetica Neue" pitchFamily="34" charset="-122"/>
-                <a:cs typeface="Helvetica Neue" pitchFamily="34" charset="-120"/>
+                <a:latin typeface="Inter" pitchFamily="34" charset="0"/>
+                <a:ea typeface="Inter" pitchFamily="34" charset="-122"/>
+                <a:cs typeface="Inter" pitchFamily="34" charset="-120"/>
               </a:rPr>
               <a:t>Same participant, finger and cuff tightness, room and lighting, firmware, reference oximeter and detection settings (3-point drop, ≥ 10 s, 120-s baseline).</a:t>
             </a:r>
@@ -9903,9 +9973,9 @@
                 <a:solidFill>
                   <a:srgbClr val="6E6E73"/>
                 </a:solidFill>
-                <a:latin typeface="Helvetica Neue" pitchFamily="34" charset="0"/>
-                <a:ea typeface="Helvetica Neue" pitchFamily="34" charset="-122"/>
-                <a:cs typeface="Helvetica Neue" pitchFamily="34" charset="-120"/>
+                <a:latin typeface="Inter" pitchFamily="34" charset="0"/>
+                <a:ea typeface="Inter" pitchFamily="34" charset="-122"/>
+                <a:cs typeface="Inter" pitchFamily="34" charset="-120"/>
               </a:rPr>
               <a:t>Appendix · not presented</a:t>
             </a:r>
@@ -9942,9 +10012,9 @@
                 <a:solidFill>
                   <a:srgbClr val="E3254B"/>
                 </a:solidFill>
-                <a:latin typeface="Helvetica Neue" pitchFamily="34" charset="0"/>
-                <a:ea typeface="Helvetica Neue" pitchFamily="34" charset="-122"/>
-                <a:cs typeface="Helvetica Neue" pitchFamily="34" charset="-120"/>
+                <a:latin typeface="Inter" pitchFamily="34" charset="0"/>
+                <a:ea typeface="Inter" pitchFamily="34" charset="-122"/>
+                <a:cs typeface="Inter" pitchFamily="34" charset="-120"/>
               </a:rPr>
               <a:t>Appendix C · Design plans</a:t>
             </a:r>
@@ -9984,9 +10054,9 @@
                 <a:solidFill>
                   <a:srgbClr val="1D1D1F"/>
                 </a:solidFill>
-                <a:latin typeface="Helvetica Neue" pitchFamily="34" charset="0"/>
-                <a:ea typeface="Helvetica Neue" pitchFamily="34" charset="-122"/>
-                <a:cs typeface="Helvetica Neue" pitchFamily="34" charset="-120"/>
+                <a:latin typeface="Inter" pitchFamily="34" charset="0"/>
+                <a:ea typeface="Inter" pitchFamily="34" charset="-122"/>
+                <a:cs typeface="Inter" pitchFamily="34" charset="-120"/>
               </a:rPr>
               <a:t>Wiring (v1) and case layout (v2).</a:t>
             </a:r>
@@ -10035,16 +10105,16 @@
                           <a:solidFill>
                             <a:srgbClr val="6E6E73"/>
                           </a:solidFill>
-                          <a:latin typeface="Helvetica Neue" pitchFamily="34" charset="0"/>
-                          <a:ea typeface="Helvetica Neue" pitchFamily="34" charset="-122"/>
-                          <a:cs typeface="Helvetica Neue" pitchFamily="34" charset="-120"/>
+                          <a:latin typeface="Inter" pitchFamily="34" charset="0"/>
+                          <a:ea typeface="Inter" pitchFamily="34" charset="-122"/>
+                          <a:cs typeface="Inter" pitchFamily="34" charset="-120"/>
                         </a:rPr>
                         <a:t>From</a:t>
                       </a:r>
                       <a:endParaRPr lang="en-US" sz="1000" dirty="0">
-                        <a:latin typeface="Helvetica Neue" charset="0"/>
-                        <a:ea typeface="Helvetica Neue" charset="0"/>
-                        <a:cs typeface="Helvetica Neue" charset="0"/>
+                        <a:latin typeface="Inter" charset="0"/>
+                        <a:ea typeface="Inter" charset="0"/>
+                        <a:cs typeface="Inter" charset="0"/>
                       </a:endParaRPr>
                     </a:p>
                   </a:txBody>
@@ -10082,16 +10152,16 @@
                           <a:solidFill>
                             <a:srgbClr val="6E6E73"/>
                           </a:solidFill>
-                          <a:latin typeface="Helvetica Neue" pitchFamily="34" charset="0"/>
-                          <a:ea typeface="Helvetica Neue" pitchFamily="34" charset="-122"/>
-                          <a:cs typeface="Helvetica Neue" pitchFamily="34" charset="-120"/>
+                          <a:latin typeface="Inter" pitchFamily="34" charset="0"/>
+                          <a:ea typeface="Inter" pitchFamily="34" charset="-122"/>
+                          <a:cs typeface="Inter" pitchFamily="34" charset="-120"/>
                         </a:rPr>
                         <a:t>To (ESP32)</a:t>
                       </a:r>
                       <a:endParaRPr lang="en-US" sz="1000" dirty="0">
-                        <a:latin typeface="Helvetica Neue" charset="0"/>
-                        <a:ea typeface="Helvetica Neue" charset="0"/>
-                        <a:cs typeface="Helvetica Neue" charset="0"/>
+                        <a:latin typeface="Inter" charset="0"/>
+                        <a:ea typeface="Inter" charset="0"/>
+                        <a:cs typeface="Inter" charset="0"/>
                       </a:endParaRPr>
                     </a:p>
                   </a:txBody>
@@ -10129,16 +10199,16 @@
                           <a:solidFill>
                             <a:srgbClr val="6E6E73"/>
                           </a:solidFill>
-                          <a:latin typeface="Helvetica Neue" pitchFamily="34" charset="0"/>
-                          <a:ea typeface="Helvetica Neue" pitchFamily="34" charset="-122"/>
-                          <a:cs typeface="Helvetica Neue" pitchFamily="34" charset="-120"/>
+                          <a:latin typeface="Inter" pitchFamily="34" charset="0"/>
+                          <a:ea typeface="Inter" pitchFamily="34" charset="-122"/>
+                          <a:cs typeface="Inter" pitchFamily="34" charset="-120"/>
                         </a:rPr>
                         <a:t>Notes</a:t>
                       </a:r>
                       <a:endParaRPr lang="en-US" sz="1000" dirty="0">
-                        <a:latin typeface="Helvetica Neue" charset="0"/>
-                        <a:ea typeface="Helvetica Neue" charset="0"/>
-                        <a:cs typeface="Helvetica Neue" charset="0"/>
+                        <a:latin typeface="Inter" charset="0"/>
+                        <a:ea typeface="Inter" charset="0"/>
+                        <a:cs typeface="Inter" charset="0"/>
                       </a:endParaRPr>
                     </a:p>
                   </a:txBody>
@@ -10178,16 +10248,16 @@
                           <a:solidFill>
                             <a:srgbClr val="1D1D1F"/>
                           </a:solidFill>
-                          <a:latin typeface="Helvetica Neue" pitchFamily="34" charset="0"/>
-                          <a:ea typeface="Helvetica Neue" pitchFamily="34" charset="-122"/>
-                          <a:cs typeface="Helvetica Neue" pitchFamily="34" charset="-120"/>
+                          <a:latin typeface="Inter" pitchFamily="34" charset="0"/>
+                          <a:ea typeface="Inter" pitchFamily="34" charset="-122"/>
+                          <a:cs typeface="Inter" pitchFamily="34" charset="-120"/>
                         </a:rPr>
                         <a:t>MAX30102 VIN / GND</a:t>
                       </a:r>
                       <a:endParaRPr lang="en-US" sz="1200" dirty="0">
-                        <a:latin typeface="Helvetica Neue" charset="0"/>
-                        <a:ea typeface="Helvetica Neue" charset="0"/>
-                        <a:cs typeface="Helvetica Neue" charset="0"/>
+                        <a:latin typeface="Inter" charset="0"/>
+                        <a:ea typeface="Inter" charset="0"/>
+                        <a:cs typeface="Inter" charset="0"/>
                       </a:endParaRPr>
                     </a:p>
                   </a:txBody>
@@ -10225,16 +10295,16 @@
                           <a:solidFill>
                             <a:srgbClr val="1D1D1F"/>
                           </a:solidFill>
-                          <a:latin typeface="Helvetica Neue" pitchFamily="34" charset="0"/>
-                          <a:ea typeface="Helvetica Neue" pitchFamily="34" charset="-122"/>
-                          <a:cs typeface="Helvetica Neue" pitchFamily="34" charset="-120"/>
+                          <a:latin typeface="Inter" pitchFamily="34" charset="0"/>
+                          <a:ea typeface="Inter" pitchFamily="34" charset="-122"/>
+                          <a:cs typeface="Inter" pitchFamily="34" charset="-120"/>
                         </a:rPr>
                         <a:t>3V3 / GND</a:t>
                       </a:r>
                       <a:endParaRPr lang="en-US" sz="1200" dirty="0">
-                        <a:latin typeface="Helvetica Neue" charset="0"/>
-                        <a:ea typeface="Helvetica Neue" charset="0"/>
-                        <a:cs typeface="Helvetica Neue" charset="0"/>
+                        <a:latin typeface="Inter" charset="0"/>
+                        <a:ea typeface="Inter" charset="0"/>
+                        <a:cs typeface="Inter" charset="0"/>
                       </a:endParaRPr>
                     </a:p>
                   </a:txBody>
@@ -10272,16 +10342,16 @@
                           <a:solidFill>
                             <a:srgbClr val="6E6E73"/>
                           </a:solidFill>
-                          <a:latin typeface="Helvetica Neue" pitchFamily="34" charset="0"/>
-                          <a:ea typeface="Helvetica Neue" pitchFamily="34" charset="-122"/>
-                          <a:cs typeface="Helvetica Neue" pitchFamily="34" charset="-120"/>
+                          <a:latin typeface="Inter" pitchFamily="34" charset="0"/>
+                          <a:ea typeface="Inter" pitchFamily="34" charset="-122"/>
+                          <a:cs typeface="Inter" pitchFamily="34" charset="-120"/>
                         </a:rPr>
                         <a:t>never 5 V</a:t>
                       </a:r>
                       <a:endParaRPr lang="en-US" sz="1200" dirty="0">
-                        <a:latin typeface="Helvetica Neue" charset="0"/>
-                        <a:ea typeface="Helvetica Neue" charset="0"/>
-                        <a:cs typeface="Helvetica Neue" charset="0"/>
+                        <a:latin typeface="Inter" charset="0"/>
+                        <a:ea typeface="Inter" charset="0"/>
+                        <a:cs typeface="Inter" charset="0"/>
                       </a:endParaRPr>
                     </a:p>
                   </a:txBody>
@@ -10321,16 +10391,16 @@
                           <a:solidFill>
                             <a:srgbClr val="1D1D1F"/>
                           </a:solidFill>
-                          <a:latin typeface="Helvetica Neue" pitchFamily="34" charset="0"/>
-                          <a:ea typeface="Helvetica Neue" pitchFamily="34" charset="-122"/>
-                          <a:cs typeface="Helvetica Neue" pitchFamily="34" charset="-120"/>
+                          <a:latin typeface="Inter" pitchFamily="34" charset="0"/>
+                          <a:ea typeface="Inter" pitchFamily="34" charset="-122"/>
+                          <a:cs typeface="Inter" pitchFamily="34" charset="-120"/>
                         </a:rPr>
                         <a:t>MAX30102 SDA / SCL</a:t>
                       </a:r>
                       <a:endParaRPr lang="en-US" sz="1200" dirty="0">
-                        <a:latin typeface="Helvetica Neue" charset="0"/>
-                        <a:ea typeface="Helvetica Neue" charset="0"/>
-                        <a:cs typeface="Helvetica Neue" charset="0"/>
+                        <a:latin typeface="Inter" charset="0"/>
+                        <a:ea typeface="Inter" charset="0"/>
+                        <a:cs typeface="Inter" charset="0"/>
                       </a:endParaRPr>
                     </a:p>
                   </a:txBody>
@@ -10368,16 +10438,16 @@
                           <a:solidFill>
                             <a:srgbClr val="1D1D1F"/>
                           </a:solidFill>
-                          <a:latin typeface="Helvetica Neue" pitchFamily="34" charset="0"/>
-                          <a:ea typeface="Helvetica Neue" pitchFamily="34" charset="-122"/>
-                          <a:cs typeface="Helvetica Neue" pitchFamily="34" charset="-120"/>
+                          <a:latin typeface="Inter" pitchFamily="34" charset="0"/>
+                          <a:ea typeface="Inter" pitchFamily="34" charset="-122"/>
+                          <a:cs typeface="Inter" pitchFamily="34" charset="-120"/>
                         </a:rPr>
                         <a:t>GPIO 21 / 22</a:t>
                       </a:r>
                       <a:endParaRPr lang="en-US" sz="1200" dirty="0">
-                        <a:latin typeface="Helvetica Neue" charset="0"/>
-                        <a:ea typeface="Helvetica Neue" charset="0"/>
-                        <a:cs typeface="Helvetica Neue" charset="0"/>
+                        <a:latin typeface="Inter" charset="0"/>
+                        <a:ea typeface="Inter" charset="0"/>
+                        <a:cs typeface="Inter" charset="0"/>
                       </a:endParaRPr>
                     </a:p>
                   </a:txBody>
@@ -10415,16 +10485,16 @@
                           <a:solidFill>
                             <a:srgbClr val="6E6E73"/>
                           </a:solidFill>
-                          <a:latin typeface="Helvetica Neue" pitchFamily="34" charset="0"/>
-                          <a:ea typeface="Helvetica Neue" pitchFamily="34" charset="-122"/>
-                          <a:cs typeface="Helvetica Neue" pitchFamily="34" charset="-120"/>
+                          <a:latin typeface="Inter" pitchFamily="34" charset="0"/>
+                          <a:ea typeface="Inter" pitchFamily="34" charset="-122"/>
+                          <a:cs typeface="Inter" pitchFamily="34" charset="-120"/>
                         </a:rPr>
                         <a:t>I²C bus 0</a:t>
                       </a:r>
                       <a:endParaRPr lang="en-US" sz="1200" dirty="0">
-                        <a:latin typeface="Helvetica Neue" charset="0"/>
-                        <a:ea typeface="Helvetica Neue" charset="0"/>
-                        <a:cs typeface="Helvetica Neue" charset="0"/>
+                        <a:latin typeface="Inter" charset="0"/>
+                        <a:ea typeface="Inter" charset="0"/>
+                        <a:cs typeface="Inter" charset="0"/>
                       </a:endParaRPr>
                     </a:p>
                   </a:txBody>
@@ -10464,16 +10534,16 @@
                           <a:solidFill>
                             <a:srgbClr val="1D1D1F"/>
                           </a:solidFill>
-                          <a:latin typeface="Helvetica Neue" pitchFamily="34" charset="0"/>
-                          <a:ea typeface="Helvetica Neue" pitchFamily="34" charset="-122"/>
-                          <a:cs typeface="Helvetica Neue" pitchFamily="34" charset="-120"/>
+                          <a:latin typeface="Inter" pitchFamily="34" charset="0"/>
+                          <a:ea typeface="Inter" pitchFamily="34" charset="-122"/>
+                          <a:cs typeface="Inter" pitchFamily="34" charset="-120"/>
                         </a:rPr>
                         <a:t>GY-521 VCC / GND</a:t>
                       </a:r>
                       <a:endParaRPr lang="en-US" sz="1200" dirty="0">
-                        <a:latin typeface="Helvetica Neue" charset="0"/>
-                        <a:ea typeface="Helvetica Neue" charset="0"/>
-                        <a:cs typeface="Helvetica Neue" charset="0"/>
+                        <a:latin typeface="Inter" charset="0"/>
+                        <a:ea typeface="Inter" charset="0"/>
+                        <a:cs typeface="Inter" charset="0"/>
                       </a:endParaRPr>
                     </a:p>
                   </a:txBody>
@@ -10511,16 +10581,16 @@
                           <a:solidFill>
                             <a:srgbClr val="1D1D1F"/>
                           </a:solidFill>
-                          <a:latin typeface="Helvetica Neue" pitchFamily="34" charset="0"/>
-                          <a:ea typeface="Helvetica Neue" pitchFamily="34" charset="-122"/>
-                          <a:cs typeface="Helvetica Neue" pitchFamily="34" charset="-120"/>
+                          <a:latin typeface="Inter" pitchFamily="34" charset="0"/>
+                          <a:ea typeface="Inter" pitchFamily="34" charset="-122"/>
+                          <a:cs typeface="Inter" pitchFamily="34" charset="-120"/>
                         </a:rPr>
                         <a:t>VIN / GND</a:t>
                       </a:r>
                       <a:endParaRPr lang="en-US" sz="1200" dirty="0">
-                        <a:latin typeface="Helvetica Neue" charset="0"/>
-                        <a:ea typeface="Helvetica Neue" charset="0"/>
-                        <a:cs typeface="Helvetica Neue" charset="0"/>
+                        <a:latin typeface="Inter" charset="0"/>
+                        <a:ea typeface="Inter" charset="0"/>
+                        <a:cs typeface="Inter" charset="0"/>
                       </a:endParaRPr>
                     </a:p>
                   </a:txBody>
@@ -10558,16 +10628,16 @@
                           <a:solidFill>
                             <a:srgbClr val="6E6E73"/>
                           </a:solidFill>
-                          <a:latin typeface="Helvetica Neue" pitchFamily="34" charset="0"/>
-                          <a:ea typeface="Helvetica Neue" pitchFamily="34" charset="-122"/>
-                          <a:cs typeface="Helvetica Neue" pitchFamily="34" charset="-120"/>
+                          <a:latin typeface="Inter" pitchFamily="34" charset="0"/>
+                          <a:ea typeface="Inter" pitchFamily="34" charset="-122"/>
+                          <a:cs typeface="Inter" pitchFamily="34" charset="-120"/>
                         </a:rPr>
                         <a:t>5 V from USB</a:t>
                       </a:r>
                       <a:endParaRPr lang="en-US" sz="1200" dirty="0">
-                        <a:latin typeface="Helvetica Neue" charset="0"/>
-                        <a:ea typeface="Helvetica Neue" charset="0"/>
-                        <a:cs typeface="Helvetica Neue" charset="0"/>
+                        <a:latin typeface="Inter" charset="0"/>
+                        <a:ea typeface="Inter" charset="0"/>
+                        <a:cs typeface="Inter" charset="0"/>
                       </a:endParaRPr>
                     </a:p>
                   </a:txBody>
@@ -10607,16 +10677,16 @@
                           <a:solidFill>
                             <a:srgbClr val="1D1D1F"/>
                           </a:solidFill>
-                          <a:latin typeface="Helvetica Neue" pitchFamily="34" charset="0"/>
-                          <a:ea typeface="Helvetica Neue" pitchFamily="34" charset="-122"/>
-                          <a:cs typeface="Helvetica Neue" pitchFamily="34" charset="-120"/>
+                          <a:latin typeface="Inter" pitchFamily="34" charset="0"/>
+                          <a:ea typeface="Inter" pitchFamily="34" charset="-122"/>
+                          <a:cs typeface="Inter" pitchFamily="34" charset="-120"/>
                         </a:rPr>
                         <a:t>GY-521 SDA / SCL</a:t>
                       </a:r>
                       <a:endParaRPr lang="en-US" sz="1200" dirty="0">
-                        <a:latin typeface="Helvetica Neue" charset="0"/>
-                        <a:ea typeface="Helvetica Neue" charset="0"/>
-                        <a:cs typeface="Helvetica Neue" charset="0"/>
+                        <a:latin typeface="Inter" charset="0"/>
+                        <a:ea typeface="Inter" charset="0"/>
+                        <a:cs typeface="Inter" charset="0"/>
                       </a:endParaRPr>
                     </a:p>
                   </a:txBody>
@@ -10654,16 +10724,16 @@
                           <a:solidFill>
                             <a:srgbClr val="1D1D1F"/>
                           </a:solidFill>
-                          <a:latin typeface="Helvetica Neue" pitchFamily="34" charset="0"/>
-                          <a:ea typeface="Helvetica Neue" pitchFamily="34" charset="-122"/>
-                          <a:cs typeface="Helvetica Neue" pitchFamily="34" charset="-120"/>
+                          <a:latin typeface="Inter" pitchFamily="34" charset="0"/>
+                          <a:ea typeface="Inter" pitchFamily="34" charset="-122"/>
+                          <a:cs typeface="Inter" pitchFamily="34" charset="-120"/>
                         </a:rPr>
                         <a:t>GPIO 33 / 32</a:t>
                       </a:r>
                       <a:endParaRPr lang="en-US" sz="1200" dirty="0">
-                        <a:latin typeface="Helvetica Neue" charset="0"/>
-                        <a:ea typeface="Helvetica Neue" charset="0"/>
-                        <a:cs typeface="Helvetica Neue" charset="0"/>
+                        <a:latin typeface="Inter" charset="0"/>
+                        <a:ea typeface="Inter" charset="0"/>
+                        <a:cs typeface="Inter" charset="0"/>
                       </a:endParaRPr>
                     </a:p>
                   </a:txBody>
@@ -10701,16 +10771,16 @@
                           <a:solidFill>
                             <a:srgbClr val="6E6E73"/>
                           </a:solidFill>
-                          <a:latin typeface="Helvetica Neue" pitchFamily="34" charset="0"/>
-                          <a:ea typeface="Helvetica Neue" pitchFamily="34" charset="-122"/>
-                          <a:cs typeface="Helvetica Neue" pitchFamily="34" charset="-120"/>
+                          <a:latin typeface="Inter" pitchFamily="34" charset="0"/>
+                          <a:ea typeface="Inter" pitchFamily="34" charset="-122"/>
+                          <a:cs typeface="Inter" pitchFamily="34" charset="-120"/>
                         </a:rPr>
                         <a:t>I²C bus 1, 100 kHz</a:t>
                       </a:r>
                       <a:endParaRPr lang="en-US" sz="1200" dirty="0">
-                        <a:latin typeface="Helvetica Neue" charset="0"/>
-                        <a:ea typeface="Helvetica Neue" charset="0"/>
-                        <a:cs typeface="Helvetica Neue" charset="0"/>
+                        <a:latin typeface="Inter" charset="0"/>
+                        <a:ea typeface="Inter" charset="0"/>
+                        <a:cs typeface="Inter" charset="0"/>
                       </a:endParaRPr>
                     </a:p>
                   </a:txBody>
@@ -10750,16 +10820,16 @@
                           <a:solidFill>
                             <a:srgbClr val="1D1D1F"/>
                           </a:solidFill>
-                          <a:latin typeface="Helvetica Neue" pitchFamily="34" charset="0"/>
-                          <a:ea typeface="Helvetica Neue" pitchFamily="34" charset="-122"/>
-                          <a:cs typeface="Helvetica Neue" pitchFamily="34" charset="-120"/>
+                          <a:latin typeface="Inter" pitchFamily="34" charset="0"/>
+                          <a:ea typeface="Inter" pitchFamily="34" charset="-122"/>
+                          <a:cs typeface="Inter" pitchFamily="34" charset="-120"/>
                         </a:rPr>
                         <a:t>Power</a:t>
                       </a:r>
                       <a:endParaRPr lang="en-US" sz="1200" dirty="0">
-                        <a:latin typeface="Helvetica Neue" charset="0"/>
-                        <a:ea typeface="Helvetica Neue" charset="0"/>
-                        <a:cs typeface="Helvetica Neue" charset="0"/>
+                        <a:latin typeface="Inter" charset="0"/>
+                        <a:ea typeface="Inter" charset="0"/>
+                        <a:cs typeface="Inter" charset="0"/>
                       </a:endParaRPr>
                     </a:p>
                   </a:txBody>
@@ -10797,16 +10867,16 @@
                           <a:solidFill>
                             <a:srgbClr val="1D1D1F"/>
                           </a:solidFill>
-                          <a:latin typeface="Helvetica Neue" pitchFamily="34" charset="0"/>
-                          <a:ea typeface="Helvetica Neue" pitchFamily="34" charset="-122"/>
-                          <a:cs typeface="Helvetica Neue" pitchFamily="34" charset="-120"/>
+                          <a:latin typeface="Inter" pitchFamily="34" charset="0"/>
+                          <a:ea typeface="Inter" pitchFamily="34" charset="-122"/>
+                          <a:cs typeface="Inter" pitchFamily="34" charset="-120"/>
                         </a:rPr>
                         <a:t>USB-C port</a:t>
                       </a:r>
                       <a:endParaRPr lang="en-US" sz="1200" dirty="0">
-                        <a:latin typeface="Helvetica Neue" charset="0"/>
-                        <a:ea typeface="Helvetica Neue" charset="0"/>
-                        <a:cs typeface="Helvetica Neue" charset="0"/>
+                        <a:latin typeface="Inter" charset="0"/>
+                        <a:ea typeface="Inter" charset="0"/>
+                        <a:cs typeface="Inter" charset="0"/>
                       </a:endParaRPr>
                     </a:p>
                   </a:txBody>
@@ -10844,16 +10914,16 @@
                           <a:solidFill>
                             <a:srgbClr val="6E6E73"/>
                           </a:solidFill>
-                          <a:latin typeface="Helvetica Neue" pitchFamily="34" charset="0"/>
-                          <a:ea typeface="Helvetica Neue" pitchFamily="34" charset="-122"/>
-                          <a:cs typeface="Helvetica Neue" pitchFamily="34" charset="-120"/>
+                          <a:latin typeface="Inter" pitchFamily="34" charset="0"/>
+                          <a:ea typeface="Inter" pitchFamily="34" charset="-122"/>
+                          <a:cs typeface="Inter" pitchFamily="34" charset="-120"/>
                         </a:rPr>
                         <a:t>3 m cable to charger</a:t>
                       </a:r>
                       <a:endParaRPr lang="en-US" sz="1200" dirty="0">
-                        <a:latin typeface="Helvetica Neue" charset="0"/>
-                        <a:ea typeface="Helvetica Neue" charset="0"/>
-                        <a:cs typeface="Helvetica Neue" charset="0"/>
+                        <a:latin typeface="Inter" charset="0"/>
+                        <a:ea typeface="Inter" charset="0"/>
+                        <a:cs typeface="Inter" charset="0"/>
                       </a:endParaRPr>
                     </a:p>
                   </a:txBody>
@@ -10893,16 +10963,16 @@
                           <a:solidFill>
                             <a:srgbClr val="1D1D1F"/>
                           </a:solidFill>
-                          <a:latin typeface="Helvetica Neue" pitchFamily="34" charset="0"/>
-                          <a:ea typeface="Helvetica Neue" pitchFamily="34" charset="-122"/>
-                          <a:cs typeface="Helvetica Neue" pitchFamily="34" charset="-120"/>
+                          <a:latin typeface="Inter" pitchFamily="34" charset="0"/>
+                          <a:ea typeface="Inter" pitchFamily="34" charset="-122"/>
+                          <a:cs typeface="Inter" pitchFamily="34" charset="-120"/>
                         </a:rPr>
                         <a:t>Status LED</a:t>
                       </a:r>
                       <a:endParaRPr lang="en-US" sz="1200" dirty="0">
-                        <a:latin typeface="Helvetica Neue" charset="0"/>
-                        <a:ea typeface="Helvetica Neue" charset="0"/>
-                        <a:cs typeface="Helvetica Neue" charset="0"/>
+                        <a:latin typeface="Inter" charset="0"/>
+                        <a:ea typeface="Inter" charset="0"/>
+                        <a:cs typeface="Inter" charset="0"/>
                       </a:endParaRPr>
                     </a:p>
                   </a:txBody>
@@ -10940,16 +11010,16 @@
                           <a:solidFill>
                             <a:srgbClr val="1D1D1F"/>
                           </a:solidFill>
-                          <a:latin typeface="Helvetica Neue" pitchFamily="34" charset="0"/>
-                          <a:ea typeface="Helvetica Neue" pitchFamily="34" charset="-122"/>
-                          <a:cs typeface="Helvetica Neue" pitchFamily="34" charset="-120"/>
+                          <a:latin typeface="Inter" pitchFamily="34" charset="0"/>
+                          <a:ea typeface="Inter" pitchFamily="34" charset="-122"/>
+                          <a:cs typeface="Inter" pitchFamily="34" charset="-120"/>
                         </a:rPr>
                         <a:t>GPIO 2</a:t>
                       </a:r>
                       <a:endParaRPr lang="en-US" sz="1200" dirty="0">
-                        <a:latin typeface="Helvetica Neue" charset="0"/>
-                        <a:ea typeface="Helvetica Neue" charset="0"/>
-                        <a:cs typeface="Helvetica Neue" charset="0"/>
+                        <a:latin typeface="Inter" charset="0"/>
+                        <a:ea typeface="Inter" charset="0"/>
+                        <a:cs typeface="Inter" charset="0"/>
                       </a:endParaRPr>
                     </a:p>
                   </a:txBody>
@@ -10987,16 +11057,16 @@
                           <a:solidFill>
                             <a:srgbClr val="6E6E73"/>
                           </a:solidFill>
-                          <a:latin typeface="Helvetica Neue" pitchFamily="34" charset="0"/>
-                          <a:ea typeface="Helvetica Neue" pitchFamily="34" charset="-122"/>
-                          <a:cs typeface="Helvetica Neue" pitchFamily="34" charset="-120"/>
+                          <a:latin typeface="Inter" pitchFamily="34" charset="0"/>
+                          <a:ea typeface="Inter" pitchFamily="34" charset="-122"/>
+                          <a:cs typeface="Inter" pitchFamily="34" charset="-120"/>
                         </a:rPr>
                         <a:t>blinks each reading</a:t>
                       </a:r>
                       <a:endParaRPr lang="en-US" sz="1200" dirty="0">
-                        <a:latin typeface="Helvetica Neue" charset="0"/>
-                        <a:ea typeface="Helvetica Neue" charset="0"/>
-                        <a:cs typeface="Helvetica Neue" charset="0"/>
+                        <a:latin typeface="Inter" charset="0"/>
+                        <a:ea typeface="Inter" charset="0"/>
+                        <a:cs typeface="Inter" charset="0"/>
                       </a:endParaRPr>
                     </a:p>
                   </a:txBody>
@@ -11125,9 +11195,9 @@
                 <a:solidFill>
                   <a:srgbClr val="6E6E73"/>
                 </a:solidFill>
-                <a:latin typeface="Helvetica Neue" pitchFamily="34" charset="0"/>
-                <a:ea typeface="Helvetica Neue" pitchFamily="34" charset="-122"/>
-                <a:cs typeface="Helvetica Neue" pitchFamily="34" charset="-120"/>
+                <a:latin typeface="Inter" pitchFamily="34" charset="0"/>
+                <a:ea typeface="Inter" pitchFamily="34" charset="-122"/>
+                <a:cs typeface="Inter" pitchFamily="34" charset="-120"/>
               </a:rPr>
               <a:t>v2: the stack inside the 25 mm-tall case</a:t>
             </a:r>
@@ -11164,9 +11234,9 @@
                 <a:solidFill>
                   <a:srgbClr val="6E6E73"/>
                 </a:solidFill>
-                <a:latin typeface="Helvetica Neue" pitchFamily="34" charset="0"/>
-                <a:ea typeface="Helvetica Neue" pitchFamily="34" charset="-122"/>
-                <a:cs typeface="Helvetica Neue" pitchFamily="34" charset="-120"/>
+                <a:latin typeface="Inter" pitchFamily="34" charset="0"/>
+                <a:ea typeface="Inter" pitchFamily="34" charset="-122"/>
+                <a:cs typeface="Inter" pitchFamily="34" charset="-120"/>
               </a:rPr>
               <a:t>Planned v2: a 70 × 45 × 29 mm box with its own battery. Layer heights: battery 6 mm + ESP32 with pins ≈ 13 mm + GY-521 ≈ 3 mm ≈ 22 mm, inside the box’s 25 mm. v1 uses each sensor’s own pins, so nothing needs splicing.</a:t>
             </a:r>
@@ -11257,9 +11327,9 @@
                 <a:solidFill>
                   <a:srgbClr val="6E6E73"/>
                 </a:solidFill>
-                <a:latin typeface="Helvetica Neue" pitchFamily="34" charset="0"/>
-                <a:ea typeface="Helvetica Neue" pitchFamily="34" charset="-122"/>
-                <a:cs typeface="Helvetica Neue" pitchFamily="34" charset="-120"/>
+                <a:latin typeface="Inter" pitchFamily="34" charset="0"/>
+                <a:ea typeface="Inter" pitchFamily="34" charset="-122"/>
+                <a:cs typeface="Inter" pitchFamily="34" charset="-120"/>
               </a:rPr>
               <a:t>Appendix · not presented</a:t>
             </a:r>
@@ -11296,9 +11366,9 @@
                 <a:solidFill>
                   <a:srgbClr val="E3254B"/>
                 </a:solidFill>
-                <a:latin typeface="Helvetica Neue" pitchFamily="34" charset="0"/>
-                <a:ea typeface="Helvetica Neue" pitchFamily="34" charset="-122"/>
-                <a:cs typeface="Helvetica Neue" pitchFamily="34" charset="-120"/>
+                <a:latin typeface="Inter" pitchFamily="34" charset="0"/>
+                <a:ea typeface="Inter" pitchFamily="34" charset="-122"/>
+                <a:cs typeface="Inter" pitchFamily="34" charset="-120"/>
               </a:rPr>
               <a:t>Appendix D · Exploratory ideas</a:t>
             </a:r>
@@ -11338,9 +11408,9 @@
                 <a:solidFill>
                   <a:srgbClr val="1D1D1F"/>
                 </a:solidFill>
-                <a:latin typeface="Helvetica Neue" pitchFamily="34" charset="0"/>
-                <a:ea typeface="Helvetica Neue" pitchFamily="34" charset="-122"/>
-                <a:cs typeface="Helvetica Neue" pitchFamily="34" charset="-120"/>
+                <a:latin typeface="Inter" pitchFamily="34" charset="0"/>
+                <a:ea typeface="Inter" pitchFamily="34" charset="-122"/>
+                <a:cs typeface="Inter" pitchFamily="34" charset="-120"/>
               </a:rPr>
               <a:t>Exploratory ideas (simulated data only).</a:t>
             </a:r>
@@ -11389,16 +11459,16 @@
                           <a:solidFill>
                             <a:srgbClr val="6E6E73"/>
                           </a:solidFill>
-                          <a:latin typeface="Helvetica Neue" pitchFamily="34" charset="0"/>
-                          <a:ea typeface="Helvetica Neue" pitchFamily="34" charset="-122"/>
-                          <a:cs typeface="Helvetica Neue" pitchFamily="34" charset="-120"/>
+                          <a:latin typeface="Inter" pitchFamily="34" charset="0"/>
+                          <a:ea typeface="Inter" pitchFamily="34" charset="-122"/>
+                          <a:cs typeface="Inter" pitchFamily="34" charset="-120"/>
                         </a:rPr>
                         <a:t>Idea (script)</a:t>
                       </a:r>
                       <a:endParaRPr lang="en-US" sz="1000" dirty="0">
-                        <a:latin typeface="Helvetica Neue" charset="0"/>
-                        <a:ea typeface="Helvetica Neue" charset="0"/>
-                        <a:cs typeface="Helvetica Neue" charset="0"/>
+                        <a:latin typeface="Inter" charset="0"/>
+                        <a:ea typeface="Inter" charset="0"/>
+                        <a:cs typeface="Inter" charset="0"/>
                       </a:endParaRPr>
                     </a:p>
                   </a:txBody>
@@ -11436,16 +11506,16 @@
                           <a:solidFill>
                             <a:srgbClr val="6E6E73"/>
                           </a:solidFill>
-                          <a:latin typeface="Helvetica Neue" pitchFamily="34" charset="0"/>
-                          <a:ea typeface="Helvetica Neue" pitchFamily="34" charset="-122"/>
-                          <a:cs typeface="Helvetica Neue" pitchFamily="34" charset="-120"/>
+                          <a:latin typeface="Inter" pitchFamily="34" charset="0"/>
+                          <a:ea typeface="Inter" pitchFamily="34" charset="-122"/>
+                          <a:cs typeface="Inter" pitchFamily="34" charset="-120"/>
                         </a:rPr>
                         <a:t>Demonstration output (simulated)</a:t>
                       </a:r>
                       <a:endParaRPr lang="en-US" sz="1000" dirty="0">
-                        <a:latin typeface="Helvetica Neue" charset="0"/>
-                        <a:ea typeface="Helvetica Neue" charset="0"/>
-                        <a:cs typeface="Helvetica Neue" charset="0"/>
+                        <a:latin typeface="Inter" charset="0"/>
+                        <a:ea typeface="Inter" charset="0"/>
+                        <a:cs typeface="Inter" charset="0"/>
                       </a:endParaRPr>
                     </a:p>
                   </a:txBody>
@@ -11483,16 +11553,16 @@
                           <a:solidFill>
                             <a:srgbClr val="6E6E73"/>
                           </a:solidFill>
-                          <a:latin typeface="Helvetica Neue" pitchFamily="34" charset="0"/>
-                          <a:ea typeface="Helvetica Neue" pitchFamily="34" charset="-122"/>
-                          <a:cs typeface="Helvetica Neue" pitchFamily="34" charset="-120"/>
+                          <a:latin typeface="Inter" pitchFamily="34" charset="0"/>
+                          <a:ea typeface="Inter" pitchFamily="34" charset="-122"/>
+                          <a:cs typeface="Inter" pitchFamily="34" charset="-120"/>
                         </a:rPr>
                         <a:t>Why it is not a finding</a:t>
                       </a:r>
                       <a:endParaRPr lang="en-US" sz="1000" dirty="0">
-                        <a:latin typeface="Helvetica Neue" charset="0"/>
-                        <a:ea typeface="Helvetica Neue" charset="0"/>
-                        <a:cs typeface="Helvetica Neue" charset="0"/>
+                        <a:latin typeface="Inter" charset="0"/>
+                        <a:ea typeface="Inter" charset="0"/>
+                        <a:cs typeface="Inter" charset="0"/>
                       </a:endParaRPr>
                     </a:p>
                   </a:txBody>
@@ -11532,16 +11602,16 @@
                           <a:solidFill>
                             <a:srgbClr val="1D1D1F"/>
                           </a:solidFill>
-                          <a:latin typeface="Helvetica Neue" pitchFamily="34" charset="0"/>
-                          <a:ea typeface="Helvetica Neue" pitchFamily="34" charset="-122"/>
-                          <a:cs typeface="Helvetica Neue" pitchFamily="34" charset="-120"/>
+                          <a:latin typeface="Inter" pitchFamily="34" charset="0"/>
+                          <a:ea typeface="Inter" pitchFamily="34" charset="-122"/>
+                          <a:cs typeface="Inter" pitchFamily="34" charset="-120"/>
                         </a:rPr>
                         <a:t>Body position (position.py)</a:t>
                       </a:r>
                       <a:endParaRPr lang="en-US" sz="1200" dirty="0">
-                        <a:latin typeface="Helvetica Neue" charset="0"/>
-                        <a:ea typeface="Helvetica Neue" charset="0"/>
-                        <a:cs typeface="Helvetica Neue" charset="0"/>
+                        <a:latin typeface="Inter" charset="0"/>
+                        <a:ea typeface="Inter" charset="0"/>
+                        <a:cs typeface="Inter" charset="0"/>
                       </a:endParaRPr>
                     </a:p>
                   </a:txBody>
@@ -11579,16 +11649,16 @@
                           <a:solidFill>
                             <a:srgbClr val="1D1D1F"/>
                           </a:solidFill>
-                          <a:latin typeface="Helvetica Neue" pitchFamily="34" charset="0"/>
-                          <a:ea typeface="Helvetica Neue" pitchFamily="34" charset="-122"/>
-                          <a:cs typeface="Helvetica Neue" pitchFamily="34" charset="-120"/>
+                          <a:latin typeface="Inter" pitchFamily="34" charset="0"/>
+                          <a:ea typeface="Inter" pitchFamily="34" charset="-122"/>
+                          <a:cs typeface="Inter" pitchFamily="34" charset="-120"/>
                         </a:rPr>
                         <a:t>events per valid hour: back 3.8, stomach 3.2, left 1.3, right 1.1</a:t>
                       </a:r>
                       <a:endParaRPr lang="en-US" sz="1200" dirty="0">
-                        <a:latin typeface="Helvetica Neue" charset="0"/>
-                        <a:ea typeface="Helvetica Neue" charset="0"/>
-                        <a:cs typeface="Helvetica Neue" charset="0"/>
+                        <a:latin typeface="Inter" charset="0"/>
+                        <a:ea typeface="Inter" charset="0"/>
+                        <a:cs typeface="Inter" charset="0"/>
                       </a:endParaRPr>
                     </a:p>
                   </a:txBody>
@@ -11626,16 +11696,16 @@
                           <a:solidFill>
                             <a:srgbClr val="6E6E73"/>
                           </a:solidFill>
-                          <a:latin typeface="Helvetica Neue" pitchFamily="34" charset="0"/>
-                          <a:ea typeface="Helvetica Neue" pitchFamily="34" charset="-122"/>
-                          <a:cs typeface="Helvetica Neue" pitchFamily="34" charset="-120"/>
+                          <a:latin typeface="Inter" pitchFamily="34" charset="0"/>
+                          <a:ea typeface="Inter" pitchFamily="34" charset="-122"/>
+                          <a:cs typeface="Inter" pitchFamily="34" charset="-120"/>
                         </a:rPr>
                         <a:t>simulated; few hours per position; not an apnea measure</a:t>
                       </a:r>
                       <a:endParaRPr lang="en-US" sz="1200" dirty="0">
-                        <a:latin typeface="Helvetica Neue" charset="0"/>
-                        <a:ea typeface="Helvetica Neue" charset="0"/>
-                        <a:cs typeface="Helvetica Neue" charset="0"/>
+                        <a:latin typeface="Inter" charset="0"/>
+                        <a:ea typeface="Inter" charset="0"/>
+                        <a:cs typeface="Inter" charset="0"/>
                       </a:endParaRPr>
                     </a:p>
                   </a:txBody>
@@ -11675,16 +11745,16 @@
                           <a:solidFill>
                             <a:srgbClr val="1D1D1F"/>
                           </a:solidFill>
-                          <a:latin typeface="Helvetica Neue" pitchFamily="34" charset="0"/>
-                          <a:ea typeface="Helvetica Neue" pitchFamily="34" charset="-122"/>
-                          <a:cs typeface="Helvetica Neue" pitchFamily="34" charset="-120"/>
+                          <a:latin typeface="Inter" pitchFamily="34" charset="0"/>
+                          <a:ea typeface="Inter" pitchFamily="34" charset="-122"/>
+                          <a:cs typeface="Inter" pitchFamily="34" charset="-120"/>
                         </a:rPr>
                         <a:t>Machine-learning flagger (train_model.py)</a:t>
                       </a:r>
                       <a:endParaRPr lang="en-US" sz="1200" dirty="0">
-                        <a:latin typeface="Helvetica Neue" charset="0"/>
-                        <a:ea typeface="Helvetica Neue" charset="0"/>
-                        <a:cs typeface="Helvetica Neue" charset="0"/>
+                        <a:latin typeface="Inter" charset="0"/>
+                        <a:ea typeface="Inter" charset="0"/>
+                        <a:cs typeface="Inter" charset="0"/>
                       </a:endParaRPr>
                     </a:p>
                   </a:txBody>
@@ -11722,16 +11792,16 @@
                           <a:solidFill>
                             <a:srgbClr val="1D1D1F"/>
                           </a:solidFill>
-                          <a:latin typeface="Helvetica Neue" pitchFamily="34" charset="0"/>
-                          <a:ea typeface="Helvetica Neue" pitchFamily="34" charset="-122"/>
-                          <a:cs typeface="Helvetica Neue" pitchFamily="34" charset="-120"/>
+                          <a:latin typeface="Inter" pitchFamily="34" charset="0"/>
+                          <a:ea typeface="Inter" pitchFamily="34" charset="-122"/>
+                          <a:cs typeface="Inter" pitchFamily="34" charset="-120"/>
                         </a:rPr>
                         <a:t>recall 0.63 vs rule-based 0.63, on simulated labels</a:t>
                       </a:r>
                       <a:endParaRPr lang="en-US" sz="1200" dirty="0">
-                        <a:latin typeface="Helvetica Neue" charset="0"/>
-                        <a:ea typeface="Helvetica Neue" charset="0"/>
-                        <a:cs typeface="Helvetica Neue" charset="0"/>
+                        <a:latin typeface="Inter" charset="0"/>
+                        <a:ea typeface="Inter" charset="0"/>
+                        <a:cs typeface="Inter" charset="0"/>
                       </a:endParaRPr>
                     </a:p>
                   </a:txBody>
@@ -11769,16 +11839,16 @@
                           <a:solidFill>
                             <a:srgbClr val="6E6E73"/>
                           </a:solidFill>
-                          <a:latin typeface="Helvetica Neue" pitchFamily="34" charset="0"/>
-                          <a:ea typeface="Helvetica Neue" pitchFamily="34" charset="-122"/>
-                          <a:cs typeface="Helvetica Neue" pitchFamily="34" charset="-120"/>
+                          <a:latin typeface="Inter" pitchFamily="34" charset="0"/>
+                          <a:ea typeface="Inter" pitchFamily="34" charset="-122"/>
+                          <a:cs typeface="Inter" pitchFamily="34" charset="-120"/>
                         </a:rPr>
                         <a:t>labels are invented; breath-hold labels would not validate apnea detection</a:t>
                       </a:r>
                       <a:endParaRPr lang="en-US" sz="1200" dirty="0">
-                        <a:latin typeface="Helvetica Neue" charset="0"/>
-                        <a:ea typeface="Helvetica Neue" charset="0"/>
-                        <a:cs typeface="Helvetica Neue" charset="0"/>
+                        <a:latin typeface="Inter" charset="0"/>
+                        <a:ea typeface="Inter" charset="0"/>
+                        <a:cs typeface="Inter" charset="0"/>
                       </a:endParaRPr>
                     </a:p>
                   </a:txBody>
@@ -11818,16 +11888,16 @@
                           <a:solidFill>
                             <a:srgbClr val="1D1D1F"/>
                           </a:solidFill>
-                          <a:latin typeface="Helvetica Neue" pitchFamily="34" charset="0"/>
-                          <a:ea typeface="Helvetica Neue" pitchFamily="34" charset="-122"/>
-                          <a:cs typeface="Helvetica Neue" pitchFamily="34" charset="-120"/>
+                          <a:latin typeface="Inter" pitchFamily="34" charset="0"/>
+                          <a:ea typeface="Inter" pitchFamily="34" charset="-122"/>
+                          <a:cs typeface="Inter" pitchFamily="34" charset="-120"/>
                         </a:rPr>
                         <a:t>Heart-rate patterns (heart.py)</a:t>
                       </a:r>
                       <a:endParaRPr lang="en-US" sz="1200" dirty="0">
-                        <a:latin typeface="Helvetica Neue" charset="0"/>
-                        <a:ea typeface="Helvetica Neue" charset="0"/>
-                        <a:cs typeface="Helvetica Neue" charset="0"/>
+                        <a:latin typeface="Inter" charset="0"/>
+                        <a:ea typeface="Inter" charset="0"/>
+                        <a:cs typeface="Inter" charset="0"/>
                       </a:endParaRPr>
                     </a:p>
                   </a:txBody>
@@ -11865,16 +11935,16 @@
                           <a:solidFill>
                             <a:srgbClr val="1D1D1F"/>
                           </a:solidFill>
-                          <a:latin typeface="Helvetica Neue" pitchFamily="34" charset="0"/>
-                          <a:ea typeface="Helvetica Neue" pitchFamily="34" charset="-122"/>
-                          <a:cs typeface="Helvetica Neue" pitchFamily="34" charset="-120"/>
+                          <a:latin typeface="Inter" pitchFamily="34" charset="0"/>
+                          <a:ea typeface="Inter" pitchFamily="34" charset="-122"/>
+                          <a:cs typeface="Inter" pitchFamily="34" charset="-120"/>
                         </a:rPr>
                         <a:t>1 fast stretch (&gt; 100 bpm), 1 very slow, 1 unsteady</a:t>
                       </a:r>
                       <a:endParaRPr lang="en-US" sz="1200" dirty="0">
-                        <a:latin typeface="Helvetica Neue" charset="0"/>
-                        <a:ea typeface="Helvetica Neue" charset="0"/>
-                        <a:cs typeface="Helvetica Neue" charset="0"/>
+                        <a:latin typeface="Inter" charset="0"/>
+                        <a:ea typeface="Inter" charset="0"/>
+                        <a:cs typeface="Inter" charset="0"/>
                       </a:endParaRPr>
                     </a:p>
                   </a:txBody>
@@ -11912,16 +11982,16 @@
                           <a:solidFill>
                             <a:srgbClr val="6E6E73"/>
                           </a:solidFill>
-                          <a:latin typeface="Helvetica Neue" pitchFamily="34" charset="0"/>
-                          <a:ea typeface="Helvetica Neue" pitchFamily="34" charset="-122"/>
-                          <a:cs typeface="Helvetica Neue" pitchFamily="34" charset="-120"/>
+                          <a:latin typeface="Inter" pitchFamily="34" charset="0"/>
+                          <a:ea typeface="Inter" pitchFamily="34" charset="-122"/>
+                          <a:cs typeface="Inter" pitchFamily="34" charset="-120"/>
                         </a:rPr>
                         <a:t>per-second optical heart rate cannot identify arrhythmias</a:t>
                       </a:r>
                       <a:endParaRPr lang="en-US" sz="1200" dirty="0">
-                        <a:latin typeface="Helvetica Neue" charset="0"/>
-                        <a:ea typeface="Helvetica Neue" charset="0"/>
-                        <a:cs typeface="Helvetica Neue" charset="0"/>
+                        <a:latin typeface="Inter" charset="0"/>
+                        <a:ea typeface="Inter" charset="0"/>
+                        <a:cs typeface="Inter" charset="0"/>
                       </a:endParaRPr>
                     </a:p>
                   </a:txBody>
@@ -11961,16 +12031,16 @@
                           <a:solidFill>
                             <a:srgbClr val="1D1D1F"/>
                           </a:solidFill>
-                          <a:latin typeface="Helvetica Neue" pitchFamily="34" charset="0"/>
-                          <a:ea typeface="Helvetica Neue" pitchFamily="34" charset="-122"/>
-                          <a:cs typeface="Helvetica Neue" pitchFamily="34" charset="-120"/>
+                          <a:latin typeface="Inter" pitchFamily="34" charset="0"/>
+                          <a:ea typeface="Inter" pitchFamily="34" charset="-122"/>
+                          <a:cs typeface="Inter" pitchFamily="34" charset="-120"/>
                         </a:rPr>
                         <a:t>Breathing-rate estimate (signals.py, asthma.py)</a:t>
                       </a:r>
                       <a:endParaRPr lang="en-US" sz="1200" dirty="0">
-                        <a:latin typeface="Helvetica Neue" charset="0"/>
-                        <a:ea typeface="Helvetica Neue" charset="0"/>
-                        <a:cs typeface="Helvetica Neue" charset="0"/>
+                        <a:latin typeface="Inter" charset="0"/>
+                        <a:ea typeface="Inter" charset="0"/>
+                        <a:cs typeface="Inter" charset="0"/>
                       </a:endParaRPr>
                     </a:p>
                   </a:txBody>
@@ -12008,16 +12078,16 @@
                           <a:solidFill>
                             <a:srgbClr val="1D1D1F"/>
                           </a:solidFill>
-                          <a:latin typeface="Helvetica Neue" pitchFamily="34" charset="0"/>
-                          <a:ea typeface="Helvetica Neue" pitchFamily="34" charset="-122"/>
-                          <a:cs typeface="Helvetica Neue" pitchFamily="34" charset="-120"/>
+                          <a:latin typeface="Inter" pitchFamily="34" charset="0"/>
+                          <a:ea typeface="Inter" pitchFamily="34" charset="-122"/>
+                          <a:cs typeface="Inter" pitchFamily="34" charset="-120"/>
                         </a:rPr>
                         <a:t>13.5 breaths/min; higher late in the simulated night</a:t>
                       </a:r>
                       <a:endParaRPr lang="en-US" sz="1200" dirty="0">
-                        <a:latin typeface="Helvetica Neue" charset="0"/>
-                        <a:ea typeface="Helvetica Neue" charset="0"/>
-                        <a:cs typeface="Helvetica Neue" charset="0"/>
+                        <a:latin typeface="Inter" charset="0"/>
+                        <a:ea typeface="Inter" charset="0"/>
+                        <a:cs typeface="Inter" charset="0"/>
                       </a:endParaRPr>
                     </a:p>
                   </a:txBody>
@@ -12055,16 +12125,16 @@
                           <a:solidFill>
                             <a:srgbClr val="6E6E73"/>
                           </a:solidFill>
-                          <a:latin typeface="Helvetica Neue" pitchFamily="34" charset="0"/>
-                          <a:ea typeface="Helvetica Neue" pitchFamily="34" charset="-122"/>
-                          <a:cs typeface="Helvetica Neue" pitchFamily="34" charset="-120"/>
+                          <a:latin typeface="Inter" pitchFamily="34" charset="0"/>
+                          <a:ea typeface="Inter" pitchFamily="34" charset="-122"/>
+                          <a:cs typeface="Inter" pitchFamily="34" charset="-120"/>
                         </a:rPr>
                         <a:t>estimated from heart-rate rhythm, never measured; cannot detect asthma</a:t>
                       </a:r>
                       <a:endParaRPr lang="en-US" sz="1200" dirty="0">
-                        <a:latin typeface="Helvetica Neue" charset="0"/>
-                        <a:ea typeface="Helvetica Neue" charset="0"/>
-                        <a:cs typeface="Helvetica Neue" charset="0"/>
+                        <a:latin typeface="Inter" charset="0"/>
+                        <a:ea typeface="Inter" charset="0"/>
+                        <a:cs typeface="Inter" charset="0"/>
                       </a:endParaRPr>
                     </a:p>
                   </a:txBody>
@@ -12104,16 +12174,16 @@
                           <a:solidFill>
                             <a:srgbClr val="1D1D1F"/>
                           </a:solidFill>
-                          <a:latin typeface="Helvetica Neue" pitchFamily="34" charset="0"/>
-                          <a:ea typeface="Helvetica Neue" pitchFamily="34" charset="-122"/>
-                          <a:cs typeface="Helvetica Neue" pitchFamily="34" charset="-120"/>
+                          <a:latin typeface="Inter" pitchFamily="34" charset="0"/>
+                          <a:ea typeface="Inter" pitchFamily="34" charset="-122"/>
+                          <a:cs typeface="Inter" pitchFamily="34" charset="-120"/>
                         </a:rPr>
                         <a:t>Device check (check_device.py)</a:t>
                       </a:r>
                       <a:endParaRPr lang="en-US" sz="1200" dirty="0">
-                        <a:latin typeface="Helvetica Neue" charset="0"/>
-                        <a:ea typeface="Helvetica Neue" charset="0"/>
-                        <a:cs typeface="Helvetica Neue" charset="0"/>
+                        <a:latin typeface="Inter" charset="0"/>
+                        <a:ea typeface="Inter" charset="0"/>
+                        <a:cs typeface="Inter" charset="0"/>
                       </a:endParaRPr>
                     </a:p>
                   </a:txBody>
@@ -12151,16 +12221,16 @@
                           <a:solidFill>
                             <a:srgbClr val="1D1D1F"/>
                           </a:solidFill>
-                          <a:latin typeface="Helvetica Neue" pitchFamily="34" charset="0"/>
-                          <a:ea typeface="Helvetica Neue" pitchFamily="34" charset="-122"/>
-                          <a:cs typeface="Helvetica Neue" pitchFamily="34" charset="-120"/>
+                          <a:latin typeface="Inter" pitchFamily="34" charset="0"/>
+                          <a:ea typeface="Inter" pitchFamily="34" charset="-122"/>
+                          <a:cs typeface="Inter" pitchFamily="34" charset="-120"/>
                         </a:rPr>
                         <a:t>simulated device: healthy → READY; broken motion sensor → NOT READY</a:t>
                       </a:r>
                       <a:endParaRPr lang="en-US" sz="1200" dirty="0">
-                        <a:latin typeface="Helvetica Neue" charset="0"/>
-                        <a:ea typeface="Helvetica Neue" charset="0"/>
-                        <a:cs typeface="Helvetica Neue" charset="0"/>
+                        <a:latin typeface="Inter" charset="0"/>
+                        <a:ea typeface="Inter" charset="0"/>
+                        <a:cs typeface="Inter" charset="0"/>
                       </a:endParaRPr>
                     </a:p>
                   </a:txBody>
@@ -12198,16 +12268,16 @@
                           <a:solidFill>
                             <a:srgbClr val="6E6E73"/>
                           </a:solidFill>
-                          <a:latin typeface="Helvetica Neue" pitchFamily="34" charset="0"/>
-                          <a:ea typeface="Helvetica Neue" pitchFamily="34" charset="-122"/>
-                          <a:cs typeface="Helvetica Neue" pitchFamily="34" charset="-120"/>
+                          <a:latin typeface="Inter" pitchFamily="34" charset="0"/>
+                          <a:ea typeface="Inter" pitchFamily="34" charset="-122"/>
+                          <a:cs typeface="Inter" pitchFamily="34" charset="-120"/>
                         </a:rPr>
                         <a:t>not yet run on real hardware</a:t>
                       </a:r>
                       <a:endParaRPr lang="en-US" sz="1200" dirty="0">
-                        <a:latin typeface="Helvetica Neue" charset="0"/>
-                        <a:ea typeface="Helvetica Neue" charset="0"/>
-                        <a:cs typeface="Helvetica Neue" charset="0"/>
+                        <a:latin typeface="Inter" charset="0"/>
+                        <a:ea typeface="Inter" charset="0"/>
+                        <a:cs typeface="Inter" charset="0"/>
                       </a:endParaRPr>
                     </a:p>
                   </a:txBody>
@@ -12288,9 +12358,9 @@
                 <a:solidFill>
                   <a:srgbClr val="B25000"/>
                 </a:solidFill>
-                <a:latin typeface="Helvetica Neue" pitchFamily="34" charset="0"/>
-                <a:ea typeface="Helvetica Neue" pitchFamily="34" charset="-122"/>
-                <a:cs typeface="Helvetica Neue" pitchFamily="34" charset="-120"/>
+                <a:latin typeface="Inter" pitchFamily="34" charset="0"/>
+                <a:ea typeface="Inter" pitchFamily="34" charset="-122"/>
+                <a:cs typeface="Inter" pitchFamily="34" charset="-120"/>
               </a:rPr>
               <a:t>Demonstration data only. </a:t>
             </a:r>
@@ -12302,9 +12372,9 @@
                 <a:solidFill>
                   <a:srgbClr val="1D1D1F"/>
                 </a:solidFill>
-                <a:latin typeface="Helvetica Neue" pitchFamily="34" charset="0"/>
-                <a:ea typeface="Helvetica Neue" pitchFamily="34" charset="-122"/>
-                <a:cs typeface="Helvetica Neue" pitchFamily="34" charset="-120"/>
+                <a:latin typeface="Inter" pitchFamily="34" charset="0"/>
+                <a:ea typeface="Inter" pitchFamily="34" charset="-122"/>
+                <a:cs typeface="Inter" pitchFamily="34" charset="-120"/>
               </a:rPr>
               <a:t>These ideas are outside the revised scope and are not used to test the hypothesis.</a:t>
             </a:r>
@@ -12341,9 +12411,9 @@
                 <a:solidFill>
                   <a:srgbClr val="0071E3"/>
                 </a:solidFill>
-                <a:latin typeface="Helvetica Neue" pitchFamily="34" charset="0"/>
-                <a:ea typeface="Helvetica Neue" pitchFamily="34" charset="-122"/>
-                <a:cs typeface="Helvetica Neue" pitchFamily="34" charset="-120"/>
+                <a:latin typeface="Inter" pitchFamily="34" charset="0"/>
+                <a:ea typeface="Inter" pitchFamily="34" charset="-122"/>
+                <a:cs typeface="Inter" pitchFamily="34" charset="-120"/>
                 <a:hlinkClick r:id="rId1" invalidUrl="" action="" tgtFrame="" tooltip="https://github.com/gabrielamamanestudent-wq/teetomivV2/tree/claude/science-fair-medical-project-7k0wk4/science-fair/night-signal" history="1" highlightClick="0" endSnd="0">
                   <a:extLst>
                     <a:ext uri="{A12FA001-AC4F-418D-AE19-62706E023703}">
@@ -12387,9 +12457,9 @@
                 <a:solidFill>
                   <a:srgbClr val="0071E3"/>
                 </a:solidFill>
-                <a:latin typeface="Helvetica Neue" pitchFamily="34" charset="0"/>
-                <a:ea typeface="Helvetica Neue" pitchFamily="34" charset="-122"/>
-                <a:cs typeface="Helvetica Neue" pitchFamily="34" charset="-120"/>
+                <a:latin typeface="Inter" pitchFamily="34" charset="0"/>
+                <a:ea typeface="Inter" pitchFamily="34" charset="-122"/>
+                <a:cs typeface="Inter" pitchFamily="34" charset="-120"/>
                 <a:hlinkClick r:id="rId2" invalidUrl="" action="" tgtFrame="" tooltip="https://gabrielamamanestudent-wq.github.io/teetomivV2/science-fair/night-signal/build-kit.html" history="1" highlightClick="0" endSnd="0">
                   <a:extLst>
                     <a:ext uri="{A12FA001-AC4F-418D-AE19-62706E023703}">
@@ -12487,9 +12557,9 @@
                 <a:solidFill>
                   <a:srgbClr val="6E6E73"/>
                 </a:solidFill>
-                <a:latin typeface="Helvetica Neue" pitchFamily="34" charset="0"/>
-                <a:ea typeface="Helvetica Neue" pitchFamily="34" charset="-122"/>
-                <a:cs typeface="Helvetica Neue" pitchFamily="34" charset="-120"/>
+                <a:latin typeface="Inter" pitchFamily="34" charset="0"/>
+                <a:ea typeface="Inter" pitchFamily="34" charset="-122"/>
+                <a:cs typeface="Inter" pitchFamily="34" charset="-120"/>
               </a:rPr>
               <a:t>Appendix · not presented</a:t>
             </a:r>
@@ -12526,9 +12596,9 @@
                 <a:solidFill>
                   <a:srgbClr val="E3254B"/>
                 </a:solidFill>
-                <a:latin typeface="Helvetica Neue" pitchFamily="34" charset="0"/>
-                <a:ea typeface="Helvetica Neue" pitchFamily="34" charset="-122"/>
-                <a:cs typeface="Helvetica Neue" pitchFamily="34" charset="-120"/>
+                <a:latin typeface="Inter" pitchFamily="34" charset="0"/>
+                <a:ea typeface="Inter" pitchFamily="34" charset="-122"/>
+                <a:cs typeface="Inter" pitchFamily="34" charset="-120"/>
               </a:rPr>
               <a:t>Bibliography · APA</a:t>
             </a:r>
@@ -12568,9 +12638,9 @@
                 <a:solidFill>
                   <a:srgbClr val="1D1D1F"/>
                 </a:solidFill>
-                <a:latin typeface="Helvetica Neue" pitchFamily="34" charset="0"/>
-                <a:ea typeface="Helvetica Neue" pitchFamily="34" charset="-122"/>
-                <a:cs typeface="Helvetica Neue" pitchFamily="34" charset="-120"/>
+                <a:latin typeface="Inter" pitchFamily="34" charset="0"/>
+                <a:ea typeface="Inter" pitchFamily="34" charset="-122"/>
+                <a:cs typeface="Inter" pitchFamily="34" charset="-120"/>
               </a:rPr>
               <a:t>References.</a:t>
             </a:r>
@@ -12607,9 +12677,9 @@
                 <a:solidFill>
                   <a:srgbClr val="6E6E73"/>
                 </a:solidFill>
-                <a:latin typeface="Helvetica Neue" pitchFamily="34" charset="0"/>
-                <a:ea typeface="Helvetica Neue" pitchFamily="34" charset="-122"/>
-                <a:cs typeface="Helvetica Neue" pitchFamily="34" charset="-120"/>
+                <a:latin typeface="Inter" pitchFamily="34" charset="0"/>
+                <a:ea typeface="Inter" pitchFamily="34" charset="-122"/>
+                <a:cs typeface="Inter" pitchFamily="34" charset="-120"/>
               </a:rPr>
               <a:t>American Academy of Sleep Medicine. (2014). International classification of sleep disorders (3rd ed.).</a:t>
             </a:r>
@@ -12646,9 +12716,9 @@
                 <a:solidFill>
                   <a:srgbClr val="6E6E73"/>
                 </a:solidFill>
-                <a:latin typeface="Helvetica Neue" pitchFamily="34" charset="0"/>
-                <a:ea typeface="Helvetica Neue" pitchFamily="34" charset="-122"/>
-                <a:cs typeface="Helvetica Neue" pitchFamily="34" charset="-120"/>
+                <a:latin typeface="Inter" pitchFamily="34" charset="0"/>
+                <a:ea typeface="Inter" pitchFamily="34" charset="-122"/>
+                <a:cs typeface="Inter" pitchFamily="34" charset="-120"/>
               </a:rPr>
               <a:t>Benjafield, A. V., et al. (2019). Estimation of the global prevalence and burden of obstructive sleep apnoea: A literature-based analysis. The Lancet Respiratory Medicine, 7(8), 687–698.</a:t>
             </a:r>
@@ -12685,9 +12755,9 @@
                 <a:solidFill>
                   <a:srgbClr val="6E6E73"/>
                 </a:solidFill>
-                <a:latin typeface="Helvetica Neue" pitchFamily="34" charset="0"/>
-                <a:ea typeface="Helvetica Neue" pitchFamily="34" charset="-122"/>
-                <a:cs typeface="Helvetica Neue" pitchFamily="34" charset="-120"/>
+                <a:latin typeface="Inter" pitchFamily="34" charset="0"/>
+                <a:ea typeface="Inter" pitchFamily="34" charset="-122"/>
+                <a:cs typeface="Inter" pitchFamily="34" charset="-120"/>
               </a:rPr>
               <a:t>Berry, R. B., et al. (2012). Rules for scoring respiratory events in sleep. Journal of Clinical Sleep Medicine, 8(5), 597–619.</a:t>
             </a:r>
@@ -12724,9 +12794,9 @@
                 <a:solidFill>
                   <a:srgbClr val="6E6E73"/>
                 </a:solidFill>
-                <a:latin typeface="Helvetica Neue" pitchFamily="34" charset="0"/>
-                <a:ea typeface="Helvetica Neue" pitchFamily="34" charset="-122"/>
-                <a:cs typeface="Helvetica Neue" pitchFamily="34" charset="-120"/>
+                <a:latin typeface="Inter" pitchFamily="34" charset="0"/>
+                <a:ea typeface="Inter" pitchFamily="34" charset="-122"/>
+                <a:cs typeface="Inter" pitchFamily="34" charset="-120"/>
               </a:rPr>
               <a:t>Bland, J. M., &amp; Altman, D. G. (1986). Statistical methods for assessing agreement between two methods of clinical measurement. The Lancet, 327(8476), 307–310.</a:t>
             </a:r>
@@ -12763,9 +12833,9 @@
                 <a:solidFill>
                   <a:srgbClr val="6E6E73"/>
                 </a:solidFill>
-                <a:latin typeface="Helvetica Neue" pitchFamily="34" charset="0"/>
-                <a:ea typeface="Helvetica Neue" pitchFamily="34" charset="-122"/>
-                <a:cs typeface="Helvetica Neue" pitchFamily="34" charset="-120"/>
+                <a:latin typeface="Inter" pitchFamily="34" charset="0"/>
+                <a:ea typeface="Inter" pitchFamily="34" charset="-122"/>
+                <a:cs typeface="Inter" pitchFamily="34" charset="-120"/>
               </a:rPr>
               <a:t>International Organization for Standardization. (2017). Medical electrical equipment — Part 2-61: Particular requirements for basic safety and essential performance of pulse oximeter equipment (ISO 80601-2-61:2017).</a:t>
             </a:r>
@@ -12802,9 +12872,9 @@
                 <a:solidFill>
                   <a:srgbClr val="6E6E73"/>
                 </a:solidFill>
-                <a:latin typeface="Helvetica Neue" pitchFamily="34" charset="0"/>
-                <a:ea typeface="Helvetica Neue" pitchFamily="34" charset="-122"/>
-                <a:cs typeface="Helvetica Neue" pitchFamily="34" charset="-120"/>
+                <a:latin typeface="Inter" pitchFamily="34" charset="0"/>
+                <a:ea typeface="Inter" pitchFamily="34" charset="-122"/>
+                <a:cs typeface="Inter" pitchFamily="34" charset="-120"/>
               </a:rPr>
               <a:t>Jubran, A. (2015). Pulse oximetry. Critical Care, 19, 272.</a:t>
             </a:r>
@@ -12841,9 +12911,9 @@
                 <a:solidFill>
                   <a:srgbClr val="6E6E73"/>
                 </a:solidFill>
-                <a:latin typeface="Helvetica Neue" pitchFamily="34" charset="0"/>
-                <a:ea typeface="Helvetica Neue" pitchFamily="34" charset="-122"/>
-                <a:cs typeface="Helvetica Neue" pitchFamily="34" charset="-120"/>
+                <a:latin typeface="Inter" pitchFamily="34" charset="0"/>
+                <a:ea typeface="Inter" pitchFamily="34" charset="-122"/>
+                <a:cs typeface="Inter" pitchFamily="34" charset="-120"/>
               </a:rPr>
               <a:t>Kapur, V. K., et al. (2017). Clinical practice guideline for diagnostic testing for adult obstructive sleep apnea. Journal of Clinical Sleep Medicine, 13(3), 479–504.</a:t>
             </a:r>
@@ -12880,9 +12950,9 @@
                 <a:solidFill>
                   <a:srgbClr val="6E6E73"/>
                 </a:solidFill>
-                <a:latin typeface="Helvetica Neue" pitchFamily="34" charset="0"/>
-                <a:ea typeface="Helvetica Neue" pitchFamily="34" charset="-122"/>
-                <a:cs typeface="Helvetica Neue" pitchFamily="34" charset="-120"/>
+                <a:latin typeface="Inter" pitchFamily="34" charset="0"/>
+                <a:ea typeface="Inter" pitchFamily="34" charset="-122"/>
+                <a:cs typeface="Inter" pitchFamily="34" charset="-120"/>
               </a:rPr>
               <a:t>Maxim Integrated. (2020). MAX30102 high-sensitivity pulse oximeter and heart-rate sensor [Datasheet].</a:t>
             </a:r>
@@ -12919,9 +12989,9 @@
                 <a:solidFill>
                   <a:srgbClr val="6E6E73"/>
                 </a:solidFill>
-                <a:latin typeface="Helvetica Neue" pitchFamily="34" charset="0"/>
-                <a:ea typeface="Helvetica Neue" pitchFamily="34" charset="-122"/>
-                <a:cs typeface="Helvetica Neue" pitchFamily="34" charset="-120"/>
+                <a:latin typeface="Inter" pitchFamily="34" charset="0"/>
+                <a:ea typeface="Inter" pitchFamily="34" charset="-122"/>
+                <a:cs typeface="Inter" pitchFamily="34" charset="-120"/>
               </a:rPr>
               <a:t>Sjoding, M. W., Dickson, R. P., Iwashyna, T. J., Gay, S. E., &amp; Valley, T. S. (2020). Racial bias in pulse oximetry measurement. New England Journal of Medicine, 383(25), 2477–2478.</a:t>
             </a:r>
@@ -12958,9 +13028,9 @@
                 <a:solidFill>
                   <a:srgbClr val="6E6E73"/>
                 </a:solidFill>
-                <a:latin typeface="Helvetica Neue" pitchFamily="34" charset="0"/>
-                <a:ea typeface="Helvetica Neue" pitchFamily="34" charset="-122"/>
-                <a:cs typeface="Helvetica Neue" pitchFamily="34" charset="-120"/>
+                <a:latin typeface="Inter" pitchFamily="34" charset="0"/>
+                <a:ea typeface="Inter" pitchFamily="34" charset="-122"/>
+                <a:cs typeface="Inter" pitchFamily="34" charset="-120"/>
               </a:rPr>
               <a:t>Task Force of the European Society of Cardiology and NASPE. (1996). Heart rate variability: Standards of measurement, physiological interpretation, and clinical use. Circulation, 93(5), 1043–1065.</a:t>
             </a:r>
@@ -13029,9 +13099,9 @@
                 <a:solidFill>
                   <a:srgbClr val="E3254B"/>
                 </a:solidFill>
-                <a:latin typeface="Helvetica Neue" pitchFamily="34" charset="0"/>
-                <a:ea typeface="Helvetica Neue" pitchFamily="34" charset="-122"/>
-                <a:cs typeface="Helvetica Neue" pitchFamily="34" charset="-120"/>
+                <a:latin typeface="Inter" pitchFamily="34" charset="0"/>
+                <a:ea typeface="Inter" pitchFamily="34" charset="-122"/>
+                <a:cs typeface="Inter" pitchFamily="34" charset="-120"/>
               </a:rPr>
               <a:t>Purpose and hypothesis</a:t>
             </a:r>
@@ -13071,9 +13141,9 @@
                 <a:solidFill>
                   <a:srgbClr val="1D1D1F"/>
                 </a:solidFill>
-                <a:latin typeface="Helvetica Neue" pitchFamily="34" charset="0"/>
-                <a:ea typeface="Helvetica Neue" pitchFamily="34" charset="-122"/>
-                <a:cs typeface="Helvetica Neue" pitchFamily="34" charset="-120"/>
+                <a:latin typeface="Inter" pitchFamily="34" charset="0"/>
+                <a:ea typeface="Inter" pitchFamily="34" charset="-122"/>
+                <a:cs typeface="Inter" pitchFamily="34" charset="-120"/>
               </a:rPr>
               <a:t>Is a low-cost oxygen wearable accurate?</a:t>
             </a:r>
@@ -13198,9 +13268,9 @@
                 <a:solidFill>
                   <a:srgbClr val="E3254B"/>
                 </a:solidFill>
-                <a:latin typeface="Helvetica Neue" pitchFamily="34" charset="0"/>
-                <a:ea typeface="Helvetica Neue" pitchFamily="34" charset="-122"/>
-                <a:cs typeface="Helvetica Neue" pitchFamily="34" charset="-120"/>
+                <a:latin typeface="Inter" pitchFamily="34" charset="0"/>
+                <a:ea typeface="Inter" pitchFamily="34" charset="-122"/>
+                <a:cs typeface="Inter" pitchFamily="34" charset="-120"/>
               </a:rPr>
               <a:t>Question</a:t>
             </a:r>
@@ -13237,9 +13307,9 @@
                 <a:solidFill>
                   <a:srgbClr val="1D1D1F"/>
                 </a:solidFill>
-                <a:latin typeface="Helvetica Neue" pitchFamily="34" charset="0"/>
-                <a:ea typeface="Helvetica Neue" pitchFamily="34" charset="-122"/>
-                <a:cs typeface="Helvetica Neue" pitchFamily="34" charset="-120"/>
+                <a:latin typeface="Inter" pitchFamily="34" charset="0"/>
+                <a:ea typeface="Inter" pitchFamily="34" charset="-122"/>
+                <a:cs typeface="Inter" pitchFamily="34" charset="-120"/>
               </a:rPr>
               <a:t>How closely do SpO₂ and heart-rate readings from a MAX30102 + ESP32 wearable agree with a Health Canada-authorized fingertip pulse oximeter, and can software reliably flag oxygen desaturation events (≥ 3 points for ≥ 10 s)?</a:t>
             </a:r>
@@ -13276,9 +13346,9 @@
                 <a:solidFill>
                   <a:srgbClr val="0071E3"/>
                 </a:solidFill>
-                <a:latin typeface="Helvetica Neue" pitchFamily="34" charset="0"/>
-                <a:ea typeface="Helvetica Neue" pitchFamily="34" charset="-122"/>
-                <a:cs typeface="Helvetica Neue" pitchFamily="34" charset="-120"/>
+                <a:latin typeface="Inter" pitchFamily="34" charset="0"/>
+                <a:ea typeface="Inter" pitchFamily="34" charset="-122"/>
+                <a:cs typeface="Inter" pitchFamily="34" charset="-120"/>
               </a:rPr>
               <a:t>Hypothesis</a:t>
             </a:r>
@@ -13315,9 +13385,9 @@
                 <a:solidFill>
                   <a:srgbClr val="1D1D1F"/>
                 </a:solidFill>
-                <a:latin typeface="Helvetica Neue" pitchFamily="34" charset="0"/>
-                <a:ea typeface="Helvetica Neue" pitchFamily="34" charset="-122"/>
-                <a:cs typeface="Helvetica Neue" pitchFamily="34" charset="-120"/>
+                <a:latin typeface="Inter" pitchFamily="34" charset="0"/>
+                <a:ea typeface="Inter" pitchFamily="34" charset="-122"/>
+                <a:cs typeface="Inter" pitchFamily="34" charset="-120"/>
               </a:rPr>
               <a:t>If the wearable is worn correctly and only good-quality readings are used, its SpO₂ will agree with the reference within about ±3 percentage points (95% limits of agreement), because both measure red/infrared light absorption.</a:t>
             </a:r>
@@ -13398,9 +13468,9 @@
                 <a:solidFill>
                   <a:srgbClr val="1D1D1F"/>
                 </a:solidFill>
-                <a:latin typeface="Helvetica Neue" pitchFamily="34" charset="0"/>
-                <a:ea typeface="Helvetica Neue" pitchFamily="34" charset="-122"/>
-                <a:cs typeface="Helvetica Neue" pitchFamily="34" charset="-120"/>
+                <a:latin typeface="Inter" pitchFamily="34" charset="0"/>
+                <a:ea typeface="Inter" pitchFamily="34" charset="-122"/>
+                <a:cs typeface="Inter" pitchFamily="34" charset="-120"/>
               </a:rPr>
               <a:t>Independent variables</a:t>
             </a:r>
@@ -13437,9 +13507,9 @@
                 <a:solidFill>
                   <a:srgbClr val="6E6E73"/>
                 </a:solidFill>
-                <a:latin typeface="Helvetica Neue" pitchFamily="34" charset="0"/>
-                <a:ea typeface="Helvetica Neue" pitchFamily="34" charset="-122"/>
-                <a:cs typeface="Helvetica Neue" pitchFamily="34" charset="-120"/>
+                <a:latin typeface="Inter" pitchFamily="34" charset="0"/>
+                <a:ea typeface="Inter" pitchFamily="34" charset="-122"/>
+                <a:cs typeface="Inter" pitchFamily="34" charset="-120"/>
               </a:rPr>
               <a:t>Measuring device (wearable vs reference); test condition (seated rest; optional breath-holds only if approved)</a:t>
             </a:r>
@@ -13520,9 +13590,9 @@
                 <a:solidFill>
                   <a:srgbClr val="1D1D1F"/>
                 </a:solidFill>
-                <a:latin typeface="Helvetica Neue" pitchFamily="34" charset="0"/>
-                <a:ea typeface="Helvetica Neue" pitchFamily="34" charset="-122"/>
-                <a:cs typeface="Helvetica Neue" pitchFamily="34" charset="-120"/>
+                <a:latin typeface="Inter" pitchFamily="34" charset="0"/>
+                <a:ea typeface="Inter" pitchFamily="34" charset="-122"/>
+                <a:cs typeface="Inter" pitchFamily="34" charset="-120"/>
               </a:rPr>
               <a:t>Dependent variables</a:t>
             </a:r>
@@ -13559,9 +13629,9 @@
                 <a:solidFill>
                   <a:srgbClr val="6E6E73"/>
                 </a:solidFill>
-                <a:latin typeface="Helvetica Neue" pitchFamily="34" charset="0"/>
-                <a:ea typeface="Helvetica Neue" pitchFamily="34" charset="-122"/>
-                <a:cs typeface="Helvetica Neue" pitchFamily="34" charset="-120"/>
+                <a:latin typeface="Inter" pitchFamily="34" charset="0"/>
+                <a:ea typeface="Inter" pitchFamily="34" charset="-122"/>
+                <a:cs typeface="Inter" pitchFamily="34" charset="-120"/>
               </a:rPr>
               <a:t>Device − reference difference (bias, 95% limits, mean error); desaturation events flagged; % valid signal</a:t>
             </a:r>
@@ -13642,9 +13712,9 @@
                 <a:solidFill>
                   <a:srgbClr val="1D1D1F"/>
                 </a:solidFill>
-                <a:latin typeface="Helvetica Neue" pitchFamily="34" charset="0"/>
-                <a:ea typeface="Helvetica Neue" pitchFamily="34" charset="-122"/>
-                <a:cs typeface="Helvetica Neue" pitchFamily="34" charset="-120"/>
+                <a:latin typeface="Inter" pitchFamily="34" charset="0"/>
+                <a:ea typeface="Inter" pitchFamily="34" charset="-122"/>
+                <a:cs typeface="Inter" pitchFamily="34" charset="-120"/>
               </a:rPr>
               <a:t>Controls</a:t>
             </a:r>
@@ -13681,9 +13751,9 @@
                 <a:solidFill>
                   <a:srgbClr val="6E6E73"/>
                 </a:solidFill>
-                <a:latin typeface="Helvetica Neue" pitchFamily="34" charset="0"/>
-                <a:ea typeface="Helvetica Neue" pitchFamily="34" charset="-122"/>
-                <a:cs typeface="Helvetica Neue" pitchFamily="34" charset="-120"/>
+                <a:latin typeface="Inter" pitchFamily="34" charset="0"/>
+                <a:ea typeface="Inter" pitchFamily="34" charset="-122"/>
+                <a:cs typeface="Inter" pitchFamily="34" charset="-120"/>
               </a:rPr>
               <a:t>Same participant, finger, cuff tightness, room and lighting; paired readings every 2 min; same settings</a:t>
             </a:r>
@@ -13720,9 +13790,9 @@
                 <a:solidFill>
                   <a:srgbClr val="A1A1A6"/>
                 </a:solidFill>
-                <a:latin typeface="Helvetica Neue" pitchFamily="34" charset="0"/>
-                <a:ea typeface="Helvetica Neue" pitchFamily="34" charset="-122"/>
-                <a:cs typeface="Helvetica Neue" pitchFamily="34" charset="-120"/>
+                <a:latin typeface="Inter" pitchFamily="34" charset="0"/>
+                <a:ea typeface="Inter" pitchFamily="34" charset="-122"/>
+                <a:cs typeface="Inter" pitchFamily="34" charset="-120"/>
               </a:rPr>
               <a:t>Night Signal</a:t>
             </a:r>
@@ -13759,9 +13829,9 @@
                 <a:solidFill>
                   <a:srgbClr val="A1A1A6"/>
                 </a:solidFill>
-                <a:latin typeface="Helvetica Neue" pitchFamily="34" charset="0"/>
-                <a:ea typeface="Helvetica Neue" pitchFamily="34" charset="-122"/>
-                <a:cs typeface="Helvetica Neue" pitchFamily="34" charset="-120"/>
+                <a:latin typeface="Inter" pitchFamily="34" charset="0"/>
+                <a:ea typeface="Inter" pitchFamily="34" charset="-122"/>
+                <a:cs typeface="Inter" pitchFamily="34" charset="-120"/>
               </a:rPr>
               <a:t>2</a:t>
             </a:r>
@@ -13830,9 +13900,9 @@
                 <a:solidFill>
                   <a:srgbClr val="E3254B"/>
                 </a:solidFill>
-                <a:latin typeface="Helvetica Neue" pitchFamily="34" charset="0"/>
-                <a:ea typeface="Helvetica Neue" pitchFamily="34" charset="-122"/>
-                <a:cs typeface="Helvetica Neue" pitchFamily="34" charset="-120"/>
+                <a:latin typeface="Inter" pitchFamily="34" charset="0"/>
+                <a:ea typeface="Inter" pitchFamily="34" charset="-122"/>
+                <a:cs typeface="Inter" pitchFamily="34" charset="-120"/>
               </a:rPr>
               <a:t>Scientific background</a:t>
             </a:r>
@@ -13872,9 +13942,9 @@
                 <a:solidFill>
                   <a:srgbClr val="1D1D1F"/>
                 </a:solidFill>
-                <a:latin typeface="Helvetica Neue" pitchFamily="34" charset="0"/>
-                <a:ea typeface="Helvetica Neue" pitchFamily="34" charset="-122"/>
-                <a:cs typeface="Helvetica Neue" pitchFamily="34" charset="-120"/>
+                <a:latin typeface="Inter" pitchFamily="34" charset="0"/>
+                <a:ea typeface="Inter" pitchFamily="34" charset="-122"/>
+                <a:cs typeface="Inter" pitchFamily="34" charset="-120"/>
               </a:rPr>
               <a:t>An oxygen dip is a clue, not a diagnosis.</a:t>
             </a:r>
@@ -13931,9 +14001,9 @@
                 <a:solidFill>
                   <a:srgbClr val="1D1D1F"/>
                 </a:solidFill>
-                <a:latin typeface="Helvetica Neue" pitchFamily="34" charset="0"/>
-                <a:ea typeface="Helvetica Neue" pitchFamily="34" charset="-122"/>
-                <a:cs typeface="Helvetica Neue" pitchFamily="34" charset="-120"/>
+                <a:latin typeface="Inter" pitchFamily="34" charset="0"/>
+                <a:ea typeface="Inter" pitchFamily="34" charset="-122"/>
+                <a:cs typeface="Inter" pitchFamily="34" charset="-120"/>
               </a:rPr>
               <a:t>Pulse oximetry: red (660 nm) and infrared (880 nm) light shine through the fingertip. Oxygen-rich and oxygen-poor blood absorb them differently, giving SpO₂.</a:t>
             </a:r>
@@ -13990,9 +14060,9 @@
                 <a:solidFill>
                   <a:srgbClr val="1D1D1F"/>
                 </a:solidFill>
-                <a:latin typeface="Helvetica Neue" pitchFamily="34" charset="0"/>
-                <a:ea typeface="Helvetica Neue" pitchFamily="34" charset="-122"/>
-                <a:cs typeface="Helvetica Neue" pitchFamily="34" charset="-120"/>
+                <a:latin typeface="Inter" pitchFamily="34" charset="0"/>
+                <a:ea typeface="Inter" pitchFamily="34" charset="-122"/>
+                <a:cs typeface="Inter" pitchFamily="34" charset="-120"/>
               </a:rPr>
               <a:t>A desaturation is a short drop in SpO₂. Sleep studies count drops of 3% or more, alongside other signals.</a:t>
             </a:r>
@@ -14049,9 +14119,9 @@
                 <a:solidFill>
                   <a:srgbClr val="1D1D1F"/>
                 </a:solidFill>
-                <a:latin typeface="Helvetica Neue" pitchFamily="34" charset="0"/>
-                <a:ea typeface="Helvetica Neue" pitchFamily="34" charset="-122"/>
-                <a:cs typeface="Helvetica Neue" pitchFamily="34" charset="-120"/>
+                <a:latin typeface="Inter" pitchFamily="34" charset="0"/>
+                <a:ea typeface="Inter" pitchFamily="34" charset="-122"/>
+                <a:cs typeface="Inter" pitchFamily="34" charset="-120"/>
               </a:rPr>
               <a:t>Sleep apnea is diagnosed with a sleep study that also measures airflow, breathing effort and sleep. Oxygen alone cannot do this.</a:t>
             </a:r>
@@ -14108,9 +14178,9 @@
                 <a:solidFill>
                   <a:srgbClr val="1D1D1F"/>
                 </a:solidFill>
-                <a:latin typeface="Helvetica Neue" pitchFamily="34" charset="0"/>
-                <a:ea typeface="Helvetica Neue" pitchFamily="34" charset="-122"/>
-                <a:cs typeface="Helvetica Neue" pitchFamily="34" charset="-120"/>
+                <a:latin typeface="Inter" pitchFamily="34" charset="0"/>
+                <a:ea typeface="Inter" pitchFamily="34" charset="-122"/>
+                <a:cs typeface="Inter" pitchFamily="34" charset="-120"/>
               </a:rPr>
               <a:t>Not every oxygen drop is an apnea (movement, poor contact, other causes), and not every apnea causes a large drop.</a:t>
             </a:r>
@@ -14169,9 +14239,9 @@
                 <a:solidFill>
                   <a:srgbClr val="FFFFFF"/>
                 </a:solidFill>
-                <a:latin typeface="Helvetica Neue" pitchFamily="34" charset="0"/>
-                <a:ea typeface="Helvetica Neue" pitchFamily="34" charset="-122"/>
-                <a:cs typeface="Helvetica Neue" pitchFamily="34" charset="-120"/>
+                <a:latin typeface="Inter" pitchFamily="34" charset="0"/>
+                <a:ea typeface="Inter" pitchFamily="34" charset="-122"/>
+                <a:cs typeface="Inter" pitchFamily="34" charset="-120"/>
               </a:rPr>
               <a:t>936 million</a:t>
             </a:r>
@@ -14208,9 +14278,9 @@
                 <a:solidFill>
                   <a:srgbClr val="86868B"/>
                 </a:solidFill>
-                <a:latin typeface="Helvetica Neue" pitchFamily="34" charset="0"/>
-                <a:ea typeface="Helvetica Neue" pitchFamily="34" charset="-122"/>
-                <a:cs typeface="Helvetica Neue" pitchFamily="34" charset="-120"/>
+                <a:latin typeface="Inter" pitchFamily="34" charset="0"/>
+                <a:ea typeface="Inter" pitchFamily="34" charset="-122"/>
+                <a:cs typeface="Inter" pitchFamily="34" charset="-120"/>
               </a:rPr>
               <a:t>adults worldwide are estimated to have obstructive sleep apnea, and most are undiagnosed (Benjafield et al., 2019).</a:t>
             </a:r>
@@ -14269,9 +14339,9 @@
                 <a:solidFill>
                   <a:srgbClr val="0071E3"/>
                 </a:solidFill>
-                <a:latin typeface="Helvetica Neue" pitchFamily="34" charset="0"/>
-                <a:ea typeface="Helvetica Neue" pitchFamily="34" charset="-122"/>
-                <a:cs typeface="Helvetica Neue" pitchFamily="34" charset="-120"/>
+                <a:latin typeface="Inter" pitchFamily="34" charset="0"/>
+                <a:ea typeface="Inter" pitchFamily="34" charset="-122"/>
+                <a:cs typeface="Inter" pitchFamily="34" charset="-120"/>
               </a:rPr>
               <a:t>SpO₂</a:t>
             </a:r>
@@ -14308,9 +14378,9 @@
                 <a:solidFill>
                   <a:srgbClr val="6E6E73"/>
                 </a:solidFill>
-                <a:latin typeface="Helvetica Neue" pitchFamily="34" charset="0"/>
-                <a:ea typeface="Helvetica Neue" pitchFamily="34" charset="-122"/>
-                <a:cs typeface="Helvetica Neue" pitchFamily="34" charset="-120"/>
+                <a:latin typeface="Inter" pitchFamily="34" charset="0"/>
+                <a:ea typeface="Inter" pitchFamily="34" charset="-122"/>
+                <a:cs typeface="Inter" pitchFamily="34" charset="-120"/>
               </a:rPr>
               <a:t>can show oxygen dips</a:t>
             </a:r>
@@ -14369,9 +14439,9 @@
                 <a:solidFill>
                   <a:srgbClr val="E3254B"/>
                 </a:solidFill>
-                <a:latin typeface="Helvetica Neue" pitchFamily="34" charset="0"/>
-                <a:ea typeface="Helvetica Neue" pitchFamily="34" charset="-122"/>
-                <a:cs typeface="Helvetica Neue" pitchFamily="34" charset="-120"/>
+                <a:latin typeface="Inter" pitchFamily="34" charset="0"/>
+                <a:ea typeface="Inter" pitchFamily="34" charset="-122"/>
+                <a:cs typeface="Inter" pitchFamily="34" charset="-120"/>
               </a:rPr>
               <a:t>Heart rate</a:t>
             </a:r>
@@ -14408,9 +14478,9 @@
                 <a:solidFill>
                   <a:srgbClr val="6E6E73"/>
                 </a:solidFill>
-                <a:latin typeface="Helvetica Neue" pitchFamily="34" charset="0"/>
-                <a:ea typeface="Helvetica Neue" pitchFamily="34" charset="-122"/>
-                <a:cs typeface="Helvetica Neue" pitchFamily="34" charset="-120"/>
+                <a:latin typeface="Inter" pitchFamily="34" charset="0"/>
+                <a:ea typeface="Inter" pitchFamily="34" charset="-122"/>
+                <a:cs typeface="Inter" pitchFamily="34" charset="-120"/>
               </a:rPr>
               <a:t>can show pulse changes</a:t>
             </a:r>
@@ -14469,9 +14539,9 @@
                 <a:solidFill>
                   <a:srgbClr val="6E6E73"/>
                 </a:solidFill>
-                <a:latin typeface="Helvetica Neue" pitchFamily="34" charset="0"/>
-                <a:ea typeface="Helvetica Neue" pitchFamily="34" charset="-122"/>
-                <a:cs typeface="Helvetica Neue" pitchFamily="34" charset="-120"/>
+                <a:latin typeface="Inter" pitchFamily="34" charset="0"/>
+                <a:ea typeface="Inter" pitchFamily="34" charset="-122"/>
+                <a:cs typeface="Inter" pitchFamily="34" charset="-120"/>
               </a:rPr>
               <a:t>Not measured</a:t>
             </a:r>
@@ -14508,9 +14578,9 @@
                 <a:solidFill>
                   <a:srgbClr val="6E6E73"/>
                 </a:solidFill>
-                <a:latin typeface="Helvetica Neue" pitchFamily="34" charset="0"/>
-                <a:ea typeface="Helvetica Neue" pitchFamily="34" charset="-122"/>
-                <a:cs typeface="Helvetica Neue" pitchFamily="34" charset="-120"/>
+                <a:latin typeface="Inter" pitchFamily="34" charset="0"/>
+                <a:ea typeface="Inter" pitchFamily="34" charset="-122"/>
+                <a:cs typeface="Inter" pitchFamily="34" charset="-120"/>
               </a:rPr>
               <a:t>airflow · breathing effort · sleep stage</a:t>
             </a:r>
@@ -14547,9 +14617,9 @@
                 <a:solidFill>
                   <a:srgbClr val="A1A1A6"/>
                 </a:solidFill>
-                <a:latin typeface="Helvetica Neue" pitchFamily="34" charset="0"/>
-                <a:ea typeface="Helvetica Neue" pitchFamily="34" charset="-122"/>
-                <a:cs typeface="Helvetica Neue" pitchFamily="34" charset="-120"/>
+                <a:latin typeface="Inter" pitchFamily="34" charset="0"/>
+                <a:ea typeface="Inter" pitchFamily="34" charset="-122"/>
+                <a:cs typeface="Inter" pitchFamily="34" charset="-120"/>
               </a:rPr>
               <a:t>Night Signal</a:t>
             </a:r>
@@ -14586,9 +14656,9 @@
                 <a:solidFill>
                   <a:srgbClr val="A1A1A6"/>
                 </a:solidFill>
-                <a:latin typeface="Helvetica Neue" pitchFamily="34" charset="0"/>
-                <a:ea typeface="Helvetica Neue" pitchFamily="34" charset="-122"/>
-                <a:cs typeface="Helvetica Neue" pitchFamily="34" charset="-120"/>
+                <a:latin typeface="Inter" pitchFamily="34" charset="0"/>
+                <a:ea typeface="Inter" pitchFamily="34" charset="-122"/>
+                <a:cs typeface="Inter" pitchFamily="34" charset="-120"/>
               </a:rPr>
               <a:t>3</a:t>
             </a:r>
@@ -14664,9 +14734,9 @@
                 <a:solidFill>
                   <a:srgbClr val="FF375F"/>
                 </a:solidFill>
-                <a:latin typeface="Helvetica Neue" pitchFamily="34" charset="0"/>
-                <a:ea typeface="Helvetica Neue" pitchFamily="34" charset="-122"/>
-                <a:cs typeface="Helvetica Neue" pitchFamily="34" charset="-120"/>
+                <a:latin typeface="Inter" pitchFamily="34" charset="0"/>
+                <a:ea typeface="Inter" pitchFamily="34" charset="-122"/>
+                <a:cs typeface="Inter" pitchFamily="34" charset="-120"/>
               </a:rPr>
               <a:t>Design</a:t>
             </a:r>
@@ -14706,9 +14776,9 @@
                 <a:solidFill>
                   <a:srgbClr val="FFFFFF"/>
                 </a:solidFill>
-                <a:latin typeface="Helvetica Neue" pitchFamily="34" charset="0"/>
-                <a:ea typeface="Helvetica Neue" pitchFamily="34" charset="-122"/>
-                <a:cs typeface="Helvetica Neue" pitchFamily="34" charset="-120"/>
+                <a:latin typeface="Inter" pitchFamily="34" charset="0"/>
+                <a:ea typeface="Inter" pitchFamily="34" charset="-122"/>
+                <a:cs typeface="Inter" pitchFamily="34" charset="-120"/>
               </a:rPr>
               <a:t>The wearable.</a:t>
             </a:r>
@@ -14793,9 +14863,9 @@
                 <a:solidFill>
                   <a:srgbClr val="86868B"/>
                 </a:solidFill>
-                <a:latin typeface="Helvetica Neue" pitchFamily="34" charset="0"/>
-                <a:ea typeface="Helvetica Neue" pitchFamily="34" charset="-122"/>
-                <a:cs typeface="Helvetica Neue" pitchFamily="34" charset="-120"/>
+                <a:latin typeface="Inter" pitchFamily="34" charset="0"/>
+                <a:ea typeface="Inter" pitchFamily="34" charset="-122"/>
+                <a:cs typeface="Inter" pitchFamily="34" charset="-120"/>
               </a:rPr>
               <a:t>3D design of a later version (v2): sealed case</a:t>
             </a:r>
@@ -14832,9 +14902,9 @@
                 <a:solidFill>
                   <a:srgbClr val="86868B"/>
                 </a:solidFill>
-                <a:latin typeface="Helvetica Neue" pitchFamily="34" charset="0"/>
-                <a:ea typeface="Helvetica Neue" pitchFamily="34" charset="-122"/>
-                <a:cs typeface="Helvetica Neue" pitchFamily="34" charset="-120"/>
+                <a:latin typeface="Inter" pitchFamily="34" charset="0"/>
+                <a:ea typeface="Inter" pitchFamily="34" charset="-122"/>
+                <a:cs typeface="Inter" pitchFamily="34" charset="-120"/>
               </a:rPr>
               <a:t>Exploded: every v2 part at its real size</a:t>
             </a:r>
@@ -14871,9 +14941,9 @@
                 <a:solidFill>
                   <a:srgbClr val="FFFFFF"/>
                 </a:solidFill>
-                <a:latin typeface="Helvetica Neue" pitchFamily="34" charset="0"/>
-                <a:ea typeface="Helvetica Neue" pitchFamily="34" charset="-122"/>
-                <a:cs typeface="Helvetica Neue" pitchFamily="34" charset="-120"/>
+                <a:latin typeface="Inter" pitchFamily="34" charset="0"/>
+                <a:ea typeface="Inter" pitchFamily="34" charset="-122"/>
+                <a:cs typeface="Inter" pitchFamily="34" charset="-120"/>
               </a:rPr>
               <a:t>Prototype v1</a:t>
             </a:r>
@@ -14910,9 +14980,9 @@
                 <a:solidFill>
                   <a:srgbClr val="86868B"/>
                 </a:solidFill>
-                <a:latin typeface="Helvetica Neue" pitchFamily="34" charset="0"/>
-                <a:ea typeface="Helvetica Neue" pitchFamily="34" charset="-122"/>
-                <a:cs typeface="Helvetica Neue" pitchFamily="34" charset="-120"/>
+                <a:latin typeface="Inter" pitchFamily="34" charset="0"/>
+                <a:ea typeface="Inter" pitchFamily="34" charset="-122"/>
+                <a:cs typeface="Inter" pitchFamily="34" charset="-120"/>
               </a:rPr>
               <a:t>armband + plug-in wires</a:t>
             </a:r>
@@ -14949,9 +15019,9 @@
                 <a:solidFill>
                   <a:srgbClr val="FFFFFF"/>
                 </a:solidFill>
-                <a:latin typeface="Helvetica Neue" pitchFamily="34" charset="0"/>
-                <a:ea typeface="Helvetica Neue" pitchFamily="34" charset="-122"/>
-                <a:cs typeface="Helvetica Neue" pitchFamily="34" charset="-120"/>
+                <a:latin typeface="Inter" pitchFamily="34" charset="0"/>
+                <a:ea typeface="Inter" pitchFamily="34" charset="-122"/>
+                <a:cs typeface="Inter" pitchFamily="34" charset="-120"/>
               </a:rPr>
               <a:t>Not built yet</a:t>
             </a:r>
@@ -14988,9 +15058,9 @@
                 <a:solidFill>
                   <a:srgbClr val="86868B"/>
                 </a:solidFill>
-                <a:latin typeface="Helvetica Neue" pitchFamily="34" charset="0"/>
-                <a:ea typeface="Helvetica Neue" pitchFamily="34" charset="-122"/>
-                <a:cs typeface="Helvetica Neue" pitchFamily="34" charset="-120"/>
+                <a:latin typeface="Inter" pitchFamily="34" charset="0"/>
+                <a:ea typeface="Inter" pitchFamily="34" charset="-122"/>
+                <a:cs typeface="Inter" pitchFamily="34" charset="-120"/>
               </a:rPr>
               <a:t>parts list ready</a:t>
             </a:r>
@@ -15027,9 +15097,9 @@
                 <a:solidFill>
                   <a:srgbClr val="FFFFFF"/>
                 </a:solidFill>
-                <a:latin typeface="Helvetica Neue" pitchFamily="34" charset="0"/>
-                <a:ea typeface="Helvetica Neue" pitchFamily="34" charset="-122"/>
-                <a:cs typeface="Helvetica Neue" pitchFamily="34" charset="-120"/>
+                <a:latin typeface="Inter" pitchFamily="34" charset="0"/>
+                <a:ea typeface="Inter" pitchFamily="34" charset="-122"/>
+                <a:cs typeface="Inter" pitchFamily="34" charset="-120"/>
               </a:rPr>
               <a:t>MAX30102</a:t>
             </a:r>
@@ -15066,9 +15136,9 @@
                 <a:solidFill>
                   <a:srgbClr val="86868B"/>
                 </a:solidFill>
-                <a:latin typeface="Helvetica Neue" pitchFamily="34" charset="0"/>
-                <a:ea typeface="Helvetica Neue" pitchFamily="34" charset="-122"/>
-                <a:cs typeface="Helvetica Neue" pitchFamily="34" charset="-120"/>
+                <a:latin typeface="Inter" pitchFamily="34" charset="0"/>
+                <a:ea typeface="Inter" pitchFamily="34" charset="-122"/>
+                <a:cs typeface="Inter" pitchFamily="34" charset="-120"/>
               </a:rPr>
               <a:t>red + infrared finger sensor</a:t>
             </a:r>
@@ -15105,9 +15175,9 @@
                 <a:solidFill>
                   <a:srgbClr val="FFFFFF"/>
                 </a:solidFill>
-                <a:latin typeface="Helvetica Neue" pitchFamily="34" charset="0"/>
-                <a:ea typeface="Helvetica Neue" pitchFamily="34" charset="-122"/>
-                <a:cs typeface="Helvetica Neue" pitchFamily="34" charset="-120"/>
+                <a:latin typeface="Inter" pitchFamily="34" charset="0"/>
+                <a:ea typeface="Inter" pitchFamily="34" charset="-122"/>
+                <a:cs typeface="Inter" pitchFamily="34" charset="-120"/>
               </a:rPr>
               <a:t>1 / second</a:t>
             </a:r>
@@ -15144,9 +15214,9 @@
                 <a:solidFill>
                   <a:srgbClr val="86868B"/>
                 </a:solidFill>
-                <a:latin typeface="Helvetica Neue" pitchFamily="34" charset="0"/>
-                <a:ea typeface="Helvetica Neue" pitchFamily="34" charset="-122"/>
-                <a:cs typeface="Helvetica Neue" pitchFamily="34" charset="-120"/>
+                <a:latin typeface="Inter" pitchFamily="34" charset="0"/>
+                <a:ea typeface="Inter" pitchFamily="34" charset="-122"/>
+                <a:cs typeface="Inter" pitchFamily="34" charset="-120"/>
               </a:rPr>
               <a:t>SpO₂ + heart rate</a:t>
             </a:r>
@@ -15231,9 +15301,9 @@
                 <a:solidFill>
                   <a:srgbClr val="2997FF"/>
                 </a:solidFill>
-                <a:latin typeface="Helvetica Neue" pitchFamily="34" charset="0"/>
-                <a:ea typeface="Helvetica Neue" pitchFamily="34" charset="-122"/>
-                <a:cs typeface="Helvetica Neue" pitchFamily="34" charset="-120"/>
+                <a:latin typeface="Inter" pitchFamily="34" charset="0"/>
+                <a:ea typeface="Inter" pitchFamily="34" charset="-122"/>
+                <a:cs typeface="Inter" pitchFamily="34" charset="-120"/>
                 <a:hlinkClick r:id="rId6" invalidUrl="" action="" tgtFrame="" tooltip="https://gabrielamamanestudent-wq.github.io/teetomivV2/science-fair/night-signal/app/3d.html" history="1" highlightClick="0" endSnd="0">
                   <a:extLst>
                     <a:ext uri="{A12FA001-AC4F-418D-AE19-62706E023703}">
@@ -15277,9 +15347,9 @@
                 <a:solidFill>
                   <a:srgbClr val="6E6E73"/>
                 </a:solidFill>
-                <a:latin typeface="Helvetica Neue" pitchFamily="34" charset="0"/>
-                <a:ea typeface="Helvetica Neue" pitchFamily="34" charset="-122"/>
-                <a:cs typeface="Helvetica Neue" pitchFamily="34" charset="-120"/>
+                <a:latin typeface="Inter" pitchFamily="34" charset="0"/>
+                <a:ea typeface="Inter" pitchFamily="34" charset="-122"/>
+                <a:cs typeface="Inter" pitchFamily="34" charset="-120"/>
               </a:rPr>
               <a:t>Night Signal</a:t>
             </a:r>
@@ -15316,9 +15386,9 @@
                 <a:solidFill>
                   <a:srgbClr val="6E6E73"/>
                 </a:solidFill>
-                <a:latin typeface="Helvetica Neue" pitchFamily="34" charset="0"/>
-                <a:ea typeface="Helvetica Neue" pitchFamily="34" charset="-122"/>
-                <a:cs typeface="Helvetica Neue" pitchFamily="34" charset="-120"/>
+                <a:latin typeface="Inter" pitchFamily="34" charset="0"/>
+                <a:ea typeface="Inter" pitchFamily="34" charset="-122"/>
+                <a:cs typeface="Inter" pitchFamily="34" charset="-120"/>
               </a:rPr>
               <a:t>4</a:t>
             </a:r>
@@ -15387,9 +15457,9 @@
                 <a:solidFill>
                   <a:srgbClr val="E3254B"/>
                 </a:solidFill>
-                <a:latin typeface="Helvetica Neue" pitchFamily="34" charset="0"/>
-                <a:ea typeface="Helvetica Neue" pitchFamily="34" charset="-122"/>
-                <a:cs typeface="Helvetica Neue" pitchFamily="34" charset="-120"/>
+                <a:latin typeface="Inter" pitchFamily="34" charset="0"/>
+                <a:ea typeface="Inter" pitchFamily="34" charset="-122"/>
+                <a:cs typeface="Inter" pitchFamily="34" charset="-120"/>
               </a:rPr>
               <a:t>How it works</a:t>
             </a:r>
@@ -15429,9 +15499,9 @@
                 <a:solidFill>
                   <a:srgbClr val="1D1D1F"/>
                 </a:solidFill>
-                <a:latin typeface="Helvetica Neue" pitchFamily="34" charset="0"/>
-                <a:ea typeface="Helvetica Neue" pitchFamily="34" charset="-122"/>
-                <a:cs typeface="Helvetica Neue" pitchFamily="34" charset="-120"/>
+                <a:latin typeface="Inter" pitchFamily="34" charset="0"/>
+                <a:ea typeface="Inter" pitchFamily="34" charset="-122"/>
+                <a:cs typeface="Inter" pitchFamily="34" charset="-120"/>
               </a:rPr>
               <a:t>From fingertip to data file.</a:t>
             </a:r>
@@ -15490,9 +15560,9 @@
                 <a:solidFill>
                   <a:srgbClr val="0071E3"/>
                 </a:solidFill>
-                <a:latin typeface="Helvetica Neue" pitchFamily="34" charset="0"/>
-                <a:ea typeface="Helvetica Neue" pitchFamily="34" charset="-122"/>
-                <a:cs typeface="Helvetica Neue" pitchFamily="34" charset="-120"/>
+                <a:latin typeface="Inter" pitchFamily="34" charset="0"/>
+                <a:ea typeface="Inter" pitchFamily="34" charset="-122"/>
+                <a:cs typeface="Inter" pitchFamily="34" charset="-120"/>
               </a:rPr>
               <a:t>01</a:t>
             </a:r>
@@ -15529,9 +15599,9 @@
                 <a:solidFill>
                   <a:srgbClr val="1D1D1F"/>
                 </a:solidFill>
-                <a:latin typeface="Helvetica Neue" pitchFamily="34" charset="0"/>
-                <a:ea typeface="Helvetica Neue" pitchFamily="34" charset="-122"/>
-                <a:cs typeface="Helvetica Neue" pitchFamily="34" charset="-120"/>
+                <a:latin typeface="Inter" pitchFamily="34" charset="0"/>
+                <a:ea typeface="Inter" pitchFamily="34" charset="-122"/>
+                <a:cs typeface="Inter" pitchFamily="34" charset="-120"/>
               </a:rPr>
               <a:t>Finger sensor</a:t>
             </a:r>
@@ -15568,9 +15638,9 @@
                 <a:solidFill>
                   <a:srgbClr val="6E6E73"/>
                 </a:solidFill>
-                <a:latin typeface="Helvetica Neue" pitchFamily="34" charset="0"/>
-                <a:ea typeface="Helvetica Neue" pitchFamily="34" charset="-122"/>
-                <a:cs typeface="Helvetica Neue" pitchFamily="34" charset="-120"/>
+                <a:latin typeface="Inter" pitchFamily="34" charset="0"/>
+                <a:ea typeface="Inter" pitchFamily="34" charset="-122"/>
+                <a:cs typeface="Inter" pitchFamily="34" charset="-120"/>
               </a:rPr>
               <a:t>MAX30102 · red + infrared light</a:t>
             </a:r>
@@ -15629,9 +15699,9 @@
                 <a:solidFill>
                   <a:srgbClr val="0071E3"/>
                 </a:solidFill>
-                <a:latin typeface="Helvetica Neue" pitchFamily="34" charset="0"/>
-                <a:ea typeface="Helvetica Neue" pitchFamily="34" charset="-122"/>
-                <a:cs typeface="Helvetica Neue" pitchFamily="34" charset="-120"/>
+                <a:latin typeface="Inter" pitchFamily="34" charset="0"/>
+                <a:ea typeface="Inter" pitchFamily="34" charset="-122"/>
+                <a:cs typeface="Inter" pitchFamily="34" charset="-120"/>
               </a:rPr>
               <a:t>02</a:t>
             </a:r>
@@ -15668,9 +15738,9 @@
                 <a:solidFill>
                   <a:srgbClr val="1D1D1F"/>
                 </a:solidFill>
-                <a:latin typeface="Helvetica Neue" pitchFamily="34" charset="0"/>
-                <a:ea typeface="Helvetica Neue" pitchFamily="34" charset="-122"/>
-                <a:cs typeface="Helvetica Neue" pitchFamily="34" charset="-120"/>
+                <a:latin typeface="Inter" pitchFamily="34" charset="0"/>
+                <a:ea typeface="Inter" pitchFamily="34" charset="-122"/>
+                <a:cs typeface="Inter" pitchFamily="34" charset="-120"/>
               </a:rPr>
               <a:t>ESP32 on the arm</a:t>
             </a:r>
@@ -15707,9 +15777,9 @@
                 <a:solidFill>
                   <a:srgbClr val="6E6E73"/>
                 </a:solidFill>
-                <a:latin typeface="Helvetica Neue" pitchFamily="34" charset="0"/>
-                <a:ea typeface="Helvetica Neue" pitchFamily="34" charset="-122"/>
-                <a:cs typeface="Helvetica Neue" pitchFamily="34" charset="-120"/>
+                <a:latin typeface="Inter" pitchFamily="34" charset="0"/>
+                <a:ea typeface="Inter" pitchFamily="34" charset="-122"/>
+                <a:cs typeface="Inter" pitchFamily="34" charset="-120"/>
               </a:rPr>
               <a:t>computes SpO₂ and pulse once per second</a:t>
             </a:r>
@@ -15768,9 +15838,9 @@
                 <a:solidFill>
                   <a:srgbClr val="0071E3"/>
                 </a:solidFill>
-                <a:latin typeface="Helvetica Neue" pitchFamily="34" charset="0"/>
-                <a:ea typeface="Helvetica Neue" pitchFamily="34" charset="-122"/>
-                <a:cs typeface="Helvetica Neue" pitchFamily="34" charset="-120"/>
+                <a:latin typeface="Inter" pitchFamily="34" charset="0"/>
+                <a:ea typeface="Inter" pitchFamily="34" charset="-122"/>
+                <a:cs typeface="Inter" pitchFamily="34" charset="-120"/>
               </a:rPr>
               <a:t>03</a:t>
             </a:r>
@@ -15807,9 +15877,9 @@
                 <a:solidFill>
                   <a:srgbClr val="1D1D1F"/>
                 </a:solidFill>
-                <a:latin typeface="Helvetica Neue" pitchFamily="34" charset="0"/>
-                <a:ea typeface="Helvetica Neue" pitchFamily="34" charset="-122"/>
-                <a:cs typeface="Helvetica Neue" pitchFamily="34" charset="-120"/>
+                <a:latin typeface="Inter" pitchFamily="34" charset="0"/>
+                <a:ea typeface="Inter" pitchFamily="34" charset="-122"/>
+                <a:cs typeface="Inter" pitchFamily="34" charset="-120"/>
               </a:rPr>
               <a:t>Bluetooth or USB</a:t>
             </a:r>
@@ -15846,9 +15916,9 @@
                 <a:solidFill>
                   <a:srgbClr val="6E6E73"/>
                 </a:solidFill>
-                <a:latin typeface="Helvetica Neue" pitchFamily="34" charset="0"/>
-                <a:ea typeface="Helvetica Neue" pitchFamily="34" charset="-122"/>
-                <a:cs typeface="Helvetica Neue" pitchFamily="34" charset="-120"/>
+                <a:latin typeface="Inter" pitchFamily="34" charset="0"/>
+                <a:ea typeface="Inter" pitchFamily="34" charset="-122"/>
+                <a:cs typeface="Inter" pitchFamily="34" charset="-120"/>
               </a:rPr>
               <a:t>one line of data every second</a:t>
             </a:r>
@@ -15907,9 +15977,9 @@
                 <a:solidFill>
                   <a:srgbClr val="0071E3"/>
                 </a:solidFill>
-                <a:latin typeface="Helvetica Neue" pitchFamily="34" charset="0"/>
-                <a:ea typeface="Helvetica Neue" pitchFamily="34" charset="-122"/>
-                <a:cs typeface="Helvetica Neue" pitchFamily="34" charset="-120"/>
+                <a:latin typeface="Inter" pitchFamily="34" charset="0"/>
+                <a:ea typeface="Inter" pitchFamily="34" charset="-122"/>
+                <a:cs typeface="Inter" pitchFamily="34" charset="-120"/>
               </a:rPr>
               <a:t>04</a:t>
             </a:r>
@@ -15946,9 +16016,9 @@
                 <a:solidFill>
                   <a:srgbClr val="1D1D1F"/>
                 </a:solidFill>
-                <a:latin typeface="Helvetica Neue" pitchFamily="34" charset="0"/>
-                <a:ea typeface="Helvetica Neue" pitchFamily="34" charset="-122"/>
-                <a:cs typeface="Helvetica Neue" pitchFamily="34" charset="-120"/>
+                <a:latin typeface="Inter" pitchFamily="34" charset="0"/>
+                <a:ea typeface="Inter" pitchFamily="34" charset="-122"/>
+                <a:cs typeface="Inter" pitchFamily="34" charset="-120"/>
               </a:rPr>
               <a:t>App + analysis</a:t>
             </a:r>
@@ -15985,9 +16055,9 @@
                 <a:solidFill>
                   <a:srgbClr val="6E6E73"/>
                 </a:solidFill>
-                <a:latin typeface="Helvetica Neue" pitchFamily="34" charset="0"/>
-                <a:ea typeface="Helvetica Neue" pitchFamily="34" charset="-122"/>
-                <a:cs typeface="Helvetica Neue" pitchFamily="34" charset="-120"/>
+                <a:latin typeface="Inter" pitchFamily="34" charset="0"/>
+                <a:ea typeface="Inter" pitchFamily="34" charset="-122"/>
+                <a:cs typeface="Inter" pitchFamily="34" charset="-120"/>
               </a:rPr>
               <a:t>signal quality, desaturation events, agreement</a:t>
             </a:r>
@@ -16024,9 +16094,9 @@
                 <a:solidFill>
                   <a:srgbClr val="1D1D1F"/>
                 </a:solidFill>
-                <a:latin typeface="Helvetica Neue" pitchFamily="34" charset="0"/>
-                <a:ea typeface="Helvetica Neue" pitchFamily="34" charset="-122"/>
-                <a:cs typeface="Helvetica Neue" pitchFamily="34" charset="-120"/>
+                <a:latin typeface="Inter" pitchFamily="34" charset="0"/>
+                <a:ea typeface="Inter" pitchFamily="34" charset="-122"/>
+                <a:cs typeface="Inter" pitchFamily="34" charset="-120"/>
               </a:rPr>
               <a:t>A device check runs before every session (tested so far on a simulated device).</a:t>
             </a:r>
@@ -16088,9 +16158,9 @@
                 <a:solidFill>
                   <a:srgbClr val="86868B"/>
                 </a:solidFill>
-                <a:latin typeface="Menlo" pitchFamily="34" charset="0"/>
-                <a:ea typeface="Menlo" pitchFamily="34" charset="-122"/>
-                <a:cs typeface="Menlo" pitchFamily="34" charset="-120"/>
+                <a:latin typeface="Roboto Mono" pitchFamily="34" charset="0"/>
+                <a:ea typeface="Roboto Mono" pitchFamily="34" charset="-122"/>
+                <a:cs typeface="Roboto Mono" pitchFamily="34" charset="-120"/>
               </a:rPr>
               <a:t>$ python check_device.py --port /dev/pts/3   (simulated device)</a:t>
             </a:r>
@@ -16108,9 +16178,9 @@
                 <a:solidFill>
                   <a:srgbClr val="30D158"/>
                 </a:solidFill>
-                <a:latin typeface="Menlo" pitchFamily="34" charset="0"/>
-                <a:ea typeface="Menlo" pitchFamily="34" charset="-122"/>
-                <a:cs typeface="Menlo" pitchFamily="34" charset="-120"/>
+                <a:latin typeface="Roboto Mono" pitchFamily="34" charset="0"/>
+                <a:ea typeface="Roboto Mono" pitchFamily="34" charset="-122"/>
+                <a:cs typeface="Roboto Mono" pitchFamily="34" charset="-120"/>
               </a:rPr>
               <a:t>[PASS] Data arriving        1 reading/s</a:t>
             </a:r>
@@ -16128,9 +16198,9 @@
                 <a:solidFill>
                   <a:srgbClr val="30D158"/>
                 </a:solidFill>
-                <a:latin typeface="Menlo" pitchFamily="34" charset="0"/>
-                <a:ea typeface="Menlo" pitchFamily="34" charset="-122"/>
-                <a:cs typeface="Menlo" pitchFamily="34" charset="-120"/>
+                <a:latin typeface="Roboto Mono" pitchFamily="34" charset="0"/>
+                <a:ea typeface="Roboto Mono" pitchFamily="34" charset="-122"/>
+                <a:cs typeface="Roboto Mono" pitchFamily="34" charset="-120"/>
               </a:rPr>
               <a:t>[PASS] Self-test            oxygen OK · motion OK</a:t>
             </a:r>
@@ -16148,9 +16218,9 @@
                 <a:solidFill>
                   <a:srgbClr val="30D158"/>
                 </a:solidFill>
-                <a:latin typeface="Menlo" pitchFamily="34" charset="0"/>
-                <a:ea typeface="Menlo" pitchFamily="34" charset="-122"/>
-                <a:cs typeface="Menlo" pitchFamily="34" charset="-120"/>
+                <a:latin typeface="Roboto Mono" pitchFamily="34" charset="0"/>
+                <a:ea typeface="Roboto Mono" pitchFamily="34" charset="-122"/>
+                <a:cs typeface="Roboto Mono" pitchFamily="34" charset="-120"/>
               </a:rPr>
               <a:t>[PASS] Finger on sensor     100%</a:t>
             </a:r>
@@ -16168,9 +16238,9 @@
                 <a:solidFill>
                   <a:srgbClr val="30D158"/>
                 </a:solidFill>
-                <a:latin typeface="Menlo" pitchFamily="34" charset="0"/>
-                <a:ea typeface="Menlo" pitchFamily="34" charset="-122"/>
-                <a:cs typeface="Menlo" pitchFamily="34" charset="-120"/>
+                <a:latin typeface="Roboto Mono" pitchFamily="34" charset="0"/>
+                <a:ea typeface="Roboto Mono" pitchFamily="34" charset="-122"/>
+                <a:cs typeface="Roboto Mono" pitchFamily="34" charset="-120"/>
               </a:rPr>
               <a:t>[PASS] Believable values    SpO2 97–98%, HR 60–64</a:t>
             </a:r>
@@ -16188,9 +16258,9 @@
                 <a:solidFill>
                   <a:srgbClr val="FFFFFF"/>
                 </a:solidFill>
-                <a:latin typeface="Menlo" pitchFamily="34" charset="0"/>
-                <a:ea typeface="Menlo" pitchFamily="34" charset="-122"/>
-                <a:cs typeface="Menlo" pitchFamily="34" charset="-120"/>
+                <a:latin typeface="Roboto Mono" pitchFamily="34" charset="0"/>
+                <a:ea typeface="Roboto Mono" pitchFamily="34" charset="-122"/>
+                <a:cs typeface="Roboto Mono" pitchFamily="34" charset="-120"/>
               </a:rPr>
               <a:t>RESULT: READY</a:t>
             </a:r>
@@ -16247,9 +16317,9 @@
                 <a:solidFill>
                   <a:srgbClr val="1D1D1F"/>
                 </a:solidFill>
-                <a:latin typeface="Helvetica Neue" pitchFamily="34" charset="0"/>
-                <a:ea typeface="Helvetica Neue" pitchFamily="34" charset="-122"/>
-                <a:cs typeface="Helvetica Neue" pitchFamily="34" charset="-120"/>
+                <a:latin typeface="Inter" pitchFamily="34" charset="0"/>
+                <a:ea typeface="Inter" pitchFamily="34" charset="-122"/>
+                <a:cs typeface="Inter" pitchFamily="34" charset="-120"/>
               </a:rPr>
               <a:t>Firmware re-checks both sensors every 30 s.</a:t>
             </a:r>
@@ -16306,9 +16376,9 @@
                 <a:solidFill>
                   <a:srgbClr val="1D1D1F"/>
                 </a:solidFill>
-                <a:latin typeface="Helvetica Neue" pitchFamily="34" charset="0"/>
-                <a:ea typeface="Helvetica Neue" pitchFamily="34" charset="-122"/>
-                <a:cs typeface="Helvetica Neue" pitchFamily="34" charset="-120"/>
+                <a:latin typeface="Inter" pitchFamily="34" charset="0"/>
+                <a:ea typeface="Inter" pitchFamily="34" charset="-122"/>
+                <a:cs typeface="Inter" pitchFamily="34" charset="-120"/>
               </a:rPr>
               <a:t>No finger: readings are marked invalid and excluded.</a:t>
             </a:r>
@@ -16365,9 +16435,9 @@
                 <a:solidFill>
                   <a:srgbClr val="1D1D1F"/>
                 </a:solidFill>
-                <a:latin typeface="Helvetica Neue" pitchFamily="34" charset="0"/>
-                <a:ea typeface="Helvetica Neue" pitchFamily="34" charset="-122"/>
-                <a:cs typeface="Helvetica Neue" pitchFamily="34" charset="-120"/>
+                <a:latin typeface="Inter" pitchFamily="34" charset="0"/>
+                <a:ea typeface="Inter" pitchFamily="34" charset="-122"/>
+                <a:cs typeface="Inter" pitchFamily="34" charset="-120"/>
               </a:rPr>
               <a:t>A broken sensor gives “NOT READY” (checked with the simulated device).</a:t>
             </a:r>
@@ -16424,9 +16494,9 @@
                 <a:solidFill>
                   <a:srgbClr val="1D1D1F"/>
                 </a:solidFill>
-                <a:latin typeface="Helvetica Neue" pitchFamily="34" charset="0"/>
-                <a:ea typeface="Helvetica Neue" pitchFamily="34" charset="-122"/>
-                <a:cs typeface="Helvetica Neue" pitchFamily="34" charset="-120"/>
+                <a:latin typeface="Inter" pitchFamily="34" charset="0"/>
+                <a:ea typeface="Inter" pitchFamily="34" charset="-122"/>
+                <a:cs typeface="Inter" pitchFamily="34" charset="-120"/>
               </a:rPr>
               <a:t>Real hardware has not been tested yet.</a:t>
             </a:r>
@@ -16463,9 +16533,9 @@
                 <a:solidFill>
                   <a:srgbClr val="A1A1A6"/>
                 </a:solidFill>
-                <a:latin typeface="Helvetica Neue" pitchFamily="34" charset="0"/>
-                <a:ea typeface="Helvetica Neue" pitchFamily="34" charset="-122"/>
-                <a:cs typeface="Helvetica Neue" pitchFamily="34" charset="-120"/>
+                <a:latin typeface="Inter" pitchFamily="34" charset="0"/>
+                <a:ea typeface="Inter" pitchFamily="34" charset="-122"/>
+                <a:cs typeface="Inter" pitchFamily="34" charset="-120"/>
               </a:rPr>
               <a:t>Night Signal</a:t>
             </a:r>
@@ -16502,9 +16572,9 @@
                 <a:solidFill>
                   <a:srgbClr val="A1A1A6"/>
                 </a:solidFill>
-                <a:latin typeface="Helvetica Neue" pitchFamily="34" charset="0"/>
-                <a:ea typeface="Helvetica Neue" pitchFamily="34" charset="-122"/>
-                <a:cs typeface="Helvetica Neue" pitchFamily="34" charset="-120"/>
+                <a:latin typeface="Inter" pitchFamily="34" charset="0"/>
+                <a:ea typeface="Inter" pitchFamily="34" charset="-122"/>
+                <a:cs typeface="Inter" pitchFamily="34" charset="-120"/>
               </a:rPr>
               <a:t>5</a:t>
             </a:r>
@@ -16573,9 +16643,9 @@
                 <a:solidFill>
                   <a:srgbClr val="E3254B"/>
                 </a:solidFill>
-                <a:latin typeface="Helvetica Neue" pitchFamily="34" charset="0"/>
-                <a:ea typeface="Helvetica Neue" pitchFamily="34" charset="-122"/>
-                <a:cs typeface="Helvetica Neue" pitchFamily="34" charset="-120"/>
+                <a:latin typeface="Inter" pitchFamily="34" charset="0"/>
+                <a:ea typeface="Inter" pitchFamily="34" charset="-122"/>
+                <a:cs typeface="Inter" pitchFamily="34" charset="-120"/>
               </a:rPr>
               <a:t>Experimental protocol · planned</a:t>
             </a:r>
@@ -16615,9 +16685,9 @@
                 <a:solidFill>
                   <a:srgbClr val="1D1D1F"/>
                 </a:solidFill>
-                <a:latin typeface="Helvetica Neue" pitchFamily="34" charset="0"/>
-                <a:ea typeface="Helvetica Neue" pitchFamily="34" charset="-122"/>
-                <a:cs typeface="Helvetica Neue" pitchFamily="34" charset="-120"/>
+                <a:latin typeface="Inter" pitchFamily="34" charset="0"/>
+                <a:ea typeface="Inter" pitchFamily="34" charset="-122"/>
+                <a:cs typeface="Inter" pitchFamily="34" charset="-120"/>
               </a:rPr>
               <a:t>How I will test it.</a:t>
             </a:r>
@@ -16674,9 +16744,9 @@
                 <a:solidFill>
                   <a:srgbClr val="FFFFFF"/>
                 </a:solidFill>
-                <a:latin typeface="Helvetica Neue" pitchFamily="34" charset="0"/>
-                <a:ea typeface="Helvetica Neue" pitchFamily="34" charset="-122"/>
-                <a:cs typeface="Helvetica Neue" pitchFamily="34" charset="-120"/>
+                <a:latin typeface="Inter" pitchFamily="34" charset="0"/>
+                <a:ea typeface="Inter" pitchFamily="34" charset="-122"/>
+                <a:cs typeface="Inter" pitchFamily="34" charset="-120"/>
               </a:rPr>
               <a:t>1</a:t>
             </a:r>
@@ -16713,9 +16783,9 @@
                 <a:solidFill>
                   <a:srgbClr val="1D1D1F"/>
                 </a:solidFill>
-                <a:latin typeface="Helvetica Neue" pitchFamily="34" charset="0"/>
-                <a:ea typeface="Helvetica Neue" pitchFamily="34" charset="-122"/>
-                <a:cs typeface="Helvetica Neue" pitchFamily="34" charset="-120"/>
+                <a:latin typeface="Inter" pitchFamily="34" charset="0"/>
+                <a:ea typeface="Inter" pitchFamily="34" charset="-122"/>
+                <a:cs typeface="Inter" pitchFamily="34" charset="-120"/>
               </a:rPr>
               <a:t>Approvals first   </a:t>
             </a:r>
@@ -16727,9 +16797,9 @@
                 <a:solidFill>
                   <a:srgbClr val="6E6E73"/>
                 </a:solidFill>
-                <a:latin typeface="Helvetica Neue" pitchFamily="34" charset="0"/>
-                <a:ea typeface="Helvetica Neue" pitchFamily="34" charset="-122"/>
-                <a:cs typeface="Helvetica Neue" pitchFamily="34" charset="-120"/>
+                <a:latin typeface="Inter" pitchFamily="34" charset="0"/>
+                <a:ea typeface="Inter" pitchFamily="34" charset="-122"/>
+                <a:cs typeface="Inter" pitchFamily="34" charset="-120"/>
               </a:rPr>
               <a:t>Ms. Ireland, the ethics committee and signed consent, before any data</a:t>
             </a:r>
@@ -16786,9 +16856,9 @@
                 <a:solidFill>
                   <a:srgbClr val="FFFFFF"/>
                 </a:solidFill>
-                <a:latin typeface="Helvetica Neue" pitchFamily="34" charset="0"/>
-                <a:ea typeface="Helvetica Neue" pitchFamily="34" charset="-122"/>
-                <a:cs typeface="Helvetica Neue" pitchFamily="34" charset="-120"/>
+                <a:latin typeface="Inter" pitchFamily="34" charset="0"/>
+                <a:ea typeface="Inter" pitchFamily="34" charset="-122"/>
+                <a:cs typeface="Inter" pitchFamily="34" charset="-120"/>
               </a:rPr>
               <a:t>2</a:t>
             </a:r>
@@ -16825,9 +16895,9 @@
                 <a:solidFill>
                   <a:srgbClr val="1D1D1F"/>
                 </a:solidFill>
-                <a:latin typeface="Helvetica Neue" pitchFamily="34" charset="0"/>
-                <a:ea typeface="Helvetica Neue" pitchFamily="34" charset="-122"/>
-                <a:cs typeface="Helvetica Neue" pitchFamily="34" charset="-120"/>
+                <a:latin typeface="Inter" pitchFamily="34" charset="0"/>
+                <a:ea typeface="Inter" pitchFamily="34" charset="-122"/>
+                <a:cs typeface="Inter" pitchFamily="34" charset="-120"/>
               </a:rPr>
               <a:t>Accuracy sessions (main)   </a:t>
             </a:r>
@@ -16839,9 +16909,9 @@
                 <a:solidFill>
                   <a:srgbClr val="6E6E73"/>
                 </a:solidFill>
-                <a:latin typeface="Helvetica Neue" pitchFamily="34" charset="0"/>
-                <a:ea typeface="Helvetica Neue" pitchFamily="34" charset="-122"/>
-                <a:cs typeface="Helvetica Neue" pitchFamily="34" charset="-120"/>
+                <a:latin typeface="Inter" pitchFamily="34" charset="0"/>
+                <a:ea typeface="Inter" pitchFamily="34" charset="-122"/>
+                <a:cs typeface="Inter" pitchFamily="34" charset="-120"/>
               </a:rPr>
               <a:t>seated; wearable on one finger, reference on the other; SpO₂ + heart rate every 2 min for 30 min; several sessions</a:t>
             </a:r>
@@ -16898,9 +16968,9 @@
                 <a:solidFill>
                   <a:srgbClr val="FFFFFF"/>
                 </a:solidFill>
-                <a:latin typeface="Helvetica Neue" pitchFamily="34" charset="0"/>
-                <a:ea typeface="Helvetica Neue" pitchFamily="34" charset="-122"/>
-                <a:cs typeface="Helvetica Neue" pitchFamily="34" charset="-120"/>
+                <a:latin typeface="Inter" pitchFamily="34" charset="0"/>
+                <a:ea typeface="Inter" pitchFamily="34" charset="-122"/>
+                <a:cs typeface="Inter" pitchFamily="34" charset="-120"/>
               </a:rPr>
               <a:t>3</a:t>
             </a:r>
@@ -16937,9 +17007,9 @@
                 <a:solidFill>
                   <a:srgbClr val="1D1D1F"/>
                 </a:solidFill>
-                <a:latin typeface="Helvetica Neue" pitchFamily="34" charset="0"/>
-                <a:ea typeface="Helvetica Neue" pitchFamily="34" charset="-122"/>
-                <a:cs typeface="Helvetica Neue" pitchFamily="34" charset="-120"/>
+                <a:latin typeface="Inter" pitchFamily="34" charset="0"/>
+                <a:ea typeface="Inter" pitchFamily="34" charset="-122"/>
+                <a:cs typeface="Inter" pitchFamily="34" charset="-120"/>
               </a:rPr>
               <a:t>Signal-quality checks   </a:t>
             </a:r>
@@ -16951,9 +17021,9 @@
                 <a:solidFill>
                   <a:srgbClr val="6E6E73"/>
                 </a:solidFill>
-                <a:latin typeface="Helvetica Neue" pitchFamily="34" charset="0"/>
-                <a:ea typeface="Helvetica Neue" pitchFamily="34" charset="-122"/>
-                <a:cs typeface="Helvetica Neue" pitchFamily="34" charset="-120"/>
+                <a:latin typeface="Inter" pitchFamily="34" charset="0"/>
+                <a:ea typeface="Inter" pitchFamily="34" charset="-122"/>
+                <a:cs typeface="Inter" pitchFamily="34" charset="-120"/>
               </a:rPr>
               <a:t>finger on, sensor-valid flag, believable range, movement excluded</a:t>
             </a:r>
@@ -17010,9 +17080,9 @@
                 <a:solidFill>
                   <a:srgbClr val="FFFFFF"/>
                 </a:solidFill>
-                <a:latin typeface="Helvetica Neue" pitchFamily="34" charset="0"/>
-                <a:ea typeface="Helvetica Neue" pitchFamily="34" charset="-122"/>
-                <a:cs typeface="Helvetica Neue" pitchFamily="34" charset="-120"/>
+                <a:latin typeface="Inter" pitchFamily="34" charset="0"/>
+                <a:ea typeface="Inter" pitchFamily="34" charset="-122"/>
+                <a:cs typeface="Inter" pitchFamily="34" charset="-120"/>
               </a:rPr>
               <a:t>4</a:t>
             </a:r>
@@ -17049,9 +17119,9 @@
                 <a:solidFill>
                   <a:srgbClr val="1D1D1F"/>
                 </a:solidFill>
-                <a:latin typeface="Helvetica Neue" pitchFamily="34" charset="0"/>
-                <a:ea typeface="Helvetica Neue" pitchFamily="34" charset="-122"/>
-                <a:cs typeface="Helvetica Neue" pitchFamily="34" charset="-120"/>
+                <a:latin typeface="Inter" pitchFamily="34" charset="0"/>
+                <a:ea typeface="Inter" pitchFamily="34" charset="-122"/>
+                <a:cs typeface="Inter" pitchFamily="34" charset="-120"/>
               </a:rPr>
               <a:t>Overnight recordings (if approved)   </a:t>
             </a:r>
@@ -17063,9 +17133,9 @@
                 <a:solidFill>
                   <a:srgbClr val="6E6E73"/>
                 </a:solidFill>
-                <a:latin typeface="Helvetica Neue" pitchFamily="34" charset="0"/>
-                <a:ea typeface="Helvetica Neue" pitchFamily="34" charset="-122"/>
-                <a:cs typeface="Helvetica Neue" pitchFamily="34" charset="-120"/>
+                <a:latin typeface="Inter" pitchFamily="34" charset="0"/>
+                <a:ea typeface="Inter" pitchFamily="34" charset="-122"/>
+                <a:cs typeface="Inter" pitchFamily="34" charset="-120"/>
               </a:rPr>
               <a:t>signal quality and desaturation events per valid hour; not verifiable overnight</a:t>
             </a:r>
@@ -17122,9 +17192,9 @@
                 <a:solidFill>
                   <a:srgbClr val="FFFFFF"/>
                 </a:solidFill>
-                <a:latin typeface="Helvetica Neue" pitchFamily="34" charset="0"/>
-                <a:ea typeface="Helvetica Neue" pitchFamily="34" charset="-122"/>
-                <a:cs typeface="Helvetica Neue" pitchFamily="34" charset="-120"/>
+                <a:latin typeface="Inter" pitchFamily="34" charset="0"/>
+                <a:ea typeface="Inter" pitchFamily="34" charset="-122"/>
+                <a:cs typeface="Inter" pitchFamily="34" charset="-120"/>
               </a:rPr>
               <a:t>5</a:t>
             </a:r>
@@ -17161,9 +17231,9 @@
                 <a:solidFill>
                   <a:srgbClr val="1D1D1F"/>
                 </a:solidFill>
-                <a:latin typeface="Helvetica Neue" pitchFamily="34" charset="0"/>
-                <a:ea typeface="Helvetica Neue" pitchFamily="34" charset="-122"/>
-                <a:cs typeface="Helvetica Neue" pitchFamily="34" charset="-120"/>
+                <a:latin typeface="Inter" pitchFamily="34" charset="0"/>
+                <a:ea typeface="Inter" pitchFamily="34" charset="-122"/>
+                <a:cs typeface="Inter" pitchFamily="34" charset="-120"/>
               </a:rPr>
               <a:t>Breath-hold test (optional, if approved)   </a:t>
             </a:r>
@@ -17175,9 +17245,9 @@
                 <a:solidFill>
                   <a:srgbClr val="6E6E73"/>
                 </a:solidFill>
-                <a:latin typeface="Helvetica Neue" pitchFamily="34" charset="0"/>
-                <a:ea typeface="Helvetica Neue" pitchFamily="34" charset="-122"/>
-                <a:cs typeface="Helvetica Neue" pitchFamily="34" charset="-120"/>
+                <a:latin typeface="Inter" pitchFamily="34" charset="0"/>
+                <a:ea typeface="Inter" pitchFamily="34" charset="-122"/>
+                <a:cs typeface="Inter" pitchFamily="34" charset="-120"/>
               </a:rPr>
               <a:t>awake and supervised; are induced dips flagged? Not a test of sleep apnea</a:t>
             </a:r>
@@ -17236,9 +17306,9 @@
                 <a:solidFill>
                   <a:srgbClr val="D70015"/>
                 </a:solidFill>
-                <a:latin typeface="Helvetica Neue" pitchFamily="34" charset="0"/>
-                <a:ea typeface="Helvetica Neue" pitchFamily="34" charset="-122"/>
-                <a:cs typeface="Helvetica Neue" pitchFamily="34" charset="-120"/>
+                <a:latin typeface="Inter" pitchFamily="34" charset="0"/>
+                <a:ea typeface="Inter" pitchFamily="34" charset="-122"/>
+                <a:cs typeface="Inter" pitchFamily="34" charset="-120"/>
               </a:rPr>
               <a:t>Safety</a:t>
             </a:r>
@@ -17295,9 +17365,9 @@
                 <a:solidFill>
                   <a:srgbClr val="1D1D1F"/>
                 </a:solidFill>
-                <a:latin typeface="Helvetica Neue" pitchFamily="34" charset="0"/>
-                <a:ea typeface="Helvetica Neue" pitchFamily="34" charset="-122"/>
-                <a:cs typeface="Helvetica Neue" pitchFamily="34" charset="-120"/>
+                <a:latin typeface="Inter" pitchFamily="34" charset="0"/>
+                <a:ea typeface="Inter" pitchFamily="34" charset="-122"/>
+                <a:cs typeface="Inter" pitchFamily="34" charset="-120"/>
               </a:rPr>
               <a:t>No testing on anyone, including me, before approval and consent</a:t>
             </a:r>
@@ -17354,9 +17424,9 @@
                 <a:solidFill>
                   <a:srgbClr val="1D1D1F"/>
                 </a:solidFill>
-                <a:latin typeface="Helvetica Neue" pitchFamily="34" charset="0"/>
-                <a:ea typeface="Helvetica Neue" pitchFamily="34" charset="-122"/>
-                <a:cs typeface="Helvetica Neue" pitchFamily="34" charset="-120"/>
+                <a:latin typeface="Inter" pitchFamily="34" charset="0"/>
+                <a:ea typeface="Inter" pitchFamily="34" charset="-122"/>
+                <a:cs typeface="Inter" pitchFamily="34" charset="-120"/>
               </a:rPr>
               <a:t>Breath-holds only if approved: awake, seated, supervised, 20 s at most, never asleep</a:t>
             </a:r>
@@ -17413,9 +17483,9 @@
                 <a:solidFill>
                   <a:srgbClr val="1D1D1F"/>
                 </a:solidFill>
-                <a:latin typeface="Helvetica Neue" pitchFamily="34" charset="0"/>
-                <a:ea typeface="Helvetica Neue" pitchFamily="34" charset="-122"/>
-                <a:cs typeface="Helvetica Neue" pitchFamily="34" charset="-120"/>
+                <a:latin typeface="Inter" pitchFamily="34" charset="0"/>
+                <a:ea typeface="Inter" pitchFamily="34" charset="-122"/>
+                <a:cs typeface="Inter" pitchFamily="34" charset="-120"/>
               </a:rPr>
               <a:t>Stop at any dizziness or discomfort</a:t>
             </a:r>
@@ -17472,9 +17542,9 @@
                 <a:solidFill>
                   <a:srgbClr val="1D1D1F"/>
                 </a:solidFill>
-                <a:latin typeface="Helvetica Neue" pitchFamily="34" charset="0"/>
-                <a:ea typeface="Helvetica Neue" pitchFamily="34" charset="-122"/>
-                <a:cs typeface="Helvetica Neue" pitchFamily="34" charset="-120"/>
+                <a:latin typeface="Inter" pitchFamily="34" charset="0"/>
+                <a:ea typeface="Inter" pitchFamily="34" charset="-122"/>
+                <a:cs typeface="Inter" pitchFamily="34" charset="-120"/>
               </a:rPr>
               <a:t>Not a medical device; no diagnosis</a:t>
             </a:r>
@@ -17511,9 +17581,9 @@
                 <a:solidFill>
                   <a:srgbClr val="A1A1A6"/>
                 </a:solidFill>
-                <a:latin typeface="Helvetica Neue" pitchFamily="34" charset="0"/>
-                <a:ea typeface="Helvetica Neue" pitchFamily="34" charset="-122"/>
-                <a:cs typeface="Helvetica Neue" pitchFamily="34" charset="-120"/>
+                <a:latin typeface="Inter" pitchFamily="34" charset="0"/>
+                <a:ea typeface="Inter" pitchFamily="34" charset="-122"/>
+                <a:cs typeface="Inter" pitchFamily="34" charset="-120"/>
               </a:rPr>
               <a:t>Night Signal</a:t>
             </a:r>
@@ -17550,9 +17620,9 @@
                 <a:solidFill>
                   <a:srgbClr val="A1A1A6"/>
                 </a:solidFill>
-                <a:latin typeface="Helvetica Neue" pitchFamily="34" charset="0"/>
-                <a:ea typeface="Helvetica Neue" pitchFamily="34" charset="-122"/>
-                <a:cs typeface="Helvetica Neue" pitchFamily="34" charset="-120"/>
+                <a:latin typeface="Inter" pitchFamily="34" charset="0"/>
+                <a:ea typeface="Inter" pitchFamily="34" charset="-122"/>
+                <a:cs typeface="Inter" pitchFamily="34" charset="-120"/>
               </a:rPr>
               <a:t>6</a:t>
             </a:r>
@@ -17621,9 +17691,9 @@
                 <a:solidFill>
                   <a:srgbClr val="E3254B"/>
                 </a:solidFill>
-                <a:latin typeface="Helvetica Neue" pitchFamily="34" charset="0"/>
-                <a:ea typeface="Helvetica Neue" pitchFamily="34" charset="-122"/>
-                <a:cs typeface="Helvetica Neue" pitchFamily="34" charset="-120"/>
+                <a:latin typeface="Inter" pitchFamily="34" charset="0"/>
+                <a:ea typeface="Inter" pitchFamily="34" charset="-122"/>
+                <a:cs typeface="Inter" pitchFamily="34" charset="-120"/>
               </a:rPr>
               <a:t>The app</a:t>
             </a:r>
@@ -17663,9 +17733,9 @@
                 <a:solidFill>
                   <a:srgbClr val="1D1D1F"/>
                 </a:solidFill>
-                <a:latin typeface="Helvetica Neue" pitchFamily="34" charset="0"/>
-                <a:ea typeface="Helvetica Neue" pitchFamily="34" charset="-122"/>
-                <a:cs typeface="Helvetica Neue" pitchFamily="34" charset="-120"/>
+                <a:latin typeface="Inter" pitchFamily="34" charset="0"/>
+                <a:ea typeface="Inter" pitchFamily="34" charset="-122"/>
+                <a:cs typeface="Inter" pitchFamily="34" charset="-120"/>
               </a:rPr>
               <a:t>The companion app.</a:t>
             </a:r>
@@ -17794,9 +17864,9 @@
                 <a:solidFill>
                   <a:srgbClr val="6E6E73"/>
                 </a:solidFill>
-                <a:latin typeface="Helvetica Neue" pitchFamily="34" charset="0"/>
-                <a:ea typeface="Helvetica Neue" pitchFamily="34" charset="-122"/>
-                <a:cs typeface="Helvetica Neue" pitchFamily="34" charset="-120"/>
+                <a:latin typeface="Inter" pitchFamily="34" charset="0"/>
+                <a:ea typeface="Inter" pitchFamily="34" charset="-122"/>
+                <a:cs typeface="Inter" pitchFamily="34" charset="-120"/>
               </a:rPr>
               <a:t>Night report (demo data)</a:t>
             </a:r>
@@ -17833,9 +17903,9 @@
                 <a:solidFill>
                   <a:srgbClr val="6E6E73"/>
                 </a:solidFill>
-                <a:latin typeface="Helvetica Neue" pitchFamily="34" charset="0"/>
-                <a:ea typeface="Helvetica Neue" pitchFamily="34" charset="-122"/>
-                <a:cs typeface="Helvetica Neue" pitchFamily="34" charset="-120"/>
+                <a:latin typeface="Inter" pitchFamily="34" charset="0"/>
+                <a:ea typeface="Inter" pitchFamily="34" charset="-122"/>
+                <a:cs typeface="Inter" pitchFamily="34" charset="-120"/>
               </a:rPr>
               <a:t>Live + device health (demo)</a:t>
             </a:r>
@@ -17892,9 +17962,9 @@
                 <a:solidFill>
                   <a:srgbClr val="1D1D1F"/>
                 </a:solidFill>
-                <a:latin typeface="Helvetica Neue" pitchFamily="34" charset="0"/>
-                <a:ea typeface="Helvetica Neue" pitchFamily="34" charset="-122"/>
-                <a:cs typeface="Helvetica Neue" pitchFamily="34" charset="-120"/>
+                <a:latin typeface="Inter" pitchFamily="34" charset="0"/>
+                <a:ea typeface="Inter" pitchFamily="34" charset="-122"/>
+                <a:cs typeface="Inter" pitchFamily="34" charset="-120"/>
               </a:rPr>
               <a:t>Night tab: oxygen chart, flagged desaturation events, events per hour of valid recording, and % valid signal.</a:t>
             </a:r>
@@ -17951,9 +18021,9 @@
                 <a:solidFill>
                   <a:srgbClr val="1D1D1F"/>
                 </a:solidFill>
-                <a:latin typeface="Helvetica Neue" pitchFamily="34" charset="0"/>
-                <a:ea typeface="Helvetica Neue" pitchFamily="34" charset="-122"/>
-                <a:cs typeface="Helvetica Neue" pitchFamily="34" charset="-120"/>
+                <a:latin typeface="Inter" pitchFamily="34" charset="0"/>
+                <a:ea typeface="Inter" pitchFamily="34" charset="-122"/>
+                <a:cs typeface="Inter" pitchFamily="34" charset="-120"/>
               </a:rPr>
               <a:t>Live tab connects to the wearable (USB or Bluetooth) and runs the device checks every second.</a:t>
             </a:r>
@@ -18010,9 +18080,9 @@
                 <a:solidFill>
                   <a:srgbClr val="1D1D1F"/>
                 </a:solidFill>
-                <a:latin typeface="Helvetica Neue" pitchFamily="34" charset="0"/>
-                <a:ea typeface="Helvetica Neue" pitchFamily="34" charset="-122"/>
-                <a:cs typeface="Helvetica Neue" pitchFamily="34" charset="-120"/>
+                <a:latin typeface="Inter" pitchFamily="34" charset="0"/>
+                <a:ea typeface="Inter" pitchFamily="34" charset="-122"/>
+                <a:cs typeface="Inter" pitchFamily="34" charset="-120"/>
               </a:rPr>
               <a:t>Saving a session gives the same CSV the analysis uses, so every number can be traced.</a:t>
             </a:r>
@@ -18069,9 +18139,9 @@
                 <a:solidFill>
                   <a:srgbClr val="1D1D1F"/>
                 </a:solidFill>
-                <a:latin typeface="Helvetica Neue" pitchFamily="34" charset="0"/>
-                <a:ea typeface="Helvetica Neue" pitchFamily="34" charset="-122"/>
-                <a:cs typeface="Helvetica Neue" pitchFamily="34" charset="-120"/>
+                <a:latin typeface="Inter" pitchFamily="34" charset="0"/>
+                <a:ea typeface="Inter" pitchFamily="34" charset="-122"/>
+                <a:cs typeface="Inter" pitchFamily="34" charset="-120"/>
               </a:rPr>
               <a:t>Everything shown so far is labelled demonstration data. Heart and breathing tabs are exploratory ideas.</a:t>
             </a:r>
@@ -18156,9 +18226,9 @@
                 <a:solidFill>
                   <a:srgbClr val="0071E3"/>
                 </a:solidFill>
-                <a:latin typeface="Helvetica Neue" pitchFamily="34" charset="0"/>
-                <a:ea typeface="Helvetica Neue" pitchFamily="34" charset="-122"/>
-                <a:cs typeface="Helvetica Neue" pitchFamily="34" charset="-120"/>
+                <a:latin typeface="Inter" pitchFamily="34" charset="0"/>
+                <a:ea typeface="Inter" pitchFamily="34" charset="-122"/>
+                <a:cs typeface="Inter" pitchFamily="34" charset="-120"/>
                 <a:hlinkClick r:id="rId5" invalidUrl="" action="" tgtFrame="" tooltip="https://gabrielamamanestudent-wq.github.io/teetomivV2/science-fair/night-signal/app/" history="1" highlightClick="0" endSnd="0">
                   <a:extLst>
                     <a:ext uri="{A12FA001-AC4F-418D-AE19-62706E023703}">
@@ -18202,9 +18272,9 @@
                 <a:solidFill>
                   <a:srgbClr val="6E6E73"/>
                 </a:solidFill>
-                <a:latin typeface="Helvetica Neue" pitchFamily="34" charset="0"/>
-                <a:ea typeface="Helvetica Neue" pitchFamily="34" charset="-122"/>
-                <a:cs typeface="Helvetica Neue" pitchFamily="34" charset="-120"/>
+                <a:latin typeface="Inter" pitchFamily="34" charset="0"/>
+                <a:ea typeface="Inter" pitchFamily="34" charset="-122"/>
+                <a:cs typeface="Inter" pitchFamily="34" charset="-120"/>
               </a:rPr>
               <a:t>Scan to try it. A demo device is built in.</a:t>
             </a:r>
@@ -18241,9 +18311,9 @@
                 <a:solidFill>
                   <a:srgbClr val="A1A1A6"/>
                 </a:solidFill>
-                <a:latin typeface="Helvetica Neue" pitchFamily="34" charset="0"/>
-                <a:ea typeface="Helvetica Neue" pitchFamily="34" charset="-122"/>
-                <a:cs typeface="Helvetica Neue" pitchFamily="34" charset="-120"/>
+                <a:latin typeface="Inter" pitchFamily="34" charset="0"/>
+                <a:ea typeface="Inter" pitchFamily="34" charset="-122"/>
+                <a:cs typeface="Inter" pitchFamily="34" charset="-120"/>
               </a:rPr>
               <a:t>Night Signal</a:t>
             </a:r>
@@ -18280,9 +18350,9 @@
                 <a:solidFill>
                   <a:srgbClr val="A1A1A6"/>
                 </a:solidFill>
-                <a:latin typeface="Helvetica Neue" pitchFamily="34" charset="0"/>
-                <a:ea typeface="Helvetica Neue" pitchFamily="34" charset="-122"/>
-                <a:cs typeface="Helvetica Neue" pitchFamily="34" charset="-120"/>
+                <a:latin typeface="Inter" pitchFamily="34" charset="0"/>
+                <a:ea typeface="Inter" pitchFamily="34" charset="-122"/>
+                <a:cs typeface="Inter" pitchFamily="34" charset="-120"/>
               </a:rPr>
               <a:t>7</a:t>
             </a:r>
@@ -18351,9 +18421,9 @@
                 <a:solidFill>
                   <a:srgbClr val="E3254B"/>
                 </a:solidFill>
-                <a:latin typeface="Helvetica Neue" pitchFamily="34" charset="0"/>
-                <a:ea typeface="Helvetica Neue" pitchFamily="34" charset="-122"/>
-                <a:cs typeface="Helvetica Neue" pitchFamily="34" charset="-120"/>
+                <a:latin typeface="Inter" pitchFamily="34" charset="0"/>
+                <a:ea typeface="Inter" pitchFamily="34" charset="-122"/>
+                <a:cs typeface="Inter" pitchFamily="34" charset="-120"/>
               </a:rPr>
               <a:t>Results · not yet collected</a:t>
             </a:r>
@@ -18393,9 +18463,9 @@
                 <a:solidFill>
                   <a:srgbClr val="1D1D1F"/>
                 </a:solidFill>
-                <a:latin typeface="Helvetica Neue" pitchFamily="34" charset="0"/>
-                <a:ea typeface="Helvetica Neue" pitchFamily="34" charset="-122"/>
-                <a:cs typeface="Helvetica Neue" pitchFamily="34" charset="-120"/>
+                <a:latin typeface="Inter" pitchFamily="34" charset="0"/>
+                <a:ea typeface="Inter" pitchFamily="34" charset="-122"/>
+                <a:cs typeface="Inter" pitchFamily="34" charset="-120"/>
               </a:rPr>
               <a:t>What will be measured.</a:t>
             </a:r>
@@ -18454,9 +18524,9 @@
                 <a:solidFill>
                   <a:srgbClr val="6E6E73"/>
                 </a:solidFill>
-                <a:latin typeface="Helvetica Neue" pitchFamily="34" charset="0"/>
-                <a:ea typeface="Helvetica Neue" pitchFamily="34" charset="-122"/>
-                <a:cs typeface="Helvetica Neue" pitchFamily="34" charset="-120"/>
+                <a:latin typeface="Inter" pitchFamily="34" charset="0"/>
+                <a:ea typeface="Inter" pitchFamily="34" charset="-122"/>
+                <a:cs typeface="Inter" pitchFamily="34" charset="-120"/>
               </a:rPr>
               <a:t>No real data yet</a:t>
             </a:r>
@@ -18506,16 +18576,16 @@
                           <a:solidFill>
                             <a:srgbClr val="6E6E73"/>
                           </a:solidFill>
-                          <a:latin typeface="Helvetica Neue" pitchFamily="34" charset="0"/>
-                          <a:ea typeface="Helvetica Neue" pitchFamily="34" charset="-122"/>
-                          <a:cs typeface="Helvetica Neue" pitchFamily="34" charset="-120"/>
+                          <a:latin typeface="Inter" pitchFamily="34" charset="0"/>
+                          <a:ea typeface="Inter" pitchFamily="34" charset="-122"/>
+                          <a:cs typeface="Inter" pitchFamily="34" charset="-120"/>
                         </a:rPr>
                         <a:t>Measure</a:t>
                       </a:r>
                       <a:endParaRPr lang="en-US" sz="1100" dirty="0">
-                        <a:latin typeface="Helvetica Neue" charset="0"/>
-                        <a:ea typeface="Helvetica Neue" charset="0"/>
-                        <a:cs typeface="Helvetica Neue" charset="0"/>
+                        <a:latin typeface="Inter" charset="0"/>
+                        <a:ea typeface="Inter" charset="0"/>
+                        <a:cs typeface="Inter" charset="0"/>
                       </a:endParaRPr>
                     </a:p>
                   </a:txBody>
@@ -18553,16 +18623,16 @@
                           <a:solidFill>
                             <a:srgbClr val="6E6E73"/>
                           </a:solidFill>
-                          <a:latin typeface="Helvetica Neue" pitchFamily="34" charset="0"/>
-                          <a:ea typeface="Helvetica Neue" pitchFamily="34" charset="-122"/>
-                          <a:cs typeface="Helvetica Neue" pitchFamily="34" charset="-120"/>
+                          <a:latin typeface="Inter" pitchFamily="34" charset="0"/>
+                          <a:ea typeface="Inter" pitchFamily="34" charset="-122"/>
+                          <a:cs typeface="Inter" pitchFamily="34" charset="-120"/>
                         </a:rPr>
                         <a:t>How it is calculated</a:t>
                       </a:r>
                       <a:endParaRPr lang="en-US" sz="1100" dirty="0">
-                        <a:latin typeface="Helvetica Neue" charset="0"/>
-                        <a:ea typeface="Helvetica Neue" charset="0"/>
-                        <a:cs typeface="Helvetica Neue" charset="0"/>
+                        <a:latin typeface="Inter" charset="0"/>
+                        <a:ea typeface="Inter" charset="0"/>
+                        <a:cs typeface="Inter" charset="0"/>
                       </a:endParaRPr>
                     </a:p>
                   </a:txBody>
@@ -18600,16 +18670,16 @@
                           <a:solidFill>
                             <a:srgbClr val="6E6E73"/>
                           </a:solidFill>
-                          <a:latin typeface="Helvetica Neue" pitchFamily="34" charset="0"/>
-                          <a:ea typeface="Helvetica Neue" pitchFamily="34" charset="-122"/>
-                          <a:cs typeface="Helvetica Neue" pitchFamily="34" charset="-120"/>
+                          <a:latin typeface="Inter" pitchFamily="34" charset="0"/>
+                          <a:ea typeface="Inter" pitchFamily="34" charset="-122"/>
+                          <a:cs typeface="Inter" pitchFamily="34" charset="-120"/>
                         </a:rPr>
                         <a:t>Demonstration (simulated)</a:t>
                       </a:r>
                       <a:endParaRPr lang="en-US" sz="1100" dirty="0">
-                        <a:latin typeface="Helvetica Neue" charset="0"/>
-                        <a:ea typeface="Helvetica Neue" charset="0"/>
-                        <a:cs typeface="Helvetica Neue" charset="0"/>
+                        <a:latin typeface="Inter" charset="0"/>
+                        <a:ea typeface="Inter" charset="0"/>
+                        <a:cs typeface="Inter" charset="0"/>
                       </a:endParaRPr>
                     </a:p>
                   </a:txBody>
@@ -18647,16 +18717,16 @@
                           <a:solidFill>
                             <a:srgbClr val="6E6E73"/>
                           </a:solidFill>
-                          <a:latin typeface="Helvetica Neue" pitchFamily="34" charset="0"/>
-                          <a:ea typeface="Helvetica Neue" pitchFamily="34" charset="-122"/>
-                          <a:cs typeface="Helvetica Neue" pitchFamily="34" charset="-120"/>
+                          <a:latin typeface="Inter" pitchFamily="34" charset="0"/>
+                          <a:ea typeface="Inter" pitchFamily="34" charset="-122"/>
+                          <a:cs typeface="Inter" pitchFamily="34" charset="-120"/>
                         </a:rPr>
                         <a:t>Real result</a:t>
                       </a:r>
                       <a:endParaRPr lang="en-US" sz="1100" dirty="0">
-                        <a:latin typeface="Helvetica Neue" charset="0"/>
-                        <a:ea typeface="Helvetica Neue" charset="0"/>
-                        <a:cs typeface="Helvetica Neue" charset="0"/>
+                        <a:latin typeface="Inter" charset="0"/>
+                        <a:ea typeface="Inter" charset="0"/>
+                        <a:cs typeface="Inter" charset="0"/>
                       </a:endParaRPr>
                     </a:p>
                   </a:txBody>
@@ -18696,16 +18766,16 @@
                           <a:solidFill>
                             <a:srgbClr val="1D1D1F"/>
                           </a:solidFill>
-                          <a:latin typeface="Helvetica Neue" pitchFamily="34" charset="0"/>
-                          <a:ea typeface="Helvetica Neue" pitchFamily="34" charset="-122"/>
-                          <a:cs typeface="Helvetica Neue" pitchFamily="34" charset="-120"/>
+                          <a:latin typeface="Inter" pitchFamily="34" charset="0"/>
+                          <a:ea typeface="Inter" pitchFamily="34" charset="-122"/>
+                          <a:cs typeface="Inter" pitchFamily="34" charset="-120"/>
                         </a:rPr>
                         <a:t>SpO₂ agreement</a:t>
                       </a:r>
                       <a:endParaRPr lang="en-US" sz="1300" dirty="0">
-                        <a:latin typeface="Helvetica Neue" charset="0"/>
-                        <a:ea typeface="Helvetica Neue" charset="0"/>
-                        <a:cs typeface="Helvetica Neue" charset="0"/>
+                        <a:latin typeface="Inter" charset="0"/>
+                        <a:ea typeface="Inter" charset="0"/>
+                        <a:cs typeface="Inter" charset="0"/>
                       </a:endParaRPr>
                     </a:p>
                   </a:txBody>
@@ -18743,16 +18813,16 @@
                           <a:solidFill>
                             <a:srgbClr val="6E6E73"/>
                           </a:solidFill>
-                          <a:latin typeface="Helvetica Neue" pitchFamily="34" charset="0"/>
-                          <a:ea typeface="Helvetica Neue" pitchFamily="34" charset="-122"/>
-                          <a:cs typeface="Helvetica Neue" pitchFamily="34" charset="-120"/>
+                          <a:latin typeface="Inter" pitchFamily="34" charset="0"/>
+                          <a:ea typeface="Inter" pitchFamily="34" charset="-122"/>
+                          <a:cs typeface="Inter" pitchFamily="34" charset="-120"/>
                         </a:rPr>
                         <a:t>device − reference, paired every 2 min: bias, 95% limits</a:t>
                       </a:r>
                       <a:endParaRPr lang="en-US" sz="1300" dirty="0">
-                        <a:latin typeface="Helvetica Neue" charset="0"/>
-                        <a:ea typeface="Helvetica Neue" charset="0"/>
-                        <a:cs typeface="Helvetica Neue" charset="0"/>
+                        <a:latin typeface="Inter" charset="0"/>
+                        <a:ea typeface="Inter" charset="0"/>
+                        <a:cs typeface="Inter" charset="0"/>
                       </a:endParaRPr>
                     </a:p>
                   </a:txBody>
@@ -18790,16 +18860,16 @@
                           <a:solidFill>
                             <a:srgbClr val="1D1D1F"/>
                           </a:solidFill>
-                          <a:latin typeface="Helvetica Neue" pitchFamily="34" charset="0"/>
-                          <a:ea typeface="Helvetica Neue" pitchFamily="34" charset="-122"/>
-                          <a:cs typeface="Helvetica Neue" pitchFamily="34" charset="-120"/>
+                          <a:latin typeface="Inter" pitchFamily="34" charset="0"/>
+                          <a:ea typeface="Inter" pitchFamily="34" charset="-122"/>
+                          <a:cs typeface="Inter" pitchFamily="34" charset="-120"/>
                         </a:rPr>
                         <a:t>+0.07 (−1.47 to +1.61) points</a:t>
                       </a:r>
                       <a:endParaRPr lang="en-US" sz="1300" dirty="0">
-                        <a:latin typeface="Helvetica Neue" charset="0"/>
-                        <a:ea typeface="Helvetica Neue" charset="0"/>
-                        <a:cs typeface="Helvetica Neue" charset="0"/>
+                        <a:latin typeface="Inter" charset="0"/>
+                        <a:ea typeface="Inter" charset="0"/>
+                        <a:cs typeface="Inter" charset="0"/>
                       </a:endParaRPr>
                     </a:p>
                   </a:txBody>
@@ -18837,16 +18907,16 @@
                           <a:solidFill>
                             <a:srgbClr val="1D1D1F"/>
                           </a:solidFill>
-                          <a:latin typeface="Helvetica Neue" pitchFamily="34" charset="0"/>
-                          <a:ea typeface="Helvetica Neue" pitchFamily="34" charset="-122"/>
-                          <a:cs typeface="Helvetica Neue" pitchFamily="34" charset="-120"/>
+                          <a:latin typeface="Inter" pitchFamily="34" charset="0"/>
+                          <a:ea typeface="Inter" pitchFamily="34" charset="-122"/>
+                          <a:cs typeface="Inter" pitchFamily="34" charset="-120"/>
                         </a:rPr>
                         <a:t>pending</a:t>
                       </a:r>
                       <a:endParaRPr lang="en-US" sz="1300" dirty="0">
-                        <a:latin typeface="Helvetica Neue" charset="0"/>
-                        <a:ea typeface="Helvetica Neue" charset="0"/>
-                        <a:cs typeface="Helvetica Neue" charset="0"/>
+                        <a:latin typeface="Inter" charset="0"/>
+                        <a:ea typeface="Inter" charset="0"/>
+                        <a:cs typeface="Inter" charset="0"/>
                       </a:endParaRPr>
                     </a:p>
                   </a:txBody>
@@ -18886,16 +18956,16 @@
                           <a:solidFill>
                             <a:srgbClr val="1D1D1F"/>
                           </a:solidFill>
-                          <a:latin typeface="Helvetica Neue" pitchFamily="34" charset="0"/>
-                          <a:ea typeface="Helvetica Neue" pitchFamily="34" charset="-122"/>
-                          <a:cs typeface="Helvetica Neue" pitchFamily="34" charset="-120"/>
+                          <a:latin typeface="Inter" pitchFamily="34" charset="0"/>
+                          <a:ea typeface="Inter" pitchFamily="34" charset="-122"/>
+                          <a:cs typeface="Inter" pitchFamily="34" charset="-120"/>
                         </a:rPr>
                         <a:t>Heart-rate agreement</a:t>
                       </a:r>
                       <a:endParaRPr lang="en-US" sz="1300" dirty="0">
-                        <a:latin typeface="Helvetica Neue" charset="0"/>
-                        <a:ea typeface="Helvetica Neue" charset="0"/>
-                        <a:cs typeface="Helvetica Neue" charset="0"/>
+                        <a:latin typeface="Inter" charset="0"/>
+                        <a:ea typeface="Inter" charset="0"/>
+                        <a:cs typeface="Inter" charset="0"/>
                       </a:endParaRPr>
                     </a:p>
                   </a:txBody>
@@ -18933,16 +19003,16 @@
                           <a:solidFill>
                             <a:srgbClr val="6E6E73"/>
                           </a:solidFill>
-                          <a:latin typeface="Helvetica Neue" pitchFamily="34" charset="0"/>
-                          <a:ea typeface="Helvetica Neue" pitchFamily="34" charset="-122"/>
-                          <a:cs typeface="Helvetica Neue" pitchFamily="34" charset="-120"/>
+                          <a:latin typeface="Inter" pitchFamily="34" charset="0"/>
+                          <a:ea typeface="Inter" pitchFamily="34" charset="-122"/>
+                          <a:cs typeface="Inter" pitchFamily="34" charset="-120"/>
                         </a:rPr>
                         <a:t>same pairing, in beats per minute</a:t>
                       </a:r>
                       <a:endParaRPr lang="en-US" sz="1300" dirty="0">
-                        <a:latin typeface="Helvetica Neue" charset="0"/>
-                        <a:ea typeface="Helvetica Neue" charset="0"/>
-                        <a:cs typeface="Helvetica Neue" charset="0"/>
+                        <a:latin typeface="Inter" charset="0"/>
+                        <a:ea typeface="Inter" charset="0"/>
+                        <a:cs typeface="Inter" charset="0"/>
                       </a:endParaRPr>
                     </a:p>
                   </a:txBody>
@@ -18980,16 +19050,16 @@
                           <a:solidFill>
                             <a:srgbClr val="1D1D1F"/>
                           </a:solidFill>
-                          <a:latin typeface="Helvetica Neue" pitchFamily="34" charset="0"/>
-                          <a:ea typeface="Helvetica Neue" pitchFamily="34" charset="-122"/>
-                          <a:cs typeface="Helvetica Neue" pitchFamily="34" charset="-120"/>
+                          <a:latin typeface="Inter" pitchFamily="34" charset="0"/>
+                          <a:ea typeface="Inter" pitchFamily="34" charset="-122"/>
+                          <a:cs typeface="Inter" pitchFamily="34" charset="-120"/>
                         </a:rPr>
                         <a:t>−0.0 (−2.3 to +2.3) bpm</a:t>
                       </a:r>
                       <a:endParaRPr lang="en-US" sz="1300" dirty="0">
-                        <a:latin typeface="Helvetica Neue" charset="0"/>
-                        <a:ea typeface="Helvetica Neue" charset="0"/>
-                        <a:cs typeface="Helvetica Neue" charset="0"/>
+                        <a:latin typeface="Inter" charset="0"/>
+                        <a:ea typeface="Inter" charset="0"/>
+                        <a:cs typeface="Inter" charset="0"/>
                       </a:endParaRPr>
                     </a:p>
                   </a:txBody>
@@ -19027,16 +19097,16 @@
                           <a:solidFill>
                             <a:srgbClr val="1D1D1F"/>
                           </a:solidFill>
-                          <a:latin typeface="Helvetica Neue" pitchFamily="34" charset="0"/>
-                          <a:ea typeface="Helvetica Neue" pitchFamily="34" charset="-122"/>
-                          <a:cs typeface="Helvetica Neue" pitchFamily="34" charset="-120"/>
+                          <a:latin typeface="Inter" pitchFamily="34" charset="0"/>
+                          <a:ea typeface="Inter" pitchFamily="34" charset="-122"/>
+                          <a:cs typeface="Inter" pitchFamily="34" charset="-120"/>
                         </a:rPr>
                         <a:t>pending</a:t>
                       </a:r>
                       <a:endParaRPr lang="en-US" sz="1300" dirty="0">
-                        <a:latin typeface="Helvetica Neue" charset="0"/>
-                        <a:ea typeface="Helvetica Neue" charset="0"/>
-                        <a:cs typeface="Helvetica Neue" charset="0"/>
+                        <a:latin typeface="Inter" charset="0"/>
+                        <a:ea typeface="Inter" charset="0"/>
+                        <a:cs typeface="Inter" charset="0"/>
                       </a:endParaRPr>
                     </a:p>
                   </a:txBody>
@@ -19076,16 +19146,16 @@
                           <a:solidFill>
                             <a:srgbClr val="1D1D1F"/>
                           </a:solidFill>
-                          <a:latin typeface="Helvetica Neue" pitchFamily="34" charset="0"/>
-                          <a:ea typeface="Helvetica Neue" pitchFamily="34" charset="-122"/>
-                          <a:cs typeface="Helvetica Neue" pitchFamily="34" charset="-120"/>
+                          <a:latin typeface="Inter" pitchFamily="34" charset="0"/>
+                          <a:ea typeface="Inter" pitchFamily="34" charset="-122"/>
+                          <a:cs typeface="Inter" pitchFamily="34" charset="-120"/>
                         </a:rPr>
                         <a:t>Valid signal</a:t>
                       </a:r>
                       <a:endParaRPr lang="en-US" sz="1300" dirty="0">
-                        <a:latin typeface="Helvetica Neue" charset="0"/>
-                        <a:ea typeface="Helvetica Neue" charset="0"/>
-                        <a:cs typeface="Helvetica Neue" charset="0"/>
+                        <a:latin typeface="Inter" charset="0"/>
+                        <a:ea typeface="Inter" charset="0"/>
+                        <a:cs typeface="Inter" charset="0"/>
                       </a:endParaRPr>
                     </a:p>
                   </a:txBody>
@@ -19123,16 +19193,16 @@
                           <a:solidFill>
                             <a:srgbClr val="6E6E73"/>
                           </a:solidFill>
-                          <a:latin typeface="Helvetica Neue" pitchFamily="34" charset="0"/>
-                          <a:ea typeface="Helvetica Neue" pitchFamily="34" charset="-122"/>
-                          <a:cs typeface="Helvetica Neue" pitchFamily="34" charset="-120"/>
+                          <a:latin typeface="Inter" pitchFamily="34" charset="0"/>
+                          <a:ea typeface="Inter" pitchFamily="34" charset="-122"/>
+                          <a:cs typeface="Inter" pitchFamily="34" charset="-120"/>
                         </a:rPr>
                         <a:t>finger on, sensor-valid, 70–100%, no movement</a:t>
                       </a:r>
                       <a:endParaRPr lang="en-US" sz="1300" dirty="0">
-                        <a:latin typeface="Helvetica Neue" charset="0"/>
-                        <a:ea typeface="Helvetica Neue" charset="0"/>
-                        <a:cs typeface="Helvetica Neue" charset="0"/>
+                        <a:latin typeface="Inter" charset="0"/>
+                        <a:ea typeface="Inter" charset="0"/>
+                        <a:cs typeface="Inter" charset="0"/>
                       </a:endParaRPr>
                     </a:p>
                   </a:txBody>
@@ -19170,16 +19240,16 @@
                           <a:solidFill>
                             <a:srgbClr val="1D1D1F"/>
                           </a:solidFill>
-                          <a:latin typeface="Helvetica Neue" pitchFamily="34" charset="0"/>
-                          <a:ea typeface="Helvetica Neue" pitchFamily="34" charset="-122"/>
-                          <a:cs typeface="Helvetica Neue" pitchFamily="34" charset="-120"/>
+                          <a:latin typeface="Inter" pitchFamily="34" charset="0"/>
+                          <a:ea typeface="Inter" pitchFamily="34" charset="-122"/>
+                          <a:cs typeface="Inter" pitchFamily="34" charset="-120"/>
                         </a:rPr>
                         <a:t>98% (6.88 of 7.0 h)</a:t>
                       </a:r>
                       <a:endParaRPr lang="en-US" sz="1300" dirty="0">
-                        <a:latin typeface="Helvetica Neue" charset="0"/>
-                        <a:ea typeface="Helvetica Neue" charset="0"/>
-                        <a:cs typeface="Helvetica Neue" charset="0"/>
+                        <a:latin typeface="Inter" charset="0"/>
+                        <a:ea typeface="Inter" charset="0"/>
+                        <a:cs typeface="Inter" charset="0"/>
                       </a:endParaRPr>
                     </a:p>
                   </a:txBody>
@@ -19217,16 +19287,16 @@
                           <a:solidFill>
                             <a:srgbClr val="1D1D1F"/>
                           </a:solidFill>
-                          <a:latin typeface="Helvetica Neue" pitchFamily="34" charset="0"/>
-                          <a:ea typeface="Helvetica Neue" pitchFamily="34" charset="-122"/>
-                          <a:cs typeface="Helvetica Neue" pitchFamily="34" charset="-120"/>
+                          <a:latin typeface="Inter" pitchFamily="34" charset="0"/>
+                          <a:ea typeface="Inter" pitchFamily="34" charset="-122"/>
+                          <a:cs typeface="Inter" pitchFamily="34" charset="-120"/>
                         </a:rPr>
                         <a:t>pending</a:t>
                       </a:r>
                       <a:endParaRPr lang="en-US" sz="1300" dirty="0">
-                        <a:latin typeface="Helvetica Neue" charset="0"/>
-                        <a:ea typeface="Helvetica Neue" charset="0"/>
-                        <a:cs typeface="Helvetica Neue" charset="0"/>
+                        <a:latin typeface="Inter" charset="0"/>
+                        <a:ea typeface="Inter" charset="0"/>
+                        <a:cs typeface="Inter" charset="0"/>
                       </a:endParaRPr>
                     </a:p>
                   </a:txBody>
@@ -19266,16 +19336,16 @@
                           <a:solidFill>
                             <a:srgbClr val="1D1D1F"/>
                           </a:solidFill>
-                          <a:latin typeface="Helvetica Neue" pitchFamily="34" charset="0"/>
-                          <a:ea typeface="Helvetica Neue" pitchFamily="34" charset="-122"/>
-                          <a:cs typeface="Helvetica Neue" pitchFamily="34" charset="-120"/>
+                          <a:latin typeface="Inter" pitchFamily="34" charset="0"/>
+                          <a:ea typeface="Inter" pitchFamily="34" charset="-122"/>
+                          <a:cs typeface="Inter" pitchFamily="34" charset="-120"/>
                         </a:rPr>
                         <a:t>Desaturation events</a:t>
                       </a:r>
                       <a:endParaRPr lang="en-US" sz="1300" dirty="0">
-                        <a:latin typeface="Helvetica Neue" charset="0"/>
-                        <a:ea typeface="Helvetica Neue" charset="0"/>
-                        <a:cs typeface="Helvetica Neue" charset="0"/>
+                        <a:latin typeface="Inter" charset="0"/>
+                        <a:ea typeface="Inter" charset="0"/>
+                        <a:cs typeface="Inter" charset="0"/>
                       </a:endParaRPr>
                     </a:p>
                   </a:txBody>
@@ -19313,16 +19383,16 @@
                           <a:solidFill>
                             <a:srgbClr val="6E6E73"/>
                           </a:solidFill>
-                          <a:latin typeface="Helvetica Neue" pitchFamily="34" charset="0"/>
-                          <a:ea typeface="Helvetica Neue" pitchFamily="34" charset="-122"/>
-                          <a:cs typeface="Helvetica Neue" pitchFamily="34" charset="-120"/>
+                          <a:latin typeface="Inter" pitchFamily="34" charset="0"/>
+                          <a:ea typeface="Inter" pitchFamily="34" charset="-122"/>
+                          <a:cs typeface="Inter" pitchFamily="34" charset="-120"/>
                         </a:rPr>
                         <a:t>≥ 3 points below a 120-s baseline for ≥ 10 s</a:t>
                       </a:r>
                       <a:endParaRPr lang="en-US" sz="1300" dirty="0">
-                        <a:latin typeface="Helvetica Neue" charset="0"/>
-                        <a:ea typeface="Helvetica Neue" charset="0"/>
-                        <a:cs typeface="Helvetica Neue" charset="0"/>
+                        <a:latin typeface="Inter" charset="0"/>
+                        <a:ea typeface="Inter" charset="0"/>
+                        <a:cs typeface="Inter" charset="0"/>
                       </a:endParaRPr>
                     </a:p>
                   </a:txBody>
@@ -19360,16 +19430,16 @@
                           <a:solidFill>
                             <a:srgbClr val="1D1D1F"/>
                           </a:solidFill>
-                          <a:latin typeface="Helvetica Neue" pitchFamily="34" charset="0"/>
-                          <a:ea typeface="Helvetica Neue" pitchFamily="34" charset="-122"/>
-                          <a:cs typeface="Helvetica Neue" pitchFamily="34" charset="-120"/>
+                          <a:latin typeface="Inter" pitchFamily="34" charset="0"/>
+                          <a:ea typeface="Inter" pitchFamily="34" charset="-122"/>
+                          <a:cs typeface="Inter" pitchFamily="34" charset="-120"/>
                         </a:rPr>
                         <a:t>19 events</a:t>
                       </a:r>
                       <a:endParaRPr lang="en-US" sz="1300" dirty="0">
-                        <a:latin typeface="Helvetica Neue" charset="0"/>
-                        <a:ea typeface="Helvetica Neue" charset="0"/>
-                        <a:cs typeface="Helvetica Neue" charset="0"/>
+                        <a:latin typeface="Inter" charset="0"/>
+                        <a:ea typeface="Inter" charset="0"/>
+                        <a:cs typeface="Inter" charset="0"/>
                       </a:endParaRPr>
                     </a:p>
                   </a:txBody>
@@ -19407,16 +19477,16 @@
                           <a:solidFill>
                             <a:srgbClr val="1D1D1F"/>
                           </a:solidFill>
-                          <a:latin typeface="Helvetica Neue" pitchFamily="34" charset="0"/>
-                          <a:ea typeface="Helvetica Neue" pitchFamily="34" charset="-122"/>
-                          <a:cs typeface="Helvetica Neue" pitchFamily="34" charset="-120"/>
+                          <a:latin typeface="Inter" pitchFamily="34" charset="0"/>
+                          <a:ea typeface="Inter" pitchFamily="34" charset="-122"/>
+                          <a:cs typeface="Inter" pitchFamily="34" charset="-120"/>
                         </a:rPr>
                         <a:t>pending</a:t>
                       </a:r>
                       <a:endParaRPr lang="en-US" sz="1300" dirty="0">
-                        <a:latin typeface="Helvetica Neue" charset="0"/>
-                        <a:ea typeface="Helvetica Neue" charset="0"/>
-                        <a:cs typeface="Helvetica Neue" charset="0"/>
+                        <a:latin typeface="Inter" charset="0"/>
+                        <a:ea typeface="Inter" charset="0"/>
+                        <a:cs typeface="Inter" charset="0"/>
                       </a:endParaRPr>
                     </a:p>
                   </a:txBody>
@@ -19456,16 +19526,16 @@
                           <a:solidFill>
                             <a:srgbClr val="1D1D1F"/>
                           </a:solidFill>
-                          <a:latin typeface="Helvetica Neue" pitchFamily="34" charset="0"/>
-                          <a:ea typeface="Helvetica Neue" pitchFamily="34" charset="-122"/>
-                          <a:cs typeface="Helvetica Neue" pitchFamily="34" charset="-120"/>
+                          <a:latin typeface="Inter" pitchFamily="34" charset="0"/>
+                          <a:ea typeface="Inter" pitchFamily="34" charset="-122"/>
+                          <a:cs typeface="Inter" pitchFamily="34" charset="-120"/>
                         </a:rPr>
                         <a:t>Desaturation event rate</a:t>
                       </a:r>
                       <a:endParaRPr lang="en-US" sz="1300" dirty="0">
-                        <a:latin typeface="Helvetica Neue" charset="0"/>
-                        <a:ea typeface="Helvetica Neue" charset="0"/>
-                        <a:cs typeface="Helvetica Neue" charset="0"/>
+                        <a:latin typeface="Inter" charset="0"/>
+                        <a:ea typeface="Inter" charset="0"/>
+                        <a:cs typeface="Inter" charset="0"/>
                       </a:endParaRPr>
                     </a:p>
                   </a:txBody>
@@ -19503,16 +19573,16 @@
                           <a:solidFill>
                             <a:srgbClr val="6E6E73"/>
                           </a:solidFill>
-                          <a:latin typeface="Helvetica Neue" pitchFamily="34" charset="0"/>
-                          <a:ea typeface="Helvetica Neue" pitchFamily="34" charset="-122"/>
-                          <a:cs typeface="Helvetica Neue" pitchFamily="34" charset="-120"/>
+                          <a:latin typeface="Inter" pitchFamily="34" charset="0"/>
+                          <a:ea typeface="Inter" pitchFamily="34" charset="-122"/>
+                          <a:cs typeface="Inter" pitchFamily="34" charset="-120"/>
                         </a:rPr>
                         <a:t>events ÷ hours of VALID recording</a:t>
                       </a:r>
                       <a:endParaRPr lang="en-US" sz="1300" dirty="0">
-                        <a:latin typeface="Helvetica Neue" charset="0"/>
-                        <a:ea typeface="Helvetica Neue" charset="0"/>
-                        <a:cs typeface="Helvetica Neue" charset="0"/>
+                        <a:latin typeface="Inter" charset="0"/>
+                        <a:ea typeface="Inter" charset="0"/>
+                        <a:cs typeface="Inter" charset="0"/>
                       </a:endParaRPr>
                     </a:p>
                   </a:txBody>
@@ -19550,16 +19620,16 @@
                           <a:solidFill>
                             <a:srgbClr val="1D1D1F"/>
                           </a:solidFill>
-                          <a:latin typeface="Helvetica Neue" pitchFamily="34" charset="0"/>
-                          <a:ea typeface="Helvetica Neue" pitchFamily="34" charset="-122"/>
-                          <a:cs typeface="Helvetica Neue" pitchFamily="34" charset="-120"/>
+                          <a:latin typeface="Inter" pitchFamily="34" charset="0"/>
+                          <a:ea typeface="Inter" pitchFamily="34" charset="-122"/>
+                          <a:cs typeface="Inter" pitchFamily="34" charset="-120"/>
                         </a:rPr>
                         <a:t>2.8 per valid hour (19 ÷ 6.88 h)</a:t>
                       </a:r>
                       <a:endParaRPr lang="en-US" sz="1300" dirty="0">
-                        <a:latin typeface="Helvetica Neue" charset="0"/>
-                        <a:ea typeface="Helvetica Neue" charset="0"/>
-                        <a:cs typeface="Helvetica Neue" charset="0"/>
+                        <a:latin typeface="Inter" charset="0"/>
+                        <a:ea typeface="Inter" charset="0"/>
+                        <a:cs typeface="Inter" charset="0"/>
                       </a:endParaRPr>
                     </a:p>
                   </a:txBody>
@@ -19597,16 +19667,16 @@
                           <a:solidFill>
                             <a:srgbClr val="1D1D1F"/>
                           </a:solidFill>
-                          <a:latin typeface="Helvetica Neue" pitchFamily="34" charset="0"/>
-                          <a:ea typeface="Helvetica Neue" pitchFamily="34" charset="-122"/>
-                          <a:cs typeface="Helvetica Neue" pitchFamily="34" charset="-120"/>
+                          <a:latin typeface="Inter" pitchFamily="34" charset="0"/>
+                          <a:ea typeface="Inter" pitchFamily="34" charset="-122"/>
+                          <a:cs typeface="Inter" pitchFamily="34" charset="-120"/>
                         </a:rPr>
                         <a:t>pending</a:t>
                       </a:r>
                       <a:endParaRPr lang="en-US" sz="1300" dirty="0">
-                        <a:latin typeface="Helvetica Neue" charset="0"/>
-                        <a:ea typeface="Helvetica Neue" charset="0"/>
-                        <a:cs typeface="Helvetica Neue" charset="0"/>
+                        <a:latin typeface="Inter" charset="0"/>
+                        <a:ea typeface="Inter" charset="0"/>
+                        <a:cs typeface="Inter" charset="0"/>
                       </a:endParaRPr>
                     </a:p>
                   </a:txBody>
@@ -19646,16 +19716,16 @@
                           <a:solidFill>
                             <a:srgbClr val="1D1D1F"/>
                           </a:solidFill>
-                          <a:latin typeface="Helvetica Neue" pitchFamily="34" charset="0"/>
-                          <a:ea typeface="Helvetica Neue" pitchFamily="34" charset="-122"/>
-                          <a:cs typeface="Helvetica Neue" pitchFamily="34" charset="-120"/>
+                          <a:latin typeface="Inter" pitchFamily="34" charset="0"/>
+                          <a:ea typeface="Inter" pitchFamily="34" charset="-122"/>
+                          <a:cs typeface="Inter" pitchFamily="34" charset="-120"/>
                         </a:rPr>
                         <a:t>Breath-hold dips flagged (if approved)</a:t>
                       </a:r>
                       <a:endParaRPr lang="en-US" sz="1300" dirty="0">
-                        <a:latin typeface="Helvetica Neue" charset="0"/>
-                        <a:ea typeface="Helvetica Neue" charset="0"/>
-                        <a:cs typeface="Helvetica Neue" charset="0"/>
+                        <a:latin typeface="Inter" charset="0"/>
+                        <a:ea typeface="Inter" charset="0"/>
+                        <a:cs typeface="Inter" charset="0"/>
                       </a:endParaRPr>
                     </a:p>
                   </a:txBody>
@@ -19693,16 +19763,16 @@
                           <a:solidFill>
                             <a:srgbClr val="6E6E73"/>
                           </a:solidFill>
-                          <a:latin typeface="Helvetica Neue" pitchFamily="34" charset="0"/>
-                          <a:ea typeface="Helvetica Neue" pitchFamily="34" charset="-122"/>
-                          <a:cs typeface="Helvetica Neue" pitchFamily="34" charset="-120"/>
+                          <a:latin typeface="Inter" pitchFamily="34" charset="0"/>
+                          <a:ea typeface="Inter" pitchFamily="34" charset="-122"/>
+                          <a:cs typeface="Inter" pitchFamily="34" charset="-120"/>
                         </a:rPr>
                         <a:t>flags within ±30 s of each logged hold</a:t>
                       </a:r>
                       <a:endParaRPr lang="en-US" sz="1300" dirty="0">
-                        <a:latin typeface="Helvetica Neue" charset="0"/>
-                        <a:ea typeface="Helvetica Neue" charset="0"/>
-                        <a:cs typeface="Helvetica Neue" charset="0"/>
+                        <a:latin typeface="Inter" charset="0"/>
+                        <a:ea typeface="Inter" charset="0"/>
+                        <a:cs typeface="Inter" charset="0"/>
                       </a:endParaRPr>
                     </a:p>
                   </a:txBody>
@@ -19740,16 +19810,16 @@
                           <a:solidFill>
                             <a:srgbClr val="1D1D1F"/>
                           </a:solidFill>
-                          <a:latin typeface="Helvetica Neue" pitchFamily="34" charset="0"/>
-                          <a:ea typeface="Helvetica Neue" pitchFamily="34" charset="-122"/>
-                          <a:cs typeface="Helvetica Neue" pitchFamily="34" charset="-120"/>
+                          <a:latin typeface="Inter" pitchFamily="34" charset="0"/>
+                          <a:ea typeface="Inter" pitchFamily="34" charset="-122"/>
+                          <a:cs typeface="Inter" pitchFamily="34" charset="-120"/>
                         </a:rPr>
                         <a:t>not simulated</a:t>
                       </a:r>
                       <a:endParaRPr lang="en-US" sz="1300" dirty="0">
-                        <a:latin typeface="Helvetica Neue" charset="0"/>
-                        <a:ea typeface="Helvetica Neue" charset="0"/>
-                        <a:cs typeface="Helvetica Neue" charset="0"/>
+                        <a:latin typeface="Inter" charset="0"/>
+                        <a:ea typeface="Inter" charset="0"/>
+                        <a:cs typeface="Inter" charset="0"/>
                       </a:endParaRPr>
                     </a:p>
                   </a:txBody>
@@ -19787,16 +19857,16 @@
                           <a:solidFill>
                             <a:srgbClr val="1D1D1F"/>
                           </a:solidFill>
-                          <a:latin typeface="Helvetica Neue" pitchFamily="34" charset="0"/>
-                          <a:ea typeface="Helvetica Neue" pitchFamily="34" charset="-122"/>
-                          <a:cs typeface="Helvetica Neue" pitchFamily="34" charset="-120"/>
+                          <a:latin typeface="Inter" pitchFamily="34" charset="0"/>
+                          <a:ea typeface="Inter" pitchFamily="34" charset="-122"/>
+                          <a:cs typeface="Inter" pitchFamily="34" charset="-120"/>
                         </a:rPr>
                         <a:t>pending</a:t>
                       </a:r>
                       <a:endParaRPr lang="en-US" sz="1300" dirty="0">
-                        <a:latin typeface="Helvetica Neue" charset="0"/>
-                        <a:ea typeface="Helvetica Neue" charset="0"/>
-                        <a:cs typeface="Helvetica Neue" charset="0"/>
+                        <a:latin typeface="Inter" charset="0"/>
+                        <a:ea typeface="Inter" charset="0"/>
+                        <a:cs typeface="Inter" charset="0"/>
                       </a:endParaRPr>
                     </a:p>
                   </a:txBody>
@@ -19877,9 +19947,9 @@
                 <a:solidFill>
                   <a:srgbClr val="B25000"/>
                 </a:solidFill>
-                <a:latin typeface="Helvetica Neue" pitchFamily="34" charset="0"/>
-                <a:ea typeface="Helvetica Neue" pitchFamily="34" charset="-122"/>
-                <a:cs typeface="Helvetica Neue" pitchFamily="34" charset="-120"/>
+                <a:latin typeface="Inter" pitchFamily="34" charset="0"/>
+                <a:ea typeface="Inter" pitchFamily="34" charset="-122"/>
+                <a:cs typeface="Inter" pitchFamily="34" charset="-120"/>
               </a:rPr>
               <a:t>Demonstration values come from simulated data. </a:t>
             </a:r>
@@ -19891,9 +19961,9 @@
                 <a:solidFill>
                   <a:srgbClr val="1D1D1F"/>
                 </a:solidFill>
-                <a:latin typeface="Helvetica Neue" pitchFamily="34" charset="0"/>
-                <a:ea typeface="Helvetica Neue" pitchFamily="34" charset="-122"/>
-                <a:cs typeface="Helvetica Neue" pitchFamily="34" charset="-120"/>
+                <a:latin typeface="Inter" pitchFamily="34" charset="0"/>
+                <a:ea typeface="Inter" pitchFamily="34" charset="-122"/>
+                <a:cs typeface="Inter" pitchFamily="34" charset="-120"/>
               </a:rPr>
               <a:t>They only show that the analysis works; they are not findings. The simulated “reference” was made from the same invented data. The event rate is not an apnea–hypopnea index.</a:t>
             </a:r>
@@ -19930,9 +20000,9 @@
                 <a:solidFill>
                   <a:srgbClr val="A1A1A6"/>
                 </a:solidFill>
-                <a:latin typeface="Helvetica Neue" pitchFamily="34" charset="0"/>
-                <a:ea typeface="Helvetica Neue" pitchFamily="34" charset="-122"/>
-                <a:cs typeface="Helvetica Neue" pitchFamily="34" charset="-120"/>
+                <a:latin typeface="Inter" pitchFamily="34" charset="0"/>
+                <a:ea typeface="Inter" pitchFamily="34" charset="-122"/>
+                <a:cs typeface="Inter" pitchFamily="34" charset="-120"/>
               </a:rPr>
               <a:t>Night Signal</a:t>
             </a:r>
@@ -19969,9 +20039,9 @@
                 <a:solidFill>
                   <a:srgbClr val="A1A1A6"/>
                 </a:solidFill>
-                <a:latin typeface="Helvetica Neue" pitchFamily="34" charset="0"/>
-                <a:ea typeface="Helvetica Neue" pitchFamily="34" charset="-122"/>
-                <a:cs typeface="Helvetica Neue" pitchFamily="34" charset="-120"/>
+                <a:latin typeface="Inter" pitchFamily="34" charset="0"/>
+                <a:ea typeface="Inter" pitchFamily="34" charset="-122"/>
+                <a:cs typeface="Inter" pitchFamily="34" charset="-120"/>
               </a:rPr>
               <a:t>8</a:t>
             </a:r>
@@ -20040,9 +20110,9 @@
                 <a:solidFill>
                   <a:srgbClr val="E3254B"/>
                 </a:solidFill>
-                <a:latin typeface="Helvetica Neue" pitchFamily="34" charset="0"/>
-                <a:ea typeface="Helvetica Neue" pitchFamily="34" charset="-122"/>
-                <a:cs typeface="Helvetica Neue" pitchFamily="34" charset="-120"/>
+                <a:latin typeface="Inter" pitchFamily="34" charset="0"/>
+                <a:ea typeface="Inter" pitchFamily="34" charset="-122"/>
+                <a:cs typeface="Inter" pitchFamily="34" charset="-120"/>
               </a:rPr>
               <a:t>Results · demonstration</a:t>
             </a:r>
@@ -20082,9 +20152,9 @@
                 <a:solidFill>
                   <a:srgbClr val="1D1D1F"/>
                 </a:solidFill>
-                <a:latin typeface="Helvetica Neue" pitchFamily="34" charset="0"/>
-                <a:ea typeface="Helvetica Neue" pitchFamily="34" charset="-122"/>
-                <a:cs typeface="Helvetica Neue" pitchFamily="34" charset="-120"/>
+                <a:latin typeface="Inter" pitchFamily="34" charset="0"/>
+                <a:ea typeface="Inter" pitchFamily="34" charset="-122"/>
+                <a:cs typeface="Inter" pitchFamily="34" charset="-120"/>
               </a:rPr>
               <a:t>How the results will be shown.</a:t>
             </a:r>
@@ -20143,9 +20213,9 @@
                 <a:solidFill>
                   <a:srgbClr val="6E6E73"/>
                 </a:solidFill>
-                <a:latin typeface="Helvetica Neue" pitchFamily="34" charset="0"/>
-                <a:ea typeface="Helvetica Neue" pitchFamily="34" charset="-122"/>
-                <a:cs typeface="Helvetica Neue" pitchFamily="34" charset="-120"/>
+                <a:latin typeface="Inter" pitchFamily="34" charset="0"/>
+                <a:ea typeface="Inter" pitchFamily="34" charset="-122"/>
+                <a:cs typeface="Inter" pitchFamily="34" charset="-120"/>
               </a:rPr>
               <a:t>Simulated data</a:t>
             </a:r>
@@ -20274,9 +20344,9 @@
                 <a:solidFill>
                   <a:srgbClr val="6E6E73"/>
                 </a:solidFill>
-                <a:latin typeface="Helvetica Neue" pitchFamily="34" charset="0"/>
-                <a:ea typeface="Helvetica Neue" pitchFamily="34" charset="-122"/>
-                <a:cs typeface="Helvetica Neue" pitchFamily="34" charset="-120"/>
+                <a:latin typeface="Inter" pitchFamily="34" charset="0"/>
+                <a:ea typeface="Inter" pitchFamily="34" charset="-122"/>
+                <a:cs typeface="Inter" pitchFamily="34" charset="-120"/>
               </a:rPr>
               <a:t>Red bands = flagged desaturation events (simulated night)</a:t>
             </a:r>
@@ -20313,9 +20383,9 @@
                 <a:solidFill>
                   <a:srgbClr val="6E6E73"/>
                 </a:solidFill>
-                <a:latin typeface="Helvetica Neue" pitchFamily="34" charset="0"/>
-                <a:ea typeface="Helvetica Neue" pitchFamily="34" charset="-122"/>
-                <a:cs typeface="Helvetica Neue" pitchFamily="34" charset="-120"/>
+                <a:latin typeface="Inter" pitchFamily="34" charset="0"/>
+                <a:ea typeface="Inter" pitchFamily="34" charset="-122"/>
+                <a:cs typeface="Inter" pitchFamily="34" charset="-120"/>
               </a:rPr>
               <a:t>Bland–Altman agreement chart (simulated pairs)</a:t>
             </a:r>
@@ -20352,9 +20422,9 @@
                 <a:solidFill>
                   <a:srgbClr val="A1A1A6"/>
                 </a:solidFill>
-                <a:latin typeface="Helvetica Neue" pitchFamily="34" charset="0"/>
-                <a:ea typeface="Helvetica Neue" pitchFamily="34" charset="-122"/>
-                <a:cs typeface="Helvetica Neue" pitchFamily="34" charset="-120"/>
+                <a:latin typeface="Inter" pitchFamily="34" charset="0"/>
+                <a:ea typeface="Inter" pitchFamily="34" charset="-122"/>
+                <a:cs typeface="Inter" pitchFamily="34" charset="-120"/>
               </a:rPr>
               <a:t>Night Signal</a:t>
             </a:r>
@@ -20391,9 +20461,9 @@
                 <a:solidFill>
                   <a:srgbClr val="A1A1A6"/>
                 </a:solidFill>
-                <a:latin typeface="Helvetica Neue" pitchFamily="34" charset="0"/>
-                <a:ea typeface="Helvetica Neue" pitchFamily="34" charset="-122"/>
-                <a:cs typeface="Helvetica Neue" pitchFamily="34" charset="-120"/>
+                <a:latin typeface="Inter" pitchFamily="34" charset="0"/>
+                <a:ea typeface="Inter" pitchFamily="34" charset="-122"/>
+                <a:cs typeface="Inter" pitchFamily="34" charset="-120"/>
               </a:rPr>
               <a:t>9</a:t>
             </a:r>
